--- a/Git_deploy_prezentatsiya.pptx
+++ b/Git_deploy_prezentatsiya.pptx
@@ -5,7 +5,7 @@
     <p:sldMasterId id="2147483648" r:id="rId1"/>
   </p:sldMasterIdLst>
   <p:notesMasterIdLst>
-    <p:notesMasterId r:id="rId19"/>
+    <p:notesMasterId r:id="rId26"/>
   </p:notesMasterIdLst>
   <p:sldIdLst>
     <p:sldId id="256" r:id="rId2"/>
@@ -14,17 +14,24 @@
     <p:sldId id="259" r:id="rId5"/>
     <p:sldId id="271" r:id="rId6"/>
     <p:sldId id="272" r:id="rId7"/>
-    <p:sldId id="260" r:id="rId8"/>
-    <p:sldId id="261" r:id="rId9"/>
-    <p:sldId id="262" r:id="rId10"/>
-    <p:sldId id="263" r:id="rId11"/>
-    <p:sldId id="264" r:id="rId12"/>
-    <p:sldId id="265" r:id="rId13"/>
-    <p:sldId id="266" r:id="rId14"/>
-    <p:sldId id="267" r:id="rId15"/>
-    <p:sldId id="268" r:id="rId16"/>
-    <p:sldId id="269" r:id="rId17"/>
-    <p:sldId id="270" r:id="rId18"/>
+    <p:sldId id="273" r:id="rId8"/>
+    <p:sldId id="274" r:id="rId9"/>
+    <p:sldId id="275" r:id="rId10"/>
+    <p:sldId id="276" r:id="rId11"/>
+    <p:sldId id="277" r:id="rId12"/>
+    <p:sldId id="278" r:id="rId13"/>
+    <p:sldId id="279" r:id="rId14"/>
+    <p:sldId id="260" r:id="rId15"/>
+    <p:sldId id="261" r:id="rId16"/>
+    <p:sldId id="262" r:id="rId17"/>
+    <p:sldId id="263" r:id="rId18"/>
+    <p:sldId id="264" r:id="rId19"/>
+    <p:sldId id="265" r:id="rId20"/>
+    <p:sldId id="266" r:id="rId21"/>
+    <p:sldId id="267" r:id="rId22"/>
+    <p:sldId id="268" r:id="rId23"/>
+    <p:sldId id="269" r:id="rId24"/>
+    <p:sldId id="270" r:id="rId25"/>
   </p:sldIdLst>
   <p:sldSz cx="12192000" cy="6858000"/>
   <p:notesSz cx="6858000" cy="9144000"/>
@@ -129,6 +136,90 @@
     </p:ext>
   </p:extLst>
 </p:presentation>
+</file>
+
+<file path=ppt/ink/ink1.xml><?xml version="1.0" encoding="utf-8"?>
+<inkml:ink xmlns:inkml="http://www.w3.org/2003/InkML">
+  <inkml:definitions>
+    <inkml:context xml:id="ctx0">
+      <inkml:inkSource xml:id="inkSrc0">
+        <inkml:traceFormat>
+          <inkml:channel name="X" type="integer" min="-2.14748E9" max="2.14748E9" units="cm"/>
+          <inkml:channel name="Y" type="integer" min="-2.14748E9" max="2.14748E9" units="cm"/>
+          <inkml:channel name="F" type="integer" max="32767" units="dev"/>
+        </inkml:traceFormat>
+        <inkml:channelProperties>
+          <inkml:channelProperty channel="X" name="resolution" value="1000" units="1/cm"/>
+          <inkml:channelProperty channel="Y" name="resolution" value="1000" units="1/cm"/>
+          <inkml:channelProperty channel="F" name="resolution" value="0" units="1/dev"/>
+        </inkml:channelProperties>
+      </inkml:inkSource>
+      <inkml:timestamp xml:id="ts0" timeString="2026-09-17T18:53:58.095"/>
+    </inkml:context>
+    <inkml:brush xml:id="br0">
+      <inkml:brushProperty name="width" value="0.35" units="cm"/>
+      <inkml:brushProperty name="height" value="0.35" units="cm"/>
+      <inkml:brushProperty name="color" value="#E71224"/>
+    </inkml:brush>
+  </inkml:definitions>
+  <inkml:trace contextRef="#ctx0" brushRef="#br0">265 1188 24575,'44'2'0,"0"1"0,0 2 0,43 12 0,127 41 0,-7-1 0,-157-46 0,28 8 0,1-3 0,1-4 0,113 4 0,379-18 0,-553 1 0,0-1 0,0 0 0,0-1 0,0-1 0,-1-1 0,1 0 0,-1-2 0,0 0 0,-1-1 0,0-1 0,0 0 0,-1-1 0,0-1 0,-1-1 0,18-16 0,0-1 0,-19 19 0,-1-2 0,0 1 0,-1-2 0,0 0 0,-1 0 0,0-1 0,-1 0 0,-1-1 0,14-29 0,46-131 0,-65 161 0,0 0 0,-2-1 0,1 0 0,-2 1 0,0-1 0,-1 0 0,0 0 0,-1 0 0,-1 1 0,-5-20 0,-3-6 0,-1 1 0,-26-56 0,31 83 0,-1 0 0,0 0 0,-1 0 0,-11-12 0,12 16 0,-1-1 0,2-1 0,-1 1 0,1-1 0,1-1 0,0 1 0,-5-14 0,8 16 0,-2 1 0,1-1 0,-1 0 0,0 1 0,0 0 0,-1 0 0,0 0 0,0 0 0,-1 1 0,0 0 0,0 0 0,-1 0 0,1 1 0,-1 0 0,0 1 0,-10-6 0,-14-5 0,0 2 0,-61-18 0,-11-4 0,71 23 0,-2 2 0,1 1 0,-1 2 0,-62-5 0,-5-2 0,63 6 0,0-3 0,-50-21 0,-41-11 0,93 37 0,0 2 0,0 1 0,-1 2 0,-53 4 0,0 0 0,-77-15 0,2-1 0,-269 14 0,426-1 0,-1 0 0,1 1 0,-1 0 0,1 0 0,0 1 0,-1 0 0,1 0 0,0 1 0,0 0 0,1 0 0,-1 1 0,1 0 0,-1 0 0,1 1 0,1 0 0,-1 0 0,1 1 0,0 0 0,0 0 0,0 0 0,1 1 0,-8 12 0,3-2 0,-8 15 0,-17 41 0,30-60 0,1 0 0,0 0 0,1 1 0,0-1 0,1 1 0,-1 22 0,3-13 0,0 25 0,5 49 0,-3-81 0,0 0 0,2-1 0,0 0 0,0 1 0,1-2 0,1 1 0,9 15 0,8 14 0,-15-27 0,1 0 0,1-1 0,0 0 0,23 27 0,-2-4 0,-26-31 0,1 0 0,1 0 0,-1-1 0,1 1 0,12 8 0,73 74 0,-79-78-242,-1 2 0,0-1 0,13 21 0,-22-30-155</inkml:trace>
+</inkml:ink>
+</file>
+
+<file path=ppt/ink/ink2.xml><?xml version="1.0" encoding="utf-8"?>
+<inkml:ink xmlns:inkml="http://www.w3.org/2003/InkML">
+  <inkml:definitions>
+    <inkml:context xml:id="ctx0">
+      <inkml:inkSource xml:id="inkSrc0">
+        <inkml:traceFormat>
+          <inkml:channel name="X" type="integer" min="-2.14748E9" max="2.14748E9" units="cm"/>
+          <inkml:channel name="Y" type="integer" min="-2.14748E9" max="2.14748E9" units="cm"/>
+          <inkml:channel name="F" type="integer" max="32767" units="dev"/>
+        </inkml:traceFormat>
+        <inkml:channelProperties>
+          <inkml:channelProperty channel="X" name="resolution" value="1000" units="1/cm"/>
+          <inkml:channelProperty channel="Y" name="resolution" value="1000" units="1/cm"/>
+          <inkml:channelProperty channel="F" name="resolution" value="0" units="1/dev"/>
+        </inkml:channelProperties>
+      </inkml:inkSource>
+      <inkml:timestamp xml:id="ts0" timeString="2026-09-17T18:53:42.657"/>
+    </inkml:context>
+    <inkml:brush xml:id="br0">
+      <inkml:brushProperty name="width" value="0.35" units="cm"/>
+      <inkml:brushProperty name="height" value="0.35" units="cm"/>
+      <inkml:brushProperty name="color" value="#E71224"/>
+    </inkml:brush>
+  </inkml:definitions>
+  <inkml:trace contextRef="#ctx0" brushRef="#br0">1 928 24575,'1'-33'0,"1"-1"0,2 1 0,1 0 0,1 0 0,3 0 0,0 1 0,2 1 0,1-1 0,2 2 0,1 0 0,26-40 0,-19 42 0,1 2 0,30-28 0,-38 40 0,11-12 0,1 2 0,1 1 0,1 1 0,43-23 0,-42 30 0,0 1 0,1 1 0,46-12 0,-49 15 0,52-27 0,-65 28 0,1 1 0,0 1 0,0 0 0,1 1 0,-1 1 0,1 1 0,0 0 0,1 1 0,17-1 0,-5 2 0,0-1 0,0-2 0,31-8 0,-31 6 0,-1 1 0,1 1 0,36 0 0,-26 3 0,44-8 0,33-1 0,614 10 0,-351 2 0,-350 1 0,58 10 0,-16 0 0,-7-4 0,-9-1 0,65 1 0,-80-6 0,0 2 0,-1 2 0,78 22 0,-30-7 0,-37-9 0,13 1 0,-1 3 0,82 32 0,-111-31 0,0 1 0,56 41 0,-55-34 0,66 34 0,-31-18 0,-54-30 0,1 0 0,0-2 0,33 14 0,25 12 0,-38-17 0,-25-12-151,-1 0-1,1 1 0,-1 0 0,0 0 1,-1 1-1,1 1 0,-2 0 1,10 10-1</inkml:trace>
+</inkml:ink>
+</file>
+
+<file path=ppt/ink/ink3.xml><?xml version="1.0" encoding="utf-8"?>
+<inkml:ink xmlns:inkml="http://www.w3.org/2003/InkML">
+  <inkml:definitions>
+    <inkml:context xml:id="ctx0">
+      <inkml:inkSource xml:id="inkSrc0">
+        <inkml:traceFormat>
+          <inkml:channel name="X" type="integer" min="-2.14748E9" max="2.14748E9" units="cm"/>
+          <inkml:channel name="Y" type="integer" min="-2.14748E9" max="2.14748E9" units="cm"/>
+          <inkml:channel name="F" type="integer" max="32767" units="dev"/>
+        </inkml:traceFormat>
+        <inkml:channelProperties>
+          <inkml:channelProperty channel="X" name="resolution" value="1000" units="1/cm"/>
+          <inkml:channelProperty channel="Y" name="resolution" value="1000" units="1/cm"/>
+          <inkml:channelProperty channel="F" name="resolution" value="0" units="1/dev"/>
+        </inkml:channelProperties>
+      </inkml:inkSource>
+      <inkml:timestamp xml:id="ts0" timeString="2026-09-17T18:53:49.705"/>
+    </inkml:context>
+    <inkml:brush xml:id="br0">
+      <inkml:brushProperty name="width" value="0.35" units="cm"/>
+      <inkml:brushProperty name="height" value="0.35" units="cm"/>
+      <inkml:brushProperty name="color" value="#E71224"/>
+    </inkml:brush>
+  </inkml:definitions>
+  <inkml:trace contextRef="#ctx0" brushRef="#br0">245 1836 24575,'53'-2'0,"0"-2"0,82-17 0,100-37 0,-9 1 0,203-18 0,-314 54 0,-2-4 0,198-72 0,-227 68 0,-15 7 0,103-40 0,-131 46 0,-30 13 0,0-1 0,0 0 0,0-1 0,0 0 0,-1-1 0,0 0 0,0-1 0,-1 0 0,1 0 0,-2-1 0,1 0 0,-1 0 0,13-18 0,-4-2 0,-1-1 0,-2 0 0,-1-2 0,13-42 0,17-34 0,-31 83 0,-2-1 0,0 0 0,-2-1 0,9-40 0,-16 58 0,-1 0 0,1 1 0,-1-1 0,-1 0 0,1 0 0,-1 1 0,-1-1 0,1 0 0,-1 1 0,0-1 0,-1 1 0,0 0 0,0-1 0,-1 2 0,0-1 0,0 0 0,0 1 0,-1-1 0,0 1 0,-6-5 0,-102-93 0,-5 5 0,-150-96 0,183 134 0,-138-84 0,217 142 0,0 0 0,0 0 0,0 1 0,-1 0 0,1 0 0,-1 1 0,0 0 0,1 0 0,-10 0 0,-67 5 0,28 0 0,-23-1 0,-128 22 0,38-4 0,-34 7 0,186-25 0,-56 11 0,-74 25 0,-56 39 0,99-35 0,91-37 0,1 0 0,0 1 0,0 1 0,0-1 0,1 2 0,0 0 0,0 0 0,-7 11 0,-7 8 0,-33 51 0,41-51 0,2 1 0,0 0 0,2 1 0,-9 37 0,20-65 0,-16 54 0,4-12 0,-23 52 0,31-83 0,1-1 0,0 1 0,1 0 0,0 0 0,1 0 0,0 0 0,1 0 0,1 0 0,0 1 0,1-1 0,0 0 0,1 0 0,0 0 0,1 0 0,8 22 0,8 12 0,2-1 0,50 81 0,-11-22 0,-39-64 0,39 82 0,-58-118-170,0 0-1,1 0 0,0 0 1,0-1-1,0 1 0,0-1 1,7 7-1</inkml:trace>
+</inkml:ink>
 </file>
 
 <file path=ppt/notesMasters/notesMaster1.xml><?xml version="1.0" encoding="utf-8"?>
@@ -331,7 +422,13 @@
   <p:cSld>
     <p:spTree>
       <p:nvGrpSpPr>
-        <p:cNvPr id="1" name=""/>
+        <p:cNvPr id="1" name="">
+          <a:extLst>
+            <a:ext uri="{FF2B5EF4-FFF2-40B4-BE49-F238E27FC236}">
+              <a16:creationId xmlns:a16="http://schemas.microsoft.com/office/drawing/2014/main" id="{6B533C1E-AB69-4BC2-B6F8-1715136251B9}"/>
+            </a:ext>
+          </a:extLst>
+        </p:cNvPr>
         <p:cNvGrpSpPr/>
         <p:nvPr/>
       </p:nvGrpSpPr>
@@ -345,7 +442,13 @@
       </p:grpSpPr>
       <p:sp>
         <p:nvSpPr>
-          <p:cNvPr id="2" name="Slide Image Placeholder 1"/>
+          <p:cNvPr id="2" name="Slide Image Placeholder 1">
+            <a:extLst>
+              <a:ext uri="{FF2B5EF4-FFF2-40B4-BE49-F238E27FC236}">
+                <a16:creationId xmlns:a16="http://schemas.microsoft.com/office/drawing/2014/main" id="{32D1EBED-3E23-AC72-3A6D-FE7831E738EC}"/>
+              </a:ext>
+            </a:extLst>
+          </p:cNvPr>
           <p:cNvSpPr>
             <a:spLocks noGrp="1" noRot="1" noChangeAspect="1"/>
           </p:cNvSpPr>
@@ -357,7 +460,13 @@
       </p:sp>
       <p:sp>
         <p:nvSpPr>
-          <p:cNvPr id="3" name="Notes Placeholder 2"/>
+          <p:cNvPr id="3" name="Notes Placeholder 2">
+            <a:extLst>
+              <a:ext uri="{FF2B5EF4-FFF2-40B4-BE49-F238E27FC236}">
+                <a16:creationId xmlns:a16="http://schemas.microsoft.com/office/drawing/2014/main" id="{57657B1E-F527-CD82-291B-57B41D5D5C0F}"/>
+              </a:ext>
+            </a:extLst>
+          </p:cNvPr>
           <p:cNvSpPr>
             <a:spLocks noGrp="1"/>
           </p:cNvSpPr>
@@ -371,14 +480,20 @@
           <a:lstStyle/>
           <a:p>
             <a:r>
-              <a:t>ФИШКА 2 мин: кейс — команда стоит час (−500), hotfix-ветка за 20 мин возвращает прод (+200 относительно долгого простоя). Мораль: ветки экономят простой.</a:t>
-            </a:r>
-          </a:p>
-        </p:txBody>
-      </p:sp>
-      <p:sp>
-        <p:nvSpPr>
-          <p:cNvPr id="4" name="Slide Number Placeholder 3"/>
+              <a:t>2 мин: Git — инструмент, GitHub/GitLab — хостинги. GitHub — экосистема, GitLab — комбайн с CI. Для курса неважно, команды одни.</a:t>
+            </a:r>
+          </a:p>
+        </p:txBody>
+      </p:sp>
+      <p:sp>
+        <p:nvSpPr>
+          <p:cNvPr id="4" name="Slide Number Placeholder 3">
+            <a:extLst>
+              <a:ext uri="{FF2B5EF4-FFF2-40B4-BE49-F238E27FC236}">
+                <a16:creationId xmlns:a16="http://schemas.microsoft.com/office/drawing/2014/main" id="{1354C697-A6E6-A78B-CF29-537CE782870F}"/>
+              </a:ext>
+            </a:extLst>
+          </p:cNvPr>
           <p:cNvSpPr>
             <a:spLocks noGrp="1"/>
           </p:cNvSpPr>
@@ -389,6 +504,11 @@
         <p:spPr/>
       </p:sp>
     </p:spTree>
+    <p:extLst>
+      <p:ext uri="{BB962C8B-B14F-4D97-AF65-F5344CB8AC3E}">
+        <p14:creationId xmlns:p14="http://schemas.microsoft.com/office/powerpoint/2010/main" val="3551805439"/>
+      </p:ext>
+    </p:extLst>
   </p:cSld>
   <p:clrMapOvr>
     <a:masterClrMapping/>
@@ -401,7 +521,13 @@
   <p:cSld>
     <p:spTree>
       <p:nvGrpSpPr>
-        <p:cNvPr id="1" name=""/>
+        <p:cNvPr id="1" name="">
+          <a:extLst>
+            <a:ext uri="{FF2B5EF4-FFF2-40B4-BE49-F238E27FC236}">
+              <a16:creationId xmlns:a16="http://schemas.microsoft.com/office/drawing/2014/main" id="{9B15DAA6-488B-0D2F-3BCB-92CEE6EEC66D}"/>
+            </a:ext>
+          </a:extLst>
+        </p:cNvPr>
         <p:cNvGrpSpPr/>
         <p:nvPr/>
       </p:nvGrpSpPr>
@@ -415,7 +541,13 @@
       </p:grpSpPr>
       <p:sp>
         <p:nvSpPr>
-          <p:cNvPr id="2" name="Slide Image Placeholder 1"/>
+          <p:cNvPr id="2" name="Slide Image Placeholder 1">
+            <a:extLst>
+              <a:ext uri="{FF2B5EF4-FFF2-40B4-BE49-F238E27FC236}">
+                <a16:creationId xmlns:a16="http://schemas.microsoft.com/office/drawing/2014/main" id="{AE32F5D3-154A-6CEE-F190-EFE72969C997}"/>
+              </a:ext>
+            </a:extLst>
+          </p:cNvPr>
           <p:cNvSpPr>
             <a:spLocks noGrp="1" noRot="1" noChangeAspect="1"/>
           </p:cNvSpPr>
@@ -427,7 +559,13 @@
       </p:sp>
       <p:sp>
         <p:nvSpPr>
-          <p:cNvPr id="3" name="Notes Placeholder 2"/>
+          <p:cNvPr id="3" name="Notes Placeholder 2">
+            <a:extLst>
+              <a:ext uri="{FF2B5EF4-FFF2-40B4-BE49-F238E27FC236}">
+                <a16:creationId xmlns:a16="http://schemas.microsoft.com/office/drawing/2014/main" id="{BFF10F25-FD78-C342-F558-2E2FC7F87E50}"/>
+              </a:ext>
+            </a:extLst>
+          </p:cNvPr>
           <p:cNvSpPr>
             <a:spLocks noGrp="1"/>
           </p:cNvSpPr>
@@ -441,14 +579,20 @@
           <a:lstStyle/>
           <a:p>
             <a:r>
-              <a:t>2 мин: жизненный цикл по шагам, каждый оставляет след: issue, ветка, коммиты, PR, деплой. Пропуск шага = невидимая работа = риск.</a:t>
-            </a:r>
-          </a:p>
-        </p:txBody>
-      </p:sp>
-      <p:sp>
-        <p:nvSpPr>
-          <p:cNvPr id="4" name="Slide Number Placeholder 3"/>
+              <a:t>2 мин: Git — инструмент, GitHub/GitLab — хостинги. GitHub — экосистема, GitLab — комбайн с CI. Для курса неважно, команды одни.</a:t>
+            </a:r>
+          </a:p>
+        </p:txBody>
+      </p:sp>
+      <p:sp>
+        <p:nvSpPr>
+          <p:cNvPr id="4" name="Slide Number Placeholder 3">
+            <a:extLst>
+              <a:ext uri="{FF2B5EF4-FFF2-40B4-BE49-F238E27FC236}">
+                <a16:creationId xmlns:a16="http://schemas.microsoft.com/office/drawing/2014/main" id="{6C68EBF1-64AC-5D86-5250-C6360BFB6E63}"/>
+              </a:ext>
+            </a:extLst>
+          </p:cNvPr>
           <p:cNvSpPr>
             <a:spLocks noGrp="1"/>
           </p:cNvSpPr>
@@ -459,6 +603,11 @@
         <p:spPr/>
       </p:sp>
     </p:spTree>
+    <p:extLst>
+      <p:ext uri="{BB962C8B-B14F-4D97-AF65-F5344CB8AC3E}">
+        <p14:creationId xmlns:p14="http://schemas.microsoft.com/office/powerpoint/2010/main" val="540687822"/>
+      </p:ext>
+    </p:extLst>
   </p:cSld>
   <p:clrMapOvr>
     <a:masterClrMapping/>
@@ -471,7 +620,13 @@
   <p:cSld>
     <p:spTree>
       <p:nvGrpSpPr>
-        <p:cNvPr id="1" name=""/>
+        <p:cNvPr id="1" name="">
+          <a:extLst>
+            <a:ext uri="{FF2B5EF4-FFF2-40B4-BE49-F238E27FC236}">
+              <a16:creationId xmlns:a16="http://schemas.microsoft.com/office/drawing/2014/main" id="{162550C9-A396-368B-6E29-A1700FE13DD1}"/>
+            </a:ext>
+          </a:extLst>
+        </p:cNvPr>
         <p:cNvGrpSpPr/>
         <p:nvPr/>
       </p:nvGrpSpPr>
@@ -485,7 +640,13 @@
       </p:grpSpPr>
       <p:sp>
         <p:nvSpPr>
-          <p:cNvPr id="2" name="Slide Image Placeholder 1"/>
+          <p:cNvPr id="2" name="Slide Image Placeholder 1">
+            <a:extLst>
+              <a:ext uri="{FF2B5EF4-FFF2-40B4-BE49-F238E27FC236}">
+                <a16:creationId xmlns:a16="http://schemas.microsoft.com/office/drawing/2014/main" id="{FDCF8D85-1B76-D263-BF64-BD59587F3C7A}"/>
+              </a:ext>
+            </a:extLst>
+          </p:cNvPr>
           <p:cNvSpPr>
             <a:spLocks noGrp="1" noRot="1" noChangeAspect="1"/>
           </p:cNvSpPr>
@@ -497,7 +658,13 @@
       </p:sp>
       <p:sp>
         <p:nvSpPr>
-          <p:cNvPr id="3" name="Notes Placeholder 2"/>
+          <p:cNvPr id="3" name="Notes Placeholder 2">
+            <a:extLst>
+              <a:ext uri="{FF2B5EF4-FFF2-40B4-BE49-F238E27FC236}">
+                <a16:creationId xmlns:a16="http://schemas.microsoft.com/office/drawing/2014/main" id="{A897FBDF-70AA-E598-AA4B-E38E49510B79}"/>
+              </a:ext>
+            </a:extLst>
+          </p:cNvPr>
           <p:cNvSpPr>
             <a:spLocks noGrp="1"/>
           </p:cNvSpPr>
@@ -511,14 +678,20 @@
           <a:lstStyle/>
           <a:p>
             <a:r>
-              <a:t>1.5 мин: три окружения, деплой идёт лесенкой. В dev — агент хоть каждый коммит, в prod — только после review и stage.</a:t>
-            </a:r>
-          </a:p>
-        </p:txBody>
-      </p:sp>
-      <p:sp>
-        <p:nvSpPr>
-          <p:cNvPr id="4" name="Slide Number Placeholder 3"/>
+              <a:t>2 мин: Git — инструмент, GitHub/GitLab — хостинги. GitHub — экосистема, GitLab — комбайн с CI. Для курса неважно, команды одни.</a:t>
+            </a:r>
+          </a:p>
+        </p:txBody>
+      </p:sp>
+      <p:sp>
+        <p:nvSpPr>
+          <p:cNvPr id="4" name="Slide Number Placeholder 3">
+            <a:extLst>
+              <a:ext uri="{FF2B5EF4-FFF2-40B4-BE49-F238E27FC236}">
+                <a16:creationId xmlns:a16="http://schemas.microsoft.com/office/drawing/2014/main" id="{B44A5FA5-B477-9990-3BC3-E36EC8FA3417}"/>
+              </a:ext>
+            </a:extLst>
+          </p:cNvPr>
           <p:cNvSpPr>
             <a:spLocks noGrp="1"/>
           </p:cNvSpPr>
@@ -529,6 +702,11 @@
         <p:spPr/>
       </p:sp>
     </p:spTree>
+    <p:extLst>
+      <p:ext uri="{BB962C8B-B14F-4D97-AF65-F5344CB8AC3E}">
+        <p14:creationId xmlns:p14="http://schemas.microsoft.com/office/powerpoint/2010/main" val="4015255328"/>
+      </p:ext>
+    </p:extLst>
   </p:cSld>
   <p:clrMapOvr>
     <a:masterClrMapping/>
@@ -541,7 +719,13 @@
   <p:cSld>
     <p:spTree>
       <p:nvGrpSpPr>
-        <p:cNvPr id="1" name=""/>
+        <p:cNvPr id="1" name="">
+          <a:extLst>
+            <a:ext uri="{FF2B5EF4-FFF2-40B4-BE49-F238E27FC236}">
+              <a16:creationId xmlns:a16="http://schemas.microsoft.com/office/drawing/2014/main" id="{D40AA3B0-2651-155C-2C22-87E175353D10}"/>
+            </a:ext>
+          </a:extLst>
+        </p:cNvPr>
         <p:cNvGrpSpPr/>
         <p:nvPr/>
       </p:nvGrpSpPr>
@@ -555,7 +739,13 @@
       </p:grpSpPr>
       <p:sp>
         <p:nvSpPr>
-          <p:cNvPr id="2" name="Slide Image Placeholder 1"/>
+          <p:cNvPr id="2" name="Slide Image Placeholder 1">
+            <a:extLst>
+              <a:ext uri="{FF2B5EF4-FFF2-40B4-BE49-F238E27FC236}">
+                <a16:creationId xmlns:a16="http://schemas.microsoft.com/office/drawing/2014/main" id="{35E244F0-D8A8-B763-861A-625849DBA6EC}"/>
+              </a:ext>
+            </a:extLst>
+          </p:cNvPr>
           <p:cNvSpPr>
             <a:spLocks noGrp="1" noRot="1" noChangeAspect="1"/>
           </p:cNvSpPr>
@@ -567,7 +757,13 @@
       </p:sp>
       <p:sp>
         <p:nvSpPr>
-          <p:cNvPr id="3" name="Notes Placeholder 2"/>
+          <p:cNvPr id="3" name="Notes Placeholder 2">
+            <a:extLst>
+              <a:ext uri="{FF2B5EF4-FFF2-40B4-BE49-F238E27FC236}">
+                <a16:creationId xmlns:a16="http://schemas.microsoft.com/office/drawing/2014/main" id="{E2A98DDF-8791-A075-8C46-F4710F28B20C}"/>
+              </a:ext>
+            </a:extLst>
+          </p:cNvPr>
           <p:cNvSpPr>
             <a:spLocks noGrp="1"/>
           </p:cNvSpPr>
@@ -581,14 +777,20 @@
           <a:lstStyle/>
           <a:p>
             <a:r>
-              <a:t>2 мин: PR — просьба влить + место дискуссии. Хороший PR: маленький, с описанием, с зелёным CI. Кнопка merge — после двух галочек.</a:t>
-            </a:r>
-          </a:p>
-        </p:txBody>
-      </p:sp>
-      <p:sp>
-        <p:nvSpPr>
-          <p:cNvPr id="4" name="Slide Number Placeholder 3"/>
+              <a:t>2 мин: Git — инструмент, GitHub/GitLab — хостинги. GitHub — экосистема, GitLab — комбайн с CI. Для курса неважно, команды одни.</a:t>
+            </a:r>
+          </a:p>
+        </p:txBody>
+      </p:sp>
+      <p:sp>
+        <p:nvSpPr>
+          <p:cNvPr id="4" name="Slide Number Placeholder 3">
+            <a:extLst>
+              <a:ext uri="{FF2B5EF4-FFF2-40B4-BE49-F238E27FC236}">
+                <a16:creationId xmlns:a16="http://schemas.microsoft.com/office/drawing/2014/main" id="{C0678664-41E0-84CA-0C86-2D90BB8EF484}"/>
+              </a:ext>
+            </a:extLst>
+          </p:cNvPr>
           <p:cNvSpPr>
             <a:spLocks noGrp="1"/>
           </p:cNvSpPr>
@@ -599,6 +801,11 @@
         <p:spPr/>
       </p:sp>
     </p:spTree>
+    <p:extLst>
+      <p:ext uri="{BB962C8B-B14F-4D97-AF65-F5344CB8AC3E}">
+        <p14:creationId xmlns:p14="http://schemas.microsoft.com/office/powerpoint/2010/main" val="3528228043"/>
+      </p:ext>
+    </p:extLst>
   </p:cSld>
   <p:clrMapOvr>
     <a:masterClrMapping/>
@@ -651,7 +858,7 @@
           <a:lstStyle/>
           <a:p>
             <a:r>
-              <a:t>2 мин: чек-лист ревью, правило 15 минут, approve/request changes, suggestion-фича. Тон решает: правим код, хвалим человека.</a:t>
+              <a:t>2 мин: агент = цикл plan-act-observe. Умеет: issue→код→тесты→PR→деплой на stage, откат. Не умеет: ответственность. Человек жмёт merge в прод.</a:t>
             </a:r>
           </a:p>
         </p:txBody>
@@ -721,7 +928,7 @@
           <a:lstStyle/>
           <a:p>
             <a:r>
-              <a:t>2 мин: конфликт — не ошибка, а встреча двух правок. Показать маркеры, правило: говорим с автором второй правки, частый pull лечит.</a:t>
+              <a:t>1.5 мин: показываю цепочку, подчёркиваю gate: прод только руками. Пример: Copilot workspace / агент в CI чинит упавший тест.</a:t>
             </a:r>
           </a:p>
         </p:txBody>
@@ -791,7 +998,7 @@
           <a:lstStyle/>
           <a:p>
             <a:r>
-              <a:t>1 мин: финал-чеклист, прошу сфотографировать слайд. Каждое правило — итог одной темы.</a:t>
+              <a:t>2 мин: анатомия: main стабилен, работа только в ветках, hotfix — короткая ветка от main. Аналогия: main — витрина, ветки — мастерская.</a:t>
             </a:r>
           </a:p>
         </p:txBody>
@@ -861,7 +1068,147 @@
           <a:lstStyle/>
           <a:p>
             <a:r>
-              <a:t>Финал 3 мин: вопросы + живое демо: создать ветку, коммит, PR, review самому себе, merge, показать граф. Призыв: завести репозиторий сегодня.</a:t>
+              <a:t>ФИШКА 2 мин: кейс — команда стоит час (−500), hotfix-ветка за 20 мин возвращает прод (+200 относительно долгого простоя). Мораль: ветки экономят простой.</a:t>
+            </a:r>
+          </a:p>
+        </p:txBody>
+      </p:sp>
+      <p:sp>
+        <p:nvSpPr>
+          <p:cNvPr id="4" name="Slide Number Placeholder 3"/>
+          <p:cNvSpPr>
+            <a:spLocks noGrp="1"/>
+          </p:cNvSpPr>
+          <p:nvPr>
+            <p:ph type="sldNum" sz="quarter" idx="5"/>
+          </p:nvPr>
+        </p:nvSpPr>
+        <p:spPr/>
+      </p:sp>
+    </p:spTree>
+  </p:cSld>
+  <p:clrMapOvr>
+    <a:masterClrMapping/>
+  </p:clrMapOvr>
+</p:notes>
+</file>
+
+<file path=ppt/notesSlides/notesSlide18.xml><?xml version="1.0" encoding="utf-8"?>
+<p:notes xmlns:a="http://schemas.openxmlformats.org/drawingml/2006/main" xmlns:r="http://schemas.openxmlformats.org/officeDocument/2006/relationships" xmlns:p="http://schemas.openxmlformats.org/presentationml/2006/main">
+  <p:cSld>
+    <p:spTree>
+      <p:nvGrpSpPr>
+        <p:cNvPr id="1" name=""/>
+        <p:cNvGrpSpPr/>
+        <p:nvPr/>
+      </p:nvGrpSpPr>
+      <p:grpSpPr>
+        <a:xfrm>
+          <a:off x="0" y="0"/>
+          <a:ext cx="0" cy="0"/>
+          <a:chOff x="0" y="0"/>
+          <a:chExt cx="0" cy="0"/>
+        </a:xfrm>
+      </p:grpSpPr>
+      <p:sp>
+        <p:nvSpPr>
+          <p:cNvPr id="2" name="Slide Image Placeholder 1"/>
+          <p:cNvSpPr>
+            <a:spLocks noGrp="1" noRot="1" noChangeAspect="1"/>
+          </p:cNvSpPr>
+          <p:nvPr>
+            <p:ph type="sldImg" idx="2"/>
+          </p:nvPr>
+        </p:nvSpPr>
+        <p:spPr/>
+      </p:sp>
+      <p:sp>
+        <p:nvSpPr>
+          <p:cNvPr id="3" name="Notes Placeholder 2"/>
+          <p:cNvSpPr>
+            <a:spLocks noGrp="1"/>
+          </p:cNvSpPr>
+          <p:nvPr>
+            <p:ph type="body" sz="quarter" idx="3"/>
+          </p:nvPr>
+        </p:nvSpPr>
+        <p:spPr/>
+        <p:txBody>
+          <a:bodyPr/>
+          <a:lstStyle/>
+          <a:p>
+            <a:r>
+              <a:t>2 мин: жизненный цикл по шагам, каждый оставляет след: issue, ветка, коммиты, PR, деплой. Пропуск шага = невидимая работа = риск.</a:t>
+            </a:r>
+          </a:p>
+        </p:txBody>
+      </p:sp>
+      <p:sp>
+        <p:nvSpPr>
+          <p:cNvPr id="4" name="Slide Number Placeholder 3"/>
+          <p:cNvSpPr>
+            <a:spLocks noGrp="1"/>
+          </p:cNvSpPr>
+          <p:nvPr>
+            <p:ph type="sldNum" sz="quarter" idx="5"/>
+          </p:nvPr>
+        </p:nvSpPr>
+        <p:spPr/>
+      </p:sp>
+    </p:spTree>
+  </p:cSld>
+  <p:clrMapOvr>
+    <a:masterClrMapping/>
+  </p:clrMapOvr>
+</p:notes>
+</file>
+
+<file path=ppt/notesSlides/notesSlide19.xml><?xml version="1.0" encoding="utf-8"?>
+<p:notes xmlns:a="http://schemas.openxmlformats.org/drawingml/2006/main" xmlns:r="http://schemas.openxmlformats.org/officeDocument/2006/relationships" xmlns:p="http://schemas.openxmlformats.org/presentationml/2006/main">
+  <p:cSld>
+    <p:spTree>
+      <p:nvGrpSpPr>
+        <p:cNvPr id="1" name=""/>
+        <p:cNvGrpSpPr/>
+        <p:nvPr/>
+      </p:nvGrpSpPr>
+      <p:grpSpPr>
+        <a:xfrm>
+          <a:off x="0" y="0"/>
+          <a:ext cx="0" cy="0"/>
+          <a:chOff x="0" y="0"/>
+          <a:chExt cx="0" cy="0"/>
+        </a:xfrm>
+      </p:grpSpPr>
+      <p:sp>
+        <p:nvSpPr>
+          <p:cNvPr id="2" name="Slide Image Placeholder 1"/>
+          <p:cNvSpPr>
+            <a:spLocks noGrp="1" noRot="1" noChangeAspect="1"/>
+          </p:cNvSpPr>
+          <p:nvPr>
+            <p:ph type="sldImg" idx="2"/>
+          </p:nvPr>
+        </p:nvSpPr>
+        <p:spPr/>
+      </p:sp>
+      <p:sp>
+        <p:nvSpPr>
+          <p:cNvPr id="3" name="Notes Placeholder 2"/>
+          <p:cNvSpPr>
+            <a:spLocks noGrp="1"/>
+          </p:cNvSpPr>
+          <p:nvPr>
+            <p:ph type="body" sz="quarter" idx="3"/>
+          </p:nvPr>
+        </p:nvSpPr>
+        <p:spPr/>
+        <p:txBody>
+          <a:bodyPr/>
+          <a:lstStyle/>
+          <a:p>
+            <a:r>
+              <a:t>1.5 мин: три окружения, деплой идёт лесенкой. В dev — агент хоть каждый коммит, в prod — только после review и stage.</a:t>
             </a:r>
           </a:p>
         </p:txBody>
@@ -932,6 +1279,356 @@
           <a:p>
             <a:r>
               <a:t>Обзор 1 мин: перечисляю 7 тем, говорю что на каждом слайде минимум текста, детали рассказываю голосом.</a:t>
+            </a:r>
+          </a:p>
+        </p:txBody>
+      </p:sp>
+      <p:sp>
+        <p:nvSpPr>
+          <p:cNvPr id="4" name="Slide Number Placeholder 3"/>
+          <p:cNvSpPr>
+            <a:spLocks noGrp="1"/>
+          </p:cNvSpPr>
+          <p:nvPr>
+            <p:ph type="sldNum" sz="quarter" idx="5"/>
+          </p:nvPr>
+        </p:nvSpPr>
+        <p:spPr/>
+      </p:sp>
+    </p:spTree>
+  </p:cSld>
+  <p:clrMapOvr>
+    <a:masterClrMapping/>
+  </p:clrMapOvr>
+</p:notes>
+</file>
+
+<file path=ppt/notesSlides/notesSlide20.xml><?xml version="1.0" encoding="utf-8"?>
+<p:notes xmlns:a="http://schemas.openxmlformats.org/drawingml/2006/main" xmlns:r="http://schemas.openxmlformats.org/officeDocument/2006/relationships" xmlns:p="http://schemas.openxmlformats.org/presentationml/2006/main">
+  <p:cSld>
+    <p:spTree>
+      <p:nvGrpSpPr>
+        <p:cNvPr id="1" name=""/>
+        <p:cNvGrpSpPr/>
+        <p:nvPr/>
+      </p:nvGrpSpPr>
+      <p:grpSpPr>
+        <a:xfrm>
+          <a:off x="0" y="0"/>
+          <a:ext cx="0" cy="0"/>
+          <a:chOff x="0" y="0"/>
+          <a:chExt cx="0" cy="0"/>
+        </a:xfrm>
+      </p:grpSpPr>
+      <p:sp>
+        <p:nvSpPr>
+          <p:cNvPr id="2" name="Slide Image Placeholder 1"/>
+          <p:cNvSpPr>
+            <a:spLocks noGrp="1" noRot="1" noChangeAspect="1"/>
+          </p:cNvSpPr>
+          <p:nvPr>
+            <p:ph type="sldImg" idx="2"/>
+          </p:nvPr>
+        </p:nvSpPr>
+        <p:spPr/>
+      </p:sp>
+      <p:sp>
+        <p:nvSpPr>
+          <p:cNvPr id="3" name="Notes Placeholder 2"/>
+          <p:cNvSpPr>
+            <a:spLocks noGrp="1"/>
+          </p:cNvSpPr>
+          <p:nvPr>
+            <p:ph type="body" sz="quarter" idx="3"/>
+          </p:nvPr>
+        </p:nvSpPr>
+        <p:spPr/>
+        <p:txBody>
+          <a:bodyPr/>
+          <a:lstStyle/>
+          <a:p>
+            <a:r>
+              <a:t>2 мин: PR — просьба влить + место дискуссии. Хороший PR: маленький, с описанием, с зелёным CI. Кнопка merge — после двух галочек.</a:t>
+            </a:r>
+          </a:p>
+        </p:txBody>
+      </p:sp>
+      <p:sp>
+        <p:nvSpPr>
+          <p:cNvPr id="4" name="Slide Number Placeholder 3"/>
+          <p:cNvSpPr>
+            <a:spLocks noGrp="1"/>
+          </p:cNvSpPr>
+          <p:nvPr>
+            <p:ph type="sldNum" sz="quarter" idx="5"/>
+          </p:nvPr>
+        </p:nvSpPr>
+        <p:spPr/>
+      </p:sp>
+    </p:spTree>
+  </p:cSld>
+  <p:clrMapOvr>
+    <a:masterClrMapping/>
+  </p:clrMapOvr>
+</p:notes>
+</file>
+
+<file path=ppt/notesSlides/notesSlide21.xml><?xml version="1.0" encoding="utf-8"?>
+<p:notes xmlns:a="http://schemas.openxmlformats.org/drawingml/2006/main" xmlns:r="http://schemas.openxmlformats.org/officeDocument/2006/relationships" xmlns:p="http://schemas.openxmlformats.org/presentationml/2006/main">
+  <p:cSld>
+    <p:spTree>
+      <p:nvGrpSpPr>
+        <p:cNvPr id="1" name=""/>
+        <p:cNvGrpSpPr/>
+        <p:nvPr/>
+      </p:nvGrpSpPr>
+      <p:grpSpPr>
+        <a:xfrm>
+          <a:off x="0" y="0"/>
+          <a:ext cx="0" cy="0"/>
+          <a:chOff x="0" y="0"/>
+          <a:chExt cx="0" cy="0"/>
+        </a:xfrm>
+      </p:grpSpPr>
+      <p:sp>
+        <p:nvSpPr>
+          <p:cNvPr id="2" name="Slide Image Placeholder 1"/>
+          <p:cNvSpPr>
+            <a:spLocks noGrp="1" noRot="1" noChangeAspect="1"/>
+          </p:cNvSpPr>
+          <p:nvPr>
+            <p:ph type="sldImg" idx="2"/>
+          </p:nvPr>
+        </p:nvSpPr>
+        <p:spPr/>
+      </p:sp>
+      <p:sp>
+        <p:nvSpPr>
+          <p:cNvPr id="3" name="Notes Placeholder 2"/>
+          <p:cNvSpPr>
+            <a:spLocks noGrp="1"/>
+          </p:cNvSpPr>
+          <p:nvPr>
+            <p:ph type="body" sz="quarter" idx="3"/>
+          </p:nvPr>
+        </p:nvSpPr>
+        <p:spPr/>
+        <p:txBody>
+          <a:bodyPr/>
+          <a:lstStyle/>
+          <a:p>
+            <a:r>
+              <a:t>2 мин: чек-лист ревью, правило 15 минут, approve/request changes, suggestion-фича. Тон решает: правим код, хвалим человека.</a:t>
+            </a:r>
+          </a:p>
+        </p:txBody>
+      </p:sp>
+      <p:sp>
+        <p:nvSpPr>
+          <p:cNvPr id="4" name="Slide Number Placeholder 3"/>
+          <p:cNvSpPr>
+            <a:spLocks noGrp="1"/>
+          </p:cNvSpPr>
+          <p:nvPr>
+            <p:ph type="sldNum" sz="quarter" idx="5"/>
+          </p:nvPr>
+        </p:nvSpPr>
+        <p:spPr/>
+      </p:sp>
+    </p:spTree>
+  </p:cSld>
+  <p:clrMapOvr>
+    <a:masterClrMapping/>
+  </p:clrMapOvr>
+</p:notes>
+</file>
+
+<file path=ppt/notesSlides/notesSlide22.xml><?xml version="1.0" encoding="utf-8"?>
+<p:notes xmlns:a="http://schemas.openxmlformats.org/drawingml/2006/main" xmlns:r="http://schemas.openxmlformats.org/officeDocument/2006/relationships" xmlns:p="http://schemas.openxmlformats.org/presentationml/2006/main">
+  <p:cSld>
+    <p:spTree>
+      <p:nvGrpSpPr>
+        <p:cNvPr id="1" name=""/>
+        <p:cNvGrpSpPr/>
+        <p:nvPr/>
+      </p:nvGrpSpPr>
+      <p:grpSpPr>
+        <a:xfrm>
+          <a:off x="0" y="0"/>
+          <a:ext cx="0" cy="0"/>
+          <a:chOff x="0" y="0"/>
+          <a:chExt cx="0" cy="0"/>
+        </a:xfrm>
+      </p:grpSpPr>
+      <p:sp>
+        <p:nvSpPr>
+          <p:cNvPr id="2" name="Slide Image Placeholder 1"/>
+          <p:cNvSpPr>
+            <a:spLocks noGrp="1" noRot="1" noChangeAspect="1"/>
+          </p:cNvSpPr>
+          <p:nvPr>
+            <p:ph type="sldImg" idx="2"/>
+          </p:nvPr>
+        </p:nvSpPr>
+        <p:spPr/>
+      </p:sp>
+      <p:sp>
+        <p:nvSpPr>
+          <p:cNvPr id="3" name="Notes Placeholder 2"/>
+          <p:cNvSpPr>
+            <a:spLocks noGrp="1"/>
+          </p:cNvSpPr>
+          <p:nvPr>
+            <p:ph type="body" sz="quarter" idx="3"/>
+          </p:nvPr>
+        </p:nvSpPr>
+        <p:spPr/>
+        <p:txBody>
+          <a:bodyPr/>
+          <a:lstStyle/>
+          <a:p>
+            <a:r>
+              <a:t>2 мин: конфликт — не ошибка, а встреча двух правок. Показать маркеры, правило: говорим с автором второй правки, частый pull лечит.</a:t>
+            </a:r>
+          </a:p>
+        </p:txBody>
+      </p:sp>
+      <p:sp>
+        <p:nvSpPr>
+          <p:cNvPr id="4" name="Slide Number Placeholder 3"/>
+          <p:cNvSpPr>
+            <a:spLocks noGrp="1"/>
+          </p:cNvSpPr>
+          <p:nvPr>
+            <p:ph type="sldNum" sz="quarter" idx="5"/>
+          </p:nvPr>
+        </p:nvSpPr>
+        <p:spPr/>
+      </p:sp>
+    </p:spTree>
+  </p:cSld>
+  <p:clrMapOvr>
+    <a:masterClrMapping/>
+  </p:clrMapOvr>
+</p:notes>
+</file>
+
+<file path=ppt/notesSlides/notesSlide23.xml><?xml version="1.0" encoding="utf-8"?>
+<p:notes xmlns:a="http://schemas.openxmlformats.org/drawingml/2006/main" xmlns:r="http://schemas.openxmlformats.org/officeDocument/2006/relationships" xmlns:p="http://schemas.openxmlformats.org/presentationml/2006/main">
+  <p:cSld>
+    <p:spTree>
+      <p:nvGrpSpPr>
+        <p:cNvPr id="1" name=""/>
+        <p:cNvGrpSpPr/>
+        <p:nvPr/>
+      </p:nvGrpSpPr>
+      <p:grpSpPr>
+        <a:xfrm>
+          <a:off x="0" y="0"/>
+          <a:ext cx="0" cy="0"/>
+          <a:chOff x="0" y="0"/>
+          <a:chExt cx="0" cy="0"/>
+        </a:xfrm>
+      </p:grpSpPr>
+      <p:sp>
+        <p:nvSpPr>
+          <p:cNvPr id="2" name="Slide Image Placeholder 1"/>
+          <p:cNvSpPr>
+            <a:spLocks noGrp="1" noRot="1" noChangeAspect="1"/>
+          </p:cNvSpPr>
+          <p:nvPr>
+            <p:ph type="sldImg" idx="2"/>
+          </p:nvPr>
+        </p:nvSpPr>
+        <p:spPr/>
+      </p:sp>
+      <p:sp>
+        <p:nvSpPr>
+          <p:cNvPr id="3" name="Notes Placeholder 2"/>
+          <p:cNvSpPr>
+            <a:spLocks noGrp="1"/>
+          </p:cNvSpPr>
+          <p:nvPr>
+            <p:ph type="body" sz="quarter" idx="3"/>
+          </p:nvPr>
+        </p:nvSpPr>
+        <p:spPr/>
+        <p:txBody>
+          <a:bodyPr/>
+          <a:lstStyle/>
+          <a:p>
+            <a:r>
+              <a:t>1 мин: финал-чеклист, прошу сфотографировать слайд. Каждое правило — итог одной темы.</a:t>
+            </a:r>
+          </a:p>
+        </p:txBody>
+      </p:sp>
+      <p:sp>
+        <p:nvSpPr>
+          <p:cNvPr id="4" name="Slide Number Placeholder 3"/>
+          <p:cNvSpPr>
+            <a:spLocks noGrp="1"/>
+          </p:cNvSpPr>
+          <p:nvPr>
+            <p:ph type="sldNum" sz="quarter" idx="5"/>
+          </p:nvPr>
+        </p:nvSpPr>
+        <p:spPr/>
+      </p:sp>
+    </p:spTree>
+  </p:cSld>
+  <p:clrMapOvr>
+    <a:masterClrMapping/>
+  </p:clrMapOvr>
+</p:notes>
+</file>
+
+<file path=ppt/notesSlides/notesSlide24.xml><?xml version="1.0" encoding="utf-8"?>
+<p:notes xmlns:a="http://schemas.openxmlformats.org/drawingml/2006/main" xmlns:r="http://schemas.openxmlformats.org/officeDocument/2006/relationships" xmlns:p="http://schemas.openxmlformats.org/presentationml/2006/main">
+  <p:cSld>
+    <p:spTree>
+      <p:nvGrpSpPr>
+        <p:cNvPr id="1" name=""/>
+        <p:cNvGrpSpPr/>
+        <p:nvPr/>
+      </p:nvGrpSpPr>
+      <p:grpSpPr>
+        <a:xfrm>
+          <a:off x="0" y="0"/>
+          <a:ext cx="0" cy="0"/>
+          <a:chOff x="0" y="0"/>
+          <a:chExt cx="0" cy="0"/>
+        </a:xfrm>
+      </p:grpSpPr>
+      <p:sp>
+        <p:nvSpPr>
+          <p:cNvPr id="2" name="Slide Image Placeholder 1"/>
+          <p:cNvSpPr>
+            <a:spLocks noGrp="1" noRot="1" noChangeAspect="1"/>
+          </p:cNvSpPr>
+          <p:nvPr>
+            <p:ph type="sldImg" idx="2"/>
+          </p:nvPr>
+        </p:nvSpPr>
+        <p:spPr/>
+      </p:sp>
+      <p:sp>
+        <p:nvSpPr>
+          <p:cNvPr id="3" name="Notes Placeholder 2"/>
+          <p:cNvSpPr>
+            <a:spLocks noGrp="1"/>
+          </p:cNvSpPr>
+          <p:nvPr>
+            <p:ph type="body" sz="quarter" idx="3"/>
+          </p:nvPr>
+        </p:nvSpPr>
+        <p:spPr/>
+        <p:txBody>
+          <a:bodyPr/>
+          <a:lstStyle/>
+          <a:p>
+            <a:r>
+              <a:t>Финал 3 мин: вопросы + живое демо: создать ветку, коммит, PR, review самому себе, merge, показать граф. Призыв: завести репозиторий сегодня.</a:t>
             </a:r>
           </a:p>
         </p:txBody>
@@ -1299,7 +1996,13 @@
   <p:cSld>
     <p:spTree>
       <p:nvGrpSpPr>
-        <p:cNvPr id="1" name=""/>
+        <p:cNvPr id="1" name="">
+          <a:extLst>
+            <a:ext uri="{FF2B5EF4-FFF2-40B4-BE49-F238E27FC236}">
+              <a16:creationId xmlns:a16="http://schemas.microsoft.com/office/drawing/2014/main" id="{7936EC4E-D60C-CC32-A613-6F1766541E23}"/>
+            </a:ext>
+          </a:extLst>
+        </p:cNvPr>
         <p:cNvGrpSpPr/>
         <p:nvPr/>
       </p:nvGrpSpPr>
@@ -1313,7 +2016,13 @@
       </p:grpSpPr>
       <p:sp>
         <p:nvSpPr>
-          <p:cNvPr id="2" name="Slide Image Placeholder 1"/>
+          <p:cNvPr id="2" name="Slide Image Placeholder 1">
+            <a:extLst>
+              <a:ext uri="{FF2B5EF4-FFF2-40B4-BE49-F238E27FC236}">
+                <a16:creationId xmlns:a16="http://schemas.microsoft.com/office/drawing/2014/main" id="{E453C867-5BF3-6555-76CD-FF368DC16E42}"/>
+              </a:ext>
+            </a:extLst>
+          </p:cNvPr>
           <p:cNvSpPr>
             <a:spLocks noGrp="1" noRot="1" noChangeAspect="1"/>
           </p:cNvSpPr>
@@ -1325,7 +2034,13 @@
       </p:sp>
       <p:sp>
         <p:nvSpPr>
-          <p:cNvPr id="3" name="Notes Placeholder 2"/>
+          <p:cNvPr id="3" name="Notes Placeholder 2">
+            <a:extLst>
+              <a:ext uri="{FF2B5EF4-FFF2-40B4-BE49-F238E27FC236}">
+                <a16:creationId xmlns:a16="http://schemas.microsoft.com/office/drawing/2014/main" id="{0C39D238-9B7A-88B7-AE25-459B2CA82022}"/>
+              </a:ext>
+            </a:extLst>
+          </p:cNvPr>
           <p:cNvSpPr>
             <a:spLocks noGrp="1"/>
           </p:cNvSpPr>
@@ -1339,14 +2054,20 @@
           <a:lstStyle/>
           <a:p>
             <a:r>
-              <a:t>2 мин: агент = цикл plan-act-observe. Умеет: issue→код→тесты→PR→деплой на stage, откат. Не умеет: ответственность. Человек жмёт merge в прод.</a:t>
-            </a:r>
-          </a:p>
-        </p:txBody>
-      </p:sp>
-      <p:sp>
-        <p:nvSpPr>
-          <p:cNvPr id="4" name="Slide Number Placeholder 3"/>
+              <a:t>2 мин: Git — инструмент, GitHub/GitLab — хостинги. GitHub — экосистема, GitLab — комбайн с CI. Для курса неважно, команды одни.</a:t>
+            </a:r>
+          </a:p>
+        </p:txBody>
+      </p:sp>
+      <p:sp>
+        <p:nvSpPr>
+          <p:cNvPr id="4" name="Slide Number Placeholder 3">
+            <a:extLst>
+              <a:ext uri="{FF2B5EF4-FFF2-40B4-BE49-F238E27FC236}">
+                <a16:creationId xmlns:a16="http://schemas.microsoft.com/office/drawing/2014/main" id="{7E68BD24-D6C7-80B8-A973-592AE3B8CD90}"/>
+              </a:ext>
+            </a:extLst>
+          </p:cNvPr>
           <p:cNvSpPr>
             <a:spLocks noGrp="1"/>
           </p:cNvSpPr>
@@ -1357,6 +2078,11 @@
         <p:spPr/>
       </p:sp>
     </p:spTree>
+    <p:extLst>
+      <p:ext uri="{BB962C8B-B14F-4D97-AF65-F5344CB8AC3E}">
+        <p14:creationId xmlns:p14="http://schemas.microsoft.com/office/powerpoint/2010/main" val="3184264184"/>
+      </p:ext>
+    </p:extLst>
   </p:cSld>
   <p:clrMapOvr>
     <a:masterClrMapping/>
@@ -1369,7 +2095,13 @@
   <p:cSld>
     <p:spTree>
       <p:nvGrpSpPr>
-        <p:cNvPr id="1" name=""/>
+        <p:cNvPr id="1" name="">
+          <a:extLst>
+            <a:ext uri="{FF2B5EF4-FFF2-40B4-BE49-F238E27FC236}">
+              <a16:creationId xmlns:a16="http://schemas.microsoft.com/office/drawing/2014/main" id="{2F3E3A89-F208-4A39-8CD3-630C912F3D03}"/>
+            </a:ext>
+          </a:extLst>
+        </p:cNvPr>
         <p:cNvGrpSpPr/>
         <p:nvPr/>
       </p:nvGrpSpPr>
@@ -1383,7 +2115,13 @@
       </p:grpSpPr>
       <p:sp>
         <p:nvSpPr>
-          <p:cNvPr id="2" name="Slide Image Placeholder 1"/>
+          <p:cNvPr id="2" name="Slide Image Placeholder 1">
+            <a:extLst>
+              <a:ext uri="{FF2B5EF4-FFF2-40B4-BE49-F238E27FC236}">
+                <a16:creationId xmlns:a16="http://schemas.microsoft.com/office/drawing/2014/main" id="{93BA2BFF-0F49-5ED3-A26A-CDFC1432996E}"/>
+              </a:ext>
+            </a:extLst>
+          </p:cNvPr>
           <p:cNvSpPr>
             <a:spLocks noGrp="1" noRot="1" noChangeAspect="1"/>
           </p:cNvSpPr>
@@ -1395,7 +2133,13 @@
       </p:sp>
       <p:sp>
         <p:nvSpPr>
-          <p:cNvPr id="3" name="Notes Placeholder 2"/>
+          <p:cNvPr id="3" name="Notes Placeholder 2">
+            <a:extLst>
+              <a:ext uri="{FF2B5EF4-FFF2-40B4-BE49-F238E27FC236}">
+                <a16:creationId xmlns:a16="http://schemas.microsoft.com/office/drawing/2014/main" id="{37435712-C74C-30BE-25A1-348D6E3FBE23}"/>
+              </a:ext>
+            </a:extLst>
+          </p:cNvPr>
           <p:cNvSpPr>
             <a:spLocks noGrp="1"/>
           </p:cNvSpPr>
@@ -1409,14 +2153,20 @@
           <a:lstStyle/>
           <a:p>
             <a:r>
-              <a:t>1.5 мин: показываю цепочку, подчёркиваю gate: прод только руками. Пример: Copilot workspace / агент в CI чинит упавший тест.</a:t>
-            </a:r>
-          </a:p>
-        </p:txBody>
-      </p:sp>
-      <p:sp>
-        <p:nvSpPr>
-          <p:cNvPr id="4" name="Slide Number Placeholder 3"/>
+              <a:t>2 мин: Git — инструмент, GitHub/GitLab — хостинги. GitHub — экосистема, GitLab — комбайн с CI. Для курса неважно, команды одни.</a:t>
+            </a:r>
+          </a:p>
+        </p:txBody>
+      </p:sp>
+      <p:sp>
+        <p:nvSpPr>
+          <p:cNvPr id="4" name="Slide Number Placeholder 3">
+            <a:extLst>
+              <a:ext uri="{FF2B5EF4-FFF2-40B4-BE49-F238E27FC236}">
+                <a16:creationId xmlns:a16="http://schemas.microsoft.com/office/drawing/2014/main" id="{1743AC60-529D-B547-67E0-99BF0519D82F}"/>
+              </a:ext>
+            </a:extLst>
+          </p:cNvPr>
           <p:cNvSpPr>
             <a:spLocks noGrp="1"/>
           </p:cNvSpPr>
@@ -1427,6 +2177,11 @@
         <p:spPr/>
       </p:sp>
     </p:spTree>
+    <p:extLst>
+      <p:ext uri="{BB962C8B-B14F-4D97-AF65-F5344CB8AC3E}">
+        <p14:creationId xmlns:p14="http://schemas.microsoft.com/office/powerpoint/2010/main" val="2498103743"/>
+      </p:ext>
+    </p:extLst>
   </p:cSld>
   <p:clrMapOvr>
     <a:masterClrMapping/>
@@ -1439,7 +2194,13 @@
   <p:cSld>
     <p:spTree>
       <p:nvGrpSpPr>
-        <p:cNvPr id="1" name=""/>
+        <p:cNvPr id="1" name="">
+          <a:extLst>
+            <a:ext uri="{FF2B5EF4-FFF2-40B4-BE49-F238E27FC236}">
+              <a16:creationId xmlns:a16="http://schemas.microsoft.com/office/drawing/2014/main" id="{EEE0DD0B-A3DA-240F-9A83-8549F1CD3910}"/>
+            </a:ext>
+          </a:extLst>
+        </p:cNvPr>
         <p:cNvGrpSpPr/>
         <p:nvPr/>
       </p:nvGrpSpPr>
@@ -1453,7 +2214,13 @@
       </p:grpSpPr>
       <p:sp>
         <p:nvSpPr>
-          <p:cNvPr id="2" name="Slide Image Placeholder 1"/>
+          <p:cNvPr id="2" name="Slide Image Placeholder 1">
+            <a:extLst>
+              <a:ext uri="{FF2B5EF4-FFF2-40B4-BE49-F238E27FC236}">
+                <a16:creationId xmlns:a16="http://schemas.microsoft.com/office/drawing/2014/main" id="{F6509B25-C6A1-BADB-B9FF-3FD50BB81572}"/>
+              </a:ext>
+            </a:extLst>
+          </p:cNvPr>
           <p:cNvSpPr>
             <a:spLocks noGrp="1" noRot="1" noChangeAspect="1"/>
           </p:cNvSpPr>
@@ -1465,7 +2232,13 @@
       </p:sp>
       <p:sp>
         <p:nvSpPr>
-          <p:cNvPr id="3" name="Notes Placeholder 2"/>
+          <p:cNvPr id="3" name="Notes Placeholder 2">
+            <a:extLst>
+              <a:ext uri="{FF2B5EF4-FFF2-40B4-BE49-F238E27FC236}">
+                <a16:creationId xmlns:a16="http://schemas.microsoft.com/office/drawing/2014/main" id="{ADE1EB91-4B00-D1C3-0D9C-13874C59D511}"/>
+              </a:ext>
+            </a:extLst>
+          </p:cNvPr>
           <p:cNvSpPr>
             <a:spLocks noGrp="1"/>
           </p:cNvSpPr>
@@ -1479,14 +2252,20 @@
           <a:lstStyle/>
           <a:p>
             <a:r>
-              <a:t>2 мин: анатомия: main стабилен, работа только в ветках, hotfix — короткая ветка от main. Аналогия: main — витрина, ветки — мастерская.</a:t>
-            </a:r>
-          </a:p>
-        </p:txBody>
-      </p:sp>
-      <p:sp>
-        <p:nvSpPr>
-          <p:cNvPr id="4" name="Slide Number Placeholder 3"/>
+              <a:t>2 мин: Git — инструмент, GitHub/GitLab — хостинги. GitHub — экосистема, GitLab — комбайн с CI. Для курса неважно, команды одни.</a:t>
+            </a:r>
+          </a:p>
+        </p:txBody>
+      </p:sp>
+      <p:sp>
+        <p:nvSpPr>
+          <p:cNvPr id="4" name="Slide Number Placeholder 3">
+            <a:extLst>
+              <a:ext uri="{FF2B5EF4-FFF2-40B4-BE49-F238E27FC236}">
+                <a16:creationId xmlns:a16="http://schemas.microsoft.com/office/drawing/2014/main" id="{594AB9DC-81DC-F769-EE15-C935FC6C6688}"/>
+              </a:ext>
+            </a:extLst>
+          </p:cNvPr>
           <p:cNvSpPr>
             <a:spLocks noGrp="1"/>
           </p:cNvSpPr>
@@ -1497,6 +2276,11 @@
         <p:spPr/>
       </p:sp>
     </p:spTree>
+    <p:extLst>
+      <p:ext uri="{BB962C8B-B14F-4D97-AF65-F5344CB8AC3E}">
+        <p14:creationId xmlns:p14="http://schemas.microsoft.com/office/powerpoint/2010/main" val="4187892930"/>
+      </p:ext>
+    </p:extLst>
   </p:cSld>
   <p:clrMapOvr>
     <a:masterClrMapping/>
@@ -6203,7 +6987,13 @@
   <p:cSld>
     <p:spTree>
       <p:nvGrpSpPr>
-        <p:cNvPr id="1" name=""/>
+        <p:cNvPr id="1" name="">
+          <a:extLst>
+            <a:ext uri="{FF2B5EF4-FFF2-40B4-BE49-F238E27FC236}">
+              <a16:creationId xmlns:a16="http://schemas.microsoft.com/office/drawing/2014/main" id="{93A77A22-7C17-581A-5F7F-E60D412DCC39}"/>
+            </a:ext>
+          </a:extLst>
+        </p:cNvPr>
         <p:cNvGrpSpPr/>
         <p:nvPr/>
       </p:nvGrpSpPr>
@@ -6217,7 +7007,13 @@
       </p:grpSpPr>
       <p:sp>
         <p:nvSpPr>
-          <p:cNvPr id="2" name="Title 1"/>
+          <p:cNvPr id="2" name="Title 1">
+            <a:extLst>
+              <a:ext uri="{FF2B5EF4-FFF2-40B4-BE49-F238E27FC236}">
+                <a16:creationId xmlns:a16="http://schemas.microsoft.com/office/drawing/2014/main" id="{2AAA368E-2045-73FB-7643-5D105B83B7D8}"/>
+              </a:ext>
+            </a:extLst>
+          </p:cNvPr>
           <p:cNvSpPr>
             <a:spLocks noGrp="1"/>
           </p:cNvSpPr>
@@ -6232,224 +7028,95 @@
           <a:p>
             <a:pPr algn="l"/>
             <a:r>
-              <a:rPr sz="4000" b="1">
+              <a:rPr lang="en-US" sz="4000" b="1" dirty="0">
                 <a:solidFill>
                   <a:srgbClr val="242852"/>
                 </a:solidFill>
                 <a:latin typeface="Calibri Light"/>
               </a:rPr>
-              <a:t>200 заработать, 500 потерять</a:t>
-            </a:r>
-          </a:p>
-        </p:txBody>
-      </p:sp>
-      <p:sp>
-        <p:nvSpPr>
-          <p:cNvPr id="3" name="Rounded Rectangle 2"/>
-          <p:cNvSpPr/>
+              <a:t>Commit</a:t>
+            </a:r>
+            <a:r>
+              <a:rPr lang="ru-RU" sz="4000" b="1" dirty="0">
+                <a:solidFill>
+                  <a:srgbClr val="242852"/>
+                </a:solidFill>
+                <a:latin typeface="Calibri Light"/>
+              </a:rPr>
+              <a:t>/</a:t>
+            </a:r>
+            <a:r>
+              <a:rPr lang="en-US" sz="4000" b="1" dirty="0">
+                <a:solidFill>
+                  <a:srgbClr val="242852"/>
+                </a:solidFill>
+                <a:latin typeface="Calibri Light"/>
+              </a:rPr>
+              <a:t>merge conflict . </a:t>
+            </a:r>
+            <a:r>
+              <a:rPr lang="ru-RU" sz="4000" b="1" dirty="0">
+                <a:solidFill>
+                  <a:srgbClr val="242852"/>
+                </a:solidFill>
+                <a:latin typeface="Calibri Light"/>
+              </a:rPr>
+              <a:t>Там же </a:t>
+            </a:r>
+            <a:r>
+              <a:rPr lang="ru-RU" sz="4000" b="1" dirty="0" err="1">
+                <a:solidFill>
+                  <a:srgbClr val="242852"/>
+                </a:solidFill>
+                <a:latin typeface="Calibri Light"/>
+              </a:rPr>
+              <a:t>ридми</a:t>
+            </a:r>
+            <a:endParaRPr sz="4000" b="1" dirty="0">
+              <a:solidFill>
+                <a:srgbClr val="242852"/>
+              </a:solidFill>
+              <a:latin typeface="Calibri Light"/>
+            </a:endParaRPr>
+          </a:p>
+        </p:txBody>
+      </p:sp>
+      <p:pic>
+        <p:nvPicPr>
+          <p:cNvPr id="4" name="Рисунок 3">
+            <a:extLst>
+              <a:ext uri="{FF2B5EF4-FFF2-40B4-BE49-F238E27FC236}">
+                <a16:creationId xmlns:a16="http://schemas.microsoft.com/office/drawing/2014/main" id="{0E11219A-1A3D-03EC-DA24-A5E42D481D80}"/>
+              </a:ext>
+            </a:extLst>
+          </p:cNvPr>
+          <p:cNvPicPr>
+            <a:picLocks noChangeAspect="1"/>
+          </p:cNvPicPr>
           <p:nvPr/>
-        </p:nvSpPr>
+        </p:nvPicPr>
+        <p:blipFill>
+          <a:blip r:embed="rId3"/>
+          <a:stretch>
+            <a:fillRect/>
+          </a:stretch>
+        </p:blipFill>
         <p:spPr>
           <a:xfrm>
-            <a:off x="640080" y="1554480"/>
-            <a:ext cx="5212080" cy="2194560"/>
-          </a:xfrm>
-          <a:prstGeom prst="roundRect">
-            <a:avLst/>
-          </a:prstGeom>
-          <a:solidFill>
-            <a:srgbClr val="7F8FA9"/>
-          </a:solidFill>
-          <a:ln>
-            <a:noFill/>
-          </a:ln>
-        </p:spPr>
-        <p:style>
-          <a:lnRef idx="1">
-            <a:schemeClr val="accent1"/>
-          </a:lnRef>
-          <a:fillRef idx="3">
-            <a:schemeClr val="accent1"/>
-          </a:fillRef>
-          <a:effectRef idx="2">
-            <a:schemeClr val="accent1"/>
-          </a:effectRef>
-          <a:fontRef idx="minor">
-            <a:schemeClr val="lt1"/>
-          </a:fontRef>
-        </p:style>
-        <p:txBody>
-          <a:bodyPr wrap="square" rtlCol="0" anchor="ctr"/>
-          <a:lstStyle/>
-          <a:p>
-            <a:pPr algn="ctr"/>
-            <a:r>
-              <a:rPr sz="2600" b="1">
-                <a:solidFill>
-                  <a:srgbClr val="FFFFFF"/>
-                </a:solidFill>
-                <a:latin typeface="Calibri"/>
-              </a:rPr>
-              <a:t>−500 простой</a:t>
-            </a:r>
-          </a:p>
-          <a:p>
-            <a:pPr algn="ctr">
-              <a:spcBef>
-                <a:spcPts val="800"/>
-              </a:spcBef>
-            </a:pPr>
-            <a:r>
-              <a:rPr sz="1600">
-                <a:solidFill>
-                  <a:srgbClr val="FFFFFF"/>
-                </a:solidFill>
-                <a:latin typeface="Calibri"/>
-              </a:rPr>
-              <a:t>деплой в лоб, все стоят</a:t>
-            </a:r>
-          </a:p>
-        </p:txBody>
-      </p:sp>
-      <p:sp>
-        <p:nvSpPr>
-          <p:cNvPr id="4" name="Rounded Rectangle 3"/>
-          <p:cNvSpPr/>
-          <p:nvPr/>
-        </p:nvSpPr>
-        <p:spPr>
-          <a:xfrm>
-            <a:off x="6309360" y="1554480"/>
-            <a:ext cx="5212080" cy="2194560"/>
-          </a:xfrm>
-          <a:prstGeom prst="roundRect">
-            <a:avLst/>
-          </a:prstGeom>
-          <a:solidFill>
-            <a:srgbClr val="5AA2AE"/>
-          </a:solidFill>
-          <a:ln>
-            <a:noFill/>
-          </a:ln>
-        </p:spPr>
-        <p:style>
-          <a:lnRef idx="1">
-            <a:schemeClr val="accent1"/>
-          </a:lnRef>
-          <a:fillRef idx="3">
-            <a:schemeClr val="accent1"/>
-          </a:fillRef>
-          <a:effectRef idx="2">
-            <a:schemeClr val="accent1"/>
-          </a:effectRef>
-          <a:fontRef idx="minor">
-            <a:schemeClr val="lt1"/>
-          </a:fontRef>
-        </p:style>
-        <p:txBody>
-          <a:bodyPr wrap="square" rtlCol="0" anchor="ctr"/>
-          <a:lstStyle/>
-          <a:p>
-            <a:pPr algn="ctr"/>
-            <a:r>
-              <a:rPr sz="2600" b="1">
-                <a:solidFill>
-                  <a:srgbClr val="FFFFFF"/>
-                </a:solidFill>
-                <a:latin typeface="Calibri"/>
-              </a:rPr>
-              <a:t>+200 ветки</a:t>
-            </a:r>
-          </a:p>
-          <a:p>
-            <a:pPr algn="ctr">
-              <a:spcBef>
-                <a:spcPts val="800"/>
-              </a:spcBef>
-            </a:pPr>
-            <a:r>
-              <a:rPr sz="1600">
-                <a:solidFill>
-                  <a:srgbClr val="FFFFFF"/>
-                </a:solidFill>
-                <a:latin typeface="Calibri"/>
-              </a:rPr>
-              <a:t>hotfix без остановки прода</a:t>
-            </a:r>
-          </a:p>
-        </p:txBody>
-      </p:sp>
-      <p:sp>
-        <p:nvSpPr>
-          <p:cNvPr id="5" name="TextBox 4"/>
-          <p:cNvSpPr txBox="1"/>
-          <p:nvPr/>
-        </p:nvSpPr>
-        <p:spPr>
-          <a:xfrm>
-            <a:off x="640080" y="4114800"/>
-            <a:ext cx="10881360" cy="914400"/>
+            <a:off x="68367" y="1273205"/>
+            <a:ext cx="12192000" cy="5918200"/>
           </a:xfrm>
           <a:prstGeom prst="rect">
             <a:avLst/>
           </a:prstGeom>
-          <a:noFill/>
         </p:spPr>
-        <p:txBody>
-          <a:bodyPr wrap="square">
-            <a:spAutoFit/>
-          </a:bodyPr>
-          <a:lstStyle/>
-          <a:p>
-            <a:pPr algn="ctr"/>
-            <a:r>
-              <a:rPr sz="1800" b="1">
-                <a:solidFill>
-                  <a:srgbClr val="242852"/>
-                </a:solidFill>
-                <a:latin typeface="Calibri"/>
-              </a:rPr>
-              <a:t>вынужденный простой дороже быстрой победы  •  чини веткой, а не паникой</a:t>
-            </a:r>
-          </a:p>
-        </p:txBody>
-      </p:sp>
-      <p:sp>
-        <p:nvSpPr>
-          <p:cNvPr id="6" name="TextBox 5"/>
-          <p:cNvSpPr txBox="1"/>
-          <p:nvPr/>
-        </p:nvSpPr>
-        <p:spPr>
-          <a:xfrm>
-            <a:off x="640080" y="5029200"/>
-            <a:ext cx="10881360" cy="914400"/>
-          </a:xfrm>
-          <a:prstGeom prst="rect">
-            <a:avLst/>
-          </a:prstGeom>
-          <a:noFill/>
-        </p:spPr>
-        <p:txBody>
-          <a:bodyPr wrap="square">
-            <a:spAutoFit/>
-          </a:bodyPr>
-          <a:lstStyle/>
-          <a:p>
-            <a:pPr algn="ctr"/>
-            <a:r>
-              <a:rPr sz="1400" b="0">
-                <a:solidFill>
-                  <a:srgbClr val="7F8FA9"/>
-                </a:solidFill>
-                <a:latin typeface="Calibri"/>
-              </a:rPr>
-              <a:t>цифры условные — для запоминания экономики простоя</a:t>
-            </a:r>
-          </a:p>
-        </p:txBody>
-      </p:sp>
+      </p:pic>
     </p:spTree>
+    <p:extLst>
+      <p:ext uri="{BB962C8B-B14F-4D97-AF65-F5344CB8AC3E}">
+        <p14:creationId xmlns:p14="http://schemas.microsoft.com/office/powerpoint/2010/main" val="1949872466"/>
+      </p:ext>
+    </p:extLst>
   </p:cSld>
   <p:clrMapOvr>
     <a:masterClrMapping/>
@@ -6462,7 +7129,13 @@
   <p:cSld>
     <p:spTree>
       <p:nvGrpSpPr>
-        <p:cNvPr id="1" name=""/>
+        <p:cNvPr id="1" name="">
+          <a:extLst>
+            <a:ext uri="{FF2B5EF4-FFF2-40B4-BE49-F238E27FC236}">
+              <a16:creationId xmlns:a16="http://schemas.microsoft.com/office/drawing/2014/main" id="{8000F368-61F7-2B31-9D59-EA66B16D99BF}"/>
+            </a:ext>
+          </a:extLst>
+        </p:cNvPr>
         <p:cNvGrpSpPr/>
         <p:nvPr/>
       </p:nvGrpSpPr>
@@ -6476,7 +7149,13 @@
       </p:grpSpPr>
       <p:sp>
         <p:nvSpPr>
-          <p:cNvPr id="2" name="Title 1"/>
+          <p:cNvPr id="2" name="Title 1">
+            <a:extLst>
+              <a:ext uri="{FF2B5EF4-FFF2-40B4-BE49-F238E27FC236}">
+                <a16:creationId xmlns:a16="http://schemas.microsoft.com/office/drawing/2014/main" id="{89521961-0055-2F3F-B2A7-A0B88B1BB30A}"/>
+              </a:ext>
+            </a:extLst>
+          </p:cNvPr>
           <p:cNvSpPr>
             <a:spLocks noGrp="1"/>
           </p:cNvSpPr>
@@ -6491,735 +7170,146 @@
           <a:p>
             <a:pPr algn="l"/>
             <a:r>
-              <a:rPr sz="3600" b="1">
+              <a:rPr lang="en-US" sz="4000" b="1" dirty="0">
                 <a:solidFill>
                   <a:srgbClr val="242852"/>
                 </a:solidFill>
                 <a:latin typeface="Calibri Light"/>
               </a:rPr>
-              <a:t>Путь фичи: идея → прод</a:t>
-            </a:r>
-          </a:p>
-        </p:txBody>
-      </p:sp>
-      <p:sp>
-        <p:nvSpPr>
-          <p:cNvPr id="3" name="Rounded Rectangle 2"/>
-          <p:cNvSpPr/>
+              <a:t>Commit</a:t>
+            </a:r>
+            <a:r>
+              <a:rPr lang="ru-RU" sz="4000" b="1" dirty="0">
+                <a:solidFill>
+                  <a:srgbClr val="242852"/>
+                </a:solidFill>
+                <a:latin typeface="Calibri Light"/>
+              </a:rPr>
+              <a:t>/</a:t>
+            </a:r>
+            <a:r>
+              <a:rPr lang="en-US" sz="4000" b="1" dirty="0">
+                <a:solidFill>
+                  <a:srgbClr val="242852"/>
+                </a:solidFill>
+                <a:latin typeface="Calibri Light"/>
+              </a:rPr>
+              <a:t>merge conflict . </a:t>
+            </a:r>
+            <a:r>
+              <a:rPr lang="ru-RU" sz="4000" b="1" dirty="0">
+                <a:solidFill>
+                  <a:srgbClr val="242852"/>
+                </a:solidFill>
+                <a:latin typeface="Calibri Light"/>
+              </a:rPr>
+              <a:t>Там же </a:t>
+            </a:r>
+            <a:r>
+              <a:rPr lang="ru-RU" sz="4000" b="1" dirty="0" err="1">
+                <a:solidFill>
+                  <a:srgbClr val="242852"/>
+                </a:solidFill>
+                <a:latin typeface="Calibri Light"/>
+              </a:rPr>
+              <a:t>ридми</a:t>
+            </a:r>
+            <a:endParaRPr sz="4000" b="1" dirty="0">
+              <a:solidFill>
+                <a:srgbClr val="242852"/>
+              </a:solidFill>
+              <a:latin typeface="Calibri Light"/>
+            </a:endParaRPr>
+          </a:p>
+        </p:txBody>
+      </p:sp>
+      <p:pic>
+        <p:nvPicPr>
+          <p:cNvPr id="5" name="Рисунок 4">
+            <a:extLst>
+              <a:ext uri="{FF2B5EF4-FFF2-40B4-BE49-F238E27FC236}">
+                <a16:creationId xmlns:a16="http://schemas.microsoft.com/office/drawing/2014/main" id="{BAAA165B-3747-00B7-A47B-CCC2FCA75CD1}"/>
+              </a:ext>
+            </a:extLst>
+          </p:cNvPr>
+          <p:cNvPicPr>
+            <a:picLocks noChangeAspect="1"/>
+          </p:cNvPicPr>
           <p:nvPr/>
-        </p:nvSpPr>
+        </p:nvPicPr>
+        <p:blipFill>
+          <a:blip r:embed="rId3"/>
+          <a:stretch>
+            <a:fillRect/>
+          </a:stretch>
+        </p:blipFill>
         <p:spPr>
           <a:xfrm>
-            <a:off x="640080" y="1554480"/>
-            <a:ext cx="1470660" cy="1737360"/>
-          </a:xfrm>
-          <a:prstGeom prst="roundRect">
-            <a:avLst/>
-          </a:prstGeom>
-          <a:solidFill>
-            <a:srgbClr val="242852"/>
-          </a:solidFill>
-          <a:ln>
-            <a:noFill/>
-          </a:ln>
-        </p:spPr>
-        <p:style>
-          <a:lnRef idx="1">
-            <a:schemeClr val="accent1"/>
-          </a:lnRef>
-          <a:fillRef idx="3">
-            <a:schemeClr val="accent1"/>
-          </a:fillRef>
-          <a:effectRef idx="2">
-            <a:schemeClr val="accent1"/>
-          </a:effectRef>
-          <a:fontRef idx="minor">
-            <a:schemeClr val="lt1"/>
-          </a:fontRef>
-        </p:style>
-        <p:txBody>
-          <a:bodyPr wrap="square" rtlCol="0" anchor="ctr"/>
-          <a:lstStyle/>
-          <a:p>
-            <a:pPr algn="ctr"/>
-            <a:r>
-              <a:rPr sz="1800" b="1">
-                <a:solidFill>
-                  <a:srgbClr val="FFFFFF"/>
-                </a:solidFill>
-                <a:latin typeface="Calibri"/>
-              </a:rPr>
-              <a:t>Идея</a:t>
-            </a:r>
-          </a:p>
-          <a:p>
-            <a:pPr algn="ctr">
-              <a:spcBef>
-                <a:spcPts val="800"/>
-              </a:spcBef>
-            </a:pPr>
-            <a:r>
-              <a:rPr sz="1300">
-                <a:solidFill>
-                  <a:srgbClr val="FFFFFF"/>
-                </a:solidFill>
-                <a:latin typeface="Calibri"/>
-              </a:rPr>
-              <a:t>issue</a:t>
-            </a:r>
-          </a:p>
-        </p:txBody>
-      </p:sp>
-      <p:sp>
-        <p:nvSpPr>
-          <p:cNvPr id="4" name="Right Arrow 3"/>
-          <p:cNvSpPr/>
-          <p:nvPr/>
-        </p:nvSpPr>
-        <p:spPr>
-          <a:xfrm>
-            <a:off x="2092452" y="2194560"/>
-            <a:ext cx="457200" cy="457200"/>
-          </a:xfrm>
-          <a:prstGeom prst="rightArrow">
-            <a:avLst/>
-          </a:prstGeom>
-          <a:solidFill>
-            <a:srgbClr val="242852"/>
-          </a:solidFill>
-          <a:ln>
-            <a:noFill/>
-          </a:ln>
-        </p:spPr>
-        <p:style>
-          <a:lnRef idx="1">
-            <a:schemeClr val="accent1"/>
-          </a:lnRef>
-          <a:fillRef idx="3">
-            <a:schemeClr val="accent1"/>
-          </a:fillRef>
-          <a:effectRef idx="2">
-            <a:schemeClr val="accent1"/>
-          </a:effectRef>
-          <a:fontRef idx="minor">
-            <a:schemeClr val="lt1"/>
-          </a:fontRef>
-        </p:style>
-        <p:txBody>
-          <a:bodyPr rtlCol="0" anchor="ctr"/>
-          <a:lstStyle/>
-          <a:p>
-            <a:pPr algn="ctr"/>
-            <a:endParaRPr/>
-          </a:p>
-        </p:txBody>
-      </p:sp>
-      <p:sp>
-        <p:nvSpPr>
-          <p:cNvPr id="5" name="Rounded Rectangle 4"/>
-          <p:cNvSpPr/>
-          <p:nvPr/>
-        </p:nvSpPr>
-        <p:spPr>
-          <a:xfrm>
-            <a:off x="2522220" y="1554480"/>
-            <a:ext cx="1470660" cy="1737360"/>
-          </a:xfrm>
-          <a:prstGeom prst="roundRect">
-            <a:avLst/>
-          </a:prstGeom>
-          <a:solidFill>
-            <a:srgbClr val="4A66AC"/>
-          </a:solidFill>
-          <a:ln>
-            <a:noFill/>
-          </a:ln>
-        </p:spPr>
-        <p:style>
-          <a:lnRef idx="1">
-            <a:schemeClr val="accent1"/>
-          </a:lnRef>
-          <a:fillRef idx="3">
-            <a:schemeClr val="accent1"/>
-          </a:fillRef>
-          <a:effectRef idx="2">
-            <a:schemeClr val="accent1"/>
-          </a:effectRef>
-          <a:fontRef idx="minor">
-            <a:schemeClr val="lt1"/>
-          </a:fontRef>
-        </p:style>
-        <p:txBody>
-          <a:bodyPr wrap="square" rtlCol="0" anchor="ctr"/>
-          <a:lstStyle/>
-          <a:p>
-            <a:pPr algn="ctr"/>
-            <a:r>
-              <a:rPr sz="1800" b="1">
-                <a:solidFill>
-                  <a:srgbClr val="FFFFFF"/>
-                </a:solidFill>
-                <a:latin typeface="Calibri"/>
-              </a:rPr>
-              <a:t>Ветка</a:t>
-            </a:r>
-          </a:p>
-          <a:p>
-            <a:pPr algn="ctr">
-              <a:spcBef>
-                <a:spcPts val="800"/>
-              </a:spcBef>
-            </a:pPr>
-            <a:r>
-              <a:rPr sz="1300">
-                <a:solidFill>
-                  <a:srgbClr val="FFFFFF"/>
-                </a:solidFill>
-                <a:latin typeface="Calibri"/>
-              </a:rPr>
-              <a:t>feature/*</a:t>
-            </a:r>
-          </a:p>
-        </p:txBody>
-      </p:sp>
-      <p:sp>
-        <p:nvSpPr>
-          <p:cNvPr id="6" name="Right Arrow 5"/>
-          <p:cNvSpPr/>
-          <p:nvPr/>
-        </p:nvSpPr>
-        <p:spPr>
-          <a:xfrm>
-            <a:off x="3974592" y="2194560"/>
-            <a:ext cx="457200" cy="457200"/>
-          </a:xfrm>
-          <a:prstGeom prst="rightArrow">
-            <a:avLst/>
-          </a:prstGeom>
-          <a:solidFill>
-            <a:srgbClr val="242852"/>
-          </a:solidFill>
-          <a:ln>
-            <a:noFill/>
-          </a:ln>
-        </p:spPr>
-        <p:style>
-          <a:lnRef idx="1">
-            <a:schemeClr val="accent1"/>
-          </a:lnRef>
-          <a:fillRef idx="3">
-            <a:schemeClr val="accent1"/>
-          </a:fillRef>
-          <a:effectRef idx="2">
-            <a:schemeClr val="accent1"/>
-          </a:effectRef>
-          <a:fontRef idx="minor">
-            <a:schemeClr val="lt1"/>
-          </a:fontRef>
-        </p:style>
-        <p:txBody>
-          <a:bodyPr rtlCol="0" anchor="ctr"/>
-          <a:lstStyle/>
-          <a:p>
-            <a:pPr algn="ctr"/>
-            <a:endParaRPr/>
-          </a:p>
-        </p:txBody>
-      </p:sp>
-      <p:sp>
-        <p:nvSpPr>
-          <p:cNvPr id="7" name="Rounded Rectangle 6"/>
-          <p:cNvSpPr/>
-          <p:nvPr/>
-        </p:nvSpPr>
-        <p:spPr>
-          <a:xfrm>
-            <a:off x="4404360" y="1554480"/>
-            <a:ext cx="1470660" cy="1737360"/>
-          </a:xfrm>
-          <a:prstGeom prst="roundRect">
-            <a:avLst/>
-          </a:prstGeom>
-          <a:solidFill>
-            <a:srgbClr val="5AA2AE"/>
-          </a:solidFill>
-          <a:ln>
-            <a:noFill/>
-          </a:ln>
-        </p:spPr>
-        <p:style>
-          <a:lnRef idx="1">
-            <a:schemeClr val="accent1"/>
-          </a:lnRef>
-          <a:fillRef idx="3">
-            <a:schemeClr val="accent1"/>
-          </a:fillRef>
-          <a:effectRef idx="2">
-            <a:schemeClr val="accent1"/>
-          </a:effectRef>
-          <a:fontRef idx="minor">
-            <a:schemeClr val="lt1"/>
-          </a:fontRef>
-        </p:style>
-        <p:txBody>
-          <a:bodyPr wrap="square" rtlCol="0" anchor="ctr"/>
-          <a:lstStyle/>
-          <a:p>
-            <a:pPr algn="ctr"/>
-            <a:r>
-              <a:rPr sz="1800" b="1">
-                <a:solidFill>
-                  <a:srgbClr val="FFFFFF"/>
-                </a:solidFill>
-                <a:latin typeface="Calibri"/>
-              </a:rPr>
-              <a:t>Код</a:t>
-            </a:r>
-          </a:p>
-          <a:p>
-            <a:pPr algn="ctr">
-              <a:spcBef>
-                <a:spcPts val="800"/>
-              </a:spcBef>
-            </a:pPr>
-            <a:r>
-              <a:rPr sz="1300">
-                <a:solidFill>
-                  <a:srgbClr val="FFFFFF"/>
-                </a:solidFill>
-                <a:latin typeface="Calibri"/>
-              </a:rPr>
-              <a:t>commit</a:t>
-            </a:r>
-          </a:p>
-        </p:txBody>
-      </p:sp>
-      <p:sp>
-        <p:nvSpPr>
-          <p:cNvPr id="8" name="Right Arrow 7"/>
-          <p:cNvSpPr/>
-          <p:nvPr/>
-        </p:nvSpPr>
-        <p:spPr>
-          <a:xfrm>
-            <a:off x="5856732" y="2194560"/>
-            <a:ext cx="457200" cy="457200"/>
-          </a:xfrm>
-          <a:prstGeom prst="rightArrow">
-            <a:avLst/>
-          </a:prstGeom>
-          <a:solidFill>
-            <a:srgbClr val="242852"/>
-          </a:solidFill>
-          <a:ln>
-            <a:noFill/>
-          </a:ln>
-        </p:spPr>
-        <p:style>
-          <a:lnRef idx="1">
-            <a:schemeClr val="accent1"/>
-          </a:lnRef>
-          <a:fillRef idx="3">
-            <a:schemeClr val="accent1"/>
-          </a:fillRef>
-          <a:effectRef idx="2">
-            <a:schemeClr val="accent1"/>
-          </a:effectRef>
-          <a:fontRef idx="minor">
-            <a:schemeClr val="lt1"/>
-          </a:fontRef>
-        </p:style>
-        <p:txBody>
-          <a:bodyPr rtlCol="0" anchor="ctr"/>
-          <a:lstStyle/>
-          <a:p>
-            <a:pPr algn="ctr"/>
-            <a:endParaRPr/>
-          </a:p>
-        </p:txBody>
-      </p:sp>
-      <p:sp>
-        <p:nvSpPr>
-          <p:cNvPr id="9" name="Rounded Rectangle 8"/>
-          <p:cNvSpPr/>
-          <p:nvPr/>
-        </p:nvSpPr>
-        <p:spPr>
-          <a:xfrm>
-            <a:off x="6286500" y="1554480"/>
-            <a:ext cx="1470660" cy="1737360"/>
-          </a:xfrm>
-          <a:prstGeom prst="roundRect">
-            <a:avLst/>
-          </a:prstGeom>
-          <a:solidFill>
-            <a:srgbClr val="297FD5"/>
-          </a:solidFill>
-          <a:ln>
-            <a:noFill/>
-          </a:ln>
-        </p:spPr>
-        <p:style>
-          <a:lnRef idx="1">
-            <a:schemeClr val="accent1"/>
-          </a:lnRef>
-          <a:fillRef idx="3">
-            <a:schemeClr val="accent1"/>
-          </a:fillRef>
-          <a:effectRef idx="2">
-            <a:schemeClr val="accent1"/>
-          </a:effectRef>
-          <a:fontRef idx="minor">
-            <a:schemeClr val="lt1"/>
-          </a:fontRef>
-        </p:style>
-        <p:txBody>
-          <a:bodyPr wrap="square" rtlCol="0" anchor="ctr"/>
-          <a:lstStyle/>
-          <a:p>
-            <a:pPr algn="ctr"/>
-            <a:r>
-              <a:rPr sz="1800" b="1">
-                <a:solidFill>
-                  <a:srgbClr val="FFFFFF"/>
-                </a:solidFill>
-                <a:latin typeface="Calibri"/>
-              </a:rPr>
-              <a:t>PR</a:t>
-            </a:r>
-          </a:p>
-          <a:p>
-            <a:pPr algn="ctr">
-              <a:spcBef>
-                <a:spcPts val="800"/>
-              </a:spcBef>
-            </a:pPr>
-            <a:r>
-              <a:rPr sz="1300">
-                <a:solidFill>
-                  <a:srgbClr val="FFFFFF"/>
-                </a:solidFill>
-                <a:latin typeface="Calibri"/>
-              </a:rPr>
-              <a:t>review</a:t>
-            </a:r>
-          </a:p>
-        </p:txBody>
-      </p:sp>
-      <p:sp>
-        <p:nvSpPr>
-          <p:cNvPr id="10" name="Right Arrow 9"/>
-          <p:cNvSpPr/>
-          <p:nvPr/>
-        </p:nvSpPr>
-        <p:spPr>
-          <a:xfrm>
-            <a:off x="7738872" y="2194560"/>
-            <a:ext cx="457200" cy="457200"/>
-          </a:xfrm>
-          <a:prstGeom prst="rightArrow">
-            <a:avLst/>
-          </a:prstGeom>
-          <a:solidFill>
-            <a:srgbClr val="242852"/>
-          </a:solidFill>
-          <a:ln>
-            <a:noFill/>
-          </a:ln>
-        </p:spPr>
-        <p:style>
-          <a:lnRef idx="1">
-            <a:schemeClr val="accent1"/>
-          </a:lnRef>
-          <a:fillRef idx="3">
-            <a:schemeClr val="accent1"/>
-          </a:fillRef>
-          <a:effectRef idx="2">
-            <a:schemeClr val="accent1"/>
-          </a:effectRef>
-          <a:fontRef idx="minor">
-            <a:schemeClr val="lt1"/>
-          </a:fontRef>
-        </p:style>
-        <p:txBody>
-          <a:bodyPr rtlCol="0" anchor="ctr"/>
-          <a:lstStyle/>
-          <a:p>
-            <a:pPr algn="ctr"/>
-            <a:endParaRPr/>
-          </a:p>
-        </p:txBody>
-      </p:sp>
-      <p:sp>
-        <p:nvSpPr>
-          <p:cNvPr id="11" name="Rounded Rectangle 10"/>
-          <p:cNvSpPr/>
-          <p:nvPr/>
-        </p:nvSpPr>
-        <p:spPr>
-          <a:xfrm>
-            <a:off x="8168640" y="1554480"/>
-            <a:ext cx="1470660" cy="1737360"/>
-          </a:xfrm>
-          <a:prstGeom prst="roundRect">
-            <a:avLst/>
-          </a:prstGeom>
-          <a:solidFill>
-            <a:srgbClr val="629DD1"/>
-          </a:solidFill>
-          <a:ln>
-            <a:noFill/>
-          </a:ln>
-        </p:spPr>
-        <p:style>
-          <a:lnRef idx="1">
-            <a:schemeClr val="accent1"/>
-          </a:lnRef>
-          <a:fillRef idx="3">
-            <a:schemeClr val="accent1"/>
-          </a:fillRef>
-          <a:effectRef idx="2">
-            <a:schemeClr val="accent1"/>
-          </a:effectRef>
-          <a:fontRef idx="minor">
-            <a:schemeClr val="lt1"/>
-          </a:fontRef>
-        </p:style>
-        <p:txBody>
-          <a:bodyPr wrap="square" rtlCol="0" anchor="ctr"/>
-          <a:lstStyle/>
-          <a:p>
-            <a:pPr algn="ctr"/>
-            <a:r>
-              <a:rPr sz="1800" b="1">
-                <a:solidFill>
-                  <a:srgbClr val="FFFFFF"/>
-                </a:solidFill>
-                <a:latin typeface="Calibri"/>
-              </a:rPr>
-              <a:t>Stage</a:t>
-            </a:r>
-          </a:p>
-          <a:p>
-            <a:pPr algn="ctr">
-              <a:spcBef>
-                <a:spcPts val="800"/>
-              </a:spcBef>
-            </a:pPr>
-            <a:r>
-              <a:rPr sz="1300">
-                <a:solidFill>
-                  <a:srgbClr val="FFFFFF"/>
-                </a:solidFill>
-                <a:latin typeface="Calibri"/>
-              </a:rPr>
-              <a:t>проверка</a:t>
-            </a:r>
-          </a:p>
-        </p:txBody>
-      </p:sp>
-      <p:sp>
-        <p:nvSpPr>
-          <p:cNvPr id="12" name="Right Arrow 11"/>
-          <p:cNvSpPr/>
-          <p:nvPr/>
-        </p:nvSpPr>
-        <p:spPr>
-          <a:xfrm>
-            <a:off x="9621012" y="2194560"/>
-            <a:ext cx="457200" cy="457200"/>
-          </a:xfrm>
-          <a:prstGeom prst="rightArrow">
-            <a:avLst/>
-          </a:prstGeom>
-          <a:solidFill>
-            <a:srgbClr val="242852"/>
-          </a:solidFill>
-          <a:ln>
-            <a:noFill/>
-          </a:ln>
-        </p:spPr>
-        <p:style>
-          <a:lnRef idx="1">
-            <a:schemeClr val="accent1"/>
-          </a:lnRef>
-          <a:fillRef idx="3">
-            <a:schemeClr val="accent1"/>
-          </a:fillRef>
-          <a:effectRef idx="2">
-            <a:schemeClr val="accent1"/>
-          </a:effectRef>
-          <a:fontRef idx="minor">
-            <a:schemeClr val="lt1"/>
-          </a:fontRef>
-        </p:style>
-        <p:txBody>
-          <a:bodyPr rtlCol="0" anchor="ctr"/>
-          <a:lstStyle/>
-          <a:p>
-            <a:pPr algn="ctr"/>
-            <a:endParaRPr/>
-          </a:p>
-        </p:txBody>
-      </p:sp>
-      <p:sp>
-        <p:nvSpPr>
-          <p:cNvPr id="13" name="Rounded Rectangle 12"/>
-          <p:cNvSpPr/>
-          <p:nvPr/>
-        </p:nvSpPr>
-        <p:spPr>
-          <a:xfrm>
-            <a:off x="10050780" y="1554480"/>
-            <a:ext cx="1470660" cy="1737360"/>
-          </a:xfrm>
-          <a:prstGeom prst="roundRect">
-            <a:avLst/>
-          </a:prstGeom>
-          <a:solidFill>
-            <a:srgbClr val="242852"/>
-          </a:solidFill>
-          <a:ln>
-            <a:noFill/>
-          </a:ln>
-        </p:spPr>
-        <p:style>
-          <a:lnRef idx="1">
-            <a:schemeClr val="accent1"/>
-          </a:lnRef>
-          <a:fillRef idx="3">
-            <a:schemeClr val="accent1"/>
-          </a:fillRef>
-          <a:effectRef idx="2">
-            <a:schemeClr val="accent1"/>
-          </a:effectRef>
-          <a:fontRef idx="minor">
-            <a:schemeClr val="lt1"/>
-          </a:fontRef>
-        </p:style>
-        <p:txBody>
-          <a:bodyPr wrap="square" rtlCol="0" anchor="ctr"/>
-          <a:lstStyle/>
-          <a:p>
-            <a:pPr algn="ctr"/>
-            <a:r>
-              <a:rPr sz="1800" b="1">
-                <a:solidFill>
-                  <a:srgbClr val="FFFFFF"/>
-                </a:solidFill>
-                <a:latin typeface="Calibri"/>
-              </a:rPr>
-              <a:t>Прод</a:t>
-            </a:r>
-          </a:p>
-          <a:p>
-            <a:pPr algn="ctr">
-              <a:spcBef>
-                <a:spcPts val="800"/>
-              </a:spcBef>
-            </a:pPr>
-            <a:r>
-              <a:rPr sz="1300">
-                <a:solidFill>
-                  <a:srgbClr val="FFFFFF"/>
-                </a:solidFill>
-                <a:latin typeface="Calibri"/>
-              </a:rPr>
-              <a:t>merge</a:t>
-            </a:r>
-          </a:p>
-        </p:txBody>
-      </p:sp>
-      <p:sp>
-        <p:nvSpPr>
-          <p:cNvPr id="14" name="TextBox 13"/>
-          <p:cNvSpPr txBox="1"/>
-          <p:nvPr/>
-        </p:nvSpPr>
-        <p:spPr>
-          <a:xfrm>
-            <a:off x="640080" y="3749039"/>
-            <a:ext cx="10881360" cy="731520"/>
+            <a:off x="0" y="1466529"/>
+            <a:ext cx="12192000" cy="5463186"/>
           </a:xfrm>
           <a:prstGeom prst="rect">
             <a:avLst/>
           </a:prstGeom>
-          <a:noFill/>
         </p:spPr>
-        <p:txBody>
-          <a:bodyPr wrap="square">
-            <a:spAutoFit/>
-          </a:bodyPr>
-          <a:lstStyle/>
-          <a:p>
-            <a:pPr algn="ctr"/>
-            <a:r>
-              <a:rPr sz="1800" b="1">
-                <a:solidFill>
-                  <a:srgbClr val="242852"/>
-                </a:solidFill>
-                <a:latin typeface="Calibri"/>
-              </a:rPr>
-              <a:t>ни один шаг не пропускаем  •  каждый шаг виден в GitHub</a:t>
-            </a:r>
-          </a:p>
-        </p:txBody>
-      </p:sp>
-      <p:sp>
-        <p:nvSpPr>
-          <p:cNvPr id="15" name="Rounded Rectangle 14"/>
-          <p:cNvSpPr/>
-          <p:nvPr/>
-        </p:nvSpPr>
-        <p:spPr>
-          <a:xfrm>
-            <a:off x="640080" y="4663440"/>
-            <a:ext cx="10881360" cy="1371600"/>
-          </a:xfrm>
-          <a:prstGeom prst="roundRect">
-            <a:avLst/>
-          </a:prstGeom>
-          <a:solidFill>
-            <a:srgbClr val="E8EDF4"/>
-          </a:solidFill>
-          <a:ln w="25400">
-            <a:solidFill>
-              <a:srgbClr val="7F8FA9"/>
-            </a:solidFill>
-          </a:ln>
-        </p:spPr>
-        <p:style>
-          <a:lnRef idx="1">
-            <a:schemeClr val="accent1"/>
-          </a:lnRef>
-          <a:fillRef idx="3">
-            <a:schemeClr val="accent1"/>
-          </a:fillRef>
-          <a:effectRef idx="2">
-            <a:schemeClr val="accent1"/>
-          </a:effectRef>
-          <a:fontRef idx="minor">
-            <a:schemeClr val="lt1"/>
-          </a:fontRef>
-        </p:style>
-        <p:txBody>
-          <a:bodyPr wrap="square" rtlCol="0" anchor="ctr"/>
-          <a:lstStyle/>
-          <a:p>
-            <a:pPr algn="ctr"/>
-            <a:r>
-              <a:rPr sz="1400">
-                <a:solidFill>
-                  <a:srgbClr val="242852"/>
-                </a:solidFill>
-                <a:latin typeface="Calibri"/>
-              </a:rPr>
-              <a:t>СКРИНШОТ 5  →  доска Issues: To Do → In Progress → Done (см. Ш5)</a:t>
-            </a:r>
-          </a:p>
-        </p:txBody>
-      </p:sp>
+      </p:pic>
+      <mc:AlternateContent xmlns:mc="http://schemas.openxmlformats.org/markup-compatibility/2006">
+        <mc:Choice xmlns:p14="http://schemas.microsoft.com/office/powerpoint/2010/main" Requires="p14">
+          <p:contentPart p14:bwMode="auto" r:id="rId4">
+            <p14:nvContentPartPr>
+              <p14:cNvPr id="6" name="Рукописный ввод 5">
+                <a:extLst>
+                  <a:ext uri="{FF2B5EF4-FFF2-40B4-BE49-F238E27FC236}">
+                    <a16:creationId xmlns:a16="http://schemas.microsoft.com/office/drawing/2014/main" id="{21F9AAE0-E8B6-FBC1-5950-BB33CF41D446}"/>
+                  </a:ext>
+                </a:extLst>
+              </p14:cNvPr>
+              <p14:cNvContentPartPr/>
+              <p14:nvPr/>
+            </p14:nvContentPartPr>
+            <p14:xfrm>
+              <a:off x="9928625" y="3460465"/>
+              <a:ext cx="900720" cy="505800"/>
+            </p14:xfrm>
+          </p:contentPart>
+        </mc:Choice>
+        <mc:Fallback>
+          <p:pic>
+            <p:nvPicPr>
+              <p:cNvPr id="6" name="Рукописный ввод 5">
+                <a:extLst>
+                  <a:ext uri="{FF2B5EF4-FFF2-40B4-BE49-F238E27FC236}">
+                    <a16:creationId xmlns:a16="http://schemas.microsoft.com/office/drawing/2014/main" id="{21F9AAE0-E8B6-FBC1-5950-BB33CF41D446}"/>
+                  </a:ext>
+                </a:extLst>
+              </p:cNvPr>
+              <p:cNvPicPr/>
+              <p:nvPr/>
+            </p:nvPicPr>
+            <p:blipFill>
+              <a:blip r:embed="rId5"/>
+              <a:stretch>
+                <a:fillRect/>
+              </a:stretch>
+            </p:blipFill>
+            <p:spPr>
+              <a:xfrm>
+                <a:off x="9865985" y="3397465"/>
+                <a:ext cx="1026360" cy="631440"/>
+              </a:xfrm>
+              <a:prstGeom prst="rect">
+                <a:avLst/>
+              </a:prstGeom>
+            </p:spPr>
+          </p:pic>
+        </mc:Fallback>
+      </mc:AlternateContent>
     </p:spTree>
+    <p:extLst>
+      <p:ext uri="{BB962C8B-B14F-4D97-AF65-F5344CB8AC3E}">
+        <p14:creationId xmlns:p14="http://schemas.microsoft.com/office/powerpoint/2010/main" val="1982239336"/>
+      </p:ext>
+    </p:extLst>
   </p:cSld>
   <p:clrMapOvr>
     <a:masterClrMapping/>
@@ -7232,7 +7322,13 @@
   <p:cSld>
     <p:spTree>
       <p:nvGrpSpPr>
-        <p:cNvPr id="1" name=""/>
+        <p:cNvPr id="1" name="">
+          <a:extLst>
+            <a:ext uri="{FF2B5EF4-FFF2-40B4-BE49-F238E27FC236}">
+              <a16:creationId xmlns:a16="http://schemas.microsoft.com/office/drawing/2014/main" id="{C9840C11-5F6F-778A-0EA7-3797600D36A3}"/>
+            </a:ext>
+          </a:extLst>
+        </p:cNvPr>
         <p:cNvGrpSpPr/>
         <p:nvPr/>
       </p:nvGrpSpPr>
@@ -7246,7 +7342,13 @@
       </p:grpSpPr>
       <p:sp>
         <p:nvSpPr>
-          <p:cNvPr id="2" name="Title 1"/>
+          <p:cNvPr id="2" name="Title 1">
+            <a:extLst>
+              <a:ext uri="{FF2B5EF4-FFF2-40B4-BE49-F238E27FC236}">
+                <a16:creationId xmlns:a16="http://schemas.microsoft.com/office/drawing/2014/main" id="{87754DBC-F154-EBF6-E5A0-9EA71C8CC9CA}"/>
+              </a:ext>
+            </a:extLst>
+          </p:cNvPr>
           <p:cNvSpPr>
             <a:spLocks noGrp="1"/>
           </p:cNvSpPr>
@@ -7261,276 +7363,197 @@
           <a:p>
             <a:pPr algn="l"/>
             <a:r>
-              <a:rPr sz="4000" b="1">
+              <a:rPr lang="en-US" sz="4000" b="1" dirty="0">
                 <a:solidFill>
                   <a:srgbClr val="242852"/>
                 </a:solidFill>
                 <a:latin typeface="Calibri Light"/>
               </a:rPr>
-              <a:t>dev → stage → prod</a:t>
-            </a:r>
-          </a:p>
-        </p:txBody>
-      </p:sp>
-      <p:sp>
-        <p:nvSpPr>
-          <p:cNvPr id="3" name="Rounded Rectangle 2"/>
-          <p:cNvSpPr/>
+              <a:t>Commit</a:t>
+            </a:r>
+            <a:r>
+              <a:rPr lang="ru-RU" sz="4000" b="1" dirty="0">
+                <a:solidFill>
+                  <a:srgbClr val="242852"/>
+                </a:solidFill>
+                <a:latin typeface="Calibri Light"/>
+              </a:rPr>
+              <a:t>/</a:t>
+            </a:r>
+            <a:r>
+              <a:rPr lang="en-US" sz="4000" b="1" dirty="0">
+                <a:solidFill>
+                  <a:srgbClr val="242852"/>
+                </a:solidFill>
+                <a:latin typeface="Calibri Light"/>
+              </a:rPr>
+              <a:t>merge conflict . </a:t>
+            </a:r>
+            <a:r>
+              <a:rPr lang="ru-RU" sz="4000" b="1" dirty="0">
+                <a:solidFill>
+                  <a:srgbClr val="242852"/>
+                </a:solidFill>
+                <a:latin typeface="Calibri Light"/>
+              </a:rPr>
+              <a:t>Там же </a:t>
+            </a:r>
+            <a:r>
+              <a:rPr lang="ru-RU" sz="4000" b="1" dirty="0" err="1">
+                <a:solidFill>
+                  <a:srgbClr val="242852"/>
+                </a:solidFill>
+                <a:latin typeface="Calibri Light"/>
+              </a:rPr>
+              <a:t>ридми</a:t>
+            </a:r>
+            <a:endParaRPr sz="4000" b="1" dirty="0">
+              <a:solidFill>
+                <a:srgbClr val="242852"/>
+              </a:solidFill>
+              <a:latin typeface="Calibri Light"/>
+            </a:endParaRPr>
+          </a:p>
+        </p:txBody>
+      </p:sp>
+      <p:pic>
+        <p:nvPicPr>
+          <p:cNvPr id="4" name="Рисунок 3">
+            <a:extLst>
+              <a:ext uri="{FF2B5EF4-FFF2-40B4-BE49-F238E27FC236}">
+                <a16:creationId xmlns:a16="http://schemas.microsoft.com/office/drawing/2014/main" id="{8FA98CC6-9A70-237E-5A01-BF74DA8EAF19}"/>
+              </a:ext>
+            </a:extLst>
+          </p:cNvPr>
+          <p:cNvPicPr>
+            <a:picLocks noChangeAspect="1"/>
+          </p:cNvPicPr>
           <p:nvPr/>
-        </p:nvSpPr>
+        </p:nvPicPr>
+        <p:blipFill>
+          <a:blip r:embed="rId3"/>
+          <a:stretch>
+            <a:fillRect/>
+          </a:stretch>
+        </p:blipFill>
         <p:spPr>
           <a:xfrm>
-            <a:off x="640080" y="1463040"/>
-            <a:ext cx="3383280" cy="1828800"/>
+            <a:off x="0" y="111095"/>
+            <a:ext cx="11681801" cy="6746905"/>
           </a:xfrm>
-          <a:prstGeom prst="roundRect">
+          <a:prstGeom prst="rect">
             <a:avLst/>
           </a:prstGeom>
-          <a:solidFill>
-            <a:srgbClr val="7F8FA9"/>
-          </a:solidFill>
-          <a:ln>
-            <a:noFill/>
-          </a:ln>
         </p:spPr>
-        <p:style>
-          <a:lnRef idx="1">
-            <a:schemeClr val="accent1"/>
-          </a:lnRef>
-          <a:fillRef idx="3">
-            <a:schemeClr val="accent1"/>
-          </a:fillRef>
-          <a:effectRef idx="2">
-            <a:schemeClr val="accent1"/>
-          </a:effectRef>
-          <a:fontRef idx="minor">
-            <a:schemeClr val="lt1"/>
-          </a:fontRef>
-        </p:style>
-        <p:txBody>
-          <a:bodyPr wrap="square" rtlCol="0" anchor="ctr"/>
-          <a:lstStyle/>
-          <a:p>
-            <a:pPr algn="ctr"/>
-            <a:r>
-              <a:rPr sz="2200" b="1">
-                <a:solidFill>
-                  <a:srgbClr val="FFFFFF"/>
-                </a:solidFill>
-                <a:latin typeface="Calibri"/>
-              </a:rPr>
-              <a:t>dev</a:t>
-            </a:r>
-          </a:p>
-          <a:p>
-            <a:pPr algn="ctr">
-              <a:spcBef>
-                <a:spcPts val="800"/>
-              </a:spcBef>
-            </a:pPr>
-            <a:r>
-              <a:rPr sz="1400">
-                <a:solidFill>
-                  <a:srgbClr val="FFFFFF"/>
-                </a:solidFill>
-                <a:latin typeface="Calibri"/>
-              </a:rPr>
-              <a:t>ломать можно</a:t>
-            </a:r>
-          </a:p>
-        </p:txBody>
-      </p:sp>
-      <p:sp>
-        <p:nvSpPr>
-          <p:cNvPr id="4" name="Rounded Rectangle 3"/>
-          <p:cNvSpPr/>
-          <p:nvPr/>
-        </p:nvSpPr>
-        <p:spPr>
-          <a:xfrm>
-            <a:off x="4389120" y="1463040"/>
-            <a:ext cx="3383280" cy="1828800"/>
-          </a:xfrm>
-          <a:prstGeom prst="roundRect">
-            <a:avLst/>
-          </a:prstGeom>
-          <a:solidFill>
-            <a:srgbClr val="5AA2AE"/>
-          </a:solidFill>
-          <a:ln>
-            <a:noFill/>
-          </a:ln>
-        </p:spPr>
-        <p:style>
-          <a:lnRef idx="1">
-            <a:schemeClr val="accent1"/>
-          </a:lnRef>
-          <a:fillRef idx="3">
-            <a:schemeClr val="accent1"/>
-          </a:fillRef>
-          <a:effectRef idx="2">
-            <a:schemeClr val="accent1"/>
-          </a:effectRef>
-          <a:fontRef idx="minor">
-            <a:schemeClr val="lt1"/>
-          </a:fontRef>
-        </p:style>
-        <p:txBody>
-          <a:bodyPr wrap="square" rtlCol="0" anchor="ctr"/>
-          <a:lstStyle/>
-          <a:p>
-            <a:pPr algn="ctr"/>
-            <a:r>
-              <a:rPr sz="2200" b="1">
-                <a:solidFill>
-                  <a:srgbClr val="FFFFFF"/>
-                </a:solidFill>
-                <a:latin typeface="Calibri"/>
-              </a:rPr>
-              <a:t>stage</a:t>
-            </a:r>
-          </a:p>
-          <a:p>
-            <a:pPr algn="ctr">
-              <a:spcBef>
-                <a:spcPts val="800"/>
-              </a:spcBef>
-            </a:pPr>
-            <a:r>
-              <a:rPr sz="1400">
-                <a:solidFill>
-                  <a:srgbClr val="FFFFFF"/>
-                </a:solidFill>
-                <a:latin typeface="Calibri"/>
-              </a:rPr>
-              <a:t>как прод, но не прод</a:t>
-            </a:r>
-          </a:p>
-        </p:txBody>
-      </p:sp>
-      <p:sp>
-        <p:nvSpPr>
-          <p:cNvPr id="5" name="Rounded Rectangle 4"/>
-          <p:cNvSpPr/>
-          <p:nvPr/>
-        </p:nvSpPr>
-        <p:spPr>
-          <a:xfrm>
-            <a:off x="8138160" y="1463040"/>
-            <a:ext cx="3383280" cy="1828800"/>
-          </a:xfrm>
-          <a:prstGeom prst="roundRect">
-            <a:avLst/>
-          </a:prstGeom>
-          <a:solidFill>
-            <a:srgbClr val="242852"/>
-          </a:solidFill>
-          <a:ln>
-            <a:noFill/>
-          </a:ln>
-        </p:spPr>
-        <p:style>
-          <a:lnRef idx="1">
-            <a:schemeClr val="accent1"/>
-          </a:lnRef>
-          <a:fillRef idx="3">
-            <a:schemeClr val="accent1"/>
-          </a:fillRef>
-          <a:effectRef idx="2">
-            <a:schemeClr val="accent1"/>
-          </a:effectRef>
-          <a:fontRef idx="minor">
-            <a:schemeClr val="lt1"/>
-          </a:fontRef>
-        </p:style>
-        <p:txBody>
-          <a:bodyPr wrap="square" rtlCol="0" anchor="ctr"/>
-          <a:lstStyle/>
-          <a:p>
-            <a:pPr algn="ctr"/>
-            <a:r>
-              <a:rPr sz="2200" b="1">
-                <a:solidFill>
-                  <a:srgbClr val="FFFFFF"/>
-                </a:solidFill>
-                <a:latin typeface="Calibri"/>
-              </a:rPr>
-              <a:t>prod</a:t>
-            </a:r>
-          </a:p>
-          <a:p>
-            <a:pPr algn="ctr">
-              <a:spcBef>
-                <a:spcPts val="800"/>
-              </a:spcBef>
-            </a:pPr>
-            <a:r>
-              <a:rPr sz="1400">
-                <a:solidFill>
-                  <a:srgbClr val="FFFFFF"/>
-                </a:solidFill>
-                <a:latin typeface="Calibri"/>
-              </a:rPr>
-              <a:t>трогаем осторожно</a:t>
-            </a:r>
-          </a:p>
-        </p:txBody>
-      </p:sp>
-      <p:sp>
-        <p:nvSpPr>
-          <p:cNvPr id="6" name="Rounded Rectangle 5"/>
-          <p:cNvSpPr/>
-          <p:nvPr/>
-        </p:nvSpPr>
-        <p:spPr>
-          <a:xfrm>
-            <a:off x="640080" y="3657600"/>
-            <a:ext cx="10881360" cy="2377440"/>
-          </a:xfrm>
-          <a:prstGeom prst="roundRect">
-            <a:avLst/>
-          </a:prstGeom>
-          <a:solidFill>
-            <a:srgbClr val="E8EDF4"/>
-          </a:solidFill>
-          <a:ln w="25400">
-            <a:solidFill>
-              <a:srgbClr val="7F8FA9"/>
-            </a:solidFill>
-          </a:ln>
-        </p:spPr>
-        <p:style>
-          <a:lnRef idx="1">
-            <a:schemeClr val="accent1"/>
-          </a:lnRef>
-          <a:fillRef idx="3">
-            <a:schemeClr val="accent1"/>
-          </a:fillRef>
-          <a:effectRef idx="2">
-            <a:schemeClr val="accent1"/>
-          </a:effectRef>
-          <a:fontRef idx="minor">
-            <a:schemeClr val="lt1"/>
-          </a:fontRef>
-        </p:style>
-        <p:txBody>
-          <a:bodyPr wrap="square" rtlCol="0" anchor="ctr"/>
-          <a:lstStyle/>
-          <a:p>
-            <a:pPr algn="ctr"/>
-            <a:r>
-              <a:rPr sz="1400">
-                <a:solidFill>
-                  <a:srgbClr val="242852"/>
-                </a:solidFill>
-                <a:latin typeface="Calibri"/>
-              </a:rPr>
-              <a:t>СКРИНШОТ 6  →  pipeline: зелёные галочки dev → stage → prod (Actions / GitLab CI, см. Ш6)</a:t>
-            </a:r>
-          </a:p>
-        </p:txBody>
-      </p:sp>
+      </p:pic>
+      <mc:AlternateContent xmlns:mc="http://schemas.openxmlformats.org/markup-compatibility/2006">
+        <mc:Choice xmlns:p14="http://schemas.microsoft.com/office/powerpoint/2010/main" Requires="p14">
+          <p:contentPart p14:bwMode="auto" r:id="rId4">
+            <p14:nvContentPartPr>
+              <p14:cNvPr id="6" name="Рукописный ввод 5">
+                <a:extLst>
+                  <a:ext uri="{FF2B5EF4-FFF2-40B4-BE49-F238E27FC236}">
+                    <a16:creationId xmlns:a16="http://schemas.microsoft.com/office/drawing/2014/main" id="{0E33EF00-88AF-0C52-842D-0D72FBE8EBA0}"/>
+                  </a:ext>
+                </a:extLst>
+              </p14:cNvPr>
+              <p14:cNvContentPartPr/>
+              <p14:nvPr/>
+            </p14:nvContentPartPr>
+            <p14:xfrm>
+              <a:off x="2332625" y="6382696"/>
+              <a:ext cx="1550520" cy="334440"/>
+            </p14:xfrm>
+          </p:contentPart>
+        </mc:Choice>
+        <mc:Fallback>
+          <p:pic>
+            <p:nvPicPr>
+              <p:cNvPr id="6" name="Рукописный ввод 5">
+                <a:extLst>
+                  <a:ext uri="{FF2B5EF4-FFF2-40B4-BE49-F238E27FC236}">
+                    <a16:creationId xmlns:a16="http://schemas.microsoft.com/office/drawing/2014/main" id="{0E33EF00-88AF-0C52-842D-0D72FBE8EBA0}"/>
+                  </a:ext>
+                </a:extLst>
+              </p:cNvPr>
+              <p:cNvPicPr/>
+              <p:nvPr/>
+            </p:nvPicPr>
+            <p:blipFill>
+              <a:blip r:embed="rId5"/>
+              <a:stretch>
+                <a:fillRect/>
+              </a:stretch>
+            </p:blipFill>
+            <p:spPr>
+              <a:xfrm>
+                <a:off x="2269985" y="6320056"/>
+                <a:ext cx="1676160" cy="460080"/>
+              </a:xfrm>
+              <a:prstGeom prst="rect">
+                <a:avLst/>
+              </a:prstGeom>
+            </p:spPr>
+          </p:pic>
+        </mc:Fallback>
+      </mc:AlternateContent>
+      <mc:AlternateContent xmlns:mc="http://schemas.openxmlformats.org/markup-compatibility/2006">
+        <mc:Choice xmlns:p14="http://schemas.microsoft.com/office/powerpoint/2010/main" Requires="p14">
+          <p:contentPart p14:bwMode="auto" r:id="rId6">
+            <p14:nvContentPartPr>
+              <p14:cNvPr id="7" name="Рукописный ввод 6">
+                <a:extLst>
+                  <a:ext uri="{FF2B5EF4-FFF2-40B4-BE49-F238E27FC236}">
+                    <a16:creationId xmlns:a16="http://schemas.microsoft.com/office/drawing/2014/main" id="{BEC8874F-6A68-3B85-8CF0-CF57F54BEF45}"/>
+                  </a:ext>
+                </a:extLst>
+              </p14:cNvPr>
+              <p14:cNvContentPartPr/>
+              <p14:nvPr/>
+            </p14:nvContentPartPr>
+            <p14:xfrm>
+              <a:off x="9491585" y="4885096"/>
+              <a:ext cx="942840" cy="661320"/>
+            </p14:xfrm>
+          </p:contentPart>
+        </mc:Choice>
+        <mc:Fallback>
+          <p:pic>
+            <p:nvPicPr>
+              <p:cNvPr id="7" name="Рукописный ввод 6">
+                <a:extLst>
+                  <a:ext uri="{FF2B5EF4-FFF2-40B4-BE49-F238E27FC236}">
+                    <a16:creationId xmlns:a16="http://schemas.microsoft.com/office/drawing/2014/main" id="{BEC8874F-6A68-3B85-8CF0-CF57F54BEF45}"/>
+                  </a:ext>
+                </a:extLst>
+              </p:cNvPr>
+              <p:cNvPicPr/>
+              <p:nvPr/>
+            </p:nvPicPr>
+            <p:blipFill>
+              <a:blip r:embed="rId7"/>
+              <a:stretch>
+                <a:fillRect/>
+              </a:stretch>
+            </p:blipFill>
+            <p:spPr>
+              <a:xfrm>
+                <a:off x="9428945" y="4822096"/>
+                <a:ext cx="1068480" cy="786960"/>
+              </a:xfrm>
+              <a:prstGeom prst="rect">
+                <a:avLst/>
+              </a:prstGeom>
+            </p:spPr>
+          </p:pic>
+        </mc:Fallback>
+      </mc:AlternateContent>
     </p:spTree>
+    <p:extLst>
+      <p:ext uri="{BB962C8B-B14F-4D97-AF65-F5344CB8AC3E}">
+        <p14:creationId xmlns:p14="http://schemas.microsoft.com/office/powerpoint/2010/main" val="2226129366"/>
+      </p:ext>
+    </p:extLst>
   </p:cSld>
   <p:clrMapOvr>
     <a:masterClrMapping/>
@@ -7543,7 +7566,13 @@
   <p:cSld>
     <p:spTree>
       <p:nvGrpSpPr>
-        <p:cNvPr id="1" name=""/>
+        <p:cNvPr id="1" name="">
+          <a:extLst>
+            <a:ext uri="{FF2B5EF4-FFF2-40B4-BE49-F238E27FC236}">
+              <a16:creationId xmlns:a16="http://schemas.microsoft.com/office/drawing/2014/main" id="{15929C59-215B-F4E7-AD91-C639CA7185F8}"/>
+            </a:ext>
+          </a:extLst>
+        </p:cNvPr>
         <p:cNvGrpSpPr/>
         <p:nvPr/>
       </p:nvGrpSpPr>
@@ -7557,7 +7586,13 @@
       </p:grpSpPr>
       <p:sp>
         <p:nvSpPr>
-          <p:cNvPr id="2" name="Title 1"/>
+          <p:cNvPr id="2" name="Title 1">
+            <a:extLst>
+              <a:ext uri="{FF2B5EF4-FFF2-40B4-BE49-F238E27FC236}">
+                <a16:creationId xmlns:a16="http://schemas.microsoft.com/office/drawing/2014/main" id="{24491A07-937A-10A6-4B37-3DE8A8BD35AA}"/>
+              </a:ext>
+            </a:extLst>
+          </p:cNvPr>
           <p:cNvSpPr>
             <a:spLocks noGrp="1"/>
           </p:cNvSpPr>
@@ -7572,476 +7607,113 @@
           <a:p>
             <a:pPr algn="l"/>
             <a:r>
-              <a:rPr sz="4000" b="1">
+              <a:rPr lang="en-US" sz="4000" b="1" dirty="0">
                 <a:solidFill>
                   <a:srgbClr val="242852"/>
                 </a:solidFill>
                 <a:latin typeface="Calibri Light"/>
               </a:rPr>
-              <a:t>Pull Request = ворота в main</a:t>
-            </a:r>
-          </a:p>
-        </p:txBody>
-      </p:sp>
-      <p:sp>
-        <p:nvSpPr>
-          <p:cNvPr id="3" name="Rounded Rectangle 2"/>
-          <p:cNvSpPr/>
+              <a:t>Commit</a:t>
+            </a:r>
+            <a:r>
+              <a:rPr lang="ru-RU" sz="4000" b="1" dirty="0">
+                <a:solidFill>
+                  <a:srgbClr val="242852"/>
+                </a:solidFill>
+                <a:latin typeface="Calibri Light"/>
+              </a:rPr>
+              <a:t>/</a:t>
+            </a:r>
+            <a:r>
+              <a:rPr lang="en-US" sz="4000" b="1" dirty="0">
+                <a:solidFill>
+                  <a:srgbClr val="242852"/>
+                </a:solidFill>
+                <a:latin typeface="Calibri Light"/>
+              </a:rPr>
+              <a:t>merge conflict . </a:t>
+            </a:r>
+            <a:r>
+              <a:rPr lang="ru-RU" sz="4000" b="1" dirty="0">
+                <a:solidFill>
+                  <a:srgbClr val="242852"/>
+                </a:solidFill>
+                <a:latin typeface="Calibri Light"/>
+              </a:rPr>
+              <a:t>Там же </a:t>
+            </a:r>
+            <a:r>
+              <a:rPr lang="ru-RU" sz="4000" b="1" dirty="0" err="1">
+                <a:solidFill>
+                  <a:srgbClr val="242852"/>
+                </a:solidFill>
+                <a:latin typeface="Calibri Light"/>
+              </a:rPr>
+              <a:t>ридми</a:t>
+            </a:r>
+            <a:r>
+              <a:rPr lang="ru-RU" sz="4000" b="1" dirty="0">
+                <a:solidFill>
+                  <a:srgbClr val="242852"/>
+                </a:solidFill>
+                <a:latin typeface="Calibri Light"/>
+              </a:rPr>
+              <a:t>. </a:t>
+            </a:r>
+            <a:r>
+              <a:rPr lang="en-US" sz="4000" b="1" dirty="0">
+                <a:solidFill>
+                  <a:srgbClr val="242852"/>
+                </a:solidFill>
+                <a:latin typeface="Calibri Light"/>
+              </a:rPr>
+              <a:t>GitHub</a:t>
+            </a:r>
+            <a:endParaRPr sz="4000" b="1" dirty="0">
+              <a:solidFill>
+                <a:srgbClr val="242852"/>
+              </a:solidFill>
+              <a:latin typeface="Calibri Light"/>
+            </a:endParaRPr>
+          </a:p>
+        </p:txBody>
+      </p:sp>
+      <p:pic>
+        <p:nvPicPr>
+          <p:cNvPr id="10" name="Рисунок 9">
+            <a:extLst>
+              <a:ext uri="{FF2B5EF4-FFF2-40B4-BE49-F238E27FC236}">
+                <a16:creationId xmlns:a16="http://schemas.microsoft.com/office/drawing/2014/main" id="{8A655B0D-4994-326A-F718-7044AC699B5B}"/>
+              </a:ext>
+            </a:extLst>
+          </p:cNvPr>
+          <p:cNvPicPr>
+            <a:picLocks noChangeAspect="1"/>
+          </p:cNvPicPr>
           <p:nvPr/>
-        </p:nvSpPr>
+        </p:nvPicPr>
+        <p:blipFill>
+          <a:blip r:embed="rId3"/>
+          <a:stretch>
+            <a:fillRect/>
+          </a:stretch>
+        </p:blipFill>
         <p:spPr>
           <a:xfrm>
-            <a:off x="640080" y="1554480"/>
-            <a:ext cx="2411730" cy="1737360"/>
+            <a:off x="0" y="1354080"/>
+            <a:ext cx="12192000" cy="6200830"/>
           </a:xfrm>
-          <a:prstGeom prst="roundRect">
+          <a:prstGeom prst="rect">
             <a:avLst/>
           </a:prstGeom>
-          <a:solidFill>
-            <a:srgbClr val="4A66AC"/>
-          </a:solidFill>
-          <a:ln>
-            <a:noFill/>
-          </a:ln>
         </p:spPr>
-        <p:style>
-          <a:lnRef idx="1">
-            <a:schemeClr val="accent1"/>
-          </a:lnRef>
-          <a:fillRef idx="3">
-            <a:schemeClr val="accent1"/>
-          </a:fillRef>
-          <a:effectRef idx="2">
-            <a:schemeClr val="accent1"/>
-          </a:effectRef>
-          <a:fontRef idx="minor">
-            <a:schemeClr val="lt1"/>
-          </a:fontRef>
-        </p:style>
-        <p:txBody>
-          <a:bodyPr wrap="square" rtlCol="0" anchor="ctr"/>
-          <a:lstStyle/>
-          <a:p>
-            <a:pPr algn="ctr"/>
-            <a:r>
-              <a:rPr sz="1800" b="1">
-                <a:solidFill>
-                  <a:srgbClr val="FFFFFF"/>
-                </a:solidFill>
-                <a:latin typeface="Calibri"/>
-              </a:rPr>
-              <a:t>Создай</a:t>
-            </a:r>
-          </a:p>
-          <a:p>
-            <a:pPr algn="ctr">
-              <a:spcBef>
-                <a:spcPts val="800"/>
-              </a:spcBef>
-            </a:pPr>
-            <a:r>
-              <a:rPr sz="1300">
-                <a:solidFill>
-                  <a:srgbClr val="FFFFFF"/>
-                </a:solidFill>
-                <a:latin typeface="Calibri"/>
-              </a:rPr>
-              <a:t>push ветки</a:t>
-            </a:r>
-          </a:p>
-        </p:txBody>
-      </p:sp>
-      <p:sp>
-        <p:nvSpPr>
-          <p:cNvPr id="4" name="Right Arrow 3"/>
-          <p:cNvSpPr/>
-          <p:nvPr/>
-        </p:nvSpPr>
-        <p:spPr>
-          <a:xfrm>
-            <a:off x="3033522" y="2194560"/>
-            <a:ext cx="457200" cy="457200"/>
-          </a:xfrm>
-          <a:prstGeom prst="rightArrow">
-            <a:avLst/>
-          </a:prstGeom>
-          <a:solidFill>
-            <a:srgbClr val="242852"/>
-          </a:solidFill>
-          <a:ln>
-            <a:noFill/>
-          </a:ln>
-        </p:spPr>
-        <p:style>
-          <a:lnRef idx="1">
-            <a:schemeClr val="accent1"/>
-          </a:lnRef>
-          <a:fillRef idx="3">
-            <a:schemeClr val="accent1"/>
-          </a:fillRef>
-          <a:effectRef idx="2">
-            <a:schemeClr val="accent1"/>
-          </a:effectRef>
-          <a:fontRef idx="minor">
-            <a:schemeClr val="lt1"/>
-          </a:fontRef>
-        </p:style>
-        <p:txBody>
-          <a:bodyPr rtlCol="0" anchor="ctr"/>
-          <a:lstStyle/>
-          <a:p>
-            <a:pPr algn="ctr"/>
-            <a:endParaRPr/>
-          </a:p>
-        </p:txBody>
-      </p:sp>
-      <p:sp>
-        <p:nvSpPr>
-          <p:cNvPr id="5" name="Rounded Rectangle 4"/>
-          <p:cNvSpPr/>
-          <p:nvPr/>
-        </p:nvSpPr>
-        <p:spPr>
-          <a:xfrm>
-            <a:off x="3463290" y="1554480"/>
-            <a:ext cx="2411730" cy="1737360"/>
-          </a:xfrm>
-          <a:prstGeom prst="roundRect">
-            <a:avLst/>
-          </a:prstGeom>
-          <a:solidFill>
-            <a:srgbClr val="5AA2AE"/>
-          </a:solidFill>
-          <a:ln>
-            <a:noFill/>
-          </a:ln>
-        </p:spPr>
-        <p:style>
-          <a:lnRef idx="1">
-            <a:schemeClr val="accent1"/>
-          </a:lnRef>
-          <a:fillRef idx="3">
-            <a:schemeClr val="accent1"/>
-          </a:fillRef>
-          <a:effectRef idx="2">
-            <a:schemeClr val="accent1"/>
-          </a:effectRef>
-          <a:fontRef idx="minor">
-            <a:schemeClr val="lt1"/>
-          </a:fontRef>
-        </p:style>
-        <p:txBody>
-          <a:bodyPr wrap="square" rtlCol="0" anchor="ctr"/>
-          <a:lstStyle/>
-          <a:p>
-            <a:pPr algn="ctr"/>
-            <a:r>
-              <a:rPr sz="1800" b="1">
-                <a:solidFill>
-                  <a:srgbClr val="FFFFFF"/>
-                </a:solidFill>
-                <a:latin typeface="Calibri"/>
-              </a:rPr>
-              <a:t>Проверки</a:t>
-            </a:r>
-          </a:p>
-          <a:p>
-            <a:pPr algn="ctr">
-              <a:spcBef>
-                <a:spcPts val="800"/>
-              </a:spcBef>
-            </a:pPr>
-            <a:r>
-              <a:rPr sz="1300">
-                <a:solidFill>
-                  <a:srgbClr val="FFFFFF"/>
-                </a:solidFill>
-                <a:latin typeface="Calibri"/>
-              </a:rPr>
-              <a:t>CI зелёный</a:t>
-            </a:r>
-          </a:p>
-        </p:txBody>
-      </p:sp>
-      <p:sp>
-        <p:nvSpPr>
-          <p:cNvPr id="6" name="Right Arrow 5"/>
-          <p:cNvSpPr/>
-          <p:nvPr/>
-        </p:nvSpPr>
-        <p:spPr>
-          <a:xfrm>
-            <a:off x="5856732" y="2194560"/>
-            <a:ext cx="457200" cy="457200"/>
-          </a:xfrm>
-          <a:prstGeom prst="rightArrow">
-            <a:avLst/>
-          </a:prstGeom>
-          <a:solidFill>
-            <a:srgbClr val="242852"/>
-          </a:solidFill>
-          <a:ln>
-            <a:noFill/>
-          </a:ln>
-        </p:spPr>
-        <p:style>
-          <a:lnRef idx="1">
-            <a:schemeClr val="accent1"/>
-          </a:lnRef>
-          <a:fillRef idx="3">
-            <a:schemeClr val="accent1"/>
-          </a:fillRef>
-          <a:effectRef idx="2">
-            <a:schemeClr val="accent1"/>
-          </a:effectRef>
-          <a:fontRef idx="minor">
-            <a:schemeClr val="lt1"/>
-          </a:fontRef>
-        </p:style>
-        <p:txBody>
-          <a:bodyPr rtlCol="0" anchor="ctr"/>
-          <a:lstStyle/>
-          <a:p>
-            <a:pPr algn="ctr"/>
-            <a:endParaRPr/>
-          </a:p>
-        </p:txBody>
-      </p:sp>
-      <p:sp>
-        <p:nvSpPr>
-          <p:cNvPr id="7" name="Rounded Rectangle 6"/>
-          <p:cNvSpPr/>
-          <p:nvPr/>
-        </p:nvSpPr>
-        <p:spPr>
-          <a:xfrm>
-            <a:off x="6286500" y="1554480"/>
-            <a:ext cx="2411730" cy="1737360"/>
-          </a:xfrm>
-          <a:prstGeom prst="roundRect">
-            <a:avLst/>
-          </a:prstGeom>
-          <a:solidFill>
-            <a:srgbClr val="297FD5"/>
-          </a:solidFill>
-          <a:ln>
-            <a:noFill/>
-          </a:ln>
-        </p:spPr>
-        <p:style>
-          <a:lnRef idx="1">
-            <a:schemeClr val="accent1"/>
-          </a:lnRef>
-          <a:fillRef idx="3">
-            <a:schemeClr val="accent1"/>
-          </a:fillRef>
-          <a:effectRef idx="2">
-            <a:schemeClr val="accent1"/>
-          </a:effectRef>
-          <a:fontRef idx="minor">
-            <a:schemeClr val="lt1"/>
-          </a:fontRef>
-        </p:style>
-        <p:txBody>
-          <a:bodyPr wrap="square" rtlCol="0" anchor="ctr"/>
-          <a:lstStyle/>
-          <a:p>
-            <a:pPr algn="ctr"/>
-            <a:r>
-              <a:rPr sz="1800" b="1">
-                <a:solidFill>
-                  <a:srgbClr val="FFFFFF"/>
-                </a:solidFill>
-                <a:latin typeface="Calibri"/>
-              </a:rPr>
-              <a:t>Обсуди</a:t>
-            </a:r>
-          </a:p>
-          <a:p>
-            <a:pPr algn="ctr">
-              <a:spcBef>
-                <a:spcPts val="800"/>
-              </a:spcBef>
-            </a:pPr>
-            <a:r>
-              <a:rPr sz="1300">
-                <a:solidFill>
-                  <a:srgbClr val="FFFFFF"/>
-                </a:solidFill>
-                <a:latin typeface="Calibri"/>
-              </a:rPr>
-              <a:t>review</a:t>
-            </a:r>
-          </a:p>
-        </p:txBody>
-      </p:sp>
-      <p:sp>
-        <p:nvSpPr>
-          <p:cNvPr id="8" name="Right Arrow 7"/>
-          <p:cNvSpPr/>
-          <p:nvPr/>
-        </p:nvSpPr>
-        <p:spPr>
-          <a:xfrm>
-            <a:off x="8679942" y="2194560"/>
-            <a:ext cx="457200" cy="457200"/>
-          </a:xfrm>
-          <a:prstGeom prst="rightArrow">
-            <a:avLst/>
-          </a:prstGeom>
-          <a:solidFill>
-            <a:srgbClr val="242852"/>
-          </a:solidFill>
-          <a:ln>
-            <a:noFill/>
-          </a:ln>
-        </p:spPr>
-        <p:style>
-          <a:lnRef idx="1">
-            <a:schemeClr val="accent1"/>
-          </a:lnRef>
-          <a:fillRef idx="3">
-            <a:schemeClr val="accent1"/>
-          </a:fillRef>
-          <a:effectRef idx="2">
-            <a:schemeClr val="accent1"/>
-          </a:effectRef>
-          <a:fontRef idx="minor">
-            <a:schemeClr val="lt1"/>
-          </a:fontRef>
-        </p:style>
-        <p:txBody>
-          <a:bodyPr rtlCol="0" anchor="ctr"/>
-          <a:lstStyle/>
-          <a:p>
-            <a:pPr algn="ctr"/>
-            <a:endParaRPr/>
-          </a:p>
-        </p:txBody>
-      </p:sp>
-      <p:sp>
-        <p:nvSpPr>
-          <p:cNvPr id="9" name="Rounded Rectangle 8"/>
-          <p:cNvSpPr/>
-          <p:nvPr/>
-        </p:nvSpPr>
-        <p:spPr>
-          <a:xfrm>
-            <a:off x="9109710" y="1554480"/>
-            <a:ext cx="2411730" cy="1737360"/>
-          </a:xfrm>
-          <a:prstGeom prst="roundRect">
-            <a:avLst/>
-          </a:prstGeom>
-          <a:solidFill>
-            <a:srgbClr val="242852"/>
-          </a:solidFill>
-          <a:ln>
-            <a:noFill/>
-          </a:ln>
-        </p:spPr>
-        <p:style>
-          <a:lnRef idx="1">
-            <a:schemeClr val="accent1"/>
-          </a:lnRef>
-          <a:fillRef idx="3">
-            <a:schemeClr val="accent1"/>
-          </a:fillRef>
-          <a:effectRef idx="2">
-            <a:schemeClr val="accent1"/>
-          </a:effectRef>
-          <a:fontRef idx="minor">
-            <a:schemeClr val="lt1"/>
-          </a:fontRef>
-        </p:style>
-        <p:txBody>
-          <a:bodyPr wrap="square" rtlCol="0" anchor="ctr"/>
-          <a:lstStyle/>
-          <a:p>
-            <a:pPr algn="ctr"/>
-            <a:r>
-              <a:rPr sz="1800" b="1">
-                <a:solidFill>
-                  <a:srgbClr val="FFFFFF"/>
-                </a:solidFill>
-                <a:latin typeface="Calibri"/>
-              </a:rPr>
-              <a:t>Влей</a:t>
-            </a:r>
-          </a:p>
-          <a:p>
-            <a:pPr algn="ctr">
-              <a:spcBef>
-                <a:spcPts val="800"/>
-              </a:spcBef>
-            </a:pPr>
-            <a:r>
-              <a:rPr sz="1300">
-                <a:solidFill>
-                  <a:srgbClr val="FFFFFF"/>
-                </a:solidFill>
-                <a:latin typeface="Calibri"/>
-              </a:rPr>
-              <a:t>merge</a:t>
-            </a:r>
-          </a:p>
-        </p:txBody>
-      </p:sp>
-      <p:sp>
-        <p:nvSpPr>
-          <p:cNvPr id="10" name="Rounded Rectangle 9"/>
-          <p:cNvSpPr/>
-          <p:nvPr/>
-        </p:nvSpPr>
-        <p:spPr>
-          <a:xfrm>
-            <a:off x="640080" y="3749039"/>
-            <a:ext cx="10881360" cy="2286000"/>
-          </a:xfrm>
-          <a:prstGeom prst="roundRect">
-            <a:avLst/>
-          </a:prstGeom>
-          <a:solidFill>
-            <a:srgbClr val="E8EDF4"/>
-          </a:solidFill>
-          <a:ln w="25400">
-            <a:solidFill>
-              <a:srgbClr val="7F8FA9"/>
-            </a:solidFill>
-          </a:ln>
-        </p:spPr>
-        <p:style>
-          <a:lnRef idx="1">
-            <a:schemeClr val="accent1"/>
-          </a:lnRef>
-          <a:fillRef idx="3">
-            <a:schemeClr val="accent1"/>
-          </a:fillRef>
-          <a:effectRef idx="2">
-            <a:schemeClr val="accent1"/>
-          </a:effectRef>
-          <a:fontRef idx="minor">
-            <a:schemeClr val="lt1"/>
-          </a:fontRef>
-        </p:style>
-        <p:txBody>
-          <a:bodyPr wrap="square" rtlCol="0" anchor="ctr"/>
-          <a:lstStyle/>
-          <a:p>
-            <a:pPr algn="ctr"/>
-            <a:r>
-              <a:rPr sz="1400">
-                <a:solidFill>
-                  <a:srgbClr val="242852"/>
-                </a:solidFill>
-                <a:latin typeface="Calibri"/>
-              </a:rPr>
-              <a:t>СКРИНШОТ 7  →  страница PR: diff + Checks + кнопка Merge (см. Ш7)</a:t>
-            </a:r>
-          </a:p>
-        </p:txBody>
-      </p:sp>
+      </p:pic>
     </p:spTree>
+    <p:extLst>
+      <p:ext uri="{BB962C8B-B14F-4D97-AF65-F5344CB8AC3E}">
+        <p14:creationId xmlns:p14="http://schemas.microsoft.com/office/powerpoint/2010/main" val="732559112"/>
+      </p:ext>
+    </p:extLst>
   </p:cSld>
   <p:clrMapOvr>
     <a:masterClrMapping/>
@@ -8089,106 +7761,75 @@
                 </a:solidFill>
                 <a:latin typeface="Calibri Light"/>
               </a:rPr>
-              <a:t>Review: найди баг до прода</a:t>
-            </a:r>
-          </a:p>
-        </p:txBody>
-      </p:sp>
-      <p:sp>
-        <p:nvSpPr>
-          <p:cNvPr id="3" name="TextBox 2"/>
-          <p:cNvSpPr txBox="1"/>
+              <a:t>ИИ-агенты деплоят сами?</a:t>
+            </a:r>
+          </a:p>
+        </p:txBody>
+      </p:sp>
+      <p:sp>
+        <p:nvSpPr>
+          <p:cNvPr id="3" name="Rounded Rectangle 2"/>
+          <p:cNvSpPr/>
           <p:nvPr/>
         </p:nvSpPr>
         <p:spPr>
           <a:xfrm>
             <a:off x="640080" y="1463040"/>
-            <a:ext cx="5303520" cy="2743200"/>
+            <a:ext cx="2560320" cy="1737360"/>
           </a:xfrm>
-          <a:prstGeom prst="rect">
+          <a:prstGeom prst="roundRect">
             <a:avLst/>
           </a:prstGeom>
-          <a:noFill/>
+          <a:solidFill>
+            <a:srgbClr val="4A66AC"/>
+          </a:solidFill>
+          <a:ln>
+            <a:noFill/>
+          </a:ln>
         </p:spPr>
-        <p:txBody>
-          <a:bodyPr wrap="square">
-            <a:spAutoFit/>
-          </a:bodyPr>
-          <a:lstStyle/>
-          <a:p>
-            <a:pPr>
+        <p:style>
+          <a:lnRef idx="1">
+            <a:schemeClr val="accent1"/>
+          </a:lnRef>
+          <a:fillRef idx="3">
+            <a:schemeClr val="accent1"/>
+          </a:fillRef>
+          <a:effectRef idx="2">
+            <a:schemeClr val="accent1"/>
+          </a:effectRef>
+          <a:fontRef idx="minor">
+            <a:schemeClr val="lt1"/>
+          </a:fontRef>
+        </p:style>
+        <p:txBody>
+          <a:bodyPr wrap="square" rtlCol="0" anchor="ctr"/>
+          <a:lstStyle/>
+          <a:p>
+            <a:pPr algn="ctr"/>
+            <a:r>
+              <a:rPr sz="1800" b="1">
+                <a:solidFill>
+                  <a:srgbClr val="FFFFFF"/>
+                </a:solidFill>
+                <a:latin typeface="Calibri"/>
+              </a:rPr>
+              <a:t>Код</a:t>
+            </a:r>
+          </a:p>
+          <a:p>
+            <a:pPr algn="ctr">
               <a:spcBef>
-                <a:spcPts val="400"/>
+                <a:spcPts val="800"/>
               </a:spcBef>
-              <a:spcAft>
-                <a:spcPts val="1000"/>
-              </a:spcAft>
             </a:pPr>
             <a:r>
-              <a:rPr sz="2000">
-                <a:solidFill>
-                  <a:srgbClr val="333333"/>
+              <a:rPr sz="1300">
+                <a:solidFill>
+                  <a:srgbClr val="FFFFFF"/>
                 </a:solidFill>
                 <a:latin typeface="Calibri"/>
               </a:rPr>
-              <a:t>✓ Логика и крайние случаи</a:t>
-            </a:r>
-          </a:p>
-          <a:p>
-            <a:pPr>
-              <a:spcBef>
-                <a:spcPts val="400"/>
-              </a:spcBef>
-              <a:spcAft>
-                <a:spcPts val="1000"/>
-              </a:spcAft>
-            </a:pPr>
-            <a:r>
-              <a:rPr sz="2000">
-                <a:solidFill>
-                  <a:srgbClr val="333333"/>
-                </a:solidFill>
-                <a:latin typeface="Calibri"/>
-              </a:rPr>
-              <a:t>✓ Тесты и читаемость</a:t>
-            </a:r>
-          </a:p>
-          <a:p>
-            <a:pPr>
-              <a:spcBef>
-                <a:spcPts val="400"/>
-              </a:spcBef>
-              <a:spcAft>
-                <a:spcPts val="1000"/>
-              </a:spcAft>
-            </a:pPr>
-            <a:r>
-              <a:rPr sz="2000">
-                <a:solidFill>
-                  <a:srgbClr val="333333"/>
-                </a:solidFill>
-                <a:latin typeface="Calibri"/>
-              </a:rPr>
-              <a:t>✓ Без секретов в коде</a:t>
-            </a:r>
-          </a:p>
-          <a:p>
-            <a:pPr>
-              <a:spcBef>
-                <a:spcPts val="400"/>
-              </a:spcBef>
-              <a:spcAft>
-                <a:spcPts val="1000"/>
-              </a:spcAft>
-            </a:pPr>
-            <a:r>
-              <a:rPr sz="2000">
-                <a:solidFill>
-                  <a:srgbClr val="333333"/>
-                </a:solidFill>
-                <a:latin typeface="Calibri"/>
-              </a:rPr>
-              <a:t>✋ Тон: к коду, не к человеку</a:t>
+              <a:t>пишет фичу</a:t>
             </a:r>
           </a:p>
         </p:txBody>
@@ -8201,8 +7842,212 @@
         </p:nvSpPr>
         <p:spPr>
           <a:xfrm>
-            <a:off x="6309360" y="1463040"/>
-            <a:ext cx="5212080" cy="3108960"/>
+            <a:off x="3383280" y="1463040"/>
+            <a:ext cx="2560320" cy="1737360"/>
+          </a:xfrm>
+          <a:prstGeom prst="roundRect">
+            <a:avLst/>
+          </a:prstGeom>
+          <a:solidFill>
+            <a:srgbClr val="5AA2AE"/>
+          </a:solidFill>
+          <a:ln>
+            <a:noFill/>
+          </a:ln>
+        </p:spPr>
+        <p:style>
+          <a:lnRef idx="1">
+            <a:schemeClr val="accent1"/>
+          </a:lnRef>
+          <a:fillRef idx="3">
+            <a:schemeClr val="accent1"/>
+          </a:fillRef>
+          <a:effectRef idx="2">
+            <a:schemeClr val="accent1"/>
+          </a:effectRef>
+          <a:fontRef idx="minor">
+            <a:schemeClr val="lt1"/>
+          </a:fontRef>
+        </p:style>
+        <p:txBody>
+          <a:bodyPr wrap="square" rtlCol="0" anchor="ctr"/>
+          <a:lstStyle/>
+          <a:p>
+            <a:pPr algn="ctr"/>
+            <a:r>
+              <a:rPr sz="1800" b="1">
+                <a:solidFill>
+                  <a:srgbClr val="FFFFFF"/>
+                </a:solidFill>
+                <a:latin typeface="Calibri"/>
+              </a:rPr>
+              <a:t>Тест</a:t>
+            </a:r>
+          </a:p>
+          <a:p>
+            <a:pPr algn="ctr">
+              <a:spcBef>
+                <a:spcPts val="800"/>
+              </a:spcBef>
+            </a:pPr>
+            <a:r>
+              <a:rPr sz="1300">
+                <a:solidFill>
+                  <a:srgbClr val="FFFFFF"/>
+                </a:solidFill>
+                <a:latin typeface="Calibri"/>
+              </a:rPr>
+              <a:t>гоняет тесты</a:t>
+            </a:r>
+          </a:p>
+        </p:txBody>
+      </p:sp>
+      <p:sp>
+        <p:nvSpPr>
+          <p:cNvPr id="5" name="Rounded Rectangle 4"/>
+          <p:cNvSpPr/>
+          <p:nvPr/>
+        </p:nvSpPr>
+        <p:spPr>
+          <a:xfrm>
+            <a:off x="6126480" y="1463040"/>
+            <a:ext cx="2560320" cy="1737360"/>
+          </a:xfrm>
+          <a:prstGeom prst="roundRect">
+            <a:avLst/>
+          </a:prstGeom>
+          <a:solidFill>
+            <a:srgbClr val="297FD5"/>
+          </a:solidFill>
+          <a:ln>
+            <a:noFill/>
+          </a:ln>
+        </p:spPr>
+        <p:style>
+          <a:lnRef idx="1">
+            <a:schemeClr val="accent1"/>
+          </a:lnRef>
+          <a:fillRef idx="3">
+            <a:schemeClr val="accent1"/>
+          </a:fillRef>
+          <a:effectRef idx="2">
+            <a:schemeClr val="accent1"/>
+          </a:effectRef>
+          <a:fontRef idx="minor">
+            <a:schemeClr val="lt1"/>
+          </a:fontRef>
+        </p:style>
+        <p:txBody>
+          <a:bodyPr wrap="square" rtlCol="0" anchor="ctr"/>
+          <a:lstStyle/>
+          <a:p>
+            <a:pPr algn="ctr"/>
+            <a:r>
+              <a:rPr sz="1800" b="1">
+                <a:solidFill>
+                  <a:srgbClr val="FFFFFF"/>
+                </a:solidFill>
+                <a:latin typeface="Calibri"/>
+              </a:rPr>
+              <a:t>Деплой</a:t>
+            </a:r>
+          </a:p>
+          <a:p>
+            <a:pPr algn="ctr">
+              <a:spcBef>
+                <a:spcPts val="800"/>
+              </a:spcBef>
+            </a:pPr>
+            <a:r>
+              <a:rPr sz="1300">
+                <a:solidFill>
+                  <a:srgbClr val="FFFFFF"/>
+                </a:solidFill>
+                <a:latin typeface="Calibri"/>
+              </a:rPr>
+              <a:t>катит на stage</a:t>
+            </a:r>
+          </a:p>
+        </p:txBody>
+      </p:sp>
+      <p:sp>
+        <p:nvSpPr>
+          <p:cNvPr id="6" name="Rounded Rectangle 5"/>
+          <p:cNvSpPr/>
+          <p:nvPr/>
+        </p:nvSpPr>
+        <p:spPr>
+          <a:xfrm>
+            <a:off x="8869680" y="1463040"/>
+            <a:ext cx="2560320" cy="1737360"/>
+          </a:xfrm>
+          <a:prstGeom prst="roundRect">
+            <a:avLst/>
+          </a:prstGeom>
+          <a:solidFill>
+            <a:srgbClr val="242852"/>
+          </a:solidFill>
+          <a:ln>
+            <a:noFill/>
+          </a:ln>
+        </p:spPr>
+        <p:style>
+          <a:lnRef idx="1">
+            <a:schemeClr val="accent1"/>
+          </a:lnRef>
+          <a:fillRef idx="3">
+            <a:schemeClr val="accent1"/>
+          </a:fillRef>
+          <a:effectRef idx="2">
+            <a:schemeClr val="accent1"/>
+          </a:effectRef>
+          <a:fontRef idx="minor">
+            <a:schemeClr val="lt1"/>
+          </a:fontRef>
+        </p:style>
+        <p:txBody>
+          <a:bodyPr wrap="square" rtlCol="0" anchor="ctr"/>
+          <a:lstStyle/>
+          <a:p>
+            <a:pPr algn="ctr"/>
+            <a:r>
+              <a:rPr sz="1800" b="1">
+                <a:solidFill>
+                  <a:srgbClr val="FFFFFF"/>
+                </a:solidFill>
+                <a:latin typeface="Calibri"/>
+              </a:rPr>
+              <a:t>Откат</a:t>
+            </a:r>
+          </a:p>
+          <a:p>
+            <a:pPr algn="ctr">
+              <a:spcBef>
+                <a:spcPts val="800"/>
+              </a:spcBef>
+            </a:pPr>
+            <a:r>
+              <a:rPr sz="1300">
+                <a:solidFill>
+                  <a:srgbClr val="FFFFFF"/>
+                </a:solidFill>
+                <a:latin typeface="Calibri"/>
+              </a:rPr>
+              <a:t>отменяет при аварии</a:t>
+            </a:r>
+          </a:p>
+        </p:txBody>
+      </p:sp>
+      <p:sp>
+        <p:nvSpPr>
+          <p:cNvPr id="7" name="Rounded Rectangle 6"/>
+          <p:cNvSpPr/>
+          <p:nvPr/>
+        </p:nvSpPr>
+        <p:spPr>
+          <a:xfrm>
+            <a:off x="640080" y="3566160"/>
+            <a:ext cx="10881360" cy="2468880"/>
           </a:xfrm>
           <a:prstGeom prst="roundRect">
             <a:avLst/>
@@ -8242,46 +8087,41 @@
                 </a:solidFill>
                 <a:latin typeface="Calibri"/>
               </a:rPr>
-              <a:t>СКРИНШОТ 8  →  комментарий ревью: suggestion + Approve (см. Ш8)</a:t>
-            </a:r>
-          </a:p>
-        </p:txBody>
-      </p:sp>
-      <p:sp>
-        <p:nvSpPr>
-          <p:cNvPr id="5" name="TextBox 4"/>
-          <p:cNvSpPr txBox="1"/>
+              <a:t>СКРИНШОТ 3  →  лог ИИ-агента: сгенерировал PR + прошёл CI (см. Ш3)</a:t>
+            </a:r>
+          </a:p>
+        </p:txBody>
+      </p:sp>
+      <p:pic>
+        <p:nvPicPr>
+          <p:cNvPr id="9" name="Рисунок 8">
+            <a:extLst>
+              <a:ext uri="{FF2B5EF4-FFF2-40B4-BE49-F238E27FC236}">
+                <a16:creationId xmlns:a16="http://schemas.microsoft.com/office/drawing/2014/main" id="{67843835-F3FC-868C-DDA8-1A04B1495D69}"/>
+              </a:ext>
+            </a:extLst>
+          </p:cNvPr>
+          <p:cNvPicPr>
+            <a:picLocks noChangeAspect="1"/>
+          </p:cNvPicPr>
           <p:nvPr/>
-        </p:nvSpPr>
+        </p:nvPicPr>
+        <p:blipFill>
+          <a:blip r:embed="rId3"/>
+          <a:stretch>
+            <a:fillRect/>
+          </a:stretch>
+        </p:blipFill>
         <p:spPr>
           <a:xfrm>
-            <a:off x="640080" y="4846320"/>
-            <a:ext cx="10881360" cy="822960"/>
+            <a:off x="61070" y="3429000"/>
+            <a:ext cx="12069859" cy="4020111"/>
           </a:xfrm>
           <a:prstGeom prst="rect">
             <a:avLst/>
           </a:prstGeom>
-          <a:noFill/>
         </p:spPr>
-        <p:txBody>
-          <a:bodyPr wrap="square">
-            <a:spAutoFit/>
-          </a:bodyPr>
-          <a:lstStyle/>
-          <a:p>
-            <a:pPr algn="ctr"/>
-            <a:r>
-              <a:rPr sz="1800" b="1">
-                <a:solidFill>
-                  <a:srgbClr val="242852"/>
-                </a:solidFill>
-                <a:latin typeface="Calibri"/>
-              </a:rPr>
-              <a:t>маленький PR ревьювят за 15 минут  •  большой — никогда</a:t>
-            </a:r>
-          </a:p>
-        </p:txBody>
-      </p:sp>
+      </p:pic>
     </p:spTree>
   </p:cSld>
   <p:clrMapOvr>
@@ -8330,7 +8170,7 @@
                 </a:solidFill>
                 <a:latin typeface="Calibri Light"/>
               </a:rPr>
-              <a:t>Конфликт: два правят одно</a:t>
+              <a:t>Агент: план → код → прод</a:t>
             </a:r>
           </a:p>
         </p:txBody>
@@ -8343,8 +8183,8 @@
         </p:nvSpPr>
         <p:spPr>
           <a:xfrm>
-            <a:off x="640080" y="1463040"/>
-            <a:ext cx="3383280" cy="1645920"/>
+            <a:off x="640080" y="1828800"/>
+            <a:ext cx="2411730" cy="1737360"/>
           </a:xfrm>
           <a:prstGeom prst="roundRect">
             <a:avLst/>
@@ -8376,13 +8216,13 @@
           <a:p>
             <a:pPr algn="ctr"/>
             <a:r>
-              <a:rPr sz="2000" b="1">
+              <a:rPr sz="1800" b="1">
                 <a:solidFill>
                   <a:srgbClr val="FFFFFF"/>
                 </a:solidFill>
                 <a:latin typeface="Calibri"/>
               </a:rPr>
-              <a:t>1. pull</a:t>
+              <a:t>1. План</a:t>
             </a:r>
           </a:p>
           <a:p>
@@ -8392,27 +8232,295 @@
               </a:spcBef>
             </a:pPr>
             <a:r>
-              <a:rPr sz="1400">
+              <a:rPr sz="1300">
                 <a:solidFill>
                   <a:srgbClr val="FFFFFF"/>
                 </a:solidFill>
                 <a:latin typeface="Calibri"/>
               </a:rPr>
-              <a:t>забери чужое</a:t>
-            </a:r>
-          </a:p>
-        </p:txBody>
-      </p:sp>
-      <p:sp>
-        <p:nvSpPr>
-          <p:cNvPr id="4" name="Rounded Rectangle 3"/>
+              <a:t>читает issue</a:t>
+            </a:r>
+          </a:p>
+        </p:txBody>
+      </p:sp>
+      <p:sp>
+        <p:nvSpPr>
+          <p:cNvPr id="4" name="Right Arrow 3"/>
           <p:cNvSpPr/>
           <p:nvPr/>
         </p:nvSpPr>
         <p:spPr>
           <a:xfrm>
-            <a:off x="4389120" y="1463040"/>
-            <a:ext cx="3383280" cy="1645920"/>
+            <a:off x="3033522" y="2468880"/>
+            <a:ext cx="457200" cy="457200"/>
+          </a:xfrm>
+          <a:prstGeom prst="rightArrow">
+            <a:avLst/>
+          </a:prstGeom>
+          <a:solidFill>
+            <a:srgbClr val="242852"/>
+          </a:solidFill>
+          <a:ln>
+            <a:noFill/>
+          </a:ln>
+        </p:spPr>
+        <p:style>
+          <a:lnRef idx="1">
+            <a:schemeClr val="accent1"/>
+          </a:lnRef>
+          <a:fillRef idx="3">
+            <a:schemeClr val="accent1"/>
+          </a:fillRef>
+          <a:effectRef idx="2">
+            <a:schemeClr val="accent1"/>
+          </a:effectRef>
+          <a:fontRef idx="minor">
+            <a:schemeClr val="lt1"/>
+          </a:fontRef>
+        </p:style>
+        <p:txBody>
+          <a:bodyPr rtlCol="0" anchor="ctr"/>
+          <a:lstStyle/>
+          <a:p>
+            <a:pPr algn="ctr"/>
+            <a:endParaRPr/>
+          </a:p>
+        </p:txBody>
+      </p:sp>
+      <p:sp>
+        <p:nvSpPr>
+          <p:cNvPr id="5" name="Rounded Rectangle 4"/>
+          <p:cNvSpPr/>
+          <p:nvPr/>
+        </p:nvSpPr>
+        <p:spPr>
+          <a:xfrm>
+            <a:off x="3463290" y="1828800"/>
+            <a:ext cx="2411730" cy="1737360"/>
+          </a:xfrm>
+          <a:prstGeom prst="roundRect">
+            <a:avLst/>
+          </a:prstGeom>
+          <a:solidFill>
+            <a:srgbClr val="629DD1"/>
+          </a:solidFill>
+          <a:ln>
+            <a:noFill/>
+          </a:ln>
+        </p:spPr>
+        <p:style>
+          <a:lnRef idx="1">
+            <a:schemeClr val="accent1"/>
+          </a:lnRef>
+          <a:fillRef idx="3">
+            <a:schemeClr val="accent1"/>
+          </a:fillRef>
+          <a:effectRef idx="2">
+            <a:schemeClr val="accent1"/>
+          </a:effectRef>
+          <a:fontRef idx="minor">
+            <a:schemeClr val="lt1"/>
+          </a:fontRef>
+        </p:style>
+        <p:txBody>
+          <a:bodyPr wrap="square" rtlCol="0" anchor="ctr"/>
+          <a:lstStyle/>
+          <a:p>
+            <a:pPr algn="ctr"/>
+            <a:r>
+              <a:rPr sz="1800" b="1">
+                <a:solidFill>
+                  <a:srgbClr val="FFFFFF"/>
+                </a:solidFill>
+                <a:latin typeface="Calibri"/>
+              </a:rPr>
+              <a:t>2. Код</a:t>
+            </a:r>
+          </a:p>
+          <a:p>
+            <a:pPr algn="ctr">
+              <a:spcBef>
+                <a:spcPts val="800"/>
+              </a:spcBef>
+            </a:pPr>
+            <a:r>
+              <a:rPr sz="1300">
+                <a:solidFill>
+                  <a:srgbClr val="FFFFFF"/>
+                </a:solidFill>
+                <a:latin typeface="Calibri"/>
+              </a:rPr>
+              <a:t>меняет ветку</a:t>
+            </a:r>
+          </a:p>
+        </p:txBody>
+      </p:sp>
+      <p:sp>
+        <p:nvSpPr>
+          <p:cNvPr id="6" name="Right Arrow 5"/>
+          <p:cNvSpPr/>
+          <p:nvPr/>
+        </p:nvSpPr>
+        <p:spPr>
+          <a:xfrm>
+            <a:off x="5856732" y="2468880"/>
+            <a:ext cx="457200" cy="457200"/>
+          </a:xfrm>
+          <a:prstGeom prst="rightArrow">
+            <a:avLst/>
+          </a:prstGeom>
+          <a:solidFill>
+            <a:srgbClr val="242852"/>
+          </a:solidFill>
+          <a:ln>
+            <a:noFill/>
+          </a:ln>
+        </p:spPr>
+        <p:style>
+          <a:lnRef idx="1">
+            <a:schemeClr val="accent1"/>
+          </a:lnRef>
+          <a:fillRef idx="3">
+            <a:schemeClr val="accent1"/>
+          </a:fillRef>
+          <a:effectRef idx="2">
+            <a:schemeClr val="accent1"/>
+          </a:effectRef>
+          <a:fontRef idx="minor">
+            <a:schemeClr val="lt1"/>
+          </a:fontRef>
+        </p:style>
+        <p:txBody>
+          <a:bodyPr rtlCol="0" anchor="ctr"/>
+          <a:lstStyle/>
+          <a:p>
+            <a:pPr algn="ctr"/>
+            <a:endParaRPr/>
+          </a:p>
+        </p:txBody>
+      </p:sp>
+      <p:sp>
+        <p:nvSpPr>
+          <p:cNvPr id="7" name="Rounded Rectangle 6"/>
+          <p:cNvSpPr/>
+          <p:nvPr/>
+        </p:nvSpPr>
+        <p:spPr>
+          <a:xfrm>
+            <a:off x="6286500" y="1828800"/>
+            <a:ext cx="2411730" cy="1737360"/>
+          </a:xfrm>
+          <a:prstGeom prst="roundRect">
+            <a:avLst/>
+          </a:prstGeom>
+          <a:solidFill>
+            <a:srgbClr val="5AA2AE"/>
+          </a:solidFill>
+          <a:ln>
+            <a:noFill/>
+          </a:ln>
+        </p:spPr>
+        <p:style>
+          <a:lnRef idx="1">
+            <a:schemeClr val="accent1"/>
+          </a:lnRef>
+          <a:fillRef idx="3">
+            <a:schemeClr val="accent1"/>
+          </a:fillRef>
+          <a:effectRef idx="2">
+            <a:schemeClr val="accent1"/>
+          </a:effectRef>
+          <a:fontRef idx="minor">
+            <a:schemeClr val="lt1"/>
+          </a:fontRef>
+        </p:style>
+        <p:txBody>
+          <a:bodyPr wrap="square" rtlCol="0" anchor="ctr"/>
+          <a:lstStyle/>
+          <a:p>
+            <a:pPr algn="ctr"/>
+            <a:r>
+              <a:rPr sz="1800" b="1">
+                <a:solidFill>
+                  <a:srgbClr val="FFFFFF"/>
+                </a:solidFill>
+                <a:latin typeface="Calibri"/>
+              </a:rPr>
+              <a:t>3. Проверка</a:t>
+            </a:r>
+          </a:p>
+          <a:p>
+            <a:pPr algn="ctr">
+              <a:spcBef>
+                <a:spcPts val="800"/>
+              </a:spcBef>
+            </a:pPr>
+            <a:r>
+              <a:rPr sz="1300">
+                <a:solidFill>
+                  <a:srgbClr val="FFFFFF"/>
+                </a:solidFill>
+                <a:latin typeface="Calibri"/>
+              </a:rPr>
+              <a:t>тесты + review</a:t>
+            </a:r>
+          </a:p>
+        </p:txBody>
+      </p:sp>
+      <p:sp>
+        <p:nvSpPr>
+          <p:cNvPr id="8" name="Right Arrow 7"/>
+          <p:cNvSpPr/>
+          <p:nvPr/>
+        </p:nvSpPr>
+        <p:spPr>
+          <a:xfrm>
+            <a:off x="8679942" y="2468880"/>
+            <a:ext cx="457200" cy="457200"/>
+          </a:xfrm>
+          <a:prstGeom prst="rightArrow">
+            <a:avLst/>
+          </a:prstGeom>
+          <a:solidFill>
+            <a:srgbClr val="242852"/>
+          </a:solidFill>
+          <a:ln>
+            <a:noFill/>
+          </a:ln>
+        </p:spPr>
+        <p:style>
+          <a:lnRef idx="1">
+            <a:schemeClr val="accent1"/>
+          </a:lnRef>
+          <a:fillRef idx="3">
+            <a:schemeClr val="accent1"/>
+          </a:fillRef>
+          <a:effectRef idx="2">
+            <a:schemeClr val="accent1"/>
+          </a:effectRef>
+          <a:fontRef idx="minor">
+            <a:schemeClr val="lt1"/>
+          </a:fontRef>
+        </p:style>
+        <p:txBody>
+          <a:bodyPr rtlCol="0" anchor="ctr"/>
+          <a:lstStyle/>
+          <a:p>
+            <a:pPr algn="ctr"/>
+            <a:endParaRPr/>
+          </a:p>
+        </p:txBody>
+      </p:sp>
+      <p:sp>
+        <p:nvSpPr>
+          <p:cNvPr id="9" name="Rounded Rectangle 8"/>
+          <p:cNvSpPr/>
+          <p:nvPr/>
+        </p:nvSpPr>
+        <p:spPr>
+          <a:xfrm>
+            <a:off x="9109710" y="1828800"/>
+            <a:ext cx="2411730" cy="1737360"/>
           </a:xfrm>
           <a:prstGeom prst="roundRect">
             <a:avLst/>
@@ -8444,13 +8552,13 @@
           <a:p>
             <a:pPr algn="ctr"/>
             <a:r>
-              <a:rPr sz="2000" b="1">
+              <a:rPr sz="1800" b="1">
                 <a:solidFill>
                   <a:srgbClr val="FFFFFF"/>
                 </a:solidFill>
                 <a:latin typeface="Calibri"/>
               </a:rPr>
-              <a:t>2. resolve</a:t>
+              <a:t>4. Деплой</a:t>
             </a:r>
           </a:p>
           <a:p>
@@ -8460,95 +8568,194 @@
               </a:spcBef>
             </a:pPr>
             <a:r>
-              <a:rPr sz="1400">
+              <a:rPr sz="1300">
                 <a:solidFill>
                   <a:srgbClr val="FFFFFF"/>
                 </a:solidFill>
                 <a:latin typeface="Calibri"/>
               </a:rPr>
-              <a:t>выбери правду</a:t>
-            </a:r>
-          </a:p>
-        </p:txBody>
-      </p:sp>
-      <p:sp>
-        <p:nvSpPr>
-          <p:cNvPr id="5" name="Rounded Rectangle 4"/>
+              <a:t>только в stage</a:t>
+            </a:r>
+          </a:p>
+        </p:txBody>
+      </p:sp>
+      <p:sp>
+        <p:nvSpPr>
+          <p:cNvPr id="10" name="TextBox 9"/>
+          <p:cNvSpPr txBox="1"/>
+          <p:nvPr/>
+        </p:nvSpPr>
+        <p:spPr>
+          <a:xfrm>
+            <a:off x="640080" y="4023360"/>
+            <a:ext cx="10881360" cy="914400"/>
+          </a:xfrm>
+          <a:prstGeom prst="rect">
+            <a:avLst/>
+          </a:prstGeom>
+          <a:noFill/>
+        </p:spPr>
+        <p:txBody>
+          <a:bodyPr wrap="square">
+            <a:spAutoFit/>
+          </a:bodyPr>
+          <a:lstStyle/>
+          <a:p>
+            <a:pPr algn="ctr"/>
+            <a:r>
+              <a:rPr sz="1800" b="1" dirty="0" err="1">
+                <a:solidFill>
+                  <a:srgbClr val="242852"/>
+                </a:solidFill>
+                <a:latin typeface="Calibri"/>
+              </a:rPr>
+              <a:t>человек</a:t>
+            </a:r>
+            <a:r>
+              <a:rPr sz="1800" b="1" dirty="0">
+                <a:solidFill>
+                  <a:srgbClr val="242852"/>
+                </a:solidFill>
+                <a:latin typeface="Calibri"/>
+              </a:rPr>
+              <a:t> </a:t>
+            </a:r>
+            <a:r>
+              <a:rPr sz="1800" b="1" dirty="0" err="1">
+                <a:solidFill>
+                  <a:srgbClr val="242852"/>
+                </a:solidFill>
+                <a:latin typeface="Calibri"/>
+              </a:rPr>
+              <a:t>жмёт</a:t>
+            </a:r>
+            <a:r>
+              <a:rPr sz="1800" b="1" dirty="0">
+                <a:solidFill>
+                  <a:srgbClr val="242852"/>
+                </a:solidFill>
+                <a:latin typeface="Calibri"/>
+              </a:rPr>
+              <a:t> </a:t>
+            </a:r>
+            <a:r>
+              <a:rPr sz="1800" b="1" dirty="0" err="1">
+                <a:solidFill>
+                  <a:srgbClr val="242852"/>
+                </a:solidFill>
+                <a:latin typeface="Calibri"/>
+              </a:rPr>
+              <a:t>кнопку</a:t>
+            </a:r>
+            <a:r>
+              <a:rPr sz="1800" b="1" dirty="0">
+                <a:solidFill>
+                  <a:srgbClr val="242852"/>
+                </a:solidFill>
+                <a:latin typeface="Calibri"/>
+              </a:rPr>
+              <a:t> в </a:t>
+            </a:r>
+            <a:r>
+              <a:rPr sz="1800" b="1" dirty="0" err="1">
+                <a:solidFill>
+                  <a:srgbClr val="242852"/>
+                </a:solidFill>
+                <a:latin typeface="Calibri"/>
+              </a:rPr>
+              <a:t>прод</a:t>
+            </a:r>
+            <a:r>
+              <a:rPr sz="1800" b="1" dirty="0">
+                <a:solidFill>
+                  <a:srgbClr val="242852"/>
+                </a:solidFill>
+                <a:latin typeface="Calibri"/>
+              </a:rPr>
+              <a:t>  •  </a:t>
+            </a:r>
+            <a:r>
+              <a:rPr sz="1800" b="1" dirty="0" err="1">
+                <a:solidFill>
+                  <a:srgbClr val="242852"/>
+                </a:solidFill>
+                <a:latin typeface="Calibri"/>
+              </a:rPr>
+              <a:t>агент</a:t>
+            </a:r>
+            <a:r>
+              <a:rPr sz="1800" b="1" dirty="0">
+                <a:solidFill>
+                  <a:srgbClr val="242852"/>
+                </a:solidFill>
+                <a:latin typeface="Calibri"/>
+              </a:rPr>
+              <a:t> </a:t>
+            </a:r>
+            <a:r>
+              <a:rPr sz="1800" b="1" dirty="0" err="1">
+                <a:solidFill>
+                  <a:srgbClr val="242852"/>
+                </a:solidFill>
+                <a:latin typeface="Calibri"/>
+              </a:rPr>
+              <a:t>готовит</a:t>
+            </a:r>
+            <a:r>
+              <a:rPr sz="1800" b="1" dirty="0">
+                <a:solidFill>
+                  <a:srgbClr val="242852"/>
+                </a:solidFill>
+                <a:latin typeface="Calibri"/>
+              </a:rPr>
+              <a:t>, </a:t>
+            </a:r>
+            <a:r>
+              <a:rPr sz="1800" b="1" dirty="0" err="1">
+                <a:solidFill>
+                  <a:srgbClr val="242852"/>
+                </a:solidFill>
+                <a:latin typeface="Calibri"/>
+              </a:rPr>
+              <a:t>не</a:t>
+            </a:r>
+            <a:r>
+              <a:rPr sz="1800" b="1" dirty="0">
+                <a:solidFill>
+                  <a:srgbClr val="242852"/>
+                </a:solidFill>
+                <a:latin typeface="Calibri"/>
+              </a:rPr>
+              <a:t> </a:t>
+            </a:r>
+            <a:r>
+              <a:rPr sz="1800" b="1" dirty="0" err="1">
+                <a:solidFill>
+                  <a:srgbClr val="242852"/>
+                </a:solidFill>
+                <a:latin typeface="Calibri"/>
+              </a:rPr>
+              <a:t>решает</a:t>
+            </a:r>
+            <a:endParaRPr sz="1800" b="1" dirty="0">
+              <a:solidFill>
+                <a:srgbClr val="242852"/>
+              </a:solidFill>
+              <a:latin typeface="Calibri"/>
+            </a:endParaRPr>
+          </a:p>
+        </p:txBody>
+      </p:sp>
+      <p:sp>
+        <p:nvSpPr>
+          <p:cNvPr id="11" name="Rounded Rectangle 10"/>
           <p:cNvSpPr/>
           <p:nvPr/>
         </p:nvSpPr>
         <p:spPr>
           <a:xfrm>
-            <a:off x="8138160" y="1463040"/>
-            <a:ext cx="3383280" cy="1645920"/>
-          </a:xfrm>
-          <a:prstGeom prst="roundRect">
-            <a:avLst/>
-          </a:prstGeom>
-          <a:solidFill>
-            <a:srgbClr val="242852"/>
-          </a:solidFill>
-          <a:ln>
-            <a:noFill/>
-          </a:ln>
-        </p:spPr>
-        <p:style>
-          <a:lnRef idx="1">
-            <a:schemeClr val="accent1"/>
-          </a:lnRef>
-          <a:fillRef idx="3">
-            <a:schemeClr val="accent1"/>
-          </a:fillRef>
-          <a:effectRef idx="2">
-            <a:schemeClr val="accent1"/>
-          </a:effectRef>
-          <a:fontRef idx="minor">
-            <a:schemeClr val="lt1"/>
-          </a:fontRef>
-        </p:style>
-        <p:txBody>
-          <a:bodyPr wrap="square" rtlCol="0" anchor="ctr"/>
-          <a:lstStyle/>
-          <a:p>
-            <a:pPr algn="ctr"/>
-            <a:r>
-              <a:rPr sz="2000" b="1">
-                <a:solidFill>
-                  <a:srgbClr val="FFFFFF"/>
-                </a:solidFill>
-                <a:latin typeface="Calibri"/>
-              </a:rPr>
-              <a:t>3. push</a:t>
-            </a:r>
-          </a:p>
-          <a:p>
-            <a:pPr algn="ctr">
-              <a:spcBef>
-                <a:spcPts val="800"/>
-              </a:spcBef>
-            </a:pPr>
-            <a:r>
-              <a:rPr sz="1400">
-                <a:solidFill>
-                  <a:srgbClr val="FFFFFF"/>
-                </a:solidFill>
-                <a:latin typeface="Calibri"/>
-              </a:rPr>
-              <a:t>отправь мир</a:t>
-            </a:r>
-          </a:p>
-        </p:txBody>
-      </p:sp>
-      <p:sp>
-        <p:nvSpPr>
-          <p:cNvPr id="6" name="Rounded Rectangle 5"/>
-          <p:cNvSpPr/>
-          <p:nvPr/>
-        </p:nvSpPr>
-        <p:spPr>
-          <a:xfrm>
-            <a:off x="640080" y="3474720"/>
-            <a:ext cx="10881360" cy="2560320"/>
+            <a:off x="640080" y="4937760"/>
+            <a:ext cx="10881360" cy="1097280"/>
           </a:xfrm>
           <a:prstGeom prst="roundRect">
             <a:avLst/>
@@ -8582,14 +8789,20 @@
           <a:p>
             <a:pPr algn="ctr"/>
             <a:r>
-              <a:rPr sz="1400">
+              <a:rPr lang="ru-RU" sz="4500" b="1" dirty="0">
                 <a:solidFill>
                   <a:srgbClr val="242852"/>
                 </a:solidFill>
                 <a:latin typeface="Calibri"/>
               </a:rPr>
-              <a:t>СКРИНШОТ 9  →  маркеры &lt;&lt;&lt;&lt;&lt;&lt;&lt; HEAD … ======= … &gt;&gt;&gt;&gt;&gt;&gt;&gt; + кнопка Resolve (см. Ш9)</a:t>
-            </a:r>
+              <a:t>ОН УМНЫЙ, НО ДОВЕРЯТЬ ЕМУ НЕ СТОИТ</a:t>
+            </a:r>
+            <a:endParaRPr sz="4500" b="1" dirty="0">
+              <a:solidFill>
+                <a:srgbClr val="242852"/>
+              </a:solidFill>
+              <a:latin typeface="Calibri"/>
+            </a:endParaRPr>
           </a:p>
         </p:txBody>
       </p:sp>
@@ -8641,129 +8854,303 @@
                 </a:solidFill>
                 <a:latin typeface="Calibri Light"/>
               </a:rPr>
-              <a:t>5 правил выживания</a:t>
-            </a:r>
-          </a:p>
-        </p:txBody>
-      </p:sp>
-      <p:sp>
-        <p:nvSpPr>
-          <p:cNvPr id="3" name="TextBox 2"/>
-          <p:cNvSpPr txBox="1"/>
+              <a:t>main — священен</a:t>
+            </a:r>
+          </a:p>
+        </p:txBody>
+      </p:sp>
+      <p:sp>
+        <p:nvSpPr>
+          <p:cNvPr id="3" name="Rounded Rectangle 2"/>
+          <p:cNvSpPr/>
           <p:nvPr/>
         </p:nvSpPr>
         <p:spPr>
           <a:xfrm>
-            <a:off x="640080" y="1371600"/>
-            <a:ext cx="10881360" cy="4572000"/>
+            <a:off x="640080" y="1463040"/>
+            <a:ext cx="3383280" cy="1554480"/>
+          </a:xfrm>
+          <a:prstGeom prst="roundRect">
+            <a:avLst/>
+          </a:prstGeom>
+          <a:solidFill>
+            <a:srgbClr val="242852"/>
+          </a:solidFill>
+          <a:ln>
+            <a:noFill/>
+          </a:ln>
+        </p:spPr>
+        <p:style>
+          <a:lnRef idx="1">
+            <a:schemeClr val="accent1"/>
+          </a:lnRef>
+          <a:fillRef idx="3">
+            <a:schemeClr val="accent1"/>
+          </a:fillRef>
+          <a:effectRef idx="2">
+            <a:schemeClr val="accent1"/>
+          </a:effectRef>
+          <a:fontRef idx="minor">
+            <a:schemeClr val="lt1"/>
+          </a:fontRef>
+        </p:style>
+        <p:txBody>
+          <a:bodyPr wrap="square" rtlCol="0" anchor="ctr"/>
+          <a:lstStyle/>
+          <a:p>
+            <a:pPr algn="ctr"/>
+            <a:r>
+              <a:rPr sz="2000" b="1">
+                <a:solidFill>
+                  <a:srgbClr val="FFFFFF"/>
+                </a:solidFill>
+                <a:latin typeface="Calibri"/>
+              </a:rPr>
+              <a:t>main</a:t>
+            </a:r>
+          </a:p>
+          <a:p>
+            <a:pPr algn="ctr">
+              <a:spcBef>
+                <a:spcPts val="800"/>
+              </a:spcBef>
+            </a:pPr>
+            <a:r>
+              <a:rPr sz="1400">
+                <a:solidFill>
+                  <a:srgbClr val="FFFFFF"/>
+                </a:solidFill>
+                <a:latin typeface="Calibri"/>
+              </a:rPr>
+              <a:t>всегда работает</a:t>
+            </a:r>
+          </a:p>
+        </p:txBody>
+      </p:sp>
+      <p:sp>
+        <p:nvSpPr>
+          <p:cNvPr id="4" name="Rounded Rectangle 3"/>
+          <p:cNvSpPr/>
+          <p:nvPr/>
+        </p:nvSpPr>
+        <p:spPr>
+          <a:xfrm>
+            <a:off x="4389120" y="1463040"/>
+            <a:ext cx="3383280" cy="1554480"/>
+          </a:xfrm>
+          <a:prstGeom prst="roundRect">
+            <a:avLst/>
+          </a:prstGeom>
+          <a:solidFill>
+            <a:srgbClr val="5AA2AE"/>
+          </a:solidFill>
+          <a:ln>
+            <a:noFill/>
+          </a:ln>
+        </p:spPr>
+        <p:style>
+          <a:lnRef idx="1">
+            <a:schemeClr val="accent1"/>
+          </a:lnRef>
+          <a:fillRef idx="3">
+            <a:schemeClr val="accent1"/>
+          </a:fillRef>
+          <a:effectRef idx="2">
+            <a:schemeClr val="accent1"/>
+          </a:effectRef>
+          <a:fontRef idx="minor">
+            <a:schemeClr val="lt1"/>
+          </a:fontRef>
+        </p:style>
+        <p:txBody>
+          <a:bodyPr wrap="square" rtlCol="0" anchor="ctr"/>
+          <a:lstStyle/>
+          <a:p>
+            <a:pPr algn="ctr"/>
+            <a:r>
+              <a:rPr sz="2000" b="1">
+                <a:solidFill>
+                  <a:srgbClr val="FFFFFF"/>
+                </a:solidFill>
+                <a:latin typeface="Calibri"/>
+              </a:rPr>
+              <a:t>feature/*</a:t>
+            </a:r>
+          </a:p>
+          <a:p>
+            <a:pPr algn="ctr">
+              <a:spcBef>
+                <a:spcPts val="800"/>
+              </a:spcBef>
+            </a:pPr>
+            <a:r>
+              <a:rPr sz="1400">
+                <a:solidFill>
+                  <a:srgbClr val="FFFFFF"/>
+                </a:solidFill>
+                <a:latin typeface="Calibri"/>
+              </a:rPr>
+              <a:t>новая фича</a:t>
+            </a:r>
+          </a:p>
+        </p:txBody>
+      </p:sp>
+      <p:sp>
+        <p:nvSpPr>
+          <p:cNvPr id="5" name="Rounded Rectangle 4"/>
+          <p:cNvSpPr/>
+          <p:nvPr/>
+        </p:nvSpPr>
+        <p:spPr>
+          <a:xfrm>
+            <a:off x="8138160" y="1463040"/>
+            <a:ext cx="3383280" cy="1554480"/>
+          </a:xfrm>
+          <a:prstGeom prst="roundRect">
+            <a:avLst/>
+          </a:prstGeom>
+          <a:solidFill>
+            <a:srgbClr val="297FD5"/>
+          </a:solidFill>
+          <a:ln>
+            <a:noFill/>
+          </a:ln>
+        </p:spPr>
+        <p:style>
+          <a:lnRef idx="1">
+            <a:schemeClr val="accent1"/>
+          </a:lnRef>
+          <a:fillRef idx="3">
+            <a:schemeClr val="accent1"/>
+          </a:fillRef>
+          <a:effectRef idx="2">
+            <a:schemeClr val="accent1"/>
+          </a:effectRef>
+          <a:fontRef idx="minor">
+            <a:schemeClr val="lt1"/>
+          </a:fontRef>
+        </p:style>
+        <p:txBody>
+          <a:bodyPr wrap="square" rtlCol="0" anchor="ctr"/>
+          <a:lstStyle/>
+          <a:p>
+            <a:pPr algn="ctr"/>
+            <a:r>
+              <a:rPr sz="2000" b="1">
+                <a:solidFill>
+                  <a:srgbClr val="FFFFFF"/>
+                </a:solidFill>
+                <a:latin typeface="Calibri"/>
+              </a:rPr>
+              <a:t>hotfix/*</a:t>
+            </a:r>
+          </a:p>
+          <a:p>
+            <a:pPr algn="ctr">
+              <a:spcBef>
+                <a:spcPts val="800"/>
+              </a:spcBef>
+            </a:pPr>
+            <a:r>
+              <a:rPr sz="1400">
+                <a:solidFill>
+                  <a:srgbClr val="FFFFFF"/>
+                </a:solidFill>
+                <a:latin typeface="Calibri"/>
+              </a:rPr>
+              <a:t>срочный фикс</a:t>
+            </a:r>
+          </a:p>
+        </p:txBody>
+      </p:sp>
+      <p:sp>
+        <p:nvSpPr>
+          <p:cNvPr id="6" name="Rounded Rectangle 5"/>
+          <p:cNvSpPr/>
+          <p:nvPr/>
+        </p:nvSpPr>
+        <p:spPr>
+          <a:xfrm>
+            <a:off x="640080" y="3383280"/>
+            <a:ext cx="10881360" cy="2651760"/>
+          </a:xfrm>
+          <a:prstGeom prst="roundRect">
+            <a:avLst/>
+          </a:prstGeom>
+          <a:solidFill>
+            <a:srgbClr val="E8EDF4"/>
+          </a:solidFill>
+          <a:ln w="25400">
+            <a:solidFill>
+              <a:srgbClr val="7F8FA9"/>
+            </a:solidFill>
+          </a:ln>
+        </p:spPr>
+        <p:style>
+          <a:lnRef idx="1">
+            <a:schemeClr val="accent1"/>
+          </a:lnRef>
+          <a:fillRef idx="3">
+            <a:schemeClr val="accent1"/>
+          </a:fillRef>
+          <a:effectRef idx="2">
+            <a:schemeClr val="accent1"/>
+          </a:effectRef>
+          <a:fontRef idx="minor">
+            <a:schemeClr val="lt1"/>
+          </a:fontRef>
+        </p:style>
+        <p:txBody>
+          <a:bodyPr wrap="square" rtlCol="0" anchor="ctr"/>
+          <a:lstStyle/>
+          <a:p>
+            <a:pPr algn="ctr"/>
+            <a:r>
+              <a:rPr sz="1400">
+                <a:solidFill>
+                  <a:srgbClr val="242852"/>
+                </a:solidFill>
+                <a:latin typeface="Calibri"/>
+              </a:rPr>
+              <a:t>СКРИНШОТ 4  →  граф веток: main + 2 feature + hotfix (см. Ш4)</a:t>
+            </a:r>
+            <a:br/>
+            <a:r>
+              <a:t>команды: git branch / git switch -c</a:t>
+            </a:r>
+          </a:p>
+        </p:txBody>
+      </p:sp>
+      <p:pic>
+        <p:nvPicPr>
+          <p:cNvPr id="8" name="Рисунок 7">
+            <a:extLst>
+              <a:ext uri="{FF2B5EF4-FFF2-40B4-BE49-F238E27FC236}">
+                <a16:creationId xmlns:a16="http://schemas.microsoft.com/office/drawing/2014/main" id="{0B0D299E-A6FA-AEF3-67D2-2DEE4DE845C3}"/>
+              </a:ext>
+            </a:extLst>
+          </p:cNvPr>
+          <p:cNvPicPr>
+            <a:picLocks noChangeAspect="1"/>
+          </p:cNvPicPr>
+          <p:nvPr/>
+        </p:nvPicPr>
+        <p:blipFill>
+          <a:blip r:embed="rId3"/>
+          <a:stretch>
+            <a:fillRect/>
+          </a:stretch>
+        </p:blipFill>
+        <p:spPr>
+          <a:xfrm>
+            <a:off x="910866" y="3522966"/>
+            <a:ext cx="10548820" cy="1783972"/>
           </a:xfrm>
           <a:prstGeom prst="rect">
             <a:avLst/>
           </a:prstGeom>
-          <a:noFill/>
         </p:spPr>
-        <p:txBody>
-          <a:bodyPr wrap="square">
-            <a:spAutoFit/>
-          </a:bodyPr>
-          <a:lstStyle/>
-          <a:p>
-            <a:pPr>
-              <a:spcBef>
-                <a:spcPts val="400"/>
-              </a:spcBef>
-              <a:spcAft>
-                <a:spcPts val="1000"/>
-              </a:spcAft>
-            </a:pPr>
-            <a:r>
-              <a:rPr sz="2400">
-                <a:solidFill>
-                  <a:srgbClr val="333333"/>
-                </a:solidFill>
-                <a:latin typeface="Calibri"/>
-              </a:rPr>
-              <a:t>1. main не ломаем — работаем в ветках</a:t>
-            </a:r>
-          </a:p>
-          <a:p>
-            <a:pPr>
-              <a:spcBef>
-                <a:spcPts val="400"/>
-              </a:spcBef>
-              <a:spcAft>
-                <a:spcPts val="1000"/>
-              </a:spcAft>
-            </a:pPr>
-            <a:r>
-              <a:rPr sz="2400">
-                <a:solidFill>
-                  <a:srgbClr val="333333"/>
-                </a:solidFill>
-                <a:latin typeface="Calibri"/>
-              </a:rPr>
-              <a:t>2. Маленький PR &gt; большой подвиг</a:t>
-            </a:r>
-          </a:p>
-          <a:p>
-            <a:pPr>
-              <a:spcBef>
-                <a:spcPts val="400"/>
-              </a:spcBef>
-              <a:spcAft>
-                <a:spcPts val="1000"/>
-              </a:spcAft>
-            </a:pPr>
-            <a:r>
-              <a:rPr sz="2400">
-                <a:solidFill>
-                  <a:srgbClr val="333333"/>
-                </a:solidFill>
-                <a:latin typeface="Calibri"/>
-              </a:rPr>
-              <a:t>3. Зелёный CI + review = merge</a:t>
-            </a:r>
-          </a:p>
-          <a:p>
-            <a:pPr>
-              <a:spcBef>
-                <a:spcPts val="400"/>
-              </a:spcBef>
-              <a:spcAft>
-                <a:spcPts val="1000"/>
-              </a:spcAft>
-            </a:pPr>
-            <a:r>
-              <a:rPr sz="2400">
-                <a:solidFill>
-                  <a:srgbClr val="333333"/>
-                </a:solidFill>
-                <a:latin typeface="Calibri"/>
-              </a:rPr>
-              <a:t>4. Конфликт? Говорим, потом кликаем</a:t>
-            </a:r>
-          </a:p>
-          <a:p>
-            <a:pPr>
-              <a:spcBef>
-                <a:spcPts val="400"/>
-              </a:spcBef>
-              <a:spcAft>
-                <a:spcPts val="1000"/>
-              </a:spcAft>
-            </a:pPr>
-            <a:r>
-              <a:rPr sz="2400">
-                <a:solidFill>
-                  <a:srgbClr val="333333"/>
-                </a:solidFill>
-                <a:latin typeface="Calibri"/>
-              </a:rPr>
-              <a:t>5. Агент готовит — человек отвечает</a:t>
-            </a:r>
-          </a:p>
-        </p:txBody>
-      </p:sp>
+      </p:pic>
     </p:spTree>
   </p:cSld>
   <p:clrMapOvr>
@@ -8796,7 +9183,7 @@
             <a:spLocks noGrp="1"/>
           </p:cNvSpPr>
           <p:nvPr>
-            <p:ph type="ctrTitle"/>
+            <p:ph type="title"/>
           </p:nvPr>
         </p:nvSpPr>
         <p:spPr/>
@@ -8804,42 +9191,846 @@
           <a:bodyPr/>
           <a:lstStyle/>
           <a:p>
-            <a:r>
-              <a:t>Спасибо! Вопросы?</a:t>
-            </a:r>
-          </a:p>
-        </p:txBody>
-      </p:sp>
-      <p:sp>
-        <p:nvSpPr>
-          <p:cNvPr id="3" name="Subtitle 2"/>
-          <p:cNvSpPr>
-            <a:spLocks noGrp="1"/>
-          </p:cNvSpPr>
-          <p:nvPr>
-            <p:ph type="subTitle" idx="1"/>
-          </p:nvPr>
-        </p:nvSpPr>
-        <p:spPr/>
-        <p:txBody>
-          <a:bodyPr/>
-          <a:lstStyle/>
-          <a:p>
-            <a:r>
-              <a:t>Демо: ветка → PR → merge за 3 минуты</a:t>
-            </a:r>
-          </a:p>
-        </p:txBody>
-      </p:sp>
-      <p:sp>
-        <p:nvSpPr>
-          <p:cNvPr id="4" name="TextBox 3"/>
+            <a:pPr algn="l"/>
+            <a:r>
+              <a:rPr sz="4000" b="1" dirty="0">
+                <a:solidFill>
+                  <a:srgbClr val="242852"/>
+                </a:solidFill>
+                <a:latin typeface="Calibri Light"/>
+              </a:rPr>
+              <a:t>200 </a:t>
+            </a:r>
+            <a:r>
+              <a:rPr sz="4000" b="1" dirty="0" err="1">
+                <a:solidFill>
+                  <a:srgbClr val="242852"/>
+                </a:solidFill>
+                <a:latin typeface="Calibri Light"/>
+              </a:rPr>
+              <a:t>заработать</a:t>
+            </a:r>
+            <a:r>
+              <a:rPr sz="4000" b="1" dirty="0">
+                <a:solidFill>
+                  <a:srgbClr val="242852"/>
+                </a:solidFill>
+                <a:latin typeface="Calibri Light"/>
+              </a:rPr>
+              <a:t>, 500 </a:t>
+            </a:r>
+            <a:r>
+              <a:rPr sz="4000" b="1" dirty="0" err="1">
+                <a:solidFill>
+                  <a:srgbClr val="242852"/>
+                </a:solidFill>
+                <a:latin typeface="Calibri Light"/>
+              </a:rPr>
+              <a:t>потерять</a:t>
+            </a:r>
+            <a:endParaRPr sz="4000" b="1" dirty="0">
+              <a:solidFill>
+                <a:srgbClr val="242852"/>
+              </a:solidFill>
+              <a:latin typeface="Calibri Light"/>
+            </a:endParaRPr>
+          </a:p>
+        </p:txBody>
+      </p:sp>
+      <p:pic>
+        <p:nvPicPr>
+          <p:cNvPr id="8" name="Рисунок 7">
+            <a:extLst>
+              <a:ext uri="{FF2B5EF4-FFF2-40B4-BE49-F238E27FC236}">
+                <a16:creationId xmlns:a16="http://schemas.microsoft.com/office/drawing/2014/main" id="{BEB62F9C-5E38-5929-4744-020A645A207C}"/>
+              </a:ext>
+            </a:extLst>
+          </p:cNvPr>
+          <p:cNvPicPr>
+            <a:picLocks noChangeAspect="1"/>
+          </p:cNvPicPr>
+          <p:nvPr/>
+        </p:nvPicPr>
+        <p:blipFill>
+          <a:blip r:embed="rId3"/>
+          <a:stretch>
+            <a:fillRect/>
+          </a:stretch>
+        </p:blipFill>
+        <p:spPr>
+          <a:xfrm>
+            <a:off x="435930" y="1783169"/>
+            <a:ext cx="11395988" cy="1250588"/>
+          </a:xfrm>
+          <a:prstGeom prst="rect">
+            <a:avLst/>
+          </a:prstGeom>
+        </p:spPr>
+      </p:pic>
+      <p:sp>
+        <p:nvSpPr>
+          <p:cNvPr id="10" name="TextBox 9">
+            <a:extLst>
+              <a:ext uri="{FF2B5EF4-FFF2-40B4-BE49-F238E27FC236}">
+                <a16:creationId xmlns:a16="http://schemas.microsoft.com/office/drawing/2014/main" id="{231DB2CE-0A75-1070-8519-D182D4A11BC4}"/>
+              </a:ext>
+            </a:extLst>
+          </p:cNvPr>
           <p:cNvSpPr txBox="1"/>
           <p:nvPr/>
         </p:nvSpPr>
         <p:spPr>
           <a:xfrm>
-            <a:off x="640080" y="4937760"/>
+            <a:off x="512747" y="4076891"/>
+            <a:ext cx="10291273" cy="784830"/>
+          </a:xfrm>
+          <a:prstGeom prst="rect">
+            <a:avLst/>
+          </a:prstGeom>
+          <a:noFill/>
+        </p:spPr>
+        <p:txBody>
+          <a:bodyPr wrap="square">
+            <a:spAutoFit/>
+          </a:bodyPr>
+          <a:lstStyle/>
+          <a:p>
+            <a:pPr algn="ctr"/>
+            <a:r>
+              <a:rPr lang="en-US" sz="4500" b="1" dirty="0">
+                <a:solidFill>
+                  <a:srgbClr val="242852"/>
+                </a:solidFill>
+                <a:latin typeface="Calibri"/>
+              </a:rPr>
+              <a:t>Main </a:t>
+            </a:r>
+            <a:r>
+              <a:rPr lang="ru-RU" sz="4500" b="1" dirty="0">
+                <a:solidFill>
+                  <a:srgbClr val="242852"/>
+                </a:solidFill>
+                <a:latin typeface="Calibri"/>
+              </a:rPr>
+              <a:t>лег -</a:t>
+            </a:r>
+            <a:r>
+              <a:rPr lang="en-US" sz="4500" b="1" dirty="0">
+                <a:solidFill>
+                  <a:srgbClr val="242852"/>
+                </a:solidFill>
+                <a:latin typeface="Calibri"/>
+              </a:rPr>
+              <a:t>&gt; </a:t>
+            </a:r>
+            <a:r>
+              <a:rPr lang="ru-RU" sz="4500" b="1">
+                <a:solidFill>
+                  <a:srgbClr val="242852"/>
+                </a:solidFill>
+                <a:latin typeface="Calibri"/>
+              </a:rPr>
+              <a:t>вынужденный простой</a:t>
+            </a:r>
+            <a:endParaRPr lang="ru-RU" sz="4500" b="1" dirty="0">
+              <a:solidFill>
+                <a:srgbClr val="242852"/>
+              </a:solidFill>
+              <a:latin typeface="Calibri"/>
+            </a:endParaRPr>
+          </a:p>
+        </p:txBody>
+      </p:sp>
+    </p:spTree>
+  </p:cSld>
+  <p:clrMapOvr>
+    <a:masterClrMapping/>
+  </p:clrMapOvr>
+</p:sld>
+</file>
+
+<file path=ppt/slides/slide18.xml><?xml version="1.0" encoding="utf-8"?>
+<p:sld xmlns:a="http://schemas.openxmlformats.org/drawingml/2006/main" xmlns:r="http://schemas.openxmlformats.org/officeDocument/2006/relationships" xmlns:p="http://schemas.openxmlformats.org/presentationml/2006/main">
+  <p:cSld>
+    <p:spTree>
+      <p:nvGrpSpPr>
+        <p:cNvPr id="1" name=""/>
+        <p:cNvGrpSpPr/>
+        <p:nvPr/>
+      </p:nvGrpSpPr>
+      <p:grpSpPr>
+        <a:xfrm>
+          <a:off x="0" y="0"/>
+          <a:ext cx="0" cy="0"/>
+          <a:chOff x="0" y="0"/>
+          <a:chExt cx="0" cy="0"/>
+        </a:xfrm>
+      </p:grpSpPr>
+      <p:sp>
+        <p:nvSpPr>
+          <p:cNvPr id="2" name="Title 1"/>
+          <p:cNvSpPr>
+            <a:spLocks noGrp="1"/>
+          </p:cNvSpPr>
+          <p:nvPr>
+            <p:ph type="title"/>
+          </p:nvPr>
+        </p:nvSpPr>
+        <p:spPr/>
+        <p:txBody>
+          <a:bodyPr/>
+          <a:lstStyle/>
+          <a:p>
+            <a:pPr algn="l"/>
+            <a:r>
+              <a:rPr sz="3600" b="1">
+                <a:solidFill>
+                  <a:srgbClr val="242852"/>
+                </a:solidFill>
+                <a:latin typeface="Calibri Light"/>
+              </a:rPr>
+              <a:t>Путь фичи: идея → прод</a:t>
+            </a:r>
+          </a:p>
+        </p:txBody>
+      </p:sp>
+      <p:sp>
+        <p:nvSpPr>
+          <p:cNvPr id="3" name="Rounded Rectangle 2"/>
+          <p:cNvSpPr/>
+          <p:nvPr/>
+        </p:nvSpPr>
+        <p:spPr>
+          <a:xfrm>
+            <a:off x="640080" y="1554480"/>
+            <a:ext cx="1470660" cy="1737360"/>
+          </a:xfrm>
+          <a:prstGeom prst="roundRect">
+            <a:avLst/>
+          </a:prstGeom>
+          <a:solidFill>
+            <a:srgbClr val="242852"/>
+          </a:solidFill>
+          <a:ln>
+            <a:noFill/>
+          </a:ln>
+        </p:spPr>
+        <p:style>
+          <a:lnRef idx="1">
+            <a:schemeClr val="accent1"/>
+          </a:lnRef>
+          <a:fillRef idx="3">
+            <a:schemeClr val="accent1"/>
+          </a:fillRef>
+          <a:effectRef idx="2">
+            <a:schemeClr val="accent1"/>
+          </a:effectRef>
+          <a:fontRef idx="minor">
+            <a:schemeClr val="lt1"/>
+          </a:fontRef>
+        </p:style>
+        <p:txBody>
+          <a:bodyPr wrap="square" rtlCol="0" anchor="ctr"/>
+          <a:lstStyle/>
+          <a:p>
+            <a:pPr algn="ctr"/>
+            <a:r>
+              <a:rPr sz="1800" b="1">
+                <a:solidFill>
+                  <a:srgbClr val="FFFFFF"/>
+                </a:solidFill>
+                <a:latin typeface="Calibri"/>
+              </a:rPr>
+              <a:t>Идея</a:t>
+            </a:r>
+          </a:p>
+          <a:p>
+            <a:pPr algn="ctr">
+              <a:spcBef>
+                <a:spcPts val="800"/>
+              </a:spcBef>
+            </a:pPr>
+            <a:r>
+              <a:rPr sz="1300">
+                <a:solidFill>
+                  <a:srgbClr val="FFFFFF"/>
+                </a:solidFill>
+                <a:latin typeface="Calibri"/>
+              </a:rPr>
+              <a:t>issue</a:t>
+            </a:r>
+          </a:p>
+        </p:txBody>
+      </p:sp>
+      <p:sp>
+        <p:nvSpPr>
+          <p:cNvPr id="4" name="Right Arrow 3"/>
+          <p:cNvSpPr/>
+          <p:nvPr/>
+        </p:nvSpPr>
+        <p:spPr>
+          <a:xfrm>
+            <a:off x="2092452" y="2194560"/>
+            <a:ext cx="457200" cy="457200"/>
+          </a:xfrm>
+          <a:prstGeom prst="rightArrow">
+            <a:avLst/>
+          </a:prstGeom>
+          <a:solidFill>
+            <a:srgbClr val="242852"/>
+          </a:solidFill>
+          <a:ln>
+            <a:noFill/>
+          </a:ln>
+        </p:spPr>
+        <p:style>
+          <a:lnRef idx="1">
+            <a:schemeClr val="accent1"/>
+          </a:lnRef>
+          <a:fillRef idx="3">
+            <a:schemeClr val="accent1"/>
+          </a:fillRef>
+          <a:effectRef idx="2">
+            <a:schemeClr val="accent1"/>
+          </a:effectRef>
+          <a:fontRef idx="minor">
+            <a:schemeClr val="lt1"/>
+          </a:fontRef>
+        </p:style>
+        <p:txBody>
+          <a:bodyPr rtlCol="0" anchor="ctr"/>
+          <a:lstStyle/>
+          <a:p>
+            <a:pPr algn="ctr"/>
+            <a:endParaRPr/>
+          </a:p>
+        </p:txBody>
+      </p:sp>
+      <p:sp>
+        <p:nvSpPr>
+          <p:cNvPr id="5" name="Rounded Rectangle 4"/>
+          <p:cNvSpPr/>
+          <p:nvPr/>
+        </p:nvSpPr>
+        <p:spPr>
+          <a:xfrm>
+            <a:off x="2522220" y="1554480"/>
+            <a:ext cx="1470660" cy="1737360"/>
+          </a:xfrm>
+          <a:prstGeom prst="roundRect">
+            <a:avLst/>
+          </a:prstGeom>
+          <a:solidFill>
+            <a:srgbClr val="4A66AC"/>
+          </a:solidFill>
+          <a:ln>
+            <a:noFill/>
+          </a:ln>
+        </p:spPr>
+        <p:style>
+          <a:lnRef idx="1">
+            <a:schemeClr val="accent1"/>
+          </a:lnRef>
+          <a:fillRef idx="3">
+            <a:schemeClr val="accent1"/>
+          </a:fillRef>
+          <a:effectRef idx="2">
+            <a:schemeClr val="accent1"/>
+          </a:effectRef>
+          <a:fontRef idx="minor">
+            <a:schemeClr val="lt1"/>
+          </a:fontRef>
+        </p:style>
+        <p:txBody>
+          <a:bodyPr wrap="square" rtlCol="0" anchor="ctr"/>
+          <a:lstStyle/>
+          <a:p>
+            <a:pPr algn="ctr"/>
+            <a:r>
+              <a:rPr sz="1800" b="1">
+                <a:solidFill>
+                  <a:srgbClr val="FFFFFF"/>
+                </a:solidFill>
+                <a:latin typeface="Calibri"/>
+              </a:rPr>
+              <a:t>Ветка</a:t>
+            </a:r>
+          </a:p>
+          <a:p>
+            <a:pPr algn="ctr">
+              <a:spcBef>
+                <a:spcPts val="800"/>
+              </a:spcBef>
+            </a:pPr>
+            <a:r>
+              <a:rPr sz="1300">
+                <a:solidFill>
+                  <a:srgbClr val="FFFFFF"/>
+                </a:solidFill>
+                <a:latin typeface="Calibri"/>
+              </a:rPr>
+              <a:t>feature/*</a:t>
+            </a:r>
+          </a:p>
+        </p:txBody>
+      </p:sp>
+      <p:sp>
+        <p:nvSpPr>
+          <p:cNvPr id="6" name="Right Arrow 5"/>
+          <p:cNvSpPr/>
+          <p:nvPr/>
+        </p:nvSpPr>
+        <p:spPr>
+          <a:xfrm>
+            <a:off x="3974592" y="2194560"/>
+            <a:ext cx="457200" cy="457200"/>
+          </a:xfrm>
+          <a:prstGeom prst="rightArrow">
+            <a:avLst/>
+          </a:prstGeom>
+          <a:solidFill>
+            <a:srgbClr val="242852"/>
+          </a:solidFill>
+          <a:ln>
+            <a:noFill/>
+          </a:ln>
+        </p:spPr>
+        <p:style>
+          <a:lnRef idx="1">
+            <a:schemeClr val="accent1"/>
+          </a:lnRef>
+          <a:fillRef idx="3">
+            <a:schemeClr val="accent1"/>
+          </a:fillRef>
+          <a:effectRef idx="2">
+            <a:schemeClr val="accent1"/>
+          </a:effectRef>
+          <a:fontRef idx="minor">
+            <a:schemeClr val="lt1"/>
+          </a:fontRef>
+        </p:style>
+        <p:txBody>
+          <a:bodyPr rtlCol="0" anchor="ctr"/>
+          <a:lstStyle/>
+          <a:p>
+            <a:pPr algn="ctr"/>
+            <a:endParaRPr/>
+          </a:p>
+        </p:txBody>
+      </p:sp>
+      <p:sp>
+        <p:nvSpPr>
+          <p:cNvPr id="7" name="Rounded Rectangle 6"/>
+          <p:cNvSpPr/>
+          <p:nvPr/>
+        </p:nvSpPr>
+        <p:spPr>
+          <a:xfrm>
+            <a:off x="4404360" y="1554480"/>
+            <a:ext cx="1470660" cy="1737360"/>
+          </a:xfrm>
+          <a:prstGeom prst="roundRect">
+            <a:avLst/>
+          </a:prstGeom>
+          <a:solidFill>
+            <a:srgbClr val="5AA2AE"/>
+          </a:solidFill>
+          <a:ln>
+            <a:noFill/>
+          </a:ln>
+        </p:spPr>
+        <p:style>
+          <a:lnRef idx="1">
+            <a:schemeClr val="accent1"/>
+          </a:lnRef>
+          <a:fillRef idx="3">
+            <a:schemeClr val="accent1"/>
+          </a:fillRef>
+          <a:effectRef idx="2">
+            <a:schemeClr val="accent1"/>
+          </a:effectRef>
+          <a:fontRef idx="minor">
+            <a:schemeClr val="lt1"/>
+          </a:fontRef>
+        </p:style>
+        <p:txBody>
+          <a:bodyPr wrap="square" rtlCol="0" anchor="ctr"/>
+          <a:lstStyle/>
+          <a:p>
+            <a:pPr algn="ctr"/>
+            <a:r>
+              <a:rPr sz="1800" b="1">
+                <a:solidFill>
+                  <a:srgbClr val="FFFFFF"/>
+                </a:solidFill>
+                <a:latin typeface="Calibri"/>
+              </a:rPr>
+              <a:t>Код</a:t>
+            </a:r>
+          </a:p>
+          <a:p>
+            <a:pPr algn="ctr">
+              <a:spcBef>
+                <a:spcPts val="800"/>
+              </a:spcBef>
+            </a:pPr>
+            <a:r>
+              <a:rPr sz="1300">
+                <a:solidFill>
+                  <a:srgbClr val="FFFFFF"/>
+                </a:solidFill>
+                <a:latin typeface="Calibri"/>
+              </a:rPr>
+              <a:t>commit</a:t>
+            </a:r>
+          </a:p>
+        </p:txBody>
+      </p:sp>
+      <p:sp>
+        <p:nvSpPr>
+          <p:cNvPr id="8" name="Right Arrow 7"/>
+          <p:cNvSpPr/>
+          <p:nvPr/>
+        </p:nvSpPr>
+        <p:spPr>
+          <a:xfrm>
+            <a:off x="5856732" y="2194560"/>
+            <a:ext cx="457200" cy="457200"/>
+          </a:xfrm>
+          <a:prstGeom prst="rightArrow">
+            <a:avLst/>
+          </a:prstGeom>
+          <a:solidFill>
+            <a:srgbClr val="242852"/>
+          </a:solidFill>
+          <a:ln>
+            <a:noFill/>
+          </a:ln>
+        </p:spPr>
+        <p:style>
+          <a:lnRef idx="1">
+            <a:schemeClr val="accent1"/>
+          </a:lnRef>
+          <a:fillRef idx="3">
+            <a:schemeClr val="accent1"/>
+          </a:fillRef>
+          <a:effectRef idx="2">
+            <a:schemeClr val="accent1"/>
+          </a:effectRef>
+          <a:fontRef idx="minor">
+            <a:schemeClr val="lt1"/>
+          </a:fontRef>
+        </p:style>
+        <p:txBody>
+          <a:bodyPr rtlCol="0" anchor="ctr"/>
+          <a:lstStyle/>
+          <a:p>
+            <a:pPr algn="ctr"/>
+            <a:endParaRPr/>
+          </a:p>
+        </p:txBody>
+      </p:sp>
+      <p:sp>
+        <p:nvSpPr>
+          <p:cNvPr id="9" name="Rounded Rectangle 8"/>
+          <p:cNvSpPr/>
+          <p:nvPr/>
+        </p:nvSpPr>
+        <p:spPr>
+          <a:xfrm>
+            <a:off x="6286500" y="1554480"/>
+            <a:ext cx="1470660" cy="1737360"/>
+          </a:xfrm>
+          <a:prstGeom prst="roundRect">
+            <a:avLst/>
+          </a:prstGeom>
+          <a:solidFill>
+            <a:srgbClr val="297FD5"/>
+          </a:solidFill>
+          <a:ln>
+            <a:noFill/>
+          </a:ln>
+        </p:spPr>
+        <p:style>
+          <a:lnRef idx="1">
+            <a:schemeClr val="accent1"/>
+          </a:lnRef>
+          <a:fillRef idx="3">
+            <a:schemeClr val="accent1"/>
+          </a:fillRef>
+          <a:effectRef idx="2">
+            <a:schemeClr val="accent1"/>
+          </a:effectRef>
+          <a:fontRef idx="minor">
+            <a:schemeClr val="lt1"/>
+          </a:fontRef>
+        </p:style>
+        <p:txBody>
+          <a:bodyPr wrap="square" rtlCol="0" anchor="ctr"/>
+          <a:lstStyle/>
+          <a:p>
+            <a:pPr algn="ctr"/>
+            <a:r>
+              <a:rPr sz="1800" b="1">
+                <a:solidFill>
+                  <a:srgbClr val="FFFFFF"/>
+                </a:solidFill>
+                <a:latin typeface="Calibri"/>
+              </a:rPr>
+              <a:t>PR</a:t>
+            </a:r>
+          </a:p>
+          <a:p>
+            <a:pPr algn="ctr">
+              <a:spcBef>
+                <a:spcPts val="800"/>
+              </a:spcBef>
+            </a:pPr>
+            <a:r>
+              <a:rPr sz="1300">
+                <a:solidFill>
+                  <a:srgbClr val="FFFFFF"/>
+                </a:solidFill>
+                <a:latin typeface="Calibri"/>
+              </a:rPr>
+              <a:t>review</a:t>
+            </a:r>
+          </a:p>
+        </p:txBody>
+      </p:sp>
+      <p:sp>
+        <p:nvSpPr>
+          <p:cNvPr id="10" name="Right Arrow 9"/>
+          <p:cNvSpPr/>
+          <p:nvPr/>
+        </p:nvSpPr>
+        <p:spPr>
+          <a:xfrm>
+            <a:off x="7738872" y="2194560"/>
+            <a:ext cx="457200" cy="457200"/>
+          </a:xfrm>
+          <a:prstGeom prst="rightArrow">
+            <a:avLst/>
+          </a:prstGeom>
+          <a:solidFill>
+            <a:srgbClr val="242852"/>
+          </a:solidFill>
+          <a:ln>
+            <a:noFill/>
+          </a:ln>
+        </p:spPr>
+        <p:style>
+          <a:lnRef idx="1">
+            <a:schemeClr val="accent1"/>
+          </a:lnRef>
+          <a:fillRef idx="3">
+            <a:schemeClr val="accent1"/>
+          </a:fillRef>
+          <a:effectRef idx="2">
+            <a:schemeClr val="accent1"/>
+          </a:effectRef>
+          <a:fontRef idx="minor">
+            <a:schemeClr val="lt1"/>
+          </a:fontRef>
+        </p:style>
+        <p:txBody>
+          <a:bodyPr rtlCol="0" anchor="ctr"/>
+          <a:lstStyle/>
+          <a:p>
+            <a:pPr algn="ctr"/>
+            <a:endParaRPr/>
+          </a:p>
+        </p:txBody>
+      </p:sp>
+      <p:sp>
+        <p:nvSpPr>
+          <p:cNvPr id="11" name="Rounded Rectangle 10"/>
+          <p:cNvSpPr/>
+          <p:nvPr/>
+        </p:nvSpPr>
+        <p:spPr>
+          <a:xfrm>
+            <a:off x="8168640" y="1554480"/>
+            <a:ext cx="1470660" cy="1737360"/>
+          </a:xfrm>
+          <a:prstGeom prst="roundRect">
+            <a:avLst/>
+          </a:prstGeom>
+          <a:solidFill>
+            <a:srgbClr val="629DD1"/>
+          </a:solidFill>
+          <a:ln>
+            <a:noFill/>
+          </a:ln>
+        </p:spPr>
+        <p:style>
+          <a:lnRef idx="1">
+            <a:schemeClr val="accent1"/>
+          </a:lnRef>
+          <a:fillRef idx="3">
+            <a:schemeClr val="accent1"/>
+          </a:fillRef>
+          <a:effectRef idx="2">
+            <a:schemeClr val="accent1"/>
+          </a:effectRef>
+          <a:fontRef idx="minor">
+            <a:schemeClr val="lt1"/>
+          </a:fontRef>
+        </p:style>
+        <p:txBody>
+          <a:bodyPr wrap="square" rtlCol="0" anchor="ctr"/>
+          <a:lstStyle/>
+          <a:p>
+            <a:pPr algn="ctr"/>
+            <a:r>
+              <a:rPr sz="1800" b="1">
+                <a:solidFill>
+                  <a:srgbClr val="FFFFFF"/>
+                </a:solidFill>
+                <a:latin typeface="Calibri"/>
+              </a:rPr>
+              <a:t>Stage</a:t>
+            </a:r>
+          </a:p>
+          <a:p>
+            <a:pPr algn="ctr">
+              <a:spcBef>
+                <a:spcPts val="800"/>
+              </a:spcBef>
+            </a:pPr>
+            <a:r>
+              <a:rPr sz="1300">
+                <a:solidFill>
+                  <a:srgbClr val="FFFFFF"/>
+                </a:solidFill>
+                <a:latin typeface="Calibri"/>
+              </a:rPr>
+              <a:t>проверка</a:t>
+            </a:r>
+          </a:p>
+        </p:txBody>
+      </p:sp>
+      <p:sp>
+        <p:nvSpPr>
+          <p:cNvPr id="12" name="Right Arrow 11"/>
+          <p:cNvSpPr/>
+          <p:nvPr/>
+        </p:nvSpPr>
+        <p:spPr>
+          <a:xfrm>
+            <a:off x="9621012" y="2194560"/>
+            <a:ext cx="457200" cy="457200"/>
+          </a:xfrm>
+          <a:prstGeom prst="rightArrow">
+            <a:avLst/>
+          </a:prstGeom>
+          <a:solidFill>
+            <a:srgbClr val="242852"/>
+          </a:solidFill>
+          <a:ln>
+            <a:noFill/>
+          </a:ln>
+        </p:spPr>
+        <p:style>
+          <a:lnRef idx="1">
+            <a:schemeClr val="accent1"/>
+          </a:lnRef>
+          <a:fillRef idx="3">
+            <a:schemeClr val="accent1"/>
+          </a:fillRef>
+          <a:effectRef idx="2">
+            <a:schemeClr val="accent1"/>
+          </a:effectRef>
+          <a:fontRef idx="minor">
+            <a:schemeClr val="lt1"/>
+          </a:fontRef>
+        </p:style>
+        <p:txBody>
+          <a:bodyPr rtlCol="0" anchor="ctr"/>
+          <a:lstStyle/>
+          <a:p>
+            <a:pPr algn="ctr"/>
+            <a:endParaRPr/>
+          </a:p>
+        </p:txBody>
+      </p:sp>
+      <p:sp>
+        <p:nvSpPr>
+          <p:cNvPr id="13" name="Rounded Rectangle 12"/>
+          <p:cNvSpPr/>
+          <p:nvPr/>
+        </p:nvSpPr>
+        <p:spPr>
+          <a:xfrm>
+            <a:off x="10050780" y="1554480"/>
+            <a:ext cx="1470660" cy="1737360"/>
+          </a:xfrm>
+          <a:prstGeom prst="roundRect">
+            <a:avLst/>
+          </a:prstGeom>
+          <a:solidFill>
+            <a:srgbClr val="242852"/>
+          </a:solidFill>
+          <a:ln>
+            <a:noFill/>
+          </a:ln>
+        </p:spPr>
+        <p:style>
+          <a:lnRef idx="1">
+            <a:schemeClr val="accent1"/>
+          </a:lnRef>
+          <a:fillRef idx="3">
+            <a:schemeClr val="accent1"/>
+          </a:fillRef>
+          <a:effectRef idx="2">
+            <a:schemeClr val="accent1"/>
+          </a:effectRef>
+          <a:fontRef idx="minor">
+            <a:schemeClr val="lt1"/>
+          </a:fontRef>
+        </p:style>
+        <p:txBody>
+          <a:bodyPr wrap="square" rtlCol="0" anchor="ctr"/>
+          <a:lstStyle/>
+          <a:p>
+            <a:pPr algn="ctr"/>
+            <a:r>
+              <a:rPr sz="1800" b="1">
+                <a:solidFill>
+                  <a:srgbClr val="FFFFFF"/>
+                </a:solidFill>
+                <a:latin typeface="Calibri"/>
+              </a:rPr>
+              <a:t>Прод</a:t>
+            </a:r>
+          </a:p>
+          <a:p>
+            <a:pPr algn="ctr">
+              <a:spcBef>
+                <a:spcPts val="800"/>
+              </a:spcBef>
+            </a:pPr>
+            <a:r>
+              <a:rPr sz="1300">
+                <a:solidFill>
+                  <a:srgbClr val="FFFFFF"/>
+                </a:solidFill>
+                <a:latin typeface="Calibri"/>
+              </a:rPr>
+              <a:t>merge</a:t>
+            </a:r>
+          </a:p>
+        </p:txBody>
+      </p:sp>
+      <p:sp>
+        <p:nvSpPr>
+          <p:cNvPr id="14" name="TextBox 13"/>
+          <p:cNvSpPr txBox="1"/>
+          <p:nvPr/>
+        </p:nvSpPr>
+        <p:spPr>
+          <a:xfrm>
+            <a:off x="640080" y="3749039"/>
             <a:ext cx="10881360" cy="731520"/>
           </a:xfrm>
           <a:prstGeom prst="rect">
@@ -8855,13 +10046,378 @@
           <a:p>
             <a:pPr algn="ctr"/>
             <a:r>
-              <a:rPr sz="1600" b="0">
-                <a:solidFill>
-                  <a:srgbClr val="7F8FA9"/>
+              <a:rPr sz="1800" b="1">
+                <a:solidFill>
+                  <a:srgbClr val="242852"/>
                 </a:solidFill>
                 <a:latin typeface="Calibri"/>
               </a:rPr>
-              <a:t>repo: github.com/&lt;твой-ник&gt;/&lt;проект&gt;  •  &lt;имя&gt;  •  2026</a:t>
+              <a:t>ни один шаг не пропускаем  •  каждый шаг виден в GitHub</a:t>
+            </a:r>
+          </a:p>
+        </p:txBody>
+      </p:sp>
+      <p:sp>
+        <p:nvSpPr>
+          <p:cNvPr id="15" name="Rounded Rectangle 14"/>
+          <p:cNvSpPr/>
+          <p:nvPr/>
+        </p:nvSpPr>
+        <p:spPr>
+          <a:xfrm>
+            <a:off x="640080" y="4663440"/>
+            <a:ext cx="10881360" cy="1371600"/>
+          </a:xfrm>
+          <a:prstGeom prst="roundRect">
+            <a:avLst/>
+          </a:prstGeom>
+          <a:solidFill>
+            <a:srgbClr val="E8EDF4"/>
+          </a:solidFill>
+          <a:ln w="25400">
+            <a:solidFill>
+              <a:srgbClr val="7F8FA9"/>
+            </a:solidFill>
+          </a:ln>
+        </p:spPr>
+        <p:style>
+          <a:lnRef idx="1">
+            <a:schemeClr val="accent1"/>
+          </a:lnRef>
+          <a:fillRef idx="3">
+            <a:schemeClr val="accent1"/>
+          </a:fillRef>
+          <a:effectRef idx="2">
+            <a:schemeClr val="accent1"/>
+          </a:effectRef>
+          <a:fontRef idx="minor">
+            <a:schemeClr val="lt1"/>
+          </a:fontRef>
+        </p:style>
+        <p:txBody>
+          <a:bodyPr wrap="square" rtlCol="0" anchor="ctr"/>
+          <a:lstStyle/>
+          <a:p>
+            <a:pPr algn="ctr"/>
+            <a:r>
+              <a:rPr sz="1400">
+                <a:solidFill>
+                  <a:srgbClr val="242852"/>
+                </a:solidFill>
+                <a:latin typeface="Calibri"/>
+              </a:rPr>
+              <a:t>СКРИНШОТ 5  →  доска Issues: To Do → In Progress → Done (см. Ш5)</a:t>
+            </a:r>
+          </a:p>
+        </p:txBody>
+      </p:sp>
+    </p:spTree>
+  </p:cSld>
+  <p:clrMapOvr>
+    <a:masterClrMapping/>
+  </p:clrMapOvr>
+</p:sld>
+</file>
+
+<file path=ppt/slides/slide19.xml><?xml version="1.0" encoding="utf-8"?>
+<p:sld xmlns:a="http://schemas.openxmlformats.org/drawingml/2006/main" xmlns:r="http://schemas.openxmlformats.org/officeDocument/2006/relationships" xmlns:p="http://schemas.openxmlformats.org/presentationml/2006/main">
+  <p:cSld>
+    <p:spTree>
+      <p:nvGrpSpPr>
+        <p:cNvPr id="1" name=""/>
+        <p:cNvGrpSpPr/>
+        <p:nvPr/>
+      </p:nvGrpSpPr>
+      <p:grpSpPr>
+        <a:xfrm>
+          <a:off x="0" y="0"/>
+          <a:ext cx="0" cy="0"/>
+          <a:chOff x="0" y="0"/>
+          <a:chExt cx="0" cy="0"/>
+        </a:xfrm>
+      </p:grpSpPr>
+      <p:sp>
+        <p:nvSpPr>
+          <p:cNvPr id="2" name="Title 1"/>
+          <p:cNvSpPr>
+            <a:spLocks noGrp="1"/>
+          </p:cNvSpPr>
+          <p:nvPr>
+            <p:ph type="title"/>
+          </p:nvPr>
+        </p:nvSpPr>
+        <p:spPr/>
+        <p:txBody>
+          <a:bodyPr/>
+          <a:lstStyle/>
+          <a:p>
+            <a:pPr algn="l"/>
+            <a:r>
+              <a:rPr sz="4000" b="1">
+                <a:solidFill>
+                  <a:srgbClr val="242852"/>
+                </a:solidFill>
+                <a:latin typeface="Calibri Light"/>
+              </a:rPr>
+              <a:t>dev → stage → prod</a:t>
+            </a:r>
+          </a:p>
+        </p:txBody>
+      </p:sp>
+      <p:sp>
+        <p:nvSpPr>
+          <p:cNvPr id="3" name="Rounded Rectangle 2"/>
+          <p:cNvSpPr/>
+          <p:nvPr/>
+        </p:nvSpPr>
+        <p:spPr>
+          <a:xfrm>
+            <a:off x="640080" y="1463040"/>
+            <a:ext cx="3383280" cy="1828800"/>
+          </a:xfrm>
+          <a:prstGeom prst="roundRect">
+            <a:avLst/>
+          </a:prstGeom>
+          <a:solidFill>
+            <a:srgbClr val="7F8FA9"/>
+          </a:solidFill>
+          <a:ln>
+            <a:noFill/>
+          </a:ln>
+        </p:spPr>
+        <p:style>
+          <a:lnRef idx="1">
+            <a:schemeClr val="accent1"/>
+          </a:lnRef>
+          <a:fillRef idx="3">
+            <a:schemeClr val="accent1"/>
+          </a:fillRef>
+          <a:effectRef idx="2">
+            <a:schemeClr val="accent1"/>
+          </a:effectRef>
+          <a:fontRef idx="minor">
+            <a:schemeClr val="lt1"/>
+          </a:fontRef>
+        </p:style>
+        <p:txBody>
+          <a:bodyPr wrap="square" rtlCol="0" anchor="ctr"/>
+          <a:lstStyle/>
+          <a:p>
+            <a:pPr algn="ctr"/>
+            <a:r>
+              <a:rPr sz="2200" b="1">
+                <a:solidFill>
+                  <a:srgbClr val="FFFFFF"/>
+                </a:solidFill>
+                <a:latin typeface="Calibri"/>
+              </a:rPr>
+              <a:t>dev</a:t>
+            </a:r>
+          </a:p>
+          <a:p>
+            <a:pPr algn="ctr">
+              <a:spcBef>
+                <a:spcPts val="800"/>
+              </a:spcBef>
+            </a:pPr>
+            <a:r>
+              <a:rPr sz="1400">
+                <a:solidFill>
+                  <a:srgbClr val="FFFFFF"/>
+                </a:solidFill>
+                <a:latin typeface="Calibri"/>
+              </a:rPr>
+              <a:t>ломать можно</a:t>
+            </a:r>
+          </a:p>
+        </p:txBody>
+      </p:sp>
+      <p:sp>
+        <p:nvSpPr>
+          <p:cNvPr id="4" name="Rounded Rectangle 3"/>
+          <p:cNvSpPr/>
+          <p:nvPr/>
+        </p:nvSpPr>
+        <p:spPr>
+          <a:xfrm>
+            <a:off x="4389120" y="1463040"/>
+            <a:ext cx="3383280" cy="1828800"/>
+          </a:xfrm>
+          <a:prstGeom prst="roundRect">
+            <a:avLst/>
+          </a:prstGeom>
+          <a:solidFill>
+            <a:srgbClr val="5AA2AE"/>
+          </a:solidFill>
+          <a:ln>
+            <a:noFill/>
+          </a:ln>
+        </p:spPr>
+        <p:style>
+          <a:lnRef idx="1">
+            <a:schemeClr val="accent1"/>
+          </a:lnRef>
+          <a:fillRef idx="3">
+            <a:schemeClr val="accent1"/>
+          </a:fillRef>
+          <a:effectRef idx="2">
+            <a:schemeClr val="accent1"/>
+          </a:effectRef>
+          <a:fontRef idx="minor">
+            <a:schemeClr val="lt1"/>
+          </a:fontRef>
+        </p:style>
+        <p:txBody>
+          <a:bodyPr wrap="square" rtlCol="0" anchor="ctr"/>
+          <a:lstStyle/>
+          <a:p>
+            <a:pPr algn="ctr"/>
+            <a:r>
+              <a:rPr sz="2200" b="1">
+                <a:solidFill>
+                  <a:srgbClr val="FFFFFF"/>
+                </a:solidFill>
+                <a:latin typeface="Calibri"/>
+              </a:rPr>
+              <a:t>stage</a:t>
+            </a:r>
+          </a:p>
+          <a:p>
+            <a:pPr algn="ctr">
+              <a:spcBef>
+                <a:spcPts val="800"/>
+              </a:spcBef>
+            </a:pPr>
+            <a:r>
+              <a:rPr sz="1400">
+                <a:solidFill>
+                  <a:srgbClr val="FFFFFF"/>
+                </a:solidFill>
+                <a:latin typeface="Calibri"/>
+              </a:rPr>
+              <a:t>как прод, но не прод</a:t>
+            </a:r>
+          </a:p>
+        </p:txBody>
+      </p:sp>
+      <p:sp>
+        <p:nvSpPr>
+          <p:cNvPr id="5" name="Rounded Rectangle 4"/>
+          <p:cNvSpPr/>
+          <p:nvPr/>
+        </p:nvSpPr>
+        <p:spPr>
+          <a:xfrm>
+            <a:off x="8138160" y="1463040"/>
+            <a:ext cx="3383280" cy="1828800"/>
+          </a:xfrm>
+          <a:prstGeom prst="roundRect">
+            <a:avLst/>
+          </a:prstGeom>
+          <a:solidFill>
+            <a:srgbClr val="242852"/>
+          </a:solidFill>
+          <a:ln>
+            <a:noFill/>
+          </a:ln>
+        </p:spPr>
+        <p:style>
+          <a:lnRef idx="1">
+            <a:schemeClr val="accent1"/>
+          </a:lnRef>
+          <a:fillRef idx="3">
+            <a:schemeClr val="accent1"/>
+          </a:fillRef>
+          <a:effectRef idx="2">
+            <a:schemeClr val="accent1"/>
+          </a:effectRef>
+          <a:fontRef idx="minor">
+            <a:schemeClr val="lt1"/>
+          </a:fontRef>
+        </p:style>
+        <p:txBody>
+          <a:bodyPr wrap="square" rtlCol="0" anchor="ctr"/>
+          <a:lstStyle/>
+          <a:p>
+            <a:pPr algn="ctr"/>
+            <a:r>
+              <a:rPr sz="2200" b="1">
+                <a:solidFill>
+                  <a:srgbClr val="FFFFFF"/>
+                </a:solidFill>
+                <a:latin typeface="Calibri"/>
+              </a:rPr>
+              <a:t>prod</a:t>
+            </a:r>
+          </a:p>
+          <a:p>
+            <a:pPr algn="ctr">
+              <a:spcBef>
+                <a:spcPts val="800"/>
+              </a:spcBef>
+            </a:pPr>
+            <a:r>
+              <a:rPr sz="1400">
+                <a:solidFill>
+                  <a:srgbClr val="FFFFFF"/>
+                </a:solidFill>
+                <a:latin typeface="Calibri"/>
+              </a:rPr>
+              <a:t>трогаем осторожно</a:t>
+            </a:r>
+          </a:p>
+        </p:txBody>
+      </p:sp>
+      <p:sp>
+        <p:nvSpPr>
+          <p:cNvPr id="6" name="Rounded Rectangle 5"/>
+          <p:cNvSpPr/>
+          <p:nvPr/>
+        </p:nvSpPr>
+        <p:spPr>
+          <a:xfrm>
+            <a:off x="640080" y="3657600"/>
+            <a:ext cx="10881360" cy="2377440"/>
+          </a:xfrm>
+          <a:prstGeom prst="roundRect">
+            <a:avLst/>
+          </a:prstGeom>
+          <a:solidFill>
+            <a:srgbClr val="E8EDF4"/>
+          </a:solidFill>
+          <a:ln w="25400">
+            <a:solidFill>
+              <a:srgbClr val="7F8FA9"/>
+            </a:solidFill>
+          </a:ln>
+        </p:spPr>
+        <p:style>
+          <a:lnRef idx="1">
+            <a:schemeClr val="accent1"/>
+          </a:lnRef>
+          <a:fillRef idx="3">
+            <a:schemeClr val="accent1"/>
+          </a:fillRef>
+          <a:effectRef idx="2">
+            <a:schemeClr val="accent1"/>
+          </a:effectRef>
+          <a:fontRef idx="minor">
+            <a:schemeClr val="lt1"/>
+          </a:fontRef>
+        </p:style>
+        <p:txBody>
+          <a:bodyPr wrap="square" rtlCol="0" anchor="ctr"/>
+          <a:lstStyle/>
+          <a:p>
+            <a:pPr algn="ctr"/>
+            <a:r>
+              <a:rPr sz="1400">
+                <a:solidFill>
+                  <a:srgbClr val="242852"/>
+                </a:solidFill>
+                <a:latin typeface="Calibri"/>
+              </a:rPr>
+              <a:t>СКРИНШОТ 6  →  pipeline: зелёные галочки dev → stage → prod (Actions / GitLab CI, см. Ш6)</a:t>
             </a:r>
           </a:p>
         </p:txBody>
@@ -9200,6 +10756,1342 @@
               </a:solidFill>
               <a:latin typeface="Calibri"/>
             </a:endParaRPr>
+          </a:p>
+        </p:txBody>
+      </p:sp>
+    </p:spTree>
+  </p:cSld>
+  <p:clrMapOvr>
+    <a:masterClrMapping/>
+  </p:clrMapOvr>
+</p:sld>
+</file>
+
+<file path=ppt/slides/slide20.xml><?xml version="1.0" encoding="utf-8"?>
+<p:sld xmlns:a="http://schemas.openxmlformats.org/drawingml/2006/main" xmlns:r="http://schemas.openxmlformats.org/officeDocument/2006/relationships" xmlns:p="http://schemas.openxmlformats.org/presentationml/2006/main">
+  <p:cSld>
+    <p:spTree>
+      <p:nvGrpSpPr>
+        <p:cNvPr id="1" name=""/>
+        <p:cNvGrpSpPr/>
+        <p:nvPr/>
+      </p:nvGrpSpPr>
+      <p:grpSpPr>
+        <a:xfrm>
+          <a:off x="0" y="0"/>
+          <a:ext cx="0" cy="0"/>
+          <a:chOff x="0" y="0"/>
+          <a:chExt cx="0" cy="0"/>
+        </a:xfrm>
+      </p:grpSpPr>
+      <p:sp>
+        <p:nvSpPr>
+          <p:cNvPr id="2" name="Title 1"/>
+          <p:cNvSpPr>
+            <a:spLocks noGrp="1"/>
+          </p:cNvSpPr>
+          <p:nvPr>
+            <p:ph type="title"/>
+          </p:nvPr>
+        </p:nvSpPr>
+        <p:spPr/>
+        <p:txBody>
+          <a:bodyPr/>
+          <a:lstStyle/>
+          <a:p>
+            <a:pPr algn="l"/>
+            <a:r>
+              <a:rPr sz="4000" b="1">
+                <a:solidFill>
+                  <a:srgbClr val="242852"/>
+                </a:solidFill>
+                <a:latin typeface="Calibri Light"/>
+              </a:rPr>
+              <a:t>Pull Request = ворота в main</a:t>
+            </a:r>
+          </a:p>
+        </p:txBody>
+      </p:sp>
+      <p:sp>
+        <p:nvSpPr>
+          <p:cNvPr id="3" name="Rounded Rectangle 2"/>
+          <p:cNvSpPr/>
+          <p:nvPr/>
+        </p:nvSpPr>
+        <p:spPr>
+          <a:xfrm>
+            <a:off x="640080" y="1554480"/>
+            <a:ext cx="2411730" cy="1737360"/>
+          </a:xfrm>
+          <a:prstGeom prst="roundRect">
+            <a:avLst/>
+          </a:prstGeom>
+          <a:solidFill>
+            <a:srgbClr val="4A66AC"/>
+          </a:solidFill>
+          <a:ln>
+            <a:noFill/>
+          </a:ln>
+        </p:spPr>
+        <p:style>
+          <a:lnRef idx="1">
+            <a:schemeClr val="accent1"/>
+          </a:lnRef>
+          <a:fillRef idx="3">
+            <a:schemeClr val="accent1"/>
+          </a:fillRef>
+          <a:effectRef idx="2">
+            <a:schemeClr val="accent1"/>
+          </a:effectRef>
+          <a:fontRef idx="minor">
+            <a:schemeClr val="lt1"/>
+          </a:fontRef>
+        </p:style>
+        <p:txBody>
+          <a:bodyPr wrap="square" rtlCol="0" anchor="ctr"/>
+          <a:lstStyle/>
+          <a:p>
+            <a:pPr algn="ctr"/>
+            <a:r>
+              <a:rPr sz="1800" b="1">
+                <a:solidFill>
+                  <a:srgbClr val="FFFFFF"/>
+                </a:solidFill>
+                <a:latin typeface="Calibri"/>
+              </a:rPr>
+              <a:t>Создай</a:t>
+            </a:r>
+          </a:p>
+          <a:p>
+            <a:pPr algn="ctr">
+              <a:spcBef>
+                <a:spcPts val="800"/>
+              </a:spcBef>
+            </a:pPr>
+            <a:r>
+              <a:rPr sz="1300">
+                <a:solidFill>
+                  <a:srgbClr val="FFFFFF"/>
+                </a:solidFill>
+                <a:latin typeface="Calibri"/>
+              </a:rPr>
+              <a:t>push ветки</a:t>
+            </a:r>
+          </a:p>
+        </p:txBody>
+      </p:sp>
+      <p:sp>
+        <p:nvSpPr>
+          <p:cNvPr id="4" name="Right Arrow 3"/>
+          <p:cNvSpPr/>
+          <p:nvPr/>
+        </p:nvSpPr>
+        <p:spPr>
+          <a:xfrm>
+            <a:off x="3033522" y="2194560"/>
+            <a:ext cx="457200" cy="457200"/>
+          </a:xfrm>
+          <a:prstGeom prst="rightArrow">
+            <a:avLst/>
+          </a:prstGeom>
+          <a:solidFill>
+            <a:srgbClr val="242852"/>
+          </a:solidFill>
+          <a:ln>
+            <a:noFill/>
+          </a:ln>
+        </p:spPr>
+        <p:style>
+          <a:lnRef idx="1">
+            <a:schemeClr val="accent1"/>
+          </a:lnRef>
+          <a:fillRef idx="3">
+            <a:schemeClr val="accent1"/>
+          </a:fillRef>
+          <a:effectRef idx="2">
+            <a:schemeClr val="accent1"/>
+          </a:effectRef>
+          <a:fontRef idx="minor">
+            <a:schemeClr val="lt1"/>
+          </a:fontRef>
+        </p:style>
+        <p:txBody>
+          <a:bodyPr rtlCol="0" anchor="ctr"/>
+          <a:lstStyle/>
+          <a:p>
+            <a:pPr algn="ctr"/>
+            <a:endParaRPr/>
+          </a:p>
+        </p:txBody>
+      </p:sp>
+      <p:sp>
+        <p:nvSpPr>
+          <p:cNvPr id="5" name="Rounded Rectangle 4"/>
+          <p:cNvSpPr/>
+          <p:nvPr/>
+        </p:nvSpPr>
+        <p:spPr>
+          <a:xfrm>
+            <a:off x="3463290" y="1554480"/>
+            <a:ext cx="2411730" cy="1737360"/>
+          </a:xfrm>
+          <a:prstGeom prst="roundRect">
+            <a:avLst/>
+          </a:prstGeom>
+          <a:solidFill>
+            <a:srgbClr val="5AA2AE"/>
+          </a:solidFill>
+          <a:ln>
+            <a:noFill/>
+          </a:ln>
+        </p:spPr>
+        <p:style>
+          <a:lnRef idx="1">
+            <a:schemeClr val="accent1"/>
+          </a:lnRef>
+          <a:fillRef idx="3">
+            <a:schemeClr val="accent1"/>
+          </a:fillRef>
+          <a:effectRef idx="2">
+            <a:schemeClr val="accent1"/>
+          </a:effectRef>
+          <a:fontRef idx="minor">
+            <a:schemeClr val="lt1"/>
+          </a:fontRef>
+        </p:style>
+        <p:txBody>
+          <a:bodyPr wrap="square" rtlCol="0" anchor="ctr"/>
+          <a:lstStyle/>
+          <a:p>
+            <a:pPr algn="ctr"/>
+            <a:r>
+              <a:rPr sz="1800" b="1">
+                <a:solidFill>
+                  <a:srgbClr val="FFFFFF"/>
+                </a:solidFill>
+                <a:latin typeface="Calibri"/>
+              </a:rPr>
+              <a:t>Проверки</a:t>
+            </a:r>
+          </a:p>
+          <a:p>
+            <a:pPr algn="ctr">
+              <a:spcBef>
+                <a:spcPts val="800"/>
+              </a:spcBef>
+            </a:pPr>
+            <a:r>
+              <a:rPr sz="1300">
+                <a:solidFill>
+                  <a:srgbClr val="FFFFFF"/>
+                </a:solidFill>
+                <a:latin typeface="Calibri"/>
+              </a:rPr>
+              <a:t>CI зелёный</a:t>
+            </a:r>
+          </a:p>
+        </p:txBody>
+      </p:sp>
+      <p:sp>
+        <p:nvSpPr>
+          <p:cNvPr id="6" name="Right Arrow 5"/>
+          <p:cNvSpPr/>
+          <p:nvPr/>
+        </p:nvSpPr>
+        <p:spPr>
+          <a:xfrm>
+            <a:off x="5856732" y="2194560"/>
+            <a:ext cx="457200" cy="457200"/>
+          </a:xfrm>
+          <a:prstGeom prst="rightArrow">
+            <a:avLst/>
+          </a:prstGeom>
+          <a:solidFill>
+            <a:srgbClr val="242852"/>
+          </a:solidFill>
+          <a:ln>
+            <a:noFill/>
+          </a:ln>
+        </p:spPr>
+        <p:style>
+          <a:lnRef idx="1">
+            <a:schemeClr val="accent1"/>
+          </a:lnRef>
+          <a:fillRef idx="3">
+            <a:schemeClr val="accent1"/>
+          </a:fillRef>
+          <a:effectRef idx="2">
+            <a:schemeClr val="accent1"/>
+          </a:effectRef>
+          <a:fontRef idx="minor">
+            <a:schemeClr val="lt1"/>
+          </a:fontRef>
+        </p:style>
+        <p:txBody>
+          <a:bodyPr rtlCol="0" anchor="ctr"/>
+          <a:lstStyle/>
+          <a:p>
+            <a:pPr algn="ctr"/>
+            <a:endParaRPr/>
+          </a:p>
+        </p:txBody>
+      </p:sp>
+      <p:sp>
+        <p:nvSpPr>
+          <p:cNvPr id="7" name="Rounded Rectangle 6"/>
+          <p:cNvSpPr/>
+          <p:nvPr/>
+        </p:nvSpPr>
+        <p:spPr>
+          <a:xfrm>
+            <a:off x="6286500" y="1554480"/>
+            <a:ext cx="2411730" cy="1737360"/>
+          </a:xfrm>
+          <a:prstGeom prst="roundRect">
+            <a:avLst/>
+          </a:prstGeom>
+          <a:solidFill>
+            <a:srgbClr val="297FD5"/>
+          </a:solidFill>
+          <a:ln>
+            <a:noFill/>
+          </a:ln>
+        </p:spPr>
+        <p:style>
+          <a:lnRef idx="1">
+            <a:schemeClr val="accent1"/>
+          </a:lnRef>
+          <a:fillRef idx="3">
+            <a:schemeClr val="accent1"/>
+          </a:fillRef>
+          <a:effectRef idx="2">
+            <a:schemeClr val="accent1"/>
+          </a:effectRef>
+          <a:fontRef idx="minor">
+            <a:schemeClr val="lt1"/>
+          </a:fontRef>
+        </p:style>
+        <p:txBody>
+          <a:bodyPr wrap="square" rtlCol="0" anchor="ctr"/>
+          <a:lstStyle/>
+          <a:p>
+            <a:pPr algn="ctr"/>
+            <a:r>
+              <a:rPr sz="1800" b="1">
+                <a:solidFill>
+                  <a:srgbClr val="FFFFFF"/>
+                </a:solidFill>
+                <a:latin typeface="Calibri"/>
+              </a:rPr>
+              <a:t>Обсуди</a:t>
+            </a:r>
+          </a:p>
+          <a:p>
+            <a:pPr algn="ctr">
+              <a:spcBef>
+                <a:spcPts val="800"/>
+              </a:spcBef>
+            </a:pPr>
+            <a:r>
+              <a:rPr sz="1300">
+                <a:solidFill>
+                  <a:srgbClr val="FFFFFF"/>
+                </a:solidFill>
+                <a:latin typeface="Calibri"/>
+              </a:rPr>
+              <a:t>review</a:t>
+            </a:r>
+          </a:p>
+        </p:txBody>
+      </p:sp>
+      <p:sp>
+        <p:nvSpPr>
+          <p:cNvPr id="8" name="Right Arrow 7"/>
+          <p:cNvSpPr/>
+          <p:nvPr/>
+        </p:nvSpPr>
+        <p:spPr>
+          <a:xfrm>
+            <a:off x="8679942" y="2194560"/>
+            <a:ext cx="457200" cy="457200"/>
+          </a:xfrm>
+          <a:prstGeom prst="rightArrow">
+            <a:avLst/>
+          </a:prstGeom>
+          <a:solidFill>
+            <a:srgbClr val="242852"/>
+          </a:solidFill>
+          <a:ln>
+            <a:noFill/>
+          </a:ln>
+        </p:spPr>
+        <p:style>
+          <a:lnRef idx="1">
+            <a:schemeClr val="accent1"/>
+          </a:lnRef>
+          <a:fillRef idx="3">
+            <a:schemeClr val="accent1"/>
+          </a:fillRef>
+          <a:effectRef idx="2">
+            <a:schemeClr val="accent1"/>
+          </a:effectRef>
+          <a:fontRef idx="minor">
+            <a:schemeClr val="lt1"/>
+          </a:fontRef>
+        </p:style>
+        <p:txBody>
+          <a:bodyPr rtlCol="0" anchor="ctr"/>
+          <a:lstStyle/>
+          <a:p>
+            <a:pPr algn="ctr"/>
+            <a:endParaRPr/>
+          </a:p>
+        </p:txBody>
+      </p:sp>
+      <p:sp>
+        <p:nvSpPr>
+          <p:cNvPr id="9" name="Rounded Rectangle 8"/>
+          <p:cNvSpPr/>
+          <p:nvPr/>
+        </p:nvSpPr>
+        <p:spPr>
+          <a:xfrm>
+            <a:off x="9109710" y="1554480"/>
+            <a:ext cx="2411730" cy="1737360"/>
+          </a:xfrm>
+          <a:prstGeom prst="roundRect">
+            <a:avLst/>
+          </a:prstGeom>
+          <a:solidFill>
+            <a:srgbClr val="242852"/>
+          </a:solidFill>
+          <a:ln>
+            <a:noFill/>
+          </a:ln>
+        </p:spPr>
+        <p:style>
+          <a:lnRef idx="1">
+            <a:schemeClr val="accent1"/>
+          </a:lnRef>
+          <a:fillRef idx="3">
+            <a:schemeClr val="accent1"/>
+          </a:fillRef>
+          <a:effectRef idx="2">
+            <a:schemeClr val="accent1"/>
+          </a:effectRef>
+          <a:fontRef idx="minor">
+            <a:schemeClr val="lt1"/>
+          </a:fontRef>
+        </p:style>
+        <p:txBody>
+          <a:bodyPr wrap="square" rtlCol="0" anchor="ctr"/>
+          <a:lstStyle/>
+          <a:p>
+            <a:pPr algn="ctr"/>
+            <a:r>
+              <a:rPr sz="1800" b="1">
+                <a:solidFill>
+                  <a:srgbClr val="FFFFFF"/>
+                </a:solidFill>
+                <a:latin typeface="Calibri"/>
+              </a:rPr>
+              <a:t>Влей</a:t>
+            </a:r>
+          </a:p>
+          <a:p>
+            <a:pPr algn="ctr">
+              <a:spcBef>
+                <a:spcPts val="800"/>
+              </a:spcBef>
+            </a:pPr>
+            <a:r>
+              <a:rPr sz="1300">
+                <a:solidFill>
+                  <a:srgbClr val="FFFFFF"/>
+                </a:solidFill>
+                <a:latin typeface="Calibri"/>
+              </a:rPr>
+              <a:t>merge</a:t>
+            </a:r>
+          </a:p>
+        </p:txBody>
+      </p:sp>
+      <p:sp>
+        <p:nvSpPr>
+          <p:cNvPr id="10" name="Rounded Rectangle 9"/>
+          <p:cNvSpPr/>
+          <p:nvPr/>
+        </p:nvSpPr>
+        <p:spPr>
+          <a:xfrm>
+            <a:off x="640080" y="3749039"/>
+            <a:ext cx="10881360" cy="2286000"/>
+          </a:xfrm>
+          <a:prstGeom prst="roundRect">
+            <a:avLst/>
+          </a:prstGeom>
+          <a:solidFill>
+            <a:srgbClr val="E8EDF4"/>
+          </a:solidFill>
+          <a:ln w="25400">
+            <a:solidFill>
+              <a:srgbClr val="7F8FA9"/>
+            </a:solidFill>
+          </a:ln>
+        </p:spPr>
+        <p:style>
+          <a:lnRef idx="1">
+            <a:schemeClr val="accent1"/>
+          </a:lnRef>
+          <a:fillRef idx="3">
+            <a:schemeClr val="accent1"/>
+          </a:fillRef>
+          <a:effectRef idx="2">
+            <a:schemeClr val="accent1"/>
+          </a:effectRef>
+          <a:fontRef idx="minor">
+            <a:schemeClr val="lt1"/>
+          </a:fontRef>
+        </p:style>
+        <p:txBody>
+          <a:bodyPr wrap="square" rtlCol="0" anchor="ctr"/>
+          <a:lstStyle/>
+          <a:p>
+            <a:pPr algn="ctr"/>
+            <a:r>
+              <a:rPr sz="1400">
+                <a:solidFill>
+                  <a:srgbClr val="242852"/>
+                </a:solidFill>
+                <a:latin typeface="Calibri"/>
+              </a:rPr>
+              <a:t>СКРИНШОТ 7  →  страница PR: diff + Checks + кнопка Merge (см. Ш7)</a:t>
+            </a:r>
+          </a:p>
+        </p:txBody>
+      </p:sp>
+    </p:spTree>
+  </p:cSld>
+  <p:clrMapOvr>
+    <a:masterClrMapping/>
+  </p:clrMapOvr>
+</p:sld>
+</file>
+
+<file path=ppt/slides/slide21.xml><?xml version="1.0" encoding="utf-8"?>
+<p:sld xmlns:a="http://schemas.openxmlformats.org/drawingml/2006/main" xmlns:r="http://schemas.openxmlformats.org/officeDocument/2006/relationships" xmlns:p="http://schemas.openxmlformats.org/presentationml/2006/main">
+  <p:cSld>
+    <p:spTree>
+      <p:nvGrpSpPr>
+        <p:cNvPr id="1" name=""/>
+        <p:cNvGrpSpPr/>
+        <p:nvPr/>
+      </p:nvGrpSpPr>
+      <p:grpSpPr>
+        <a:xfrm>
+          <a:off x="0" y="0"/>
+          <a:ext cx="0" cy="0"/>
+          <a:chOff x="0" y="0"/>
+          <a:chExt cx="0" cy="0"/>
+        </a:xfrm>
+      </p:grpSpPr>
+      <p:sp>
+        <p:nvSpPr>
+          <p:cNvPr id="2" name="Title 1"/>
+          <p:cNvSpPr>
+            <a:spLocks noGrp="1"/>
+          </p:cNvSpPr>
+          <p:nvPr>
+            <p:ph type="title"/>
+          </p:nvPr>
+        </p:nvSpPr>
+        <p:spPr/>
+        <p:txBody>
+          <a:bodyPr/>
+          <a:lstStyle/>
+          <a:p>
+            <a:pPr algn="l"/>
+            <a:r>
+              <a:rPr sz="4000" b="1">
+                <a:solidFill>
+                  <a:srgbClr val="242852"/>
+                </a:solidFill>
+                <a:latin typeface="Calibri Light"/>
+              </a:rPr>
+              <a:t>Review: найди баг до прода</a:t>
+            </a:r>
+          </a:p>
+        </p:txBody>
+      </p:sp>
+      <p:sp>
+        <p:nvSpPr>
+          <p:cNvPr id="3" name="TextBox 2"/>
+          <p:cNvSpPr txBox="1"/>
+          <p:nvPr/>
+        </p:nvSpPr>
+        <p:spPr>
+          <a:xfrm>
+            <a:off x="640080" y="1463040"/>
+            <a:ext cx="5303520" cy="2743200"/>
+          </a:xfrm>
+          <a:prstGeom prst="rect">
+            <a:avLst/>
+          </a:prstGeom>
+          <a:noFill/>
+        </p:spPr>
+        <p:txBody>
+          <a:bodyPr wrap="square">
+            <a:spAutoFit/>
+          </a:bodyPr>
+          <a:lstStyle/>
+          <a:p>
+            <a:pPr>
+              <a:spcBef>
+                <a:spcPts val="400"/>
+              </a:spcBef>
+              <a:spcAft>
+                <a:spcPts val="1000"/>
+              </a:spcAft>
+            </a:pPr>
+            <a:r>
+              <a:rPr sz="2000">
+                <a:solidFill>
+                  <a:srgbClr val="333333"/>
+                </a:solidFill>
+                <a:latin typeface="Calibri"/>
+              </a:rPr>
+              <a:t>✓ Логика и крайние случаи</a:t>
+            </a:r>
+          </a:p>
+          <a:p>
+            <a:pPr>
+              <a:spcBef>
+                <a:spcPts val="400"/>
+              </a:spcBef>
+              <a:spcAft>
+                <a:spcPts val="1000"/>
+              </a:spcAft>
+            </a:pPr>
+            <a:r>
+              <a:rPr sz="2000">
+                <a:solidFill>
+                  <a:srgbClr val="333333"/>
+                </a:solidFill>
+                <a:latin typeface="Calibri"/>
+              </a:rPr>
+              <a:t>✓ Тесты и читаемость</a:t>
+            </a:r>
+          </a:p>
+          <a:p>
+            <a:pPr>
+              <a:spcBef>
+                <a:spcPts val="400"/>
+              </a:spcBef>
+              <a:spcAft>
+                <a:spcPts val="1000"/>
+              </a:spcAft>
+            </a:pPr>
+            <a:r>
+              <a:rPr sz="2000">
+                <a:solidFill>
+                  <a:srgbClr val="333333"/>
+                </a:solidFill>
+                <a:latin typeface="Calibri"/>
+              </a:rPr>
+              <a:t>✓ Без секретов в коде</a:t>
+            </a:r>
+          </a:p>
+          <a:p>
+            <a:pPr>
+              <a:spcBef>
+                <a:spcPts val="400"/>
+              </a:spcBef>
+              <a:spcAft>
+                <a:spcPts val="1000"/>
+              </a:spcAft>
+            </a:pPr>
+            <a:r>
+              <a:rPr sz="2000">
+                <a:solidFill>
+                  <a:srgbClr val="333333"/>
+                </a:solidFill>
+                <a:latin typeface="Calibri"/>
+              </a:rPr>
+              <a:t>✋ Тон: к коду, не к человеку</a:t>
+            </a:r>
+          </a:p>
+        </p:txBody>
+      </p:sp>
+      <p:sp>
+        <p:nvSpPr>
+          <p:cNvPr id="4" name="Rounded Rectangle 3"/>
+          <p:cNvSpPr/>
+          <p:nvPr/>
+        </p:nvSpPr>
+        <p:spPr>
+          <a:xfrm>
+            <a:off x="6309360" y="1463040"/>
+            <a:ext cx="5212080" cy="3108960"/>
+          </a:xfrm>
+          <a:prstGeom prst="roundRect">
+            <a:avLst/>
+          </a:prstGeom>
+          <a:solidFill>
+            <a:srgbClr val="E8EDF4"/>
+          </a:solidFill>
+          <a:ln w="25400">
+            <a:solidFill>
+              <a:srgbClr val="7F8FA9"/>
+            </a:solidFill>
+          </a:ln>
+        </p:spPr>
+        <p:style>
+          <a:lnRef idx="1">
+            <a:schemeClr val="accent1"/>
+          </a:lnRef>
+          <a:fillRef idx="3">
+            <a:schemeClr val="accent1"/>
+          </a:fillRef>
+          <a:effectRef idx="2">
+            <a:schemeClr val="accent1"/>
+          </a:effectRef>
+          <a:fontRef idx="minor">
+            <a:schemeClr val="lt1"/>
+          </a:fontRef>
+        </p:style>
+        <p:txBody>
+          <a:bodyPr wrap="square" rtlCol="0" anchor="ctr"/>
+          <a:lstStyle/>
+          <a:p>
+            <a:pPr algn="ctr"/>
+            <a:r>
+              <a:rPr sz="1400">
+                <a:solidFill>
+                  <a:srgbClr val="242852"/>
+                </a:solidFill>
+                <a:latin typeface="Calibri"/>
+              </a:rPr>
+              <a:t>СКРИНШОТ 8  →  комментарий ревью: suggestion + Approve (см. Ш8)</a:t>
+            </a:r>
+          </a:p>
+        </p:txBody>
+      </p:sp>
+      <p:sp>
+        <p:nvSpPr>
+          <p:cNvPr id="5" name="TextBox 4"/>
+          <p:cNvSpPr txBox="1"/>
+          <p:nvPr/>
+        </p:nvSpPr>
+        <p:spPr>
+          <a:xfrm>
+            <a:off x="640080" y="4846320"/>
+            <a:ext cx="10881360" cy="822960"/>
+          </a:xfrm>
+          <a:prstGeom prst="rect">
+            <a:avLst/>
+          </a:prstGeom>
+          <a:noFill/>
+        </p:spPr>
+        <p:txBody>
+          <a:bodyPr wrap="square">
+            <a:spAutoFit/>
+          </a:bodyPr>
+          <a:lstStyle/>
+          <a:p>
+            <a:pPr algn="ctr"/>
+            <a:r>
+              <a:rPr sz="1800" b="1">
+                <a:solidFill>
+                  <a:srgbClr val="242852"/>
+                </a:solidFill>
+                <a:latin typeface="Calibri"/>
+              </a:rPr>
+              <a:t>маленький PR ревьювят за 15 минут  •  большой — никогда</a:t>
+            </a:r>
+          </a:p>
+        </p:txBody>
+      </p:sp>
+    </p:spTree>
+  </p:cSld>
+  <p:clrMapOvr>
+    <a:masterClrMapping/>
+  </p:clrMapOvr>
+</p:sld>
+</file>
+
+<file path=ppt/slides/slide22.xml><?xml version="1.0" encoding="utf-8"?>
+<p:sld xmlns:a="http://schemas.openxmlformats.org/drawingml/2006/main" xmlns:r="http://schemas.openxmlformats.org/officeDocument/2006/relationships" xmlns:p="http://schemas.openxmlformats.org/presentationml/2006/main">
+  <p:cSld>
+    <p:spTree>
+      <p:nvGrpSpPr>
+        <p:cNvPr id="1" name=""/>
+        <p:cNvGrpSpPr/>
+        <p:nvPr/>
+      </p:nvGrpSpPr>
+      <p:grpSpPr>
+        <a:xfrm>
+          <a:off x="0" y="0"/>
+          <a:ext cx="0" cy="0"/>
+          <a:chOff x="0" y="0"/>
+          <a:chExt cx="0" cy="0"/>
+        </a:xfrm>
+      </p:grpSpPr>
+      <p:sp>
+        <p:nvSpPr>
+          <p:cNvPr id="2" name="Title 1"/>
+          <p:cNvSpPr>
+            <a:spLocks noGrp="1"/>
+          </p:cNvSpPr>
+          <p:nvPr>
+            <p:ph type="title"/>
+          </p:nvPr>
+        </p:nvSpPr>
+        <p:spPr/>
+        <p:txBody>
+          <a:bodyPr/>
+          <a:lstStyle/>
+          <a:p>
+            <a:pPr algn="l"/>
+            <a:r>
+              <a:rPr sz="4000" b="1">
+                <a:solidFill>
+                  <a:srgbClr val="242852"/>
+                </a:solidFill>
+                <a:latin typeface="Calibri Light"/>
+              </a:rPr>
+              <a:t>Конфликт: два правят одно</a:t>
+            </a:r>
+          </a:p>
+        </p:txBody>
+      </p:sp>
+      <p:sp>
+        <p:nvSpPr>
+          <p:cNvPr id="3" name="Rounded Rectangle 2"/>
+          <p:cNvSpPr/>
+          <p:nvPr/>
+        </p:nvSpPr>
+        <p:spPr>
+          <a:xfrm>
+            <a:off x="640080" y="1463040"/>
+            <a:ext cx="3383280" cy="1645920"/>
+          </a:xfrm>
+          <a:prstGeom prst="roundRect">
+            <a:avLst/>
+          </a:prstGeom>
+          <a:solidFill>
+            <a:srgbClr val="4A66AC"/>
+          </a:solidFill>
+          <a:ln>
+            <a:noFill/>
+          </a:ln>
+        </p:spPr>
+        <p:style>
+          <a:lnRef idx="1">
+            <a:schemeClr val="accent1"/>
+          </a:lnRef>
+          <a:fillRef idx="3">
+            <a:schemeClr val="accent1"/>
+          </a:fillRef>
+          <a:effectRef idx="2">
+            <a:schemeClr val="accent1"/>
+          </a:effectRef>
+          <a:fontRef idx="minor">
+            <a:schemeClr val="lt1"/>
+          </a:fontRef>
+        </p:style>
+        <p:txBody>
+          <a:bodyPr wrap="square" rtlCol="0" anchor="ctr"/>
+          <a:lstStyle/>
+          <a:p>
+            <a:pPr algn="ctr"/>
+            <a:r>
+              <a:rPr sz="2000" b="1">
+                <a:solidFill>
+                  <a:srgbClr val="FFFFFF"/>
+                </a:solidFill>
+                <a:latin typeface="Calibri"/>
+              </a:rPr>
+              <a:t>1. pull</a:t>
+            </a:r>
+          </a:p>
+          <a:p>
+            <a:pPr algn="ctr">
+              <a:spcBef>
+                <a:spcPts val="800"/>
+              </a:spcBef>
+            </a:pPr>
+            <a:r>
+              <a:rPr sz="1400">
+                <a:solidFill>
+                  <a:srgbClr val="FFFFFF"/>
+                </a:solidFill>
+                <a:latin typeface="Calibri"/>
+              </a:rPr>
+              <a:t>забери чужое</a:t>
+            </a:r>
+          </a:p>
+        </p:txBody>
+      </p:sp>
+      <p:sp>
+        <p:nvSpPr>
+          <p:cNvPr id="4" name="Rounded Rectangle 3"/>
+          <p:cNvSpPr/>
+          <p:nvPr/>
+        </p:nvSpPr>
+        <p:spPr>
+          <a:xfrm>
+            <a:off x="4389120" y="1463040"/>
+            <a:ext cx="3383280" cy="1645920"/>
+          </a:xfrm>
+          <a:prstGeom prst="roundRect">
+            <a:avLst/>
+          </a:prstGeom>
+          <a:solidFill>
+            <a:srgbClr val="297FD5"/>
+          </a:solidFill>
+          <a:ln>
+            <a:noFill/>
+          </a:ln>
+        </p:spPr>
+        <p:style>
+          <a:lnRef idx="1">
+            <a:schemeClr val="accent1"/>
+          </a:lnRef>
+          <a:fillRef idx="3">
+            <a:schemeClr val="accent1"/>
+          </a:fillRef>
+          <a:effectRef idx="2">
+            <a:schemeClr val="accent1"/>
+          </a:effectRef>
+          <a:fontRef idx="minor">
+            <a:schemeClr val="lt1"/>
+          </a:fontRef>
+        </p:style>
+        <p:txBody>
+          <a:bodyPr wrap="square" rtlCol="0" anchor="ctr"/>
+          <a:lstStyle/>
+          <a:p>
+            <a:pPr algn="ctr"/>
+            <a:r>
+              <a:rPr sz="2000" b="1">
+                <a:solidFill>
+                  <a:srgbClr val="FFFFFF"/>
+                </a:solidFill>
+                <a:latin typeface="Calibri"/>
+              </a:rPr>
+              <a:t>2. resolve</a:t>
+            </a:r>
+          </a:p>
+          <a:p>
+            <a:pPr algn="ctr">
+              <a:spcBef>
+                <a:spcPts val="800"/>
+              </a:spcBef>
+            </a:pPr>
+            <a:r>
+              <a:rPr sz="1400">
+                <a:solidFill>
+                  <a:srgbClr val="FFFFFF"/>
+                </a:solidFill>
+                <a:latin typeface="Calibri"/>
+              </a:rPr>
+              <a:t>выбери правду</a:t>
+            </a:r>
+          </a:p>
+        </p:txBody>
+      </p:sp>
+      <p:sp>
+        <p:nvSpPr>
+          <p:cNvPr id="5" name="Rounded Rectangle 4"/>
+          <p:cNvSpPr/>
+          <p:nvPr/>
+        </p:nvSpPr>
+        <p:spPr>
+          <a:xfrm>
+            <a:off x="8138160" y="1463040"/>
+            <a:ext cx="3383280" cy="1645920"/>
+          </a:xfrm>
+          <a:prstGeom prst="roundRect">
+            <a:avLst/>
+          </a:prstGeom>
+          <a:solidFill>
+            <a:srgbClr val="242852"/>
+          </a:solidFill>
+          <a:ln>
+            <a:noFill/>
+          </a:ln>
+        </p:spPr>
+        <p:style>
+          <a:lnRef idx="1">
+            <a:schemeClr val="accent1"/>
+          </a:lnRef>
+          <a:fillRef idx="3">
+            <a:schemeClr val="accent1"/>
+          </a:fillRef>
+          <a:effectRef idx="2">
+            <a:schemeClr val="accent1"/>
+          </a:effectRef>
+          <a:fontRef idx="minor">
+            <a:schemeClr val="lt1"/>
+          </a:fontRef>
+        </p:style>
+        <p:txBody>
+          <a:bodyPr wrap="square" rtlCol="0" anchor="ctr"/>
+          <a:lstStyle/>
+          <a:p>
+            <a:pPr algn="ctr"/>
+            <a:r>
+              <a:rPr sz="2000" b="1">
+                <a:solidFill>
+                  <a:srgbClr val="FFFFFF"/>
+                </a:solidFill>
+                <a:latin typeface="Calibri"/>
+              </a:rPr>
+              <a:t>3. push</a:t>
+            </a:r>
+          </a:p>
+          <a:p>
+            <a:pPr algn="ctr">
+              <a:spcBef>
+                <a:spcPts val="800"/>
+              </a:spcBef>
+            </a:pPr>
+            <a:r>
+              <a:rPr sz="1400">
+                <a:solidFill>
+                  <a:srgbClr val="FFFFFF"/>
+                </a:solidFill>
+                <a:latin typeface="Calibri"/>
+              </a:rPr>
+              <a:t>отправь мир</a:t>
+            </a:r>
+          </a:p>
+        </p:txBody>
+      </p:sp>
+      <p:sp>
+        <p:nvSpPr>
+          <p:cNvPr id="6" name="Rounded Rectangle 5"/>
+          <p:cNvSpPr/>
+          <p:nvPr/>
+        </p:nvSpPr>
+        <p:spPr>
+          <a:xfrm>
+            <a:off x="640080" y="3474720"/>
+            <a:ext cx="10881360" cy="2560320"/>
+          </a:xfrm>
+          <a:prstGeom prst="roundRect">
+            <a:avLst/>
+          </a:prstGeom>
+          <a:solidFill>
+            <a:srgbClr val="E8EDF4"/>
+          </a:solidFill>
+          <a:ln w="25400">
+            <a:solidFill>
+              <a:srgbClr val="7F8FA9"/>
+            </a:solidFill>
+          </a:ln>
+        </p:spPr>
+        <p:style>
+          <a:lnRef idx="1">
+            <a:schemeClr val="accent1"/>
+          </a:lnRef>
+          <a:fillRef idx="3">
+            <a:schemeClr val="accent1"/>
+          </a:fillRef>
+          <a:effectRef idx="2">
+            <a:schemeClr val="accent1"/>
+          </a:effectRef>
+          <a:fontRef idx="minor">
+            <a:schemeClr val="lt1"/>
+          </a:fontRef>
+        </p:style>
+        <p:txBody>
+          <a:bodyPr wrap="square" rtlCol="0" anchor="ctr"/>
+          <a:lstStyle/>
+          <a:p>
+            <a:pPr algn="ctr"/>
+            <a:r>
+              <a:rPr sz="1400">
+                <a:solidFill>
+                  <a:srgbClr val="242852"/>
+                </a:solidFill>
+                <a:latin typeface="Calibri"/>
+              </a:rPr>
+              <a:t>СКРИНШОТ 9  →  маркеры &lt;&lt;&lt;&lt;&lt;&lt;&lt; HEAD … ======= … &gt;&gt;&gt;&gt;&gt;&gt;&gt; + кнопка Resolve (см. Ш9)</a:t>
+            </a:r>
+          </a:p>
+        </p:txBody>
+      </p:sp>
+    </p:spTree>
+  </p:cSld>
+  <p:clrMapOvr>
+    <a:masterClrMapping/>
+  </p:clrMapOvr>
+</p:sld>
+</file>
+
+<file path=ppt/slides/slide23.xml><?xml version="1.0" encoding="utf-8"?>
+<p:sld xmlns:a="http://schemas.openxmlformats.org/drawingml/2006/main" xmlns:r="http://schemas.openxmlformats.org/officeDocument/2006/relationships" xmlns:p="http://schemas.openxmlformats.org/presentationml/2006/main">
+  <p:cSld>
+    <p:spTree>
+      <p:nvGrpSpPr>
+        <p:cNvPr id="1" name=""/>
+        <p:cNvGrpSpPr/>
+        <p:nvPr/>
+      </p:nvGrpSpPr>
+      <p:grpSpPr>
+        <a:xfrm>
+          <a:off x="0" y="0"/>
+          <a:ext cx="0" cy="0"/>
+          <a:chOff x="0" y="0"/>
+          <a:chExt cx="0" cy="0"/>
+        </a:xfrm>
+      </p:grpSpPr>
+      <p:sp>
+        <p:nvSpPr>
+          <p:cNvPr id="2" name="Title 1"/>
+          <p:cNvSpPr>
+            <a:spLocks noGrp="1"/>
+          </p:cNvSpPr>
+          <p:nvPr>
+            <p:ph type="title"/>
+          </p:nvPr>
+        </p:nvSpPr>
+        <p:spPr/>
+        <p:txBody>
+          <a:bodyPr/>
+          <a:lstStyle/>
+          <a:p>
+            <a:pPr algn="l"/>
+            <a:r>
+              <a:rPr sz="4000" b="1">
+                <a:solidFill>
+                  <a:srgbClr val="242852"/>
+                </a:solidFill>
+                <a:latin typeface="Calibri Light"/>
+              </a:rPr>
+              <a:t>5 правил выживания</a:t>
+            </a:r>
+          </a:p>
+        </p:txBody>
+      </p:sp>
+      <p:sp>
+        <p:nvSpPr>
+          <p:cNvPr id="3" name="TextBox 2"/>
+          <p:cNvSpPr txBox="1"/>
+          <p:nvPr/>
+        </p:nvSpPr>
+        <p:spPr>
+          <a:xfrm>
+            <a:off x="640080" y="1371600"/>
+            <a:ext cx="10881360" cy="4572000"/>
+          </a:xfrm>
+          <a:prstGeom prst="rect">
+            <a:avLst/>
+          </a:prstGeom>
+          <a:noFill/>
+        </p:spPr>
+        <p:txBody>
+          <a:bodyPr wrap="square">
+            <a:spAutoFit/>
+          </a:bodyPr>
+          <a:lstStyle/>
+          <a:p>
+            <a:pPr>
+              <a:spcBef>
+                <a:spcPts val="400"/>
+              </a:spcBef>
+              <a:spcAft>
+                <a:spcPts val="1000"/>
+              </a:spcAft>
+            </a:pPr>
+            <a:r>
+              <a:rPr sz="2400">
+                <a:solidFill>
+                  <a:srgbClr val="333333"/>
+                </a:solidFill>
+                <a:latin typeface="Calibri"/>
+              </a:rPr>
+              <a:t>1. main не ломаем — работаем в ветках</a:t>
+            </a:r>
+          </a:p>
+          <a:p>
+            <a:pPr>
+              <a:spcBef>
+                <a:spcPts val="400"/>
+              </a:spcBef>
+              <a:spcAft>
+                <a:spcPts val="1000"/>
+              </a:spcAft>
+            </a:pPr>
+            <a:r>
+              <a:rPr sz="2400">
+                <a:solidFill>
+                  <a:srgbClr val="333333"/>
+                </a:solidFill>
+                <a:latin typeface="Calibri"/>
+              </a:rPr>
+              <a:t>2. Маленький PR &gt; большой подвиг</a:t>
+            </a:r>
+          </a:p>
+          <a:p>
+            <a:pPr>
+              <a:spcBef>
+                <a:spcPts val="400"/>
+              </a:spcBef>
+              <a:spcAft>
+                <a:spcPts val="1000"/>
+              </a:spcAft>
+            </a:pPr>
+            <a:r>
+              <a:rPr sz="2400">
+                <a:solidFill>
+                  <a:srgbClr val="333333"/>
+                </a:solidFill>
+                <a:latin typeface="Calibri"/>
+              </a:rPr>
+              <a:t>3. Зелёный CI + review = merge</a:t>
+            </a:r>
+          </a:p>
+          <a:p>
+            <a:pPr>
+              <a:spcBef>
+                <a:spcPts val="400"/>
+              </a:spcBef>
+              <a:spcAft>
+                <a:spcPts val="1000"/>
+              </a:spcAft>
+            </a:pPr>
+            <a:r>
+              <a:rPr sz="2400">
+                <a:solidFill>
+                  <a:srgbClr val="333333"/>
+                </a:solidFill>
+                <a:latin typeface="Calibri"/>
+              </a:rPr>
+              <a:t>4. Конфликт? Говорим, потом кликаем</a:t>
+            </a:r>
+          </a:p>
+          <a:p>
+            <a:pPr>
+              <a:spcBef>
+                <a:spcPts val="400"/>
+              </a:spcBef>
+              <a:spcAft>
+                <a:spcPts val="1000"/>
+              </a:spcAft>
+            </a:pPr>
+            <a:r>
+              <a:rPr sz="2400">
+                <a:solidFill>
+                  <a:srgbClr val="333333"/>
+                </a:solidFill>
+                <a:latin typeface="Calibri"/>
+              </a:rPr>
+              <a:t>5. Агент готовит — человек отвечает</a:t>
+            </a:r>
+          </a:p>
+        </p:txBody>
+      </p:sp>
+    </p:spTree>
+  </p:cSld>
+  <p:clrMapOvr>
+    <a:masterClrMapping/>
+  </p:clrMapOvr>
+</p:sld>
+</file>
+
+<file path=ppt/slides/slide24.xml><?xml version="1.0" encoding="utf-8"?>
+<p:sld xmlns:a="http://schemas.openxmlformats.org/drawingml/2006/main" xmlns:r="http://schemas.openxmlformats.org/officeDocument/2006/relationships" xmlns:p="http://schemas.openxmlformats.org/presentationml/2006/main">
+  <p:cSld>
+    <p:spTree>
+      <p:nvGrpSpPr>
+        <p:cNvPr id="1" name=""/>
+        <p:cNvGrpSpPr/>
+        <p:nvPr/>
+      </p:nvGrpSpPr>
+      <p:grpSpPr>
+        <a:xfrm>
+          <a:off x="0" y="0"/>
+          <a:ext cx="0" cy="0"/>
+          <a:chOff x="0" y="0"/>
+          <a:chExt cx="0" cy="0"/>
+        </a:xfrm>
+      </p:grpSpPr>
+      <p:sp>
+        <p:nvSpPr>
+          <p:cNvPr id="2" name="Title 1"/>
+          <p:cNvSpPr>
+            <a:spLocks noGrp="1"/>
+          </p:cNvSpPr>
+          <p:nvPr>
+            <p:ph type="ctrTitle"/>
+          </p:nvPr>
+        </p:nvSpPr>
+        <p:spPr/>
+        <p:txBody>
+          <a:bodyPr/>
+          <a:lstStyle/>
+          <a:p>
+            <a:r>
+              <a:t>Спасибо! Вопросы?</a:t>
+            </a:r>
+          </a:p>
+        </p:txBody>
+      </p:sp>
+      <p:sp>
+        <p:nvSpPr>
+          <p:cNvPr id="3" name="Subtitle 2"/>
+          <p:cNvSpPr>
+            <a:spLocks noGrp="1"/>
+          </p:cNvSpPr>
+          <p:nvPr>
+            <p:ph type="subTitle" idx="1"/>
+          </p:nvPr>
+        </p:nvSpPr>
+        <p:spPr/>
+        <p:txBody>
+          <a:bodyPr/>
+          <a:lstStyle/>
+          <a:p>
+            <a:r>
+              <a:t>Демо: ветка → PR → merge за 3 минуты</a:t>
+            </a:r>
+          </a:p>
+        </p:txBody>
+      </p:sp>
+      <p:sp>
+        <p:nvSpPr>
+          <p:cNvPr id="4" name="TextBox 3"/>
+          <p:cNvSpPr txBox="1"/>
+          <p:nvPr/>
+        </p:nvSpPr>
+        <p:spPr>
+          <a:xfrm>
+            <a:off x="640080" y="4937760"/>
+            <a:ext cx="10881360" cy="731520"/>
+          </a:xfrm>
+          <a:prstGeom prst="rect">
+            <a:avLst/>
+          </a:prstGeom>
+          <a:noFill/>
+        </p:spPr>
+        <p:txBody>
+          <a:bodyPr wrap="square">
+            <a:spAutoFit/>
+          </a:bodyPr>
+          <a:lstStyle/>
+          <a:p>
+            <a:pPr algn="ctr"/>
+            <a:r>
+              <a:rPr sz="1600" b="0">
+                <a:solidFill>
+                  <a:srgbClr val="7F8FA9"/>
+                </a:solidFill>
+                <a:latin typeface="Calibri"/>
+              </a:rPr>
+              <a:t>repo: github.com/&lt;твой-ник&gt;/&lt;проект&gt;  •  &lt;имя&gt;  •  2026</a:t>
+            </a:r>
           </a:p>
         </p:txBody>
       </p:sp>
@@ -10076,13 +12968,13 @@
           <a:p>
             <a:pPr algn="l"/>
             <a:r>
-              <a:rPr lang="en-US" sz="4000" b="1">
+              <a:rPr lang="en-US" sz="4000" b="1" dirty="0">
                 <a:solidFill>
                   <a:srgbClr val="242852"/>
                 </a:solidFill>
                 <a:latin typeface="Calibri Light"/>
               </a:rPr>
-              <a:t>Git ignores</a:t>
+              <a:t>Commit</a:t>
             </a:r>
             <a:endParaRPr sz="4000" b="1" dirty="0">
               <a:solidFill>
@@ -10093,6 +12985,36 @@
           </a:p>
         </p:txBody>
       </p:sp>
+      <p:pic>
+        <p:nvPicPr>
+          <p:cNvPr id="4" name="Рисунок 3">
+            <a:extLst>
+              <a:ext uri="{FF2B5EF4-FFF2-40B4-BE49-F238E27FC236}">
+                <a16:creationId xmlns:a16="http://schemas.microsoft.com/office/drawing/2014/main" id="{90CD81EE-4AB6-2AE9-9935-718DC4F44302}"/>
+              </a:ext>
+            </a:extLst>
+          </p:cNvPr>
+          <p:cNvPicPr>
+            <a:picLocks noChangeAspect="1"/>
+          </p:cNvPicPr>
+          <p:nvPr/>
+        </p:nvPicPr>
+        <p:blipFill>
+          <a:blip r:embed="rId3"/>
+          <a:stretch>
+            <a:fillRect/>
+          </a:stretch>
+        </p:blipFill>
+        <p:spPr>
+          <a:xfrm>
+            <a:off x="656734" y="1690688"/>
+            <a:ext cx="8964276" cy="4477375"/>
+          </a:xfrm>
+          <a:prstGeom prst="rect">
+            <a:avLst/>
+          </a:prstGeom>
+        </p:spPr>
+      </p:pic>
     </p:spTree>
     <p:extLst>
       <p:ext uri="{BB962C8B-B14F-4D97-AF65-F5344CB8AC3E}">
@@ -10111,7 +13033,13 @@
   <p:cSld>
     <p:spTree>
       <p:nvGrpSpPr>
-        <p:cNvPr id="1" name=""/>
+        <p:cNvPr id="1" name="">
+          <a:extLst>
+            <a:ext uri="{FF2B5EF4-FFF2-40B4-BE49-F238E27FC236}">
+              <a16:creationId xmlns:a16="http://schemas.microsoft.com/office/drawing/2014/main" id="{706B4A78-673F-A954-BE06-EC2F64BBF411}"/>
+            </a:ext>
+          </a:extLst>
+        </p:cNvPr>
         <p:cNvGrpSpPr/>
         <p:nvPr/>
       </p:nvGrpSpPr>
@@ -10125,7 +13053,13 @@
       </p:grpSpPr>
       <p:sp>
         <p:nvSpPr>
-          <p:cNvPr id="2" name="Title 1"/>
+          <p:cNvPr id="2" name="Title 1">
+            <a:extLst>
+              <a:ext uri="{FF2B5EF4-FFF2-40B4-BE49-F238E27FC236}">
+                <a16:creationId xmlns:a16="http://schemas.microsoft.com/office/drawing/2014/main" id="{07B8A0E7-C857-096D-4FDA-A3B8E3432384}"/>
+              </a:ext>
+            </a:extLst>
+          </p:cNvPr>
           <p:cNvSpPr>
             <a:spLocks noGrp="1"/>
           </p:cNvSpPr>
@@ -10140,344 +13074,59 @@
           <a:p>
             <a:pPr algn="l"/>
             <a:r>
-              <a:rPr sz="4000" b="1">
+              <a:rPr lang="en-US" sz="4000" b="1" dirty="0">
                 <a:solidFill>
                   <a:srgbClr val="242852"/>
                 </a:solidFill>
                 <a:latin typeface="Calibri Light"/>
               </a:rPr>
-              <a:t>ИИ-агенты деплоят сами?</a:t>
-            </a:r>
-          </a:p>
-        </p:txBody>
-      </p:sp>
-      <p:sp>
-        <p:nvSpPr>
-          <p:cNvPr id="3" name="Rounded Rectangle 2"/>
-          <p:cNvSpPr/>
+              <a:t>Commit</a:t>
+            </a:r>
+            <a:endParaRPr sz="4000" b="1" dirty="0">
+              <a:solidFill>
+                <a:srgbClr val="242852"/>
+              </a:solidFill>
+              <a:latin typeface="Calibri Light"/>
+            </a:endParaRPr>
+          </a:p>
+        </p:txBody>
+      </p:sp>
+      <p:pic>
+        <p:nvPicPr>
+          <p:cNvPr id="5" name="Рисунок 4">
+            <a:extLst>
+              <a:ext uri="{FF2B5EF4-FFF2-40B4-BE49-F238E27FC236}">
+                <a16:creationId xmlns:a16="http://schemas.microsoft.com/office/drawing/2014/main" id="{45DE4C32-D3CE-234E-8631-1AAD22369966}"/>
+              </a:ext>
+            </a:extLst>
+          </p:cNvPr>
+          <p:cNvPicPr>
+            <a:picLocks noChangeAspect="1"/>
+          </p:cNvPicPr>
           <p:nvPr/>
-        </p:nvSpPr>
+        </p:nvPicPr>
+        <p:blipFill>
+          <a:blip r:embed="rId3"/>
+          <a:stretch>
+            <a:fillRect/>
+          </a:stretch>
+        </p:blipFill>
         <p:spPr>
           <a:xfrm>
-            <a:off x="640080" y="1463040"/>
-            <a:ext cx="2560320" cy="1737360"/>
+            <a:off x="384949" y="1437996"/>
+            <a:ext cx="11469869" cy="3783483"/>
           </a:xfrm>
-          <a:prstGeom prst="roundRect">
+          <a:prstGeom prst="rect">
             <a:avLst/>
           </a:prstGeom>
-          <a:solidFill>
-            <a:srgbClr val="4A66AC"/>
-          </a:solidFill>
-          <a:ln>
-            <a:noFill/>
-          </a:ln>
         </p:spPr>
-        <p:style>
-          <a:lnRef idx="1">
-            <a:schemeClr val="accent1"/>
-          </a:lnRef>
-          <a:fillRef idx="3">
-            <a:schemeClr val="accent1"/>
-          </a:fillRef>
-          <a:effectRef idx="2">
-            <a:schemeClr val="accent1"/>
-          </a:effectRef>
-          <a:fontRef idx="minor">
-            <a:schemeClr val="lt1"/>
-          </a:fontRef>
-        </p:style>
-        <p:txBody>
-          <a:bodyPr wrap="square" rtlCol="0" anchor="ctr"/>
-          <a:lstStyle/>
-          <a:p>
-            <a:pPr algn="ctr"/>
-            <a:r>
-              <a:rPr sz="1800" b="1">
-                <a:solidFill>
-                  <a:srgbClr val="FFFFFF"/>
-                </a:solidFill>
-                <a:latin typeface="Calibri"/>
-              </a:rPr>
-              <a:t>Код</a:t>
-            </a:r>
-          </a:p>
-          <a:p>
-            <a:pPr algn="ctr">
-              <a:spcBef>
-                <a:spcPts val="800"/>
-              </a:spcBef>
-            </a:pPr>
-            <a:r>
-              <a:rPr sz="1300">
-                <a:solidFill>
-                  <a:srgbClr val="FFFFFF"/>
-                </a:solidFill>
-                <a:latin typeface="Calibri"/>
-              </a:rPr>
-              <a:t>пишет фичу</a:t>
-            </a:r>
-          </a:p>
-        </p:txBody>
-      </p:sp>
-      <p:sp>
-        <p:nvSpPr>
-          <p:cNvPr id="4" name="Rounded Rectangle 3"/>
-          <p:cNvSpPr/>
-          <p:nvPr/>
-        </p:nvSpPr>
-        <p:spPr>
-          <a:xfrm>
-            <a:off x="3383280" y="1463040"/>
-            <a:ext cx="2560320" cy="1737360"/>
-          </a:xfrm>
-          <a:prstGeom prst="roundRect">
-            <a:avLst/>
-          </a:prstGeom>
-          <a:solidFill>
-            <a:srgbClr val="5AA2AE"/>
-          </a:solidFill>
-          <a:ln>
-            <a:noFill/>
-          </a:ln>
-        </p:spPr>
-        <p:style>
-          <a:lnRef idx="1">
-            <a:schemeClr val="accent1"/>
-          </a:lnRef>
-          <a:fillRef idx="3">
-            <a:schemeClr val="accent1"/>
-          </a:fillRef>
-          <a:effectRef idx="2">
-            <a:schemeClr val="accent1"/>
-          </a:effectRef>
-          <a:fontRef idx="minor">
-            <a:schemeClr val="lt1"/>
-          </a:fontRef>
-        </p:style>
-        <p:txBody>
-          <a:bodyPr wrap="square" rtlCol="0" anchor="ctr"/>
-          <a:lstStyle/>
-          <a:p>
-            <a:pPr algn="ctr"/>
-            <a:r>
-              <a:rPr sz="1800" b="1">
-                <a:solidFill>
-                  <a:srgbClr val="FFFFFF"/>
-                </a:solidFill>
-                <a:latin typeface="Calibri"/>
-              </a:rPr>
-              <a:t>Тест</a:t>
-            </a:r>
-          </a:p>
-          <a:p>
-            <a:pPr algn="ctr">
-              <a:spcBef>
-                <a:spcPts val="800"/>
-              </a:spcBef>
-            </a:pPr>
-            <a:r>
-              <a:rPr sz="1300">
-                <a:solidFill>
-                  <a:srgbClr val="FFFFFF"/>
-                </a:solidFill>
-                <a:latin typeface="Calibri"/>
-              </a:rPr>
-              <a:t>гоняет тесты</a:t>
-            </a:r>
-          </a:p>
-        </p:txBody>
-      </p:sp>
-      <p:sp>
-        <p:nvSpPr>
-          <p:cNvPr id="5" name="Rounded Rectangle 4"/>
-          <p:cNvSpPr/>
-          <p:nvPr/>
-        </p:nvSpPr>
-        <p:spPr>
-          <a:xfrm>
-            <a:off x="6126480" y="1463040"/>
-            <a:ext cx="2560320" cy="1737360"/>
-          </a:xfrm>
-          <a:prstGeom prst="roundRect">
-            <a:avLst/>
-          </a:prstGeom>
-          <a:solidFill>
-            <a:srgbClr val="297FD5"/>
-          </a:solidFill>
-          <a:ln>
-            <a:noFill/>
-          </a:ln>
-        </p:spPr>
-        <p:style>
-          <a:lnRef idx="1">
-            <a:schemeClr val="accent1"/>
-          </a:lnRef>
-          <a:fillRef idx="3">
-            <a:schemeClr val="accent1"/>
-          </a:fillRef>
-          <a:effectRef idx="2">
-            <a:schemeClr val="accent1"/>
-          </a:effectRef>
-          <a:fontRef idx="minor">
-            <a:schemeClr val="lt1"/>
-          </a:fontRef>
-        </p:style>
-        <p:txBody>
-          <a:bodyPr wrap="square" rtlCol="0" anchor="ctr"/>
-          <a:lstStyle/>
-          <a:p>
-            <a:pPr algn="ctr"/>
-            <a:r>
-              <a:rPr sz="1800" b="1">
-                <a:solidFill>
-                  <a:srgbClr val="FFFFFF"/>
-                </a:solidFill>
-                <a:latin typeface="Calibri"/>
-              </a:rPr>
-              <a:t>Деплой</a:t>
-            </a:r>
-          </a:p>
-          <a:p>
-            <a:pPr algn="ctr">
-              <a:spcBef>
-                <a:spcPts val="800"/>
-              </a:spcBef>
-            </a:pPr>
-            <a:r>
-              <a:rPr sz="1300">
-                <a:solidFill>
-                  <a:srgbClr val="FFFFFF"/>
-                </a:solidFill>
-                <a:latin typeface="Calibri"/>
-              </a:rPr>
-              <a:t>катит на stage</a:t>
-            </a:r>
-          </a:p>
-        </p:txBody>
-      </p:sp>
-      <p:sp>
-        <p:nvSpPr>
-          <p:cNvPr id="6" name="Rounded Rectangle 5"/>
-          <p:cNvSpPr/>
-          <p:nvPr/>
-        </p:nvSpPr>
-        <p:spPr>
-          <a:xfrm>
-            <a:off x="8869680" y="1463040"/>
-            <a:ext cx="2560320" cy="1737360"/>
-          </a:xfrm>
-          <a:prstGeom prst="roundRect">
-            <a:avLst/>
-          </a:prstGeom>
-          <a:solidFill>
-            <a:srgbClr val="242852"/>
-          </a:solidFill>
-          <a:ln>
-            <a:noFill/>
-          </a:ln>
-        </p:spPr>
-        <p:style>
-          <a:lnRef idx="1">
-            <a:schemeClr val="accent1"/>
-          </a:lnRef>
-          <a:fillRef idx="3">
-            <a:schemeClr val="accent1"/>
-          </a:fillRef>
-          <a:effectRef idx="2">
-            <a:schemeClr val="accent1"/>
-          </a:effectRef>
-          <a:fontRef idx="minor">
-            <a:schemeClr val="lt1"/>
-          </a:fontRef>
-        </p:style>
-        <p:txBody>
-          <a:bodyPr wrap="square" rtlCol="0" anchor="ctr"/>
-          <a:lstStyle/>
-          <a:p>
-            <a:pPr algn="ctr"/>
-            <a:r>
-              <a:rPr sz="1800" b="1">
-                <a:solidFill>
-                  <a:srgbClr val="FFFFFF"/>
-                </a:solidFill>
-                <a:latin typeface="Calibri"/>
-              </a:rPr>
-              <a:t>Откат</a:t>
-            </a:r>
-          </a:p>
-          <a:p>
-            <a:pPr algn="ctr">
-              <a:spcBef>
-                <a:spcPts val="800"/>
-              </a:spcBef>
-            </a:pPr>
-            <a:r>
-              <a:rPr sz="1300">
-                <a:solidFill>
-                  <a:srgbClr val="FFFFFF"/>
-                </a:solidFill>
-                <a:latin typeface="Calibri"/>
-              </a:rPr>
-              <a:t>отменяет при аварии</a:t>
-            </a:r>
-          </a:p>
-        </p:txBody>
-      </p:sp>
-      <p:sp>
-        <p:nvSpPr>
-          <p:cNvPr id="7" name="Rounded Rectangle 6"/>
-          <p:cNvSpPr/>
-          <p:nvPr/>
-        </p:nvSpPr>
-        <p:spPr>
-          <a:xfrm>
-            <a:off x="640080" y="3566160"/>
-            <a:ext cx="10881360" cy="2468880"/>
-          </a:xfrm>
-          <a:prstGeom prst="roundRect">
-            <a:avLst/>
-          </a:prstGeom>
-          <a:solidFill>
-            <a:srgbClr val="E8EDF4"/>
-          </a:solidFill>
-          <a:ln w="25400">
-            <a:solidFill>
-              <a:srgbClr val="7F8FA9"/>
-            </a:solidFill>
-          </a:ln>
-        </p:spPr>
-        <p:style>
-          <a:lnRef idx="1">
-            <a:schemeClr val="accent1"/>
-          </a:lnRef>
-          <a:fillRef idx="3">
-            <a:schemeClr val="accent1"/>
-          </a:fillRef>
-          <a:effectRef idx="2">
-            <a:schemeClr val="accent1"/>
-          </a:effectRef>
-          <a:fontRef idx="minor">
-            <a:schemeClr val="lt1"/>
-          </a:fontRef>
-        </p:style>
-        <p:txBody>
-          <a:bodyPr wrap="square" rtlCol="0" anchor="ctr"/>
-          <a:lstStyle/>
-          <a:p>
-            <a:pPr algn="ctr"/>
-            <a:r>
-              <a:rPr sz="1400">
-                <a:solidFill>
-                  <a:srgbClr val="242852"/>
-                </a:solidFill>
-                <a:latin typeface="Calibri"/>
-              </a:rPr>
-              <a:t>СКРИНШОТ 3  →  лог ИИ-агента: сгенерировал PR + прошёл CI (см. Ш3)</a:t>
-            </a:r>
-          </a:p>
-        </p:txBody>
-      </p:sp>
+      </p:pic>
     </p:spTree>
+    <p:extLst>
+      <p:ext uri="{BB962C8B-B14F-4D97-AF65-F5344CB8AC3E}">
+        <p14:creationId xmlns:p14="http://schemas.microsoft.com/office/powerpoint/2010/main" val="1084690237"/>
+      </p:ext>
+    </p:extLst>
   </p:cSld>
   <p:clrMapOvr>
     <a:masterClrMapping/>
@@ -10490,7 +13139,13 @@
   <p:cSld>
     <p:spTree>
       <p:nvGrpSpPr>
-        <p:cNvPr id="1" name=""/>
+        <p:cNvPr id="1" name="">
+          <a:extLst>
+            <a:ext uri="{FF2B5EF4-FFF2-40B4-BE49-F238E27FC236}">
+              <a16:creationId xmlns:a16="http://schemas.microsoft.com/office/drawing/2014/main" id="{DE34CE77-C026-2F27-0FEB-E6B8F2B5E64B}"/>
+            </a:ext>
+          </a:extLst>
+        </p:cNvPr>
         <p:cNvGrpSpPr/>
         <p:nvPr/>
       </p:nvGrpSpPr>
@@ -10504,7 +13159,13 @@
       </p:grpSpPr>
       <p:sp>
         <p:nvSpPr>
-          <p:cNvPr id="2" name="Title 1"/>
+          <p:cNvPr id="2" name="Title 1">
+            <a:extLst>
+              <a:ext uri="{FF2B5EF4-FFF2-40B4-BE49-F238E27FC236}">
+                <a16:creationId xmlns:a16="http://schemas.microsoft.com/office/drawing/2014/main" id="{7BE04BFF-7D06-7AA6-D117-E71F3063AF35}"/>
+              </a:ext>
+            </a:extLst>
+          </p:cNvPr>
           <p:cNvSpPr>
             <a:spLocks noGrp="1"/>
           </p:cNvSpPr>
@@ -10519,511 +13180,59 @@
           <a:p>
             <a:pPr algn="l"/>
             <a:r>
-              <a:rPr sz="4000" b="1">
+              <a:rPr lang="en-US" sz="4000" b="1" dirty="0">
                 <a:solidFill>
                   <a:srgbClr val="242852"/>
                 </a:solidFill>
                 <a:latin typeface="Calibri Light"/>
               </a:rPr>
-              <a:t>Агент: план → код → прод</a:t>
-            </a:r>
-          </a:p>
-        </p:txBody>
-      </p:sp>
-      <p:sp>
-        <p:nvSpPr>
-          <p:cNvPr id="3" name="Rounded Rectangle 2"/>
-          <p:cNvSpPr/>
+              <a:t>Commit</a:t>
+            </a:r>
+            <a:endParaRPr sz="4000" b="1" dirty="0">
+              <a:solidFill>
+                <a:srgbClr val="242852"/>
+              </a:solidFill>
+              <a:latin typeface="Calibri Light"/>
+            </a:endParaRPr>
+          </a:p>
+        </p:txBody>
+      </p:sp>
+      <p:pic>
+        <p:nvPicPr>
+          <p:cNvPr id="4" name="Рисунок 3">
+            <a:extLst>
+              <a:ext uri="{FF2B5EF4-FFF2-40B4-BE49-F238E27FC236}">
+                <a16:creationId xmlns:a16="http://schemas.microsoft.com/office/drawing/2014/main" id="{DB63477F-EACA-337F-B235-284795BF7AF9}"/>
+              </a:ext>
+            </a:extLst>
+          </p:cNvPr>
+          <p:cNvPicPr>
+            <a:picLocks noChangeAspect="1"/>
+          </p:cNvPicPr>
           <p:nvPr/>
-        </p:nvSpPr>
+        </p:nvPicPr>
+        <p:blipFill>
+          <a:blip r:embed="rId3"/>
+          <a:stretch>
+            <a:fillRect/>
+          </a:stretch>
+        </p:blipFill>
         <p:spPr>
           <a:xfrm>
-            <a:off x="640080" y="1828800"/>
-            <a:ext cx="2411730" cy="1737360"/>
-          </a:xfrm>
-          <a:prstGeom prst="roundRect">
-            <a:avLst/>
-          </a:prstGeom>
-          <a:solidFill>
-            <a:srgbClr val="4A66AC"/>
-          </a:solidFill>
-          <a:ln>
-            <a:noFill/>
-          </a:ln>
-        </p:spPr>
-        <p:style>
-          <a:lnRef idx="1">
-            <a:schemeClr val="accent1"/>
-          </a:lnRef>
-          <a:fillRef idx="3">
-            <a:schemeClr val="accent1"/>
-          </a:fillRef>
-          <a:effectRef idx="2">
-            <a:schemeClr val="accent1"/>
-          </a:effectRef>
-          <a:fontRef idx="minor">
-            <a:schemeClr val="lt1"/>
-          </a:fontRef>
-        </p:style>
-        <p:txBody>
-          <a:bodyPr wrap="square" rtlCol="0" anchor="ctr"/>
-          <a:lstStyle/>
-          <a:p>
-            <a:pPr algn="ctr"/>
-            <a:r>
-              <a:rPr sz="1800" b="1">
-                <a:solidFill>
-                  <a:srgbClr val="FFFFFF"/>
-                </a:solidFill>
-                <a:latin typeface="Calibri"/>
-              </a:rPr>
-              <a:t>1. План</a:t>
-            </a:r>
-          </a:p>
-          <a:p>
-            <a:pPr algn="ctr">
-              <a:spcBef>
-                <a:spcPts val="800"/>
-              </a:spcBef>
-            </a:pPr>
-            <a:r>
-              <a:rPr sz="1300">
-                <a:solidFill>
-                  <a:srgbClr val="FFFFFF"/>
-                </a:solidFill>
-                <a:latin typeface="Calibri"/>
-              </a:rPr>
-              <a:t>читает issue</a:t>
-            </a:r>
-          </a:p>
-        </p:txBody>
-      </p:sp>
-      <p:sp>
-        <p:nvSpPr>
-          <p:cNvPr id="4" name="Right Arrow 3"/>
-          <p:cNvSpPr/>
-          <p:nvPr/>
-        </p:nvSpPr>
-        <p:spPr>
-          <a:xfrm>
-            <a:off x="3033522" y="2468880"/>
-            <a:ext cx="457200" cy="457200"/>
-          </a:xfrm>
-          <a:prstGeom prst="rightArrow">
-            <a:avLst/>
-          </a:prstGeom>
-          <a:solidFill>
-            <a:srgbClr val="242852"/>
-          </a:solidFill>
-          <a:ln>
-            <a:noFill/>
-          </a:ln>
-        </p:spPr>
-        <p:style>
-          <a:lnRef idx="1">
-            <a:schemeClr val="accent1"/>
-          </a:lnRef>
-          <a:fillRef idx="3">
-            <a:schemeClr val="accent1"/>
-          </a:fillRef>
-          <a:effectRef idx="2">
-            <a:schemeClr val="accent1"/>
-          </a:effectRef>
-          <a:fontRef idx="minor">
-            <a:schemeClr val="lt1"/>
-          </a:fontRef>
-        </p:style>
-        <p:txBody>
-          <a:bodyPr rtlCol="0" anchor="ctr"/>
-          <a:lstStyle/>
-          <a:p>
-            <a:pPr algn="ctr"/>
-            <a:endParaRPr/>
-          </a:p>
-        </p:txBody>
-      </p:sp>
-      <p:sp>
-        <p:nvSpPr>
-          <p:cNvPr id="5" name="Rounded Rectangle 4"/>
-          <p:cNvSpPr/>
-          <p:nvPr/>
-        </p:nvSpPr>
-        <p:spPr>
-          <a:xfrm>
-            <a:off x="3463290" y="1828800"/>
-            <a:ext cx="2411730" cy="1737360"/>
-          </a:xfrm>
-          <a:prstGeom prst="roundRect">
-            <a:avLst/>
-          </a:prstGeom>
-          <a:solidFill>
-            <a:srgbClr val="629DD1"/>
-          </a:solidFill>
-          <a:ln>
-            <a:noFill/>
-          </a:ln>
-        </p:spPr>
-        <p:style>
-          <a:lnRef idx="1">
-            <a:schemeClr val="accent1"/>
-          </a:lnRef>
-          <a:fillRef idx="3">
-            <a:schemeClr val="accent1"/>
-          </a:fillRef>
-          <a:effectRef idx="2">
-            <a:schemeClr val="accent1"/>
-          </a:effectRef>
-          <a:fontRef idx="minor">
-            <a:schemeClr val="lt1"/>
-          </a:fontRef>
-        </p:style>
-        <p:txBody>
-          <a:bodyPr wrap="square" rtlCol="0" anchor="ctr"/>
-          <a:lstStyle/>
-          <a:p>
-            <a:pPr algn="ctr"/>
-            <a:r>
-              <a:rPr sz="1800" b="1">
-                <a:solidFill>
-                  <a:srgbClr val="FFFFFF"/>
-                </a:solidFill>
-                <a:latin typeface="Calibri"/>
-              </a:rPr>
-              <a:t>2. Код</a:t>
-            </a:r>
-          </a:p>
-          <a:p>
-            <a:pPr algn="ctr">
-              <a:spcBef>
-                <a:spcPts val="800"/>
-              </a:spcBef>
-            </a:pPr>
-            <a:r>
-              <a:rPr sz="1300">
-                <a:solidFill>
-                  <a:srgbClr val="FFFFFF"/>
-                </a:solidFill>
-                <a:latin typeface="Calibri"/>
-              </a:rPr>
-              <a:t>меняет ветку</a:t>
-            </a:r>
-          </a:p>
-        </p:txBody>
-      </p:sp>
-      <p:sp>
-        <p:nvSpPr>
-          <p:cNvPr id="6" name="Right Arrow 5"/>
-          <p:cNvSpPr/>
-          <p:nvPr/>
-        </p:nvSpPr>
-        <p:spPr>
-          <a:xfrm>
-            <a:off x="5856732" y="2468880"/>
-            <a:ext cx="457200" cy="457200"/>
-          </a:xfrm>
-          <a:prstGeom prst="rightArrow">
-            <a:avLst/>
-          </a:prstGeom>
-          <a:solidFill>
-            <a:srgbClr val="242852"/>
-          </a:solidFill>
-          <a:ln>
-            <a:noFill/>
-          </a:ln>
-        </p:spPr>
-        <p:style>
-          <a:lnRef idx="1">
-            <a:schemeClr val="accent1"/>
-          </a:lnRef>
-          <a:fillRef idx="3">
-            <a:schemeClr val="accent1"/>
-          </a:fillRef>
-          <a:effectRef idx="2">
-            <a:schemeClr val="accent1"/>
-          </a:effectRef>
-          <a:fontRef idx="minor">
-            <a:schemeClr val="lt1"/>
-          </a:fontRef>
-        </p:style>
-        <p:txBody>
-          <a:bodyPr rtlCol="0" anchor="ctr"/>
-          <a:lstStyle/>
-          <a:p>
-            <a:pPr algn="ctr"/>
-            <a:endParaRPr/>
-          </a:p>
-        </p:txBody>
-      </p:sp>
-      <p:sp>
-        <p:nvSpPr>
-          <p:cNvPr id="7" name="Rounded Rectangle 6"/>
-          <p:cNvSpPr/>
-          <p:nvPr/>
-        </p:nvSpPr>
-        <p:spPr>
-          <a:xfrm>
-            <a:off x="6286500" y="1828800"/>
-            <a:ext cx="2411730" cy="1737360"/>
-          </a:xfrm>
-          <a:prstGeom prst="roundRect">
-            <a:avLst/>
-          </a:prstGeom>
-          <a:solidFill>
-            <a:srgbClr val="5AA2AE"/>
-          </a:solidFill>
-          <a:ln>
-            <a:noFill/>
-          </a:ln>
-        </p:spPr>
-        <p:style>
-          <a:lnRef idx="1">
-            <a:schemeClr val="accent1"/>
-          </a:lnRef>
-          <a:fillRef idx="3">
-            <a:schemeClr val="accent1"/>
-          </a:fillRef>
-          <a:effectRef idx="2">
-            <a:schemeClr val="accent1"/>
-          </a:effectRef>
-          <a:fontRef idx="minor">
-            <a:schemeClr val="lt1"/>
-          </a:fontRef>
-        </p:style>
-        <p:txBody>
-          <a:bodyPr wrap="square" rtlCol="0" anchor="ctr"/>
-          <a:lstStyle/>
-          <a:p>
-            <a:pPr algn="ctr"/>
-            <a:r>
-              <a:rPr sz="1800" b="1">
-                <a:solidFill>
-                  <a:srgbClr val="FFFFFF"/>
-                </a:solidFill>
-                <a:latin typeface="Calibri"/>
-              </a:rPr>
-              <a:t>3. Проверка</a:t>
-            </a:r>
-          </a:p>
-          <a:p>
-            <a:pPr algn="ctr">
-              <a:spcBef>
-                <a:spcPts val="800"/>
-              </a:spcBef>
-            </a:pPr>
-            <a:r>
-              <a:rPr sz="1300">
-                <a:solidFill>
-                  <a:srgbClr val="FFFFFF"/>
-                </a:solidFill>
-                <a:latin typeface="Calibri"/>
-              </a:rPr>
-              <a:t>тесты + review</a:t>
-            </a:r>
-          </a:p>
-        </p:txBody>
-      </p:sp>
-      <p:sp>
-        <p:nvSpPr>
-          <p:cNvPr id="8" name="Right Arrow 7"/>
-          <p:cNvSpPr/>
-          <p:nvPr/>
-        </p:nvSpPr>
-        <p:spPr>
-          <a:xfrm>
-            <a:off x="8679942" y="2468880"/>
-            <a:ext cx="457200" cy="457200"/>
-          </a:xfrm>
-          <a:prstGeom prst="rightArrow">
-            <a:avLst/>
-          </a:prstGeom>
-          <a:solidFill>
-            <a:srgbClr val="242852"/>
-          </a:solidFill>
-          <a:ln>
-            <a:noFill/>
-          </a:ln>
-        </p:spPr>
-        <p:style>
-          <a:lnRef idx="1">
-            <a:schemeClr val="accent1"/>
-          </a:lnRef>
-          <a:fillRef idx="3">
-            <a:schemeClr val="accent1"/>
-          </a:fillRef>
-          <a:effectRef idx="2">
-            <a:schemeClr val="accent1"/>
-          </a:effectRef>
-          <a:fontRef idx="minor">
-            <a:schemeClr val="lt1"/>
-          </a:fontRef>
-        </p:style>
-        <p:txBody>
-          <a:bodyPr rtlCol="0" anchor="ctr"/>
-          <a:lstStyle/>
-          <a:p>
-            <a:pPr algn="ctr"/>
-            <a:endParaRPr/>
-          </a:p>
-        </p:txBody>
-      </p:sp>
-      <p:sp>
-        <p:nvSpPr>
-          <p:cNvPr id="9" name="Rounded Rectangle 8"/>
-          <p:cNvSpPr/>
-          <p:nvPr/>
-        </p:nvSpPr>
-        <p:spPr>
-          <a:xfrm>
-            <a:off x="9109710" y="1828800"/>
-            <a:ext cx="2411730" cy="1737360"/>
-          </a:xfrm>
-          <a:prstGeom prst="roundRect">
-            <a:avLst/>
-          </a:prstGeom>
-          <a:solidFill>
-            <a:srgbClr val="297FD5"/>
-          </a:solidFill>
-          <a:ln>
-            <a:noFill/>
-          </a:ln>
-        </p:spPr>
-        <p:style>
-          <a:lnRef idx="1">
-            <a:schemeClr val="accent1"/>
-          </a:lnRef>
-          <a:fillRef idx="3">
-            <a:schemeClr val="accent1"/>
-          </a:fillRef>
-          <a:effectRef idx="2">
-            <a:schemeClr val="accent1"/>
-          </a:effectRef>
-          <a:fontRef idx="minor">
-            <a:schemeClr val="lt1"/>
-          </a:fontRef>
-        </p:style>
-        <p:txBody>
-          <a:bodyPr wrap="square" rtlCol="0" anchor="ctr"/>
-          <a:lstStyle/>
-          <a:p>
-            <a:pPr algn="ctr"/>
-            <a:r>
-              <a:rPr sz="1800" b="1">
-                <a:solidFill>
-                  <a:srgbClr val="FFFFFF"/>
-                </a:solidFill>
-                <a:latin typeface="Calibri"/>
-              </a:rPr>
-              <a:t>4. Деплой</a:t>
-            </a:r>
-          </a:p>
-          <a:p>
-            <a:pPr algn="ctr">
-              <a:spcBef>
-                <a:spcPts val="800"/>
-              </a:spcBef>
-            </a:pPr>
-            <a:r>
-              <a:rPr sz="1300">
-                <a:solidFill>
-                  <a:srgbClr val="FFFFFF"/>
-                </a:solidFill>
-                <a:latin typeface="Calibri"/>
-              </a:rPr>
-              <a:t>только в stage</a:t>
-            </a:r>
-          </a:p>
-        </p:txBody>
-      </p:sp>
-      <p:sp>
-        <p:nvSpPr>
-          <p:cNvPr id="10" name="TextBox 9"/>
-          <p:cNvSpPr txBox="1"/>
-          <p:nvPr/>
-        </p:nvSpPr>
-        <p:spPr>
-          <a:xfrm>
-            <a:off x="640080" y="4023360"/>
-            <a:ext cx="10881360" cy="914400"/>
+            <a:off x="152104" y="1620241"/>
+            <a:ext cx="12677284" cy="3729426"/>
           </a:xfrm>
           <a:prstGeom prst="rect">
             <a:avLst/>
           </a:prstGeom>
-          <a:noFill/>
         </p:spPr>
-        <p:txBody>
-          <a:bodyPr wrap="square">
-            <a:spAutoFit/>
-          </a:bodyPr>
-          <a:lstStyle/>
-          <a:p>
-            <a:pPr algn="ctr"/>
-            <a:r>
-              <a:rPr sz="1800" b="1">
-                <a:solidFill>
-                  <a:srgbClr val="242852"/>
-                </a:solidFill>
-                <a:latin typeface="Calibri"/>
-              </a:rPr>
-              <a:t>человек жмёт кнопку в прод  •  агент готовит, не решает</a:t>
-            </a:r>
-          </a:p>
-        </p:txBody>
-      </p:sp>
-      <p:sp>
-        <p:nvSpPr>
-          <p:cNvPr id="11" name="Rounded Rectangle 10"/>
-          <p:cNvSpPr/>
-          <p:nvPr/>
-        </p:nvSpPr>
-        <p:spPr>
-          <a:xfrm>
-            <a:off x="640080" y="4937760"/>
-            <a:ext cx="10881360" cy="1097280"/>
-          </a:xfrm>
-          <a:prstGeom prst="roundRect">
-            <a:avLst/>
-          </a:prstGeom>
-          <a:solidFill>
-            <a:srgbClr val="E8EDF4"/>
-          </a:solidFill>
-          <a:ln w="25400">
-            <a:solidFill>
-              <a:srgbClr val="7F8FA9"/>
-            </a:solidFill>
-          </a:ln>
-        </p:spPr>
-        <p:style>
-          <a:lnRef idx="1">
-            <a:schemeClr val="accent1"/>
-          </a:lnRef>
-          <a:fillRef idx="3">
-            <a:schemeClr val="accent1"/>
-          </a:fillRef>
-          <a:effectRef idx="2">
-            <a:schemeClr val="accent1"/>
-          </a:effectRef>
-          <a:fontRef idx="minor">
-            <a:schemeClr val="lt1"/>
-          </a:fontRef>
-        </p:style>
-        <p:txBody>
-          <a:bodyPr wrap="square" rtlCol="0" anchor="ctr"/>
-          <a:lstStyle/>
-          <a:p>
-            <a:pPr algn="ctr"/>
-            <a:r>
-              <a:rPr sz="1400">
-                <a:solidFill>
-                  <a:srgbClr val="242852"/>
-                </a:solidFill>
-                <a:latin typeface="Calibri"/>
-              </a:rPr>
-              <a:t>СХЕМА: стрелки уже на слайде — скриншот не нужен, можно живьём показать агента</a:t>
-            </a:r>
-          </a:p>
-        </p:txBody>
-      </p:sp>
+      </p:pic>
     </p:spTree>
+    <p:extLst>
+      <p:ext uri="{BB962C8B-B14F-4D97-AF65-F5344CB8AC3E}">
+        <p14:creationId xmlns:p14="http://schemas.microsoft.com/office/powerpoint/2010/main" val="1441980146"/>
+      </p:ext>
+    </p:extLst>
   </p:cSld>
   <p:clrMapOvr>
     <a:masterClrMapping/>
@@ -11036,7 +13245,13 @@
   <p:cSld>
     <p:spTree>
       <p:nvGrpSpPr>
-        <p:cNvPr id="1" name=""/>
+        <p:cNvPr id="1" name="">
+          <a:extLst>
+            <a:ext uri="{FF2B5EF4-FFF2-40B4-BE49-F238E27FC236}">
+              <a16:creationId xmlns:a16="http://schemas.microsoft.com/office/drawing/2014/main" id="{89D4246A-A2CB-DA39-7291-B5658EF6CF36}"/>
+            </a:ext>
+          </a:extLst>
+        </p:cNvPr>
         <p:cNvGrpSpPr/>
         <p:nvPr/>
       </p:nvGrpSpPr>
@@ -11050,7 +13265,13 @@
       </p:grpSpPr>
       <p:sp>
         <p:nvSpPr>
-          <p:cNvPr id="2" name="Title 1"/>
+          <p:cNvPr id="2" name="Title 1">
+            <a:extLst>
+              <a:ext uri="{FF2B5EF4-FFF2-40B4-BE49-F238E27FC236}">
+                <a16:creationId xmlns:a16="http://schemas.microsoft.com/office/drawing/2014/main" id="{81AF3927-5C2E-66FF-DC8D-60D6019293D7}"/>
+              </a:ext>
+            </a:extLst>
+          </p:cNvPr>
           <p:cNvSpPr>
             <a:spLocks noGrp="1"/>
           </p:cNvSpPr>
@@ -11065,280 +13286,95 @@
           <a:p>
             <a:pPr algn="l"/>
             <a:r>
-              <a:rPr sz="4000" b="1">
+              <a:rPr lang="en-US" sz="4000" b="1" dirty="0">
                 <a:solidFill>
                   <a:srgbClr val="242852"/>
                 </a:solidFill>
                 <a:latin typeface="Calibri Light"/>
               </a:rPr>
-              <a:t>main — священен</a:t>
-            </a:r>
-          </a:p>
-        </p:txBody>
-      </p:sp>
-      <p:sp>
-        <p:nvSpPr>
-          <p:cNvPr id="3" name="Rounded Rectangle 2"/>
-          <p:cNvSpPr/>
+              <a:t>Commit</a:t>
+            </a:r>
+            <a:r>
+              <a:rPr lang="ru-RU" sz="4000" b="1" dirty="0">
+                <a:solidFill>
+                  <a:srgbClr val="242852"/>
+                </a:solidFill>
+                <a:latin typeface="Calibri Light"/>
+              </a:rPr>
+              <a:t>/</a:t>
+            </a:r>
+            <a:r>
+              <a:rPr lang="en-US" sz="4000" b="1" dirty="0">
+                <a:solidFill>
+                  <a:srgbClr val="242852"/>
+                </a:solidFill>
+                <a:latin typeface="Calibri Light"/>
+              </a:rPr>
+              <a:t>merge conflict . </a:t>
+            </a:r>
+            <a:r>
+              <a:rPr lang="ru-RU" sz="4000" b="1" dirty="0">
+                <a:solidFill>
+                  <a:srgbClr val="242852"/>
+                </a:solidFill>
+                <a:latin typeface="Calibri Light"/>
+              </a:rPr>
+              <a:t>Там же </a:t>
+            </a:r>
+            <a:r>
+              <a:rPr lang="ru-RU" sz="4000" b="1" dirty="0" err="1">
+                <a:solidFill>
+                  <a:srgbClr val="242852"/>
+                </a:solidFill>
+                <a:latin typeface="Calibri Light"/>
+              </a:rPr>
+              <a:t>ридми</a:t>
+            </a:r>
+            <a:endParaRPr sz="4000" b="1" dirty="0">
+              <a:solidFill>
+                <a:srgbClr val="242852"/>
+              </a:solidFill>
+              <a:latin typeface="Calibri Light"/>
+            </a:endParaRPr>
+          </a:p>
+        </p:txBody>
+      </p:sp>
+      <p:pic>
+        <p:nvPicPr>
+          <p:cNvPr id="5" name="Рисунок 4">
+            <a:extLst>
+              <a:ext uri="{FF2B5EF4-FFF2-40B4-BE49-F238E27FC236}">
+                <a16:creationId xmlns:a16="http://schemas.microsoft.com/office/drawing/2014/main" id="{0691E10F-EF0B-7EDC-42FF-E458D984DCF8}"/>
+              </a:ext>
+            </a:extLst>
+          </p:cNvPr>
+          <p:cNvPicPr>
+            <a:picLocks noChangeAspect="1"/>
+          </p:cNvPicPr>
           <p:nvPr/>
-        </p:nvSpPr>
+        </p:nvPicPr>
+        <p:blipFill>
+          <a:blip r:embed="rId3"/>
+          <a:stretch>
+            <a:fillRect/>
+          </a:stretch>
+        </p:blipFill>
         <p:spPr>
           <a:xfrm>
-            <a:off x="640080" y="1463040"/>
-            <a:ext cx="3383280" cy="1554480"/>
+            <a:off x="531208" y="1456073"/>
+            <a:ext cx="9078592" cy="4544059"/>
           </a:xfrm>
-          <a:prstGeom prst="roundRect">
+          <a:prstGeom prst="rect">
             <a:avLst/>
           </a:prstGeom>
-          <a:solidFill>
-            <a:srgbClr val="242852"/>
-          </a:solidFill>
-          <a:ln>
-            <a:noFill/>
-          </a:ln>
         </p:spPr>
-        <p:style>
-          <a:lnRef idx="1">
-            <a:schemeClr val="accent1"/>
-          </a:lnRef>
-          <a:fillRef idx="3">
-            <a:schemeClr val="accent1"/>
-          </a:fillRef>
-          <a:effectRef idx="2">
-            <a:schemeClr val="accent1"/>
-          </a:effectRef>
-          <a:fontRef idx="minor">
-            <a:schemeClr val="lt1"/>
-          </a:fontRef>
-        </p:style>
-        <p:txBody>
-          <a:bodyPr wrap="square" rtlCol="0" anchor="ctr"/>
-          <a:lstStyle/>
-          <a:p>
-            <a:pPr algn="ctr"/>
-            <a:r>
-              <a:rPr sz="2000" b="1">
-                <a:solidFill>
-                  <a:srgbClr val="FFFFFF"/>
-                </a:solidFill>
-                <a:latin typeface="Calibri"/>
-              </a:rPr>
-              <a:t>main</a:t>
-            </a:r>
-          </a:p>
-          <a:p>
-            <a:pPr algn="ctr">
-              <a:spcBef>
-                <a:spcPts val="800"/>
-              </a:spcBef>
-            </a:pPr>
-            <a:r>
-              <a:rPr sz="1400">
-                <a:solidFill>
-                  <a:srgbClr val="FFFFFF"/>
-                </a:solidFill>
-                <a:latin typeface="Calibri"/>
-              </a:rPr>
-              <a:t>всегда работает</a:t>
-            </a:r>
-          </a:p>
-        </p:txBody>
-      </p:sp>
-      <p:sp>
-        <p:nvSpPr>
-          <p:cNvPr id="4" name="Rounded Rectangle 3"/>
-          <p:cNvSpPr/>
-          <p:nvPr/>
-        </p:nvSpPr>
-        <p:spPr>
-          <a:xfrm>
-            <a:off x="4389120" y="1463040"/>
-            <a:ext cx="3383280" cy="1554480"/>
-          </a:xfrm>
-          <a:prstGeom prst="roundRect">
-            <a:avLst/>
-          </a:prstGeom>
-          <a:solidFill>
-            <a:srgbClr val="5AA2AE"/>
-          </a:solidFill>
-          <a:ln>
-            <a:noFill/>
-          </a:ln>
-        </p:spPr>
-        <p:style>
-          <a:lnRef idx="1">
-            <a:schemeClr val="accent1"/>
-          </a:lnRef>
-          <a:fillRef idx="3">
-            <a:schemeClr val="accent1"/>
-          </a:fillRef>
-          <a:effectRef idx="2">
-            <a:schemeClr val="accent1"/>
-          </a:effectRef>
-          <a:fontRef idx="minor">
-            <a:schemeClr val="lt1"/>
-          </a:fontRef>
-        </p:style>
-        <p:txBody>
-          <a:bodyPr wrap="square" rtlCol="0" anchor="ctr"/>
-          <a:lstStyle/>
-          <a:p>
-            <a:pPr algn="ctr"/>
-            <a:r>
-              <a:rPr sz="2000" b="1">
-                <a:solidFill>
-                  <a:srgbClr val="FFFFFF"/>
-                </a:solidFill>
-                <a:latin typeface="Calibri"/>
-              </a:rPr>
-              <a:t>feature/*</a:t>
-            </a:r>
-          </a:p>
-          <a:p>
-            <a:pPr algn="ctr">
-              <a:spcBef>
-                <a:spcPts val="800"/>
-              </a:spcBef>
-            </a:pPr>
-            <a:r>
-              <a:rPr sz="1400">
-                <a:solidFill>
-                  <a:srgbClr val="FFFFFF"/>
-                </a:solidFill>
-                <a:latin typeface="Calibri"/>
-              </a:rPr>
-              <a:t>новая фича</a:t>
-            </a:r>
-          </a:p>
-        </p:txBody>
-      </p:sp>
-      <p:sp>
-        <p:nvSpPr>
-          <p:cNvPr id="5" name="Rounded Rectangle 4"/>
-          <p:cNvSpPr/>
-          <p:nvPr/>
-        </p:nvSpPr>
-        <p:spPr>
-          <a:xfrm>
-            <a:off x="8138160" y="1463040"/>
-            <a:ext cx="3383280" cy="1554480"/>
-          </a:xfrm>
-          <a:prstGeom prst="roundRect">
-            <a:avLst/>
-          </a:prstGeom>
-          <a:solidFill>
-            <a:srgbClr val="297FD5"/>
-          </a:solidFill>
-          <a:ln>
-            <a:noFill/>
-          </a:ln>
-        </p:spPr>
-        <p:style>
-          <a:lnRef idx="1">
-            <a:schemeClr val="accent1"/>
-          </a:lnRef>
-          <a:fillRef idx="3">
-            <a:schemeClr val="accent1"/>
-          </a:fillRef>
-          <a:effectRef idx="2">
-            <a:schemeClr val="accent1"/>
-          </a:effectRef>
-          <a:fontRef idx="minor">
-            <a:schemeClr val="lt1"/>
-          </a:fontRef>
-        </p:style>
-        <p:txBody>
-          <a:bodyPr wrap="square" rtlCol="0" anchor="ctr"/>
-          <a:lstStyle/>
-          <a:p>
-            <a:pPr algn="ctr"/>
-            <a:r>
-              <a:rPr sz="2000" b="1">
-                <a:solidFill>
-                  <a:srgbClr val="FFFFFF"/>
-                </a:solidFill>
-                <a:latin typeface="Calibri"/>
-              </a:rPr>
-              <a:t>hotfix/*</a:t>
-            </a:r>
-          </a:p>
-          <a:p>
-            <a:pPr algn="ctr">
-              <a:spcBef>
-                <a:spcPts val="800"/>
-              </a:spcBef>
-            </a:pPr>
-            <a:r>
-              <a:rPr sz="1400">
-                <a:solidFill>
-                  <a:srgbClr val="FFFFFF"/>
-                </a:solidFill>
-                <a:latin typeface="Calibri"/>
-              </a:rPr>
-              <a:t>срочный фикс</a:t>
-            </a:r>
-          </a:p>
-        </p:txBody>
-      </p:sp>
-      <p:sp>
-        <p:nvSpPr>
-          <p:cNvPr id="6" name="Rounded Rectangle 5"/>
-          <p:cNvSpPr/>
-          <p:nvPr/>
-        </p:nvSpPr>
-        <p:spPr>
-          <a:xfrm>
-            <a:off x="640080" y="3383280"/>
-            <a:ext cx="10881360" cy="2651760"/>
-          </a:xfrm>
-          <a:prstGeom prst="roundRect">
-            <a:avLst/>
-          </a:prstGeom>
-          <a:solidFill>
-            <a:srgbClr val="E8EDF4"/>
-          </a:solidFill>
-          <a:ln w="25400">
-            <a:solidFill>
-              <a:srgbClr val="7F8FA9"/>
-            </a:solidFill>
-          </a:ln>
-        </p:spPr>
-        <p:style>
-          <a:lnRef idx="1">
-            <a:schemeClr val="accent1"/>
-          </a:lnRef>
-          <a:fillRef idx="3">
-            <a:schemeClr val="accent1"/>
-          </a:fillRef>
-          <a:effectRef idx="2">
-            <a:schemeClr val="accent1"/>
-          </a:effectRef>
-          <a:fontRef idx="minor">
-            <a:schemeClr val="lt1"/>
-          </a:fontRef>
-        </p:style>
-        <p:txBody>
-          <a:bodyPr wrap="square" rtlCol="0" anchor="ctr"/>
-          <a:lstStyle/>
-          <a:p>
-            <a:pPr algn="ctr"/>
-            <a:r>
-              <a:rPr sz="1400">
-                <a:solidFill>
-                  <a:srgbClr val="242852"/>
-                </a:solidFill>
-                <a:latin typeface="Calibri"/>
-              </a:rPr>
-              <a:t>СКРИНШОТ 4  →  граф веток: main + 2 feature + hotfix (см. Ш4)</a:t>
-            </a:r>
-            <a:br/>
-            <a:r>
-              <a:t>команды: git branch / git switch -c</a:t>
-            </a:r>
-          </a:p>
-        </p:txBody>
-      </p:sp>
+      </p:pic>
     </p:spTree>
+    <p:extLst>
+      <p:ext uri="{BB962C8B-B14F-4D97-AF65-F5344CB8AC3E}">
+        <p14:creationId xmlns:p14="http://schemas.microsoft.com/office/powerpoint/2010/main" val="2261491973"/>
+      </p:ext>
+    </p:extLst>
   </p:cSld>
   <p:clrMapOvr>
     <a:masterClrMapping/>

--- a/Git_deploy_prezentatsiya.pptx
+++ b/Git_deploy_prezentatsiya.pptx
@@ -5,7 +5,7 @@
     <p:sldMasterId id="2147483648" r:id="rId1"/>
   </p:sldMasterIdLst>
   <p:notesMasterIdLst>
-    <p:notesMasterId r:id="rId26"/>
+    <p:notesMasterId r:id="rId33"/>
   </p:notesMasterIdLst>
   <p:sldIdLst>
     <p:sldId id="256" r:id="rId2"/>
@@ -26,12 +26,19 @@
     <p:sldId id="262" r:id="rId17"/>
     <p:sldId id="263" r:id="rId18"/>
     <p:sldId id="264" r:id="rId19"/>
-    <p:sldId id="265" r:id="rId20"/>
-    <p:sldId id="266" r:id="rId21"/>
-    <p:sldId id="267" r:id="rId22"/>
-    <p:sldId id="268" r:id="rId23"/>
-    <p:sldId id="269" r:id="rId24"/>
-    <p:sldId id="270" r:id="rId25"/>
+    <p:sldId id="280" r:id="rId20"/>
+    <p:sldId id="281" r:id="rId21"/>
+    <p:sldId id="282" r:id="rId22"/>
+    <p:sldId id="283" r:id="rId23"/>
+    <p:sldId id="284" r:id="rId24"/>
+    <p:sldId id="285" r:id="rId25"/>
+    <p:sldId id="286" r:id="rId26"/>
+    <p:sldId id="265" r:id="rId27"/>
+    <p:sldId id="266" r:id="rId28"/>
+    <p:sldId id="267" r:id="rId29"/>
+    <p:sldId id="268" r:id="rId30"/>
+    <p:sldId id="269" r:id="rId31"/>
+    <p:sldId id="270" r:id="rId32"/>
   </p:sldIdLst>
   <p:sldSz cx="12192000" cy="6858000"/>
   <p:notesSz cx="6858000" cy="9144000"/>
@@ -222,6 +229,174 @@
 </inkml:ink>
 </file>
 
+<file path=ppt/ink/ink4.xml><?xml version="1.0" encoding="utf-8"?>
+<inkml:ink xmlns:inkml="http://www.w3.org/2003/InkML">
+  <inkml:definitions>
+    <inkml:context xml:id="ctx0">
+      <inkml:inkSource xml:id="inkSrc0">
+        <inkml:traceFormat>
+          <inkml:channel name="X" type="integer" min="-2.14748E9" max="2.14748E9" units="cm"/>
+          <inkml:channel name="Y" type="integer" min="-2.14748E9" max="2.14748E9" units="cm"/>
+          <inkml:channel name="F" type="integer" max="32767" units="dev"/>
+        </inkml:traceFormat>
+        <inkml:channelProperties>
+          <inkml:channelProperty channel="X" name="resolution" value="1000" units="1/cm"/>
+          <inkml:channelProperty channel="Y" name="resolution" value="1000" units="1/cm"/>
+          <inkml:channelProperty channel="F" name="resolution" value="0" units="1/dev"/>
+        </inkml:channelProperties>
+      </inkml:inkSource>
+      <inkml:timestamp xml:id="ts0" timeString="2026-09-17T19:46:13.206"/>
+    </inkml:context>
+    <inkml:brush xml:id="br0">
+      <inkml:brushProperty name="width" value="0.35" units="cm"/>
+      <inkml:brushProperty name="height" value="0.35" units="cm"/>
+      <inkml:brushProperty name="color" value="#E71224"/>
+    </inkml:brush>
+  </inkml:definitions>
+  <inkml:trace contextRef="#ctx0" brushRef="#br0">1 75 24575,'114'1'0,"498"-24"0,-593 20 0,1-2 0,35-12 0,-39 11 0,0 1 0,0 1 0,0 0 0,27-2 0,428 4 0,-230 5 0,-94-6 0,158 6 0,-227 9 0,-50-7 0,55 3 0,1-4 0,83 16 0,81 4 0,108-27 0,152 5 0,-22 56 0,-345-37 0,-8-2 0,216 2 0,759-22 0,-868 13 0,-17 0 0,-137-12 0,-4-1 0,0 4 0,142 22 0,-137-13 0,0-3 0,0-4 0,110-9 0,-41 2 0,278 21 0,98-11 0,-303-11 0,4626 3 0,-4456-12 0,-10-1 0,3714 11 0,-2014 5 0,5688-3-1365</inkml:trace>
+</inkml:ink>
+</file>
+
+<file path=ppt/ink/ink5.xml><?xml version="1.0" encoding="utf-8"?>
+<inkml:ink xmlns:inkml="http://www.w3.org/2003/InkML">
+  <inkml:definitions>
+    <inkml:context xml:id="ctx0">
+      <inkml:inkSource xml:id="inkSrc0">
+        <inkml:traceFormat>
+          <inkml:channel name="X" type="integer" min="-2.14748E9" max="2.14748E9" units="cm"/>
+          <inkml:channel name="Y" type="integer" min="-2.14748E9" max="2.14748E9" units="cm"/>
+          <inkml:channel name="F" type="integer" max="32767" units="dev"/>
+        </inkml:traceFormat>
+        <inkml:channelProperties>
+          <inkml:channelProperty channel="X" name="resolution" value="1000" units="1/cm"/>
+          <inkml:channelProperty channel="Y" name="resolution" value="1000" units="1/cm"/>
+          <inkml:channelProperty channel="F" name="resolution" value="0" units="1/dev"/>
+        </inkml:channelProperties>
+      </inkml:inkSource>
+      <inkml:timestamp xml:id="ts0" timeString="2026-09-17T19:46:13.206"/>
+    </inkml:context>
+    <inkml:brush xml:id="br0">
+      <inkml:brushProperty name="width" value="0.35" units="cm"/>
+      <inkml:brushProperty name="height" value="0.35" units="cm"/>
+      <inkml:brushProperty name="color" value="#E71224"/>
+    </inkml:brush>
+  </inkml:definitions>
+  <inkml:trace contextRef="#ctx0" brushRef="#br0">1 75 24575,'114'1'0,"498"-24"0,-593 20 0,1-2 0,35-12 0,-39 11 0,0 1 0,0 1 0,0 0 0,27-2 0,428 4 0,-230 5 0,-94-6 0,158 6 0,-227 9 0,-50-7 0,55 3 0,1-4 0,83 16 0,81 4 0,108-27 0,152 5 0,-22 56 0,-345-37 0,-8-2 0,216 2 0,759-22 0,-868 13 0,-17 0 0,-137-12 0,-4-1 0,0 4 0,142 22 0,-137-13 0,0-3 0,0-4 0,110-9 0,-41 2 0,278 21 0,98-11 0,-303-11 0,4626 3 0,-4456-12 0,-10-1 0,3714 11 0,-2014 5 0,5688-3-1365</inkml:trace>
+</inkml:ink>
+</file>
+
+<file path=ppt/ink/ink6.xml><?xml version="1.0" encoding="utf-8"?>
+<inkml:ink xmlns:inkml="http://www.w3.org/2003/InkML">
+  <inkml:definitions>
+    <inkml:context xml:id="ctx0">
+      <inkml:inkSource xml:id="inkSrc0">
+        <inkml:traceFormat>
+          <inkml:channel name="X" type="integer" min="-2.14748E9" max="2.14748E9" units="cm"/>
+          <inkml:channel name="Y" type="integer" min="-2.14748E9" max="2.14748E9" units="cm"/>
+          <inkml:channel name="F" type="integer" max="32767" units="dev"/>
+        </inkml:traceFormat>
+        <inkml:channelProperties>
+          <inkml:channelProperty channel="X" name="resolution" value="1000" units="1/cm"/>
+          <inkml:channelProperty channel="Y" name="resolution" value="1000" units="1/cm"/>
+          <inkml:channelProperty channel="F" name="resolution" value="0" units="1/dev"/>
+        </inkml:channelProperties>
+      </inkml:inkSource>
+      <inkml:timestamp xml:id="ts0" timeString="2026-09-17T19:48:36.218"/>
+    </inkml:context>
+    <inkml:brush xml:id="br0">
+      <inkml:brushProperty name="width" value="0.35" units="cm"/>
+      <inkml:brushProperty name="height" value="0.35" units="cm"/>
+      <inkml:brushProperty name="color" value="#E71224"/>
+    </inkml:brush>
+  </inkml:definitions>
+  <inkml:trace contextRef="#ctx0" brushRef="#br0">0 0 24575,'909'35'0,"11"25"0,-788-51 0,170 35 0,-51-3 0,-65-18 0,-97-11 0,143 3 0,190-14 0,149-4 0,-210-31 0,-174-5 0,-161 34 0,0-2 0,0 0 0,32-15 0,-23 9 0,56-21-1365</inkml:trace>
+</inkml:ink>
+</file>
+
+<file path=ppt/ink/ink7.xml><?xml version="1.0" encoding="utf-8"?>
+<inkml:ink xmlns:inkml="http://www.w3.org/2003/InkML">
+  <inkml:definitions>
+    <inkml:context xml:id="ctx0">
+      <inkml:inkSource xml:id="inkSrc0">
+        <inkml:traceFormat>
+          <inkml:channel name="X" type="integer" min="-2.14748E9" max="2.14748E9" units="cm"/>
+          <inkml:channel name="Y" type="integer" min="-2.14748E9" max="2.14748E9" units="cm"/>
+          <inkml:channel name="F" type="integer" max="32767" units="dev"/>
+        </inkml:traceFormat>
+        <inkml:channelProperties>
+          <inkml:channelProperty channel="X" name="resolution" value="1000" units="1/cm"/>
+          <inkml:channelProperty channel="Y" name="resolution" value="1000" units="1/cm"/>
+          <inkml:channelProperty channel="F" name="resolution" value="0" units="1/dev"/>
+        </inkml:channelProperties>
+      </inkml:inkSource>
+      <inkml:timestamp xml:id="ts0" timeString="2026-09-17T19:48:36.218"/>
+    </inkml:context>
+    <inkml:brush xml:id="br0">
+      <inkml:brushProperty name="width" value="0.35" units="cm"/>
+      <inkml:brushProperty name="height" value="0.35" units="cm"/>
+      <inkml:brushProperty name="color" value="#E71224"/>
+    </inkml:brush>
+  </inkml:definitions>
+  <inkml:trace contextRef="#ctx0" brushRef="#br0">0 0 24575,'909'35'0,"11"25"0,-788-51 0,170 35 0,-51-3 0,-65-18 0,-97-11 0,143 3 0,190-14 0,149-4 0,-210-31 0,-174-5 0,-161 34 0,0-2 0,0 0 0,32-15 0,-23 9 0,56-21-1365</inkml:trace>
+</inkml:ink>
+</file>
+
+<file path=ppt/ink/ink8.xml><?xml version="1.0" encoding="utf-8"?>
+<inkml:ink xmlns:inkml="http://www.w3.org/2003/InkML">
+  <inkml:definitions>
+    <inkml:context xml:id="ctx0">
+      <inkml:inkSource xml:id="inkSrc0">
+        <inkml:traceFormat>
+          <inkml:channel name="X" type="integer" min="-2.14748E9" max="2.14748E9" units="cm"/>
+          <inkml:channel name="Y" type="integer" min="-2.14748E9" max="2.14748E9" units="cm"/>
+          <inkml:channel name="F" type="integer" max="32767" units="dev"/>
+        </inkml:traceFormat>
+        <inkml:channelProperties>
+          <inkml:channelProperty channel="X" name="resolution" value="1000" units="1/cm"/>
+          <inkml:channelProperty channel="Y" name="resolution" value="1000" units="1/cm"/>
+          <inkml:channelProperty channel="F" name="resolution" value="0" units="1/dev"/>
+        </inkml:channelProperties>
+      </inkml:inkSource>
+      <inkml:timestamp xml:id="ts0" timeString="2026-09-17T19:48:36.218"/>
+    </inkml:context>
+    <inkml:brush xml:id="br0">
+      <inkml:brushProperty name="width" value="0.35" units="cm"/>
+      <inkml:brushProperty name="height" value="0.35" units="cm"/>
+      <inkml:brushProperty name="color" value="#E71224"/>
+    </inkml:brush>
+  </inkml:definitions>
+  <inkml:trace contextRef="#ctx0" brushRef="#br0">0 0 24575,'909'35'0,"11"25"0,-788-51 0,170 35 0,-51-3 0,-65-18 0,-97-11 0,143 3 0,190-14 0,149-4 0,-210-31 0,-174-5 0,-161 34 0,0-2 0,0 0 0,32-15 0,-23 9 0,56-21-1365</inkml:trace>
+</inkml:ink>
+</file>
+
+<file path=ppt/ink/ink9.xml><?xml version="1.0" encoding="utf-8"?>
+<inkml:ink xmlns:inkml="http://www.w3.org/2003/InkML">
+  <inkml:definitions>
+    <inkml:context xml:id="ctx0">
+      <inkml:inkSource xml:id="inkSrc0">
+        <inkml:traceFormat>
+          <inkml:channel name="X" type="integer" min="-2.14748E9" max="2.14748E9" units="cm"/>
+          <inkml:channel name="Y" type="integer" min="-2.14748E9" max="2.14748E9" units="cm"/>
+          <inkml:channel name="F" type="integer" max="32767" units="dev"/>
+        </inkml:traceFormat>
+        <inkml:channelProperties>
+          <inkml:channelProperty channel="X" name="resolution" value="1000" units="1/cm"/>
+          <inkml:channelProperty channel="Y" name="resolution" value="1000" units="1/cm"/>
+          <inkml:channelProperty channel="F" name="resolution" value="0" units="1/dev"/>
+        </inkml:channelProperties>
+      </inkml:inkSource>
+      <inkml:timestamp xml:id="ts0" timeString="2026-09-17T19:48:36.218"/>
+    </inkml:context>
+    <inkml:brush xml:id="br0">
+      <inkml:brushProperty name="width" value="0.35" units="cm"/>
+      <inkml:brushProperty name="height" value="0.35" units="cm"/>
+      <inkml:brushProperty name="color" value="#E71224"/>
+    </inkml:brush>
+  </inkml:definitions>
+  <inkml:trace contextRef="#ctx0" brushRef="#br0">0 0 24575,'909'35'0,"11"25"0,-788-51 0,170 35 0,-51-3 0,-65-18 0,-97-11 0,143 3 0,190-14 0,149-4 0,-210-31 0,-174-5 0,-161 34 0,0-2 0,0 0 0,32-15 0,-23 9 0,56-21-1365</inkml:trace>
+</inkml:ink>
+</file>
+
 <file path=ppt/notesMasters/notesMaster1.xml><?xml version="1.0" encoding="utf-8"?>
 <p:notesMaster xmlns:a="http://schemas.openxmlformats.org/drawingml/2006/main" xmlns:r="http://schemas.openxmlformats.org/officeDocument/2006/relationships" xmlns:p="http://schemas.openxmlformats.org/presentationml/2006/main">
   <p:cSld>
@@ -1168,7 +1343,13 @@
   <p:cSld>
     <p:spTree>
       <p:nvGrpSpPr>
-        <p:cNvPr id="1" name=""/>
+        <p:cNvPr id="1" name="">
+          <a:extLst>
+            <a:ext uri="{FF2B5EF4-FFF2-40B4-BE49-F238E27FC236}">
+              <a16:creationId xmlns:a16="http://schemas.microsoft.com/office/drawing/2014/main" id="{06A86C7A-5C40-80C8-07CC-4DF854E472A9}"/>
+            </a:ext>
+          </a:extLst>
+        </p:cNvPr>
         <p:cNvGrpSpPr/>
         <p:nvPr/>
       </p:nvGrpSpPr>
@@ -1182,7 +1363,13 @@
       </p:grpSpPr>
       <p:sp>
         <p:nvSpPr>
-          <p:cNvPr id="2" name="Slide Image Placeholder 1"/>
+          <p:cNvPr id="2" name="Slide Image Placeholder 1">
+            <a:extLst>
+              <a:ext uri="{FF2B5EF4-FFF2-40B4-BE49-F238E27FC236}">
+                <a16:creationId xmlns:a16="http://schemas.microsoft.com/office/drawing/2014/main" id="{AD6A5530-8B68-7197-6B48-2D060918FE41}"/>
+              </a:ext>
+            </a:extLst>
+          </p:cNvPr>
           <p:cNvSpPr>
             <a:spLocks noGrp="1" noRot="1" noChangeAspect="1"/>
           </p:cNvSpPr>
@@ -1194,7 +1381,13 @@
       </p:sp>
       <p:sp>
         <p:nvSpPr>
-          <p:cNvPr id="3" name="Notes Placeholder 2"/>
+          <p:cNvPr id="3" name="Notes Placeholder 2">
+            <a:extLst>
+              <a:ext uri="{FF2B5EF4-FFF2-40B4-BE49-F238E27FC236}">
+                <a16:creationId xmlns:a16="http://schemas.microsoft.com/office/drawing/2014/main" id="{EA9E8640-79CF-0841-96AA-263D85C1414A}"/>
+              </a:ext>
+            </a:extLst>
+          </p:cNvPr>
           <p:cNvSpPr>
             <a:spLocks noGrp="1"/>
           </p:cNvSpPr>
@@ -1208,14 +1401,20 @@
           <a:lstStyle/>
           <a:p>
             <a:r>
-              <a:t>1.5 мин: три окружения, деплой идёт лесенкой. В dev — агент хоть каждый коммит, в prod — только после review и stage.</a:t>
-            </a:r>
-          </a:p>
-        </p:txBody>
-      </p:sp>
-      <p:sp>
-        <p:nvSpPr>
-          <p:cNvPr id="4" name="Slide Number Placeholder 3"/>
+              <a:t>2 мин: агент = цикл plan-act-observe. Умеет: issue→код→тесты→PR→деплой на stage, откат. Не умеет: ответственность. Человек жмёт merge в прод.</a:t>
+            </a:r>
+          </a:p>
+        </p:txBody>
+      </p:sp>
+      <p:sp>
+        <p:nvSpPr>
+          <p:cNvPr id="4" name="Slide Number Placeholder 3">
+            <a:extLst>
+              <a:ext uri="{FF2B5EF4-FFF2-40B4-BE49-F238E27FC236}">
+                <a16:creationId xmlns:a16="http://schemas.microsoft.com/office/drawing/2014/main" id="{927EFCB3-1AEE-540C-AD49-136648100457}"/>
+              </a:ext>
+            </a:extLst>
+          </p:cNvPr>
           <p:cNvSpPr>
             <a:spLocks noGrp="1"/>
           </p:cNvSpPr>
@@ -1226,6 +1425,11 @@
         <p:spPr/>
       </p:sp>
     </p:spTree>
+    <p:extLst>
+      <p:ext uri="{BB962C8B-B14F-4D97-AF65-F5344CB8AC3E}">
+        <p14:creationId xmlns:p14="http://schemas.microsoft.com/office/powerpoint/2010/main" val="938133952"/>
+      </p:ext>
+    </p:extLst>
   </p:cSld>
   <p:clrMapOvr>
     <a:masterClrMapping/>
@@ -1308,7 +1512,13 @@
   <p:cSld>
     <p:spTree>
       <p:nvGrpSpPr>
-        <p:cNvPr id="1" name=""/>
+        <p:cNvPr id="1" name="">
+          <a:extLst>
+            <a:ext uri="{FF2B5EF4-FFF2-40B4-BE49-F238E27FC236}">
+              <a16:creationId xmlns:a16="http://schemas.microsoft.com/office/drawing/2014/main" id="{4878008E-CE98-113E-13C5-617AF3577015}"/>
+            </a:ext>
+          </a:extLst>
+        </p:cNvPr>
         <p:cNvGrpSpPr/>
         <p:nvPr/>
       </p:nvGrpSpPr>
@@ -1322,7 +1532,13 @@
       </p:grpSpPr>
       <p:sp>
         <p:nvSpPr>
-          <p:cNvPr id="2" name="Slide Image Placeholder 1"/>
+          <p:cNvPr id="2" name="Slide Image Placeholder 1">
+            <a:extLst>
+              <a:ext uri="{FF2B5EF4-FFF2-40B4-BE49-F238E27FC236}">
+                <a16:creationId xmlns:a16="http://schemas.microsoft.com/office/drawing/2014/main" id="{C1830952-AC60-A44C-4896-3441564D7C4A}"/>
+              </a:ext>
+            </a:extLst>
+          </p:cNvPr>
           <p:cNvSpPr>
             <a:spLocks noGrp="1" noRot="1" noChangeAspect="1"/>
           </p:cNvSpPr>
@@ -1334,7 +1550,13 @@
       </p:sp>
       <p:sp>
         <p:nvSpPr>
-          <p:cNvPr id="3" name="Notes Placeholder 2"/>
+          <p:cNvPr id="3" name="Notes Placeholder 2">
+            <a:extLst>
+              <a:ext uri="{FF2B5EF4-FFF2-40B4-BE49-F238E27FC236}">
+                <a16:creationId xmlns:a16="http://schemas.microsoft.com/office/drawing/2014/main" id="{EC572438-7952-6C50-88C7-36A00D08634E}"/>
+              </a:ext>
+            </a:extLst>
+          </p:cNvPr>
           <p:cNvSpPr>
             <a:spLocks noGrp="1"/>
           </p:cNvSpPr>
@@ -1348,14 +1570,20 @@
           <a:lstStyle/>
           <a:p>
             <a:r>
-              <a:t>2 мин: PR — просьба влить + место дискуссии. Хороший PR: маленький, с описанием, с зелёным CI. Кнопка merge — после двух галочек.</a:t>
-            </a:r>
-          </a:p>
-        </p:txBody>
-      </p:sp>
-      <p:sp>
-        <p:nvSpPr>
-          <p:cNvPr id="4" name="Slide Number Placeholder 3"/>
+              <a:t>2 мин: агент = цикл plan-act-observe. Умеет: issue→код→тесты→PR→деплой на stage, откат. Не умеет: ответственность. Человек жмёт merge в прод.</a:t>
+            </a:r>
+          </a:p>
+        </p:txBody>
+      </p:sp>
+      <p:sp>
+        <p:nvSpPr>
+          <p:cNvPr id="4" name="Slide Number Placeholder 3">
+            <a:extLst>
+              <a:ext uri="{FF2B5EF4-FFF2-40B4-BE49-F238E27FC236}">
+                <a16:creationId xmlns:a16="http://schemas.microsoft.com/office/drawing/2014/main" id="{021CCEF2-B665-2FAB-B2C9-B331C5B2E4CA}"/>
+              </a:ext>
+            </a:extLst>
+          </p:cNvPr>
           <p:cNvSpPr>
             <a:spLocks noGrp="1"/>
           </p:cNvSpPr>
@@ -1366,6 +1594,11 @@
         <p:spPr/>
       </p:sp>
     </p:spTree>
+    <p:extLst>
+      <p:ext uri="{BB962C8B-B14F-4D97-AF65-F5344CB8AC3E}">
+        <p14:creationId xmlns:p14="http://schemas.microsoft.com/office/powerpoint/2010/main" val="1277761984"/>
+      </p:ext>
+    </p:extLst>
   </p:cSld>
   <p:clrMapOvr>
     <a:masterClrMapping/>
@@ -1374,6 +1607,501 @@
 </file>
 
 <file path=ppt/notesSlides/notesSlide21.xml><?xml version="1.0" encoding="utf-8"?>
+<p:notes xmlns:a="http://schemas.openxmlformats.org/drawingml/2006/main" xmlns:r="http://schemas.openxmlformats.org/officeDocument/2006/relationships" xmlns:p="http://schemas.openxmlformats.org/presentationml/2006/main">
+  <p:cSld>
+    <p:spTree>
+      <p:nvGrpSpPr>
+        <p:cNvPr id="1" name="">
+          <a:extLst>
+            <a:ext uri="{FF2B5EF4-FFF2-40B4-BE49-F238E27FC236}">
+              <a16:creationId xmlns:a16="http://schemas.microsoft.com/office/drawing/2014/main" id="{75634B98-8519-2033-7343-FC75BB8D3A5B}"/>
+            </a:ext>
+          </a:extLst>
+        </p:cNvPr>
+        <p:cNvGrpSpPr/>
+        <p:nvPr/>
+      </p:nvGrpSpPr>
+      <p:grpSpPr>
+        <a:xfrm>
+          <a:off x="0" y="0"/>
+          <a:ext cx="0" cy="0"/>
+          <a:chOff x="0" y="0"/>
+          <a:chExt cx="0" cy="0"/>
+        </a:xfrm>
+      </p:grpSpPr>
+      <p:sp>
+        <p:nvSpPr>
+          <p:cNvPr id="2" name="Slide Image Placeholder 1">
+            <a:extLst>
+              <a:ext uri="{FF2B5EF4-FFF2-40B4-BE49-F238E27FC236}">
+                <a16:creationId xmlns:a16="http://schemas.microsoft.com/office/drawing/2014/main" id="{C96047ED-A067-31D6-C3B4-EC940FEB38D4}"/>
+              </a:ext>
+            </a:extLst>
+          </p:cNvPr>
+          <p:cNvSpPr>
+            <a:spLocks noGrp="1" noRot="1" noChangeAspect="1"/>
+          </p:cNvSpPr>
+          <p:nvPr>
+            <p:ph type="sldImg" idx="2"/>
+          </p:nvPr>
+        </p:nvSpPr>
+        <p:spPr/>
+      </p:sp>
+      <p:sp>
+        <p:nvSpPr>
+          <p:cNvPr id="3" name="Notes Placeholder 2">
+            <a:extLst>
+              <a:ext uri="{FF2B5EF4-FFF2-40B4-BE49-F238E27FC236}">
+                <a16:creationId xmlns:a16="http://schemas.microsoft.com/office/drawing/2014/main" id="{D1E0FB2B-098A-FB12-28D5-652BA55643BF}"/>
+              </a:ext>
+            </a:extLst>
+          </p:cNvPr>
+          <p:cNvSpPr>
+            <a:spLocks noGrp="1"/>
+          </p:cNvSpPr>
+          <p:nvPr>
+            <p:ph type="body" sz="quarter" idx="3"/>
+          </p:nvPr>
+        </p:nvSpPr>
+        <p:spPr/>
+        <p:txBody>
+          <a:bodyPr/>
+          <a:lstStyle/>
+          <a:p>
+            <a:r>
+              <a:t>2 мин: агент = цикл plan-act-observe. Умеет: issue→код→тесты→PR→деплой на stage, откат. Не умеет: ответственность. Человек жмёт merge в прод.</a:t>
+            </a:r>
+          </a:p>
+        </p:txBody>
+      </p:sp>
+      <p:sp>
+        <p:nvSpPr>
+          <p:cNvPr id="4" name="Slide Number Placeholder 3">
+            <a:extLst>
+              <a:ext uri="{FF2B5EF4-FFF2-40B4-BE49-F238E27FC236}">
+                <a16:creationId xmlns:a16="http://schemas.microsoft.com/office/drawing/2014/main" id="{30DB44C6-61C0-50F5-1EF9-BC77E493762C}"/>
+              </a:ext>
+            </a:extLst>
+          </p:cNvPr>
+          <p:cNvSpPr>
+            <a:spLocks noGrp="1"/>
+          </p:cNvSpPr>
+          <p:nvPr>
+            <p:ph type="sldNum" sz="quarter" idx="5"/>
+          </p:nvPr>
+        </p:nvSpPr>
+        <p:spPr/>
+      </p:sp>
+    </p:spTree>
+    <p:extLst>
+      <p:ext uri="{BB962C8B-B14F-4D97-AF65-F5344CB8AC3E}">
+        <p14:creationId xmlns:p14="http://schemas.microsoft.com/office/powerpoint/2010/main" val="2492463716"/>
+      </p:ext>
+    </p:extLst>
+  </p:cSld>
+  <p:clrMapOvr>
+    <a:masterClrMapping/>
+  </p:clrMapOvr>
+</p:notes>
+</file>
+
+<file path=ppt/notesSlides/notesSlide22.xml><?xml version="1.0" encoding="utf-8"?>
+<p:notes xmlns:a="http://schemas.openxmlformats.org/drawingml/2006/main" xmlns:r="http://schemas.openxmlformats.org/officeDocument/2006/relationships" xmlns:p="http://schemas.openxmlformats.org/presentationml/2006/main">
+  <p:cSld>
+    <p:spTree>
+      <p:nvGrpSpPr>
+        <p:cNvPr id="1" name="">
+          <a:extLst>
+            <a:ext uri="{FF2B5EF4-FFF2-40B4-BE49-F238E27FC236}">
+              <a16:creationId xmlns:a16="http://schemas.microsoft.com/office/drawing/2014/main" id="{55FB62E1-0EAC-792B-0ABC-D402C99E7C3B}"/>
+            </a:ext>
+          </a:extLst>
+        </p:cNvPr>
+        <p:cNvGrpSpPr/>
+        <p:nvPr/>
+      </p:nvGrpSpPr>
+      <p:grpSpPr>
+        <a:xfrm>
+          <a:off x="0" y="0"/>
+          <a:ext cx="0" cy="0"/>
+          <a:chOff x="0" y="0"/>
+          <a:chExt cx="0" cy="0"/>
+        </a:xfrm>
+      </p:grpSpPr>
+      <p:sp>
+        <p:nvSpPr>
+          <p:cNvPr id="2" name="Slide Image Placeholder 1">
+            <a:extLst>
+              <a:ext uri="{FF2B5EF4-FFF2-40B4-BE49-F238E27FC236}">
+                <a16:creationId xmlns:a16="http://schemas.microsoft.com/office/drawing/2014/main" id="{16B82B10-6E98-BC8B-45C1-ED79C4811B5D}"/>
+              </a:ext>
+            </a:extLst>
+          </p:cNvPr>
+          <p:cNvSpPr>
+            <a:spLocks noGrp="1" noRot="1" noChangeAspect="1"/>
+          </p:cNvSpPr>
+          <p:nvPr>
+            <p:ph type="sldImg" idx="2"/>
+          </p:nvPr>
+        </p:nvSpPr>
+        <p:spPr/>
+      </p:sp>
+      <p:sp>
+        <p:nvSpPr>
+          <p:cNvPr id="3" name="Notes Placeholder 2">
+            <a:extLst>
+              <a:ext uri="{FF2B5EF4-FFF2-40B4-BE49-F238E27FC236}">
+                <a16:creationId xmlns:a16="http://schemas.microsoft.com/office/drawing/2014/main" id="{FAAB7E93-E7C4-CFC1-C2E7-B3AE458974F9}"/>
+              </a:ext>
+            </a:extLst>
+          </p:cNvPr>
+          <p:cNvSpPr>
+            <a:spLocks noGrp="1"/>
+          </p:cNvSpPr>
+          <p:nvPr>
+            <p:ph type="body" sz="quarter" idx="3"/>
+          </p:nvPr>
+        </p:nvSpPr>
+        <p:spPr/>
+        <p:txBody>
+          <a:bodyPr/>
+          <a:lstStyle/>
+          <a:p>
+            <a:r>
+              <a:t>2 мин: агент = цикл plan-act-observe. Умеет: issue→код→тесты→PR→деплой на stage, откат. Не умеет: ответственность. Человек жмёт merge в прод.</a:t>
+            </a:r>
+          </a:p>
+        </p:txBody>
+      </p:sp>
+      <p:sp>
+        <p:nvSpPr>
+          <p:cNvPr id="4" name="Slide Number Placeholder 3">
+            <a:extLst>
+              <a:ext uri="{FF2B5EF4-FFF2-40B4-BE49-F238E27FC236}">
+                <a16:creationId xmlns:a16="http://schemas.microsoft.com/office/drawing/2014/main" id="{73BE4B28-0247-2B6F-8E02-ABBB03E28A59}"/>
+              </a:ext>
+            </a:extLst>
+          </p:cNvPr>
+          <p:cNvSpPr>
+            <a:spLocks noGrp="1"/>
+          </p:cNvSpPr>
+          <p:nvPr>
+            <p:ph type="sldNum" sz="quarter" idx="5"/>
+          </p:nvPr>
+        </p:nvSpPr>
+        <p:spPr/>
+      </p:sp>
+    </p:spTree>
+    <p:extLst>
+      <p:ext uri="{BB962C8B-B14F-4D97-AF65-F5344CB8AC3E}">
+        <p14:creationId xmlns:p14="http://schemas.microsoft.com/office/powerpoint/2010/main" val="800694854"/>
+      </p:ext>
+    </p:extLst>
+  </p:cSld>
+  <p:clrMapOvr>
+    <a:masterClrMapping/>
+  </p:clrMapOvr>
+</p:notes>
+</file>
+
+<file path=ppt/notesSlides/notesSlide23.xml><?xml version="1.0" encoding="utf-8"?>
+<p:notes xmlns:a="http://schemas.openxmlformats.org/drawingml/2006/main" xmlns:r="http://schemas.openxmlformats.org/officeDocument/2006/relationships" xmlns:p="http://schemas.openxmlformats.org/presentationml/2006/main">
+  <p:cSld>
+    <p:spTree>
+      <p:nvGrpSpPr>
+        <p:cNvPr id="1" name="">
+          <a:extLst>
+            <a:ext uri="{FF2B5EF4-FFF2-40B4-BE49-F238E27FC236}">
+              <a16:creationId xmlns:a16="http://schemas.microsoft.com/office/drawing/2014/main" id="{1BB20FA1-9934-B8B6-A25B-DAF13EA49BE8}"/>
+            </a:ext>
+          </a:extLst>
+        </p:cNvPr>
+        <p:cNvGrpSpPr/>
+        <p:nvPr/>
+      </p:nvGrpSpPr>
+      <p:grpSpPr>
+        <a:xfrm>
+          <a:off x="0" y="0"/>
+          <a:ext cx="0" cy="0"/>
+          <a:chOff x="0" y="0"/>
+          <a:chExt cx="0" cy="0"/>
+        </a:xfrm>
+      </p:grpSpPr>
+      <p:sp>
+        <p:nvSpPr>
+          <p:cNvPr id="2" name="Slide Image Placeholder 1">
+            <a:extLst>
+              <a:ext uri="{FF2B5EF4-FFF2-40B4-BE49-F238E27FC236}">
+                <a16:creationId xmlns:a16="http://schemas.microsoft.com/office/drawing/2014/main" id="{5219890E-7B58-20B9-B2DF-9D2B304AD4B4}"/>
+              </a:ext>
+            </a:extLst>
+          </p:cNvPr>
+          <p:cNvSpPr>
+            <a:spLocks noGrp="1" noRot="1" noChangeAspect="1"/>
+          </p:cNvSpPr>
+          <p:nvPr>
+            <p:ph type="sldImg" idx="2"/>
+          </p:nvPr>
+        </p:nvSpPr>
+        <p:spPr/>
+      </p:sp>
+      <p:sp>
+        <p:nvSpPr>
+          <p:cNvPr id="3" name="Notes Placeholder 2">
+            <a:extLst>
+              <a:ext uri="{FF2B5EF4-FFF2-40B4-BE49-F238E27FC236}">
+                <a16:creationId xmlns:a16="http://schemas.microsoft.com/office/drawing/2014/main" id="{6AC51B2F-1CBF-C739-358F-7C219FB9B406}"/>
+              </a:ext>
+            </a:extLst>
+          </p:cNvPr>
+          <p:cNvSpPr>
+            <a:spLocks noGrp="1"/>
+          </p:cNvSpPr>
+          <p:nvPr>
+            <p:ph type="body" sz="quarter" idx="3"/>
+          </p:nvPr>
+        </p:nvSpPr>
+        <p:spPr/>
+        <p:txBody>
+          <a:bodyPr/>
+          <a:lstStyle/>
+          <a:p>
+            <a:r>
+              <a:t>2 мин: агент = цикл plan-act-observe. Умеет: issue→код→тесты→PR→деплой на stage, откат. Не умеет: ответственность. Человек жмёт merge в прод.</a:t>
+            </a:r>
+          </a:p>
+        </p:txBody>
+      </p:sp>
+      <p:sp>
+        <p:nvSpPr>
+          <p:cNvPr id="4" name="Slide Number Placeholder 3">
+            <a:extLst>
+              <a:ext uri="{FF2B5EF4-FFF2-40B4-BE49-F238E27FC236}">
+                <a16:creationId xmlns:a16="http://schemas.microsoft.com/office/drawing/2014/main" id="{29DE1D15-B075-0CED-BC83-66BBD8BDBC75}"/>
+              </a:ext>
+            </a:extLst>
+          </p:cNvPr>
+          <p:cNvSpPr>
+            <a:spLocks noGrp="1"/>
+          </p:cNvSpPr>
+          <p:nvPr>
+            <p:ph type="sldNum" sz="quarter" idx="5"/>
+          </p:nvPr>
+        </p:nvSpPr>
+        <p:spPr/>
+      </p:sp>
+    </p:spTree>
+    <p:extLst>
+      <p:ext uri="{BB962C8B-B14F-4D97-AF65-F5344CB8AC3E}">
+        <p14:creationId xmlns:p14="http://schemas.microsoft.com/office/powerpoint/2010/main" val="73396364"/>
+      </p:ext>
+    </p:extLst>
+  </p:cSld>
+  <p:clrMapOvr>
+    <a:masterClrMapping/>
+  </p:clrMapOvr>
+</p:notes>
+</file>
+
+<file path=ppt/notesSlides/notesSlide24.xml><?xml version="1.0" encoding="utf-8"?>
+<p:notes xmlns:a="http://schemas.openxmlformats.org/drawingml/2006/main" xmlns:r="http://schemas.openxmlformats.org/officeDocument/2006/relationships" xmlns:p="http://schemas.openxmlformats.org/presentationml/2006/main">
+  <p:cSld>
+    <p:spTree>
+      <p:nvGrpSpPr>
+        <p:cNvPr id="1" name="">
+          <a:extLst>
+            <a:ext uri="{FF2B5EF4-FFF2-40B4-BE49-F238E27FC236}">
+              <a16:creationId xmlns:a16="http://schemas.microsoft.com/office/drawing/2014/main" id="{D1424208-B903-4F30-2F5A-E4D33CDCF90F}"/>
+            </a:ext>
+          </a:extLst>
+        </p:cNvPr>
+        <p:cNvGrpSpPr/>
+        <p:nvPr/>
+      </p:nvGrpSpPr>
+      <p:grpSpPr>
+        <a:xfrm>
+          <a:off x="0" y="0"/>
+          <a:ext cx="0" cy="0"/>
+          <a:chOff x="0" y="0"/>
+          <a:chExt cx="0" cy="0"/>
+        </a:xfrm>
+      </p:grpSpPr>
+      <p:sp>
+        <p:nvSpPr>
+          <p:cNvPr id="2" name="Slide Image Placeholder 1">
+            <a:extLst>
+              <a:ext uri="{FF2B5EF4-FFF2-40B4-BE49-F238E27FC236}">
+                <a16:creationId xmlns:a16="http://schemas.microsoft.com/office/drawing/2014/main" id="{EA7FDF83-9FF0-0C27-04F3-37DCE7CE9E9E}"/>
+              </a:ext>
+            </a:extLst>
+          </p:cNvPr>
+          <p:cNvSpPr>
+            <a:spLocks noGrp="1" noRot="1" noChangeAspect="1"/>
+          </p:cNvSpPr>
+          <p:nvPr>
+            <p:ph type="sldImg" idx="2"/>
+          </p:nvPr>
+        </p:nvSpPr>
+        <p:spPr/>
+      </p:sp>
+      <p:sp>
+        <p:nvSpPr>
+          <p:cNvPr id="3" name="Notes Placeholder 2">
+            <a:extLst>
+              <a:ext uri="{FF2B5EF4-FFF2-40B4-BE49-F238E27FC236}">
+                <a16:creationId xmlns:a16="http://schemas.microsoft.com/office/drawing/2014/main" id="{38FBE778-3368-CE77-3761-B71D206AEF60}"/>
+              </a:ext>
+            </a:extLst>
+          </p:cNvPr>
+          <p:cNvSpPr>
+            <a:spLocks noGrp="1"/>
+          </p:cNvSpPr>
+          <p:nvPr>
+            <p:ph type="body" sz="quarter" idx="3"/>
+          </p:nvPr>
+        </p:nvSpPr>
+        <p:spPr/>
+        <p:txBody>
+          <a:bodyPr/>
+          <a:lstStyle/>
+          <a:p>
+            <a:r>
+              <a:t>2 мин: агент = цикл plan-act-observe. Умеет: issue→код→тесты→PR→деплой на stage, откат. Не умеет: ответственность. Человек жмёт merge в прод.</a:t>
+            </a:r>
+          </a:p>
+        </p:txBody>
+      </p:sp>
+      <p:sp>
+        <p:nvSpPr>
+          <p:cNvPr id="4" name="Slide Number Placeholder 3">
+            <a:extLst>
+              <a:ext uri="{FF2B5EF4-FFF2-40B4-BE49-F238E27FC236}">
+                <a16:creationId xmlns:a16="http://schemas.microsoft.com/office/drawing/2014/main" id="{D7C92187-6CA6-E9C5-7E34-A3B7CAC5ED04}"/>
+              </a:ext>
+            </a:extLst>
+          </p:cNvPr>
+          <p:cNvSpPr>
+            <a:spLocks noGrp="1"/>
+          </p:cNvSpPr>
+          <p:nvPr>
+            <p:ph type="sldNum" sz="quarter" idx="5"/>
+          </p:nvPr>
+        </p:nvSpPr>
+        <p:spPr/>
+      </p:sp>
+    </p:spTree>
+    <p:extLst>
+      <p:ext uri="{BB962C8B-B14F-4D97-AF65-F5344CB8AC3E}">
+        <p14:creationId xmlns:p14="http://schemas.microsoft.com/office/powerpoint/2010/main" val="2795195383"/>
+      </p:ext>
+    </p:extLst>
+  </p:cSld>
+  <p:clrMapOvr>
+    <a:masterClrMapping/>
+  </p:clrMapOvr>
+</p:notes>
+</file>
+
+<file path=ppt/notesSlides/notesSlide25.xml><?xml version="1.0" encoding="utf-8"?>
+<p:notes xmlns:a="http://schemas.openxmlformats.org/drawingml/2006/main" xmlns:r="http://schemas.openxmlformats.org/officeDocument/2006/relationships" xmlns:p="http://schemas.openxmlformats.org/presentationml/2006/main">
+  <p:cSld>
+    <p:spTree>
+      <p:nvGrpSpPr>
+        <p:cNvPr id="1" name="">
+          <a:extLst>
+            <a:ext uri="{FF2B5EF4-FFF2-40B4-BE49-F238E27FC236}">
+              <a16:creationId xmlns:a16="http://schemas.microsoft.com/office/drawing/2014/main" id="{FF066F06-6657-1DE5-B771-84D1FB084AD0}"/>
+            </a:ext>
+          </a:extLst>
+        </p:cNvPr>
+        <p:cNvGrpSpPr/>
+        <p:nvPr/>
+      </p:nvGrpSpPr>
+      <p:grpSpPr>
+        <a:xfrm>
+          <a:off x="0" y="0"/>
+          <a:ext cx="0" cy="0"/>
+          <a:chOff x="0" y="0"/>
+          <a:chExt cx="0" cy="0"/>
+        </a:xfrm>
+      </p:grpSpPr>
+      <p:sp>
+        <p:nvSpPr>
+          <p:cNvPr id="2" name="Slide Image Placeholder 1">
+            <a:extLst>
+              <a:ext uri="{FF2B5EF4-FFF2-40B4-BE49-F238E27FC236}">
+                <a16:creationId xmlns:a16="http://schemas.microsoft.com/office/drawing/2014/main" id="{9602DDDE-D1B6-A0B7-21DE-1FE65F3AB341}"/>
+              </a:ext>
+            </a:extLst>
+          </p:cNvPr>
+          <p:cNvSpPr>
+            <a:spLocks noGrp="1" noRot="1" noChangeAspect="1"/>
+          </p:cNvSpPr>
+          <p:nvPr>
+            <p:ph type="sldImg" idx="2"/>
+          </p:nvPr>
+        </p:nvSpPr>
+        <p:spPr/>
+      </p:sp>
+      <p:sp>
+        <p:nvSpPr>
+          <p:cNvPr id="3" name="Notes Placeholder 2">
+            <a:extLst>
+              <a:ext uri="{FF2B5EF4-FFF2-40B4-BE49-F238E27FC236}">
+                <a16:creationId xmlns:a16="http://schemas.microsoft.com/office/drawing/2014/main" id="{02404659-B7A8-96EF-30B0-AC6C4A66769B}"/>
+              </a:ext>
+            </a:extLst>
+          </p:cNvPr>
+          <p:cNvSpPr>
+            <a:spLocks noGrp="1"/>
+          </p:cNvSpPr>
+          <p:nvPr>
+            <p:ph type="body" sz="quarter" idx="3"/>
+          </p:nvPr>
+        </p:nvSpPr>
+        <p:spPr/>
+        <p:txBody>
+          <a:bodyPr/>
+          <a:lstStyle/>
+          <a:p>
+            <a:r>
+              <a:t>2 мин: агент = цикл plan-act-observe. Умеет: issue→код→тесты→PR→деплой на stage, откат. Не умеет: ответственность. Человек жмёт merge в прод.</a:t>
+            </a:r>
+          </a:p>
+        </p:txBody>
+      </p:sp>
+      <p:sp>
+        <p:nvSpPr>
+          <p:cNvPr id="4" name="Slide Number Placeholder 3">
+            <a:extLst>
+              <a:ext uri="{FF2B5EF4-FFF2-40B4-BE49-F238E27FC236}">
+                <a16:creationId xmlns:a16="http://schemas.microsoft.com/office/drawing/2014/main" id="{A2C6CA2B-FD3D-B00A-2F27-BCEDE8FEB598}"/>
+              </a:ext>
+            </a:extLst>
+          </p:cNvPr>
+          <p:cNvSpPr>
+            <a:spLocks noGrp="1"/>
+          </p:cNvSpPr>
+          <p:nvPr>
+            <p:ph type="sldNum" sz="quarter" idx="5"/>
+          </p:nvPr>
+        </p:nvSpPr>
+        <p:spPr/>
+      </p:sp>
+    </p:spTree>
+    <p:extLst>
+      <p:ext uri="{BB962C8B-B14F-4D97-AF65-F5344CB8AC3E}">
+        <p14:creationId xmlns:p14="http://schemas.microsoft.com/office/powerpoint/2010/main" val="3163511156"/>
+      </p:ext>
+    </p:extLst>
+  </p:cSld>
+  <p:clrMapOvr>
+    <a:masterClrMapping/>
+  </p:clrMapOvr>
+</p:notes>
+</file>
+
+<file path=ppt/notesSlides/notesSlide26.xml><?xml version="1.0" encoding="utf-8"?>
 <p:notes xmlns:a="http://schemas.openxmlformats.org/drawingml/2006/main" xmlns:r="http://schemas.openxmlformats.org/officeDocument/2006/relationships" xmlns:p="http://schemas.openxmlformats.org/presentationml/2006/main">
   <p:cSld>
     <p:spTree>
@@ -1418,7 +2146,7 @@
           <a:lstStyle/>
           <a:p>
             <a:r>
-              <a:t>2 мин: чек-лист ревью, правило 15 минут, approve/request changes, suggestion-фича. Тон решает: правим код, хвалим человека.</a:t>
+              <a:t>1.5 мин: три окружения, деплой идёт лесенкой. В dev — агент хоть каждый коммит, в prod — только после review и stage.</a:t>
             </a:r>
           </a:p>
         </p:txBody>
@@ -1443,7 +2171,7 @@
 </p:notes>
 </file>
 
-<file path=ppt/notesSlides/notesSlide22.xml><?xml version="1.0" encoding="utf-8"?>
+<file path=ppt/notesSlides/notesSlide27.xml><?xml version="1.0" encoding="utf-8"?>
 <p:notes xmlns:a="http://schemas.openxmlformats.org/drawingml/2006/main" xmlns:r="http://schemas.openxmlformats.org/officeDocument/2006/relationships" xmlns:p="http://schemas.openxmlformats.org/presentationml/2006/main">
   <p:cSld>
     <p:spTree>
@@ -1488,7 +2216,7 @@
           <a:lstStyle/>
           <a:p>
             <a:r>
-              <a:t>2 мин: конфликт — не ошибка, а встреча двух правок. Показать маркеры, правило: говорим с автором второй правки, частый pull лечит.</a:t>
+              <a:t>2 мин: PR — просьба влить + место дискуссии. Хороший PR: маленький, с описанием, с зелёным CI. Кнопка merge — после двух галочек.</a:t>
             </a:r>
           </a:p>
         </p:txBody>
@@ -1513,7 +2241,7 @@
 </p:notes>
 </file>
 
-<file path=ppt/notesSlides/notesSlide23.xml><?xml version="1.0" encoding="utf-8"?>
+<file path=ppt/notesSlides/notesSlide28.xml><?xml version="1.0" encoding="utf-8"?>
 <p:notes xmlns:a="http://schemas.openxmlformats.org/drawingml/2006/main" xmlns:r="http://schemas.openxmlformats.org/officeDocument/2006/relationships" xmlns:p="http://schemas.openxmlformats.org/presentationml/2006/main">
   <p:cSld>
     <p:spTree>
@@ -1558,7 +2286,7 @@
           <a:lstStyle/>
           <a:p>
             <a:r>
-              <a:t>1 мин: финал-чеклист, прошу сфотографировать слайд. Каждое правило — итог одной темы.</a:t>
+              <a:t>2 мин: чек-лист ревью, правило 15 минут, approve/request changes, suggestion-фича. Тон решает: правим код, хвалим человека.</a:t>
             </a:r>
           </a:p>
         </p:txBody>
@@ -1583,7 +2311,7 @@
 </p:notes>
 </file>
 
-<file path=ppt/notesSlides/notesSlide24.xml><?xml version="1.0" encoding="utf-8"?>
+<file path=ppt/notesSlides/notesSlide29.xml><?xml version="1.0" encoding="utf-8"?>
 <p:notes xmlns:a="http://schemas.openxmlformats.org/drawingml/2006/main" xmlns:r="http://schemas.openxmlformats.org/officeDocument/2006/relationships" xmlns:p="http://schemas.openxmlformats.org/presentationml/2006/main">
   <p:cSld>
     <p:spTree>
@@ -1628,7 +2356,7 @@
           <a:lstStyle/>
           <a:p>
             <a:r>
-              <a:t>Финал 3 мин: вопросы + живое демо: создать ветку, коммит, PR, review самому себе, merge, показать граф. Призыв: завести репозиторий сегодня.</a:t>
+              <a:t>2 мин: конфликт — не ошибка, а встреча двух правок. Показать маркеры, правило: говорим с автором второй правки, частый pull лечит.</a:t>
             </a:r>
           </a:p>
         </p:txBody>
@@ -1699,6 +2427,146 @@
           <a:p>
             <a:r>
               <a:t>Git 2 мин: снапшоты, commit/branch/merge, локально всё, удалённый репозиторий — страховка. Показать скрин git log.</a:t>
+            </a:r>
+          </a:p>
+        </p:txBody>
+      </p:sp>
+      <p:sp>
+        <p:nvSpPr>
+          <p:cNvPr id="4" name="Slide Number Placeholder 3"/>
+          <p:cNvSpPr>
+            <a:spLocks noGrp="1"/>
+          </p:cNvSpPr>
+          <p:nvPr>
+            <p:ph type="sldNum" sz="quarter" idx="5"/>
+          </p:nvPr>
+        </p:nvSpPr>
+        <p:spPr/>
+      </p:sp>
+    </p:spTree>
+  </p:cSld>
+  <p:clrMapOvr>
+    <a:masterClrMapping/>
+  </p:clrMapOvr>
+</p:notes>
+</file>
+
+<file path=ppt/notesSlides/notesSlide30.xml><?xml version="1.0" encoding="utf-8"?>
+<p:notes xmlns:a="http://schemas.openxmlformats.org/drawingml/2006/main" xmlns:r="http://schemas.openxmlformats.org/officeDocument/2006/relationships" xmlns:p="http://schemas.openxmlformats.org/presentationml/2006/main">
+  <p:cSld>
+    <p:spTree>
+      <p:nvGrpSpPr>
+        <p:cNvPr id="1" name=""/>
+        <p:cNvGrpSpPr/>
+        <p:nvPr/>
+      </p:nvGrpSpPr>
+      <p:grpSpPr>
+        <a:xfrm>
+          <a:off x="0" y="0"/>
+          <a:ext cx="0" cy="0"/>
+          <a:chOff x="0" y="0"/>
+          <a:chExt cx="0" cy="0"/>
+        </a:xfrm>
+      </p:grpSpPr>
+      <p:sp>
+        <p:nvSpPr>
+          <p:cNvPr id="2" name="Slide Image Placeholder 1"/>
+          <p:cNvSpPr>
+            <a:spLocks noGrp="1" noRot="1" noChangeAspect="1"/>
+          </p:cNvSpPr>
+          <p:nvPr>
+            <p:ph type="sldImg" idx="2"/>
+          </p:nvPr>
+        </p:nvSpPr>
+        <p:spPr/>
+      </p:sp>
+      <p:sp>
+        <p:nvSpPr>
+          <p:cNvPr id="3" name="Notes Placeholder 2"/>
+          <p:cNvSpPr>
+            <a:spLocks noGrp="1"/>
+          </p:cNvSpPr>
+          <p:nvPr>
+            <p:ph type="body" sz="quarter" idx="3"/>
+          </p:nvPr>
+        </p:nvSpPr>
+        <p:spPr/>
+        <p:txBody>
+          <a:bodyPr/>
+          <a:lstStyle/>
+          <a:p>
+            <a:r>
+              <a:t>1 мин: финал-чеклист, прошу сфотографировать слайд. Каждое правило — итог одной темы.</a:t>
+            </a:r>
+          </a:p>
+        </p:txBody>
+      </p:sp>
+      <p:sp>
+        <p:nvSpPr>
+          <p:cNvPr id="4" name="Slide Number Placeholder 3"/>
+          <p:cNvSpPr>
+            <a:spLocks noGrp="1"/>
+          </p:cNvSpPr>
+          <p:nvPr>
+            <p:ph type="sldNum" sz="quarter" idx="5"/>
+          </p:nvPr>
+        </p:nvSpPr>
+        <p:spPr/>
+      </p:sp>
+    </p:spTree>
+  </p:cSld>
+  <p:clrMapOvr>
+    <a:masterClrMapping/>
+  </p:clrMapOvr>
+</p:notes>
+</file>
+
+<file path=ppt/notesSlides/notesSlide31.xml><?xml version="1.0" encoding="utf-8"?>
+<p:notes xmlns:a="http://schemas.openxmlformats.org/drawingml/2006/main" xmlns:r="http://schemas.openxmlformats.org/officeDocument/2006/relationships" xmlns:p="http://schemas.openxmlformats.org/presentationml/2006/main">
+  <p:cSld>
+    <p:spTree>
+      <p:nvGrpSpPr>
+        <p:cNvPr id="1" name=""/>
+        <p:cNvGrpSpPr/>
+        <p:nvPr/>
+      </p:nvGrpSpPr>
+      <p:grpSpPr>
+        <a:xfrm>
+          <a:off x="0" y="0"/>
+          <a:ext cx="0" cy="0"/>
+          <a:chOff x="0" y="0"/>
+          <a:chExt cx="0" cy="0"/>
+        </a:xfrm>
+      </p:grpSpPr>
+      <p:sp>
+        <p:nvSpPr>
+          <p:cNvPr id="2" name="Slide Image Placeholder 1"/>
+          <p:cNvSpPr>
+            <a:spLocks noGrp="1" noRot="1" noChangeAspect="1"/>
+          </p:cNvSpPr>
+          <p:nvPr>
+            <p:ph type="sldImg" idx="2"/>
+          </p:nvPr>
+        </p:nvSpPr>
+        <p:spPr/>
+      </p:sp>
+      <p:sp>
+        <p:nvSpPr>
+          <p:cNvPr id="3" name="Notes Placeholder 2"/>
+          <p:cNvSpPr>
+            <a:spLocks noGrp="1"/>
+          </p:cNvSpPr>
+          <p:nvPr>
+            <p:ph type="body" sz="quarter" idx="3"/>
+          </p:nvPr>
+        </p:nvSpPr>
+        <p:spPr/>
+        <p:txBody>
+          <a:bodyPr/>
+          <a:lstStyle/>
+          <a:p>
+            <a:r>
+              <a:t>Финал 3 мин: вопросы + живое демо: создать ветку, коммит, PR, review самому себе, merge, показать граф. Призыв: завести репозиторий сегодня.</a:t>
             </a:r>
           </a:p>
         </p:txBody>
@@ -9324,7 +10192,7 @@
               <a:t>&gt; </a:t>
             </a:r>
             <a:r>
-              <a:rPr lang="ru-RU" sz="4500" b="1">
+              <a:rPr lang="ru-RU" sz="4500" b="1" dirty="0">
                 <a:solidFill>
                   <a:srgbClr val="242852"/>
                 </a:solidFill>
@@ -9332,12 +10200,6 @@
               </a:rPr>
               <a:t>вынужденный простой</a:t>
             </a:r>
-            <a:endParaRPr lang="ru-RU" sz="4500" b="1" dirty="0">
-              <a:solidFill>
-                <a:srgbClr val="242852"/>
-              </a:solidFill>
-              <a:latin typeface="Calibri"/>
-            </a:endParaRPr>
           </a:p>
         </p:txBody>
       </p:sp>
@@ -10057,60 +10919,6 @@
           </a:p>
         </p:txBody>
       </p:sp>
-      <p:sp>
-        <p:nvSpPr>
-          <p:cNvPr id="15" name="Rounded Rectangle 14"/>
-          <p:cNvSpPr/>
-          <p:nvPr/>
-        </p:nvSpPr>
-        <p:spPr>
-          <a:xfrm>
-            <a:off x="640080" y="4663440"/>
-            <a:ext cx="10881360" cy="1371600"/>
-          </a:xfrm>
-          <a:prstGeom prst="roundRect">
-            <a:avLst/>
-          </a:prstGeom>
-          <a:solidFill>
-            <a:srgbClr val="E8EDF4"/>
-          </a:solidFill>
-          <a:ln w="25400">
-            <a:solidFill>
-              <a:srgbClr val="7F8FA9"/>
-            </a:solidFill>
-          </a:ln>
-        </p:spPr>
-        <p:style>
-          <a:lnRef idx="1">
-            <a:schemeClr val="accent1"/>
-          </a:lnRef>
-          <a:fillRef idx="3">
-            <a:schemeClr val="accent1"/>
-          </a:fillRef>
-          <a:effectRef idx="2">
-            <a:schemeClr val="accent1"/>
-          </a:effectRef>
-          <a:fontRef idx="minor">
-            <a:schemeClr val="lt1"/>
-          </a:fontRef>
-        </p:style>
-        <p:txBody>
-          <a:bodyPr wrap="square" rtlCol="0" anchor="ctr"/>
-          <a:lstStyle/>
-          <a:p>
-            <a:pPr algn="ctr"/>
-            <a:r>
-              <a:rPr sz="1400">
-                <a:solidFill>
-                  <a:srgbClr val="242852"/>
-                </a:solidFill>
-                <a:latin typeface="Calibri"/>
-              </a:rPr>
-              <a:t>СКРИНШОТ 5  →  доска Issues: To Do → In Progress → Done (см. Ш5)</a:t>
-            </a:r>
-          </a:p>
-        </p:txBody>
-      </p:sp>
     </p:spTree>
   </p:cSld>
   <p:clrMapOvr>
@@ -10124,7 +10932,13 @@
   <p:cSld>
     <p:spTree>
       <p:nvGrpSpPr>
-        <p:cNvPr id="1" name=""/>
+        <p:cNvPr id="1" name="">
+          <a:extLst>
+            <a:ext uri="{FF2B5EF4-FFF2-40B4-BE49-F238E27FC236}">
+              <a16:creationId xmlns:a16="http://schemas.microsoft.com/office/drawing/2014/main" id="{2BF1EA3D-91E7-E06F-5592-5693F8E888A6}"/>
+            </a:ext>
+          </a:extLst>
+        </p:cNvPr>
         <p:cNvGrpSpPr/>
         <p:nvPr/>
       </p:nvGrpSpPr>
@@ -10138,7 +10952,13 @@
       </p:grpSpPr>
       <p:sp>
         <p:nvSpPr>
-          <p:cNvPr id="2" name="Title 1"/>
+          <p:cNvPr id="2" name="Title 1">
+            <a:extLst>
+              <a:ext uri="{FF2B5EF4-FFF2-40B4-BE49-F238E27FC236}">
+                <a16:creationId xmlns:a16="http://schemas.microsoft.com/office/drawing/2014/main" id="{13749563-84B5-811A-83C4-D21B485F454B}"/>
+              </a:ext>
+            </a:extLst>
+          </p:cNvPr>
           <p:cNvSpPr>
             <a:spLocks noGrp="1"/>
           </p:cNvSpPr>
@@ -10153,276 +10973,114 @@
           <a:p>
             <a:pPr algn="l"/>
             <a:r>
-              <a:rPr sz="4000" b="1">
+              <a:rPr lang="en-US" sz="4000" b="1" dirty="0">
                 <a:solidFill>
                   <a:srgbClr val="242852"/>
                 </a:solidFill>
                 <a:latin typeface="Calibri Light"/>
               </a:rPr>
-              <a:t>dev → stage → prod</a:t>
-            </a:r>
-          </a:p>
-        </p:txBody>
-      </p:sp>
-      <p:sp>
-        <p:nvSpPr>
-          <p:cNvPr id="3" name="Rounded Rectangle 2"/>
-          <p:cNvSpPr/>
+              <a:t>PR = PULL REQUEST</a:t>
+            </a:r>
+            <a:r>
+              <a:rPr sz="4000" b="1" dirty="0">
+                <a:solidFill>
+                  <a:srgbClr val="242852"/>
+                </a:solidFill>
+                <a:latin typeface="Calibri Light"/>
+              </a:rPr>
+              <a:t>?</a:t>
+            </a:r>
+          </a:p>
+        </p:txBody>
+      </p:sp>
+      <p:pic>
+        <p:nvPicPr>
+          <p:cNvPr id="10" name="Рисунок 9">
+            <a:extLst>
+              <a:ext uri="{FF2B5EF4-FFF2-40B4-BE49-F238E27FC236}">
+                <a16:creationId xmlns:a16="http://schemas.microsoft.com/office/drawing/2014/main" id="{41E16626-37F1-C85A-98BA-A8F6B8B48910}"/>
+              </a:ext>
+            </a:extLst>
+          </p:cNvPr>
+          <p:cNvPicPr>
+            <a:picLocks noChangeAspect="1"/>
+          </p:cNvPicPr>
           <p:nvPr/>
-        </p:nvSpPr>
+        </p:nvPicPr>
+        <p:blipFill>
+          <a:blip r:embed="rId3"/>
+          <a:srcRect t="25114"/>
+          <a:stretch>
+            <a:fillRect/>
+          </a:stretch>
+        </p:blipFill>
         <p:spPr>
           <a:xfrm>
-            <a:off x="640080" y="1463040"/>
-            <a:ext cx="3383280" cy="1828800"/>
+            <a:off x="0" y="1452784"/>
+            <a:ext cx="12192000" cy="4170349"/>
           </a:xfrm>
-          <a:prstGeom prst="roundRect">
+          <a:prstGeom prst="rect">
             <a:avLst/>
           </a:prstGeom>
-          <a:solidFill>
-            <a:srgbClr val="7F8FA9"/>
-          </a:solidFill>
-          <a:ln>
-            <a:noFill/>
-          </a:ln>
         </p:spPr>
-        <p:style>
-          <a:lnRef idx="1">
-            <a:schemeClr val="accent1"/>
-          </a:lnRef>
-          <a:fillRef idx="3">
-            <a:schemeClr val="accent1"/>
-          </a:fillRef>
-          <a:effectRef idx="2">
-            <a:schemeClr val="accent1"/>
-          </a:effectRef>
-          <a:fontRef idx="minor">
-            <a:schemeClr val="lt1"/>
-          </a:fontRef>
-        </p:style>
-        <p:txBody>
-          <a:bodyPr wrap="square" rtlCol="0" anchor="ctr"/>
-          <a:lstStyle/>
-          <a:p>
-            <a:pPr algn="ctr"/>
-            <a:r>
-              <a:rPr sz="2200" b="1">
-                <a:solidFill>
-                  <a:srgbClr val="FFFFFF"/>
-                </a:solidFill>
-                <a:latin typeface="Calibri"/>
-              </a:rPr>
-              <a:t>dev</a:t>
-            </a:r>
-          </a:p>
-          <a:p>
-            <a:pPr algn="ctr">
-              <a:spcBef>
-                <a:spcPts val="800"/>
-              </a:spcBef>
-            </a:pPr>
-            <a:r>
-              <a:rPr sz="1400">
-                <a:solidFill>
-                  <a:srgbClr val="FFFFFF"/>
-                </a:solidFill>
-                <a:latin typeface="Calibri"/>
-              </a:rPr>
-              <a:t>ломать можно</a:t>
-            </a:r>
-          </a:p>
-        </p:txBody>
-      </p:sp>
-      <p:sp>
-        <p:nvSpPr>
-          <p:cNvPr id="4" name="Rounded Rectangle 3"/>
-          <p:cNvSpPr/>
-          <p:nvPr/>
-        </p:nvSpPr>
-        <p:spPr>
-          <a:xfrm>
-            <a:off x="4389120" y="1463040"/>
-            <a:ext cx="3383280" cy="1828800"/>
-          </a:xfrm>
-          <a:prstGeom prst="roundRect">
-            <a:avLst/>
-          </a:prstGeom>
-          <a:solidFill>
-            <a:srgbClr val="5AA2AE"/>
-          </a:solidFill>
-          <a:ln>
-            <a:noFill/>
-          </a:ln>
-        </p:spPr>
-        <p:style>
-          <a:lnRef idx="1">
-            <a:schemeClr val="accent1"/>
-          </a:lnRef>
-          <a:fillRef idx="3">
-            <a:schemeClr val="accent1"/>
-          </a:fillRef>
-          <a:effectRef idx="2">
-            <a:schemeClr val="accent1"/>
-          </a:effectRef>
-          <a:fontRef idx="minor">
-            <a:schemeClr val="lt1"/>
-          </a:fontRef>
-        </p:style>
-        <p:txBody>
-          <a:bodyPr wrap="square" rtlCol="0" anchor="ctr"/>
-          <a:lstStyle/>
-          <a:p>
-            <a:pPr algn="ctr"/>
-            <a:r>
-              <a:rPr sz="2200" b="1">
-                <a:solidFill>
-                  <a:srgbClr val="FFFFFF"/>
-                </a:solidFill>
-                <a:latin typeface="Calibri"/>
-              </a:rPr>
-              <a:t>stage</a:t>
-            </a:r>
-          </a:p>
-          <a:p>
-            <a:pPr algn="ctr">
-              <a:spcBef>
-                <a:spcPts val="800"/>
-              </a:spcBef>
-            </a:pPr>
-            <a:r>
-              <a:rPr sz="1400">
-                <a:solidFill>
-                  <a:srgbClr val="FFFFFF"/>
-                </a:solidFill>
-                <a:latin typeface="Calibri"/>
-              </a:rPr>
-              <a:t>как прод, но не прод</a:t>
-            </a:r>
-          </a:p>
-        </p:txBody>
-      </p:sp>
-      <p:sp>
-        <p:nvSpPr>
-          <p:cNvPr id="5" name="Rounded Rectangle 4"/>
-          <p:cNvSpPr/>
-          <p:nvPr/>
-        </p:nvSpPr>
-        <p:spPr>
-          <a:xfrm>
-            <a:off x="8138160" y="1463040"/>
-            <a:ext cx="3383280" cy="1828800"/>
-          </a:xfrm>
-          <a:prstGeom prst="roundRect">
-            <a:avLst/>
-          </a:prstGeom>
-          <a:solidFill>
-            <a:srgbClr val="242852"/>
-          </a:solidFill>
-          <a:ln>
-            <a:noFill/>
-          </a:ln>
-        </p:spPr>
-        <p:style>
-          <a:lnRef idx="1">
-            <a:schemeClr val="accent1"/>
-          </a:lnRef>
-          <a:fillRef idx="3">
-            <a:schemeClr val="accent1"/>
-          </a:fillRef>
-          <a:effectRef idx="2">
-            <a:schemeClr val="accent1"/>
-          </a:effectRef>
-          <a:fontRef idx="minor">
-            <a:schemeClr val="lt1"/>
-          </a:fontRef>
-        </p:style>
-        <p:txBody>
-          <a:bodyPr wrap="square" rtlCol="0" anchor="ctr"/>
-          <a:lstStyle/>
-          <a:p>
-            <a:pPr algn="ctr"/>
-            <a:r>
-              <a:rPr sz="2200" b="1">
-                <a:solidFill>
-                  <a:srgbClr val="FFFFFF"/>
-                </a:solidFill>
-                <a:latin typeface="Calibri"/>
-              </a:rPr>
-              <a:t>prod</a:t>
-            </a:r>
-          </a:p>
-          <a:p>
-            <a:pPr algn="ctr">
-              <a:spcBef>
-                <a:spcPts val="800"/>
-              </a:spcBef>
-            </a:pPr>
-            <a:r>
-              <a:rPr sz="1400">
-                <a:solidFill>
-                  <a:srgbClr val="FFFFFF"/>
-                </a:solidFill>
-                <a:latin typeface="Calibri"/>
-              </a:rPr>
-              <a:t>трогаем осторожно</a:t>
-            </a:r>
-          </a:p>
-        </p:txBody>
-      </p:sp>
-      <p:sp>
-        <p:nvSpPr>
-          <p:cNvPr id="6" name="Rounded Rectangle 5"/>
-          <p:cNvSpPr/>
-          <p:nvPr/>
-        </p:nvSpPr>
-        <p:spPr>
-          <a:xfrm>
-            <a:off x="640080" y="3657600"/>
-            <a:ext cx="10881360" cy="2377440"/>
-          </a:xfrm>
-          <a:prstGeom prst="roundRect">
-            <a:avLst/>
-          </a:prstGeom>
-          <a:solidFill>
-            <a:srgbClr val="E8EDF4"/>
-          </a:solidFill>
-          <a:ln w="25400">
-            <a:solidFill>
-              <a:srgbClr val="7F8FA9"/>
-            </a:solidFill>
-          </a:ln>
-        </p:spPr>
-        <p:style>
-          <a:lnRef idx="1">
-            <a:schemeClr val="accent1"/>
-          </a:lnRef>
-          <a:fillRef idx="3">
-            <a:schemeClr val="accent1"/>
-          </a:fillRef>
-          <a:effectRef idx="2">
-            <a:schemeClr val="accent1"/>
-          </a:effectRef>
-          <a:fontRef idx="minor">
-            <a:schemeClr val="lt1"/>
-          </a:fontRef>
-        </p:style>
-        <p:txBody>
-          <a:bodyPr wrap="square" rtlCol="0" anchor="ctr"/>
-          <a:lstStyle/>
-          <a:p>
-            <a:pPr algn="ctr"/>
-            <a:r>
-              <a:rPr sz="1400">
-                <a:solidFill>
-                  <a:srgbClr val="242852"/>
-                </a:solidFill>
-                <a:latin typeface="Calibri"/>
-              </a:rPr>
-              <a:t>СКРИНШОТ 6  →  pipeline: зелёные галочки dev → stage → prod (Actions / GitLab CI, см. Ш6)</a:t>
-            </a:r>
-          </a:p>
-        </p:txBody>
-      </p:sp>
+      </p:pic>
+      <mc:AlternateContent xmlns:mc="http://schemas.openxmlformats.org/markup-compatibility/2006">
+        <mc:Choice xmlns:p14="http://schemas.microsoft.com/office/powerpoint/2010/main" Requires="p14">
+          <p:contentPart p14:bwMode="auto" r:id="rId4">
+            <p14:nvContentPartPr>
+              <p14:cNvPr id="11" name="Рукописный ввод 10">
+                <a:extLst>
+                  <a:ext uri="{FF2B5EF4-FFF2-40B4-BE49-F238E27FC236}">
+                    <a16:creationId xmlns:a16="http://schemas.microsoft.com/office/drawing/2014/main" id="{CDBDFAF1-9E9E-B202-84E8-55AC295C7572}"/>
+                  </a:ext>
+                </a:extLst>
+              </p14:cNvPr>
+              <p14:cNvContentPartPr/>
+              <p14:nvPr/>
+            </p14:nvContentPartPr>
+            <p14:xfrm>
+              <a:off x="1811345" y="5322496"/>
+              <a:ext cx="10158840" cy="105120"/>
+            </p14:xfrm>
+          </p:contentPart>
+        </mc:Choice>
+        <mc:Fallback>
+          <p:pic>
+            <p:nvPicPr>
+              <p:cNvPr id="11" name="Рукописный ввод 10">
+                <a:extLst>
+                  <a:ext uri="{FF2B5EF4-FFF2-40B4-BE49-F238E27FC236}">
+                    <a16:creationId xmlns:a16="http://schemas.microsoft.com/office/drawing/2014/main" id="{CDBDFAF1-9E9E-B202-84E8-55AC295C7572}"/>
+                  </a:ext>
+                </a:extLst>
+              </p:cNvPr>
+              <p:cNvPicPr/>
+              <p:nvPr/>
+            </p:nvPicPr>
+            <p:blipFill>
+              <a:blip r:embed="rId5"/>
+              <a:stretch>
+                <a:fillRect/>
+              </a:stretch>
+            </p:blipFill>
+            <p:spPr>
+              <a:xfrm>
+                <a:off x="1748705" y="5259856"/>
+                <a:ext cx="10284480" cy="230760"/>
+              </a:xfrm>
+              <a:prstGeom prst="rect">
+                <a:avLst/>
+              </a:prstGeom>
+            </p:spPr>
+          </p:pic>
+        </mc:Fallback>
+      </mc:AlternateContent>
     </p:spTree>
+    <p:extLst>
+      <p:ext uri="{BB962C8B-B14F-4D97-AF65-F5344CB8AC3E}">
+        <p14:creationId xmlns:p14="http://schemas.microsoft.com/office/powerpoint/2010/main" val="1476630604"/>
+      </p:ext>
+    </p:extLst>
   </p:cSld>
   <p:clrMapOvr>
     <a:masterClrMapping/>
@@ -10772,6 +11430,1220 @@
   <p:cSld>
     <p:spTree>
       <p:nvGrpSpPr>
+        <p:cNvPr id="1" name="">
+          <a:extLst>
+            <a:ext uri="{FF2B5EF4-FFF2-40B4-BE49-F238E27FC236}">
+              <a16:creationId xmlns:a16="http://schemas.microsoft.com/office/drawing/2014/main" id="{5A71872F-9129-7F11-F09E-35C00EB875B4}"/>
+            </a:ext>
+          </a:extLst>
+        </p:cNvPr>
+        <p:cNvGrpSpPr/>
+        <p:nvPr/>
+      </p:nvGrpSpPr>
+      <p:grpSpPr>
+        <a:xfrm>
+          <a:off x="0" y="0"/>
+          <a:ext cx="0" cy="0"/>
+          <a:chOff x="0" y="0"/>
+          <a:chExt cx="0" cy="0"/>
+        </a:xfrm>
+      </p:grpSpPr>
+      <p:sp>
+        <p:nvSpPr>
+          <p:cNvPr id="2" name="Title 1">
+            <a:extLst>
+              <a:ext uri="{FF2B5EF4-FFF2-40B4-BE49-F238E27FC236}">
+                <a16:creationId xmlns:a16="http://schemas.microsoft.com/office/drawing/2014/main" id="{04CA2270-40FB-BCD3-7201-287464ECB8F1}"/>
+              </a:ext>
+            </a:extLst>
+          </p:cNvPr>
+          <p:cNvSpPr>
+            <a:spLocks noGrp="1"/>
+          </p:cNvSpPr>
+          <p:nvPr>
+            <p:ph type="title"/>
+          </p:nvPr>
+        </p:nvSpPr>
+        <p:spPr/>
+        <p:txBody>
+          <a:bodyPr/>
+          <a:lstStyle/>
+          <a:p>
+            <a:pPr algn="l"/>
+            <a:r>
+              <a:rPr lang="en-US" sz="4000" b="1" dirty="0">
+                <a:solidFill>
+                  <a:srgbClr val="242852"/>
+                </a:solidFill>
+                <a:latin typeface="Calibri Light"/>
+              </a:rPr>
+              <a:t>PR = PULL REQUEST</a:t>
+            </a:r>
+            <a:r>
+              <a:rPr sz="4000" b="1" dirty="0">
+                <a:solidFill>
+                  <a:srgbClr val="242852"/>
+                </a:solidFill>
+                <a:latin typeface="Calibri Light"/>
+              </a:rPr>
+              <a:t>?</a:t>
+            </a:r>
+          </a:p>
+        </p:txBody>
+      </p:sp>
+      <mc:AlternateContent xmlns:mc="http://schemas.openxmlformats.org/markup-compatibility/2006">
+        <mc:Choice xmlns:p14="http://schemas.microsoft.com/office/powerpoint/2010/main" Requires="p14">
+          <p:contentPart p14:bwMode="auto" r:id="rId3">
+            <p14:nvContentPartPr>
+              <p14:cNvPr id="11" name="Рукописный ввод 10">
+                <a:extLst>
+                  <a:ext uri="{FF2B5EF4-FFF2-40B4-BE49-F238E27FC236}">
+                    <a16:creationId xmlns:a16="http://schemas.microsoft.com/office/drawing/2014/main" id="{2EFFC39F-5B76-E107-4F6F-AB1312DEA579}"/>
+                  </a:ext>
+                </a:extLst>
+              </p14:cNvPr>
+              <p14:cNvContentPartPr/>
+              <p14:nvPr/>
+            </p14:nvContentPartPr>
+            <p14:xfrm>
+              <a:off x="1811345" y="5322496"/>
+              <a:ext cx="10158840" cy="105120"/>
+            </p14:xfrm>
+          </p:contentPart>
+        </mc:Choice>
+        <mc:Fallback>
+          <p:pic>
+            <p:nvPicPr>
+              <p:cNvPr id="11" name="Рукописный ввод 10">
+                <a:extLst>
+                  <a:ext uri="{FF2B5EF4-FFF2-40B4-BE49-F238E27FC236}">
+                    <a16:creationId xmlns:a16="http://schemas.microsoft.com/office/drawing/2014/main" id="{2EFFC39F-5B76-E107-4F6F-AB1312DEA579}"/>
+                  </a:ext>
+                </a:extLst>
+              </p:cNvPr>
+              <p:cNvPicPr/>
+              <p:nvPr/>
+            </p:nvPicPr>
+            <p:blipFill>
+              <a:blip r:embed="rId4"/>
+              <a:stretch>
+                <a:fillRect/>
+              </a:stretch>
+            </p:blipFill>
+            <p:spPr>
+              <a:xfrm>
+                <a:off x="1748345" y="5259496"/>
+                <a:ext cx="10284480" cy="230760"/>
+              </a:xfrm>
+              <a:prstGeom prst="rect">
+                <a:avLst/>
+              </a:prstGeom>
+            </p:spPr>
+          </p:pic>
+        </mc:Fallback>
+      </mc:AlternateContent>
+      <p:pic>
+        <p:nvPicPr>
+          <p:cNvPr id="4" name="Рисунок 3">
+            <a:extLst>
+              <a:ext uri="{FF2B5EF4-FFF2-40B4-BE49-F238E27FC236}">
+                <a16:creationId xmlns:a16="http://schemas.microsoft.com/office/drawing/2014/main" id="{00CEE28B-B30A-8560-37F0-EE6D8A2F3958}"/>
+              </a:ext>
+            </a:extLst>
+          </p:cNvPr>
+          <p:cNvPicPr>
+            <a:picLocks noChangeAspect="1"/>
+          </p:cNvPicPr>
+          <p:nvPr/>
+        </p:nvPicPr>
+        <p:blipFill>
+          <a:blip r:embed="rId5"/>
+          <a:stretch>
+            <a:fillRect/>
+          </a:stretch>
+        </p:blipFill>
+        <p:spPr>
+          <a:xfrm>
+            <a:off x="0" y="1430384"/>
+            <a:ext cx="12192000" cy="5732915"/>
+          </a:xfrm>
+          <a:prstGeom prst="rect">
+            <a:avLst/>
+          </a:prstGeom>
+        </p:spPr>
+      </p:pic>
+    </p:spTree>
+    <p:extLst>
+      <p:ext uri="{BB962C8B-B14F-4D97-AF65-F5344CB8AC3E}">
+        <p14:creationId xmlns:p14="http://schemas.microsoft.com/office/powerpoint/2010/main" val="1200940368"/>
+      </p:ext>
+    </p:extLst>
+  </p:cSld>
+  <p:clrMapOvr>
+    <a:masterClrMapping/>
+  </p:clrMapOvr>
+</p:sld>
+</file>
+
+<file path=ppt/slides/slide21.xml><?xml version="1.0" encoding="utf-8"?>
+<p:sld xmlns:a="http://schemas.openxmlformats.org/drawingml/2006/main" xmlns:r="http://schemas.openxmlformats.org/officeDocument/2006/relationships" xmlns:p="http://schemas.openxmlformats.org/presentationml/2006/main">
+  <p:cSld>
+    <p:spTree>
+      <p:nvGrpSpPr>
+        <p:cNvPr id="1" name="">
+          <a:extLst>
+            <a:ext uri="{FF2B5EF4-FFF2-40B4-BE49-F238E27FC236}">
+              <a16:creationId xmlns:a16="http://schemas.microsoft.com/office/drawing/2014/main" id="{02E7D3F7-1D88-CDC6-9352-44F6AC7CDEA9}"/>
+            </a:ext>
+          </a:extLst>
+        </p:cNvPr>
+        <p:cNvGrpSpPr/>
+        <p:nvPr/>
+      </p:nvGrpSpPr>
+      <p:grpSpPr>
+        <a:xfrm>
+          <a:off x="0" y="0"/>
+          <a:ext cx="0" cy="0"/>
+          <a:chOff x="0" y="0"/>
+          <a:chExt cx="0" cy="0"/>
+        </a:xfrm>
+      </p:grpSpPr>
+      <p:sp>
+        <p:nvSpPr>
+          <p:cNvPr id="2" name="Title 1">
+            <a:extLst>
+              <a:ext uri="{FF2B5EF4-FFF2-40B4-BE49-F238E27FC236}">
+                <a16:creationId xmlns:a16="http://schemas.microsoft.com/office/drawing/2014/main" id="{422665A0-8CBC-1641-B761-E8AC7AB49BC7}"/>
+              </a:ext>
+            </a:extLst>
+          </p:cNvPr>
+          <p:cNvSpPr>
+            <a:spLocks noGrp="1"/>
+          </p:cNvSpPr>
+          <p:nvPr>
+            <p:ph type="title"/>
+          </p:nvPr>
+        </p:nvSpPr>
+        <p:spPr/>
+        <p:txBody>
+          <a:bodyPr/>
+          <a:lstStyle/>
+          <a:p>
+            <a:pPr algn="l"/>
+            <a:r>
+              <a:rPr lang="en-US" sz="4000" b="1" dirty="0">
+                <a:solidFill>
+                  <a:srgbClr val="242852"/>
+                </a:solidFill>
+                <a:latin typeface="Calibri Light"/>
+              </a:rPr>
+              <a:t>PR = PULL REQUEST</a:t>
+            </a:r>
+            <a:r>
+              <a:rPr sz="4000" b="1" dirty="0">
+                <a:solidFill>
+                  <a:srgbClr val="242852"/>
+                </a:solidFill>
+                <a:latin typeface="Calibri Light"/>
+              </a:rPr>
+              <a:t>?</a:t>
+            </a:r>
+          </a:p>
+        </p:txBody>
+      </p:sp>
+      <p:pic>
+        <p:nvPicPr>
+          <p:cNvPr id="5" name="Рисунок 4">
+            <a:extLst>
+              <a:ext uri="{FF2B5EF4-FFF2-40B4-BE49-F238E27FC236}">
+                <a16:creationId xmlns:a16="http://schemas.microsoft.com/office/drawing/2014/main" id="{95A9AE8D-8C23-B801-7B5C-314B91594864}"/>
+              </a:ext>
+            </a:extLst>
+          </p:cNvPr>
+          <p:cNvPicPr>
+            <a:picLocks noChangeAspect="1"/>
+          </p:cNvPicPr>
+          <p:nvPr/>
+        </p:nvPicPr>
+        <p:blipFill>
+          <a:blip r:embed="rId3"/>
+          <a:stretch>
+            <a:fillRect/>
+          </a:stretch>
+        </p:blipFill>
+        <p:spPr>
+          <a:xfrm>
+            <a:off x="16115" y="2486826"/>
+            <a:ext cx="12187342" cy="1888621"/>
+          </a:xfrm>
+          <a:prstGeom prst="rect">
+            <a:avLst/>
+          </a:prstGeom>
+        </p:spPr>
+      </p:pic>
+      <mc:AlternateContent xmlns:mc="http://schemas.openxmlformats.org/markup-compatibility/2006">
+        <mc:Choice xmlns:p14="http://schemas.microsoft.com/office/powerpoint/2010/main" Requires="p14">
+          <p:contentPart p14:bwMode="auto" r:id="rId4">
+            <p14:nvContentPartPr>
+              <p14:cNvPr id="6" name="Рукописный ввод 5">
+                <a:extLst>
+                  <a:ext uri="{FF2B5EF4-FFF2-40B4-BE49-F238E27FC236}">
+                    <a16:creationId xmlns:a16="http://schemas.microsoft.com/office/drawing/2014/main" id="{120BAC2A-C9E2-B4B9-59D7-DCC494952A03}"/>
+                  </a:ext>
+                </a:extLst>
+              </p14:cNvPr>
+              <p14:cNvContentPartPr/>
+              <p14:nvPr/>
+            </p14:nvContentPartPr>
+            <p14:xfrm>
+              <a:off x="9750566" y="3905176"/>
+              <a:ext cx="1737000" cy="86760"/>
+            </p14:xfrm>
+          </p:contentPart>
+        </mc:Choice>
+        <mc:Fallback>
+          <p:pic>
+            <p:nvPicPr>
+              <p:cNvPr id="6" name="Рукописный ввод 5">
+                <a:extLst>
+                  <a:ext uri="{FF2B5EF4-FFF2-40B4-BE49-F238E27FC236}">
+                    <a16:creationId xmlns:a16="http://schemas.microsoft.com/office/drawing/2014/main" id="{120BAC2A-C9E2-B4B9-59D7-DCC494952A03}"/>
+                  </a:ext>
+                </a:extLst>
+              </p:cNvPr>
+              <p:cNvPicPr/>
+              <p:nvPr/>
+            </p:nvPicPr>
+            <p:blipFill>
+              <a:blip r:embed="rId5"/>
+              <a:stretch>
+                <a:fillRect/>
+              </a:stretch>
+            </p:blipFill>
+            <p:spPr>
+              <a:xfrm>
+                <a:off x="9687566" y="3842176"/>
+                <a:ext cx="1862640" cy="212400"/>
+              </a:xfrm>
+              <a:prstGeom prst="rect">
+                <a:avLst/>
+              </a:prstGeom>
+            </p:spPr>
+          </p:pic>
+        </mc:Fallback>
+      </mc:AlternateContent>
+    </p:spTree>
+    <p:extLst>
+      <p:ext uri="{BB962C8B-B14F-4D97-AF65-F5344CB8AC3E}">
+        <p14:creationId xmlns:p14="http://schemas.microsoft.com/office/powerpoint/2010/main" val="3323755937"/>
+      </p:ext>
+    </p:extLst>
+  </p:cSld>
+  <p:clrMapOvr>
+    <a:masterClrMapping/>
+  </p:clrMapOvr>
+</p:sld>
+</file>
+
+<file path=ppt/slides/slide22.xml><?xml version="1.0" encoding="utf-8"?>
+<p:sld xmlns:a="http://schemas.openxmlformats.org/drawingml/2006/main" xmlns:r="http://schemas.openxmlformats.org/officeDocument/2006/relationships" xmlns:p="http://schemas.openxmlformats.org/presentationml/2006/main">
+  <p:cSld>
+    <p:spTree>
+      <p:nvGrpSpPr>
+        <p:cNvPr id="1" name="">
+          <a:extLst>
+            <a:ext uri="{FF2B5EF4-FFF2-40B4-BE49-F238E27FC236}">
+              <a16:creationId xmlns:a16="http://schemas.microsoft.com/office/drawing/2014/main" id="{FE79A64F-0D4C-0BF8-C582-D47F8BC76924}"/>
+            </a:ext>
+          </a:extLst>
+        </p:cNvPr>
+        <p:cNvGrpSpPr/>
+        <p:nvPr/>
+      </p:nvGrpSpPr>
+      <p:grpSpPr>
+        <a:xfrm>
+          <a:off x="0" y="0"/>
+          <a:ext cx="0" cy="0"/>
+          <a:chOff x="0" y="0"/>
+          <a:chExt cx="0" cy="0"/>
+        </a:xfrm>
+      </p:grpSpPr>
+      <p:sp>
+        <p:nvSpPr>
+          <p:cNvPr id="2" name="Title 1">
+            <a:extLst>
+              <a:ext uri="{FF2B5EF4-FFF2-40B4-BE49-F238E27FC236}">
+                <a16:creationId xmlns:a16="http://schemas.microsoft.com/office/drawing/2014/main" id="{E3A00FFE-EABA-B67C-0ED9-2A25EB91535E}"/>
+              </a:ext>
+            </a:extLst>
+          </p:cNvPr>
+          <p:cNvSpPr>
+            <a:spLocks noGrp="1"/>
+          </p:cNvSpPr>
+          <p:nvPr>
+            <p:ph type="title"/>
+          </p:nvPr>
+        </p:nvSpPr>
+        <p:spPr/>
+        <p:txBody>
+          <a:bodyPr/>
+          <a:lstStyle/>
+          <a:p>
+            <a:pPr algn="l"/>
+            <a:r>
+              <a:rPr lang="en-US" sz="4000" b="1" dirty="0">
+                <a:solidFill>
+                  <a:srgbClr val="242852"/>
+                </a:solidFill>
+                <a:latin typeface="Calibri Light"/>
+              </a:rPr>
+              <a:t>PR = PULL REQUEST</a:t>
+            </a:r>
+            <a:r>
+              <a:rPr sz="4000" b="1" dirty="0">
+                <a:solidFill>
+                  <a:srgbClr val="242852"/>
+                </a:solidFill>
+                <a:latin typeface="Calibri Light"/>
+              </a:rPr>
+              <a:t>?</a:t>
+            </a:r>
+          </a:p>
+        </p:txBody>
+      </p:sp>
+      <p:pic>
+        <p:nvPicPr>
+          <p:cNvPr id="5" name="Рисунок 4">
+            <a:extLst>
+              <a:ext uri="{FF2B5EF4-FFF2-40B4-BE49-F238E27FC236}">
+                <a16:creationId xmlns:a16="http://schemas.microsoft.com/office/drawing/2014/main" id="{0A7F3E47-6F6D-F961-94D3-C2BB83ECCB81}"/>
+              </a:ext>
+            </a:extLst>
+          </p:cNvPr>
+          <p:cNvPicPr>
+            <a:picLocks noChangeAspect="1"/>
+          </p:cNvPicPr>
+          <p:nvPr/>
+        </p:nvPicPr>
+        <p:blipFill>
+          <a:blip r:embed="rId3"/>
+          <a:stretch>
+            <a:fillRect/>
+          </a:stretch>
+        </p:blipFill>
+        <p:spPr>
+          <a:xfrm>
+            <a:off x="16115" y="2486826"/>
+            <a:ext cx="12187342" cy="1888621"/>
+          </a:xfrm>
+          <a:prstGeom prst="rect">
+            <a:avLst/>
+          </a:prstGeom>
+        </p:spPr>
+      </p:pic>
+      <mc:AlternateContent xmlns:mc="http://schemas.openxmlformats.org/markup-compatibility/2006">
+        <mc:Choice xmlns:p14="http://schemas.microsoft.com/office/powerpoint/2010/main" Requires="p14">
+          <p:contentPart p14:bwMode="auto" r:id="rId4">
+            <p14:nvContentPartPr>
+              <p14:cNvPr id="6" name="Рукописный ввод 5">
+                <a:extLst>
+                  <a:ext uri="{FF2B5EF4-FFF2-40B4-BE49-F238E27FC236}">
+                    <a16:creationId xmlns:a16="http://schemas.microsoft.com/office/drawing/2014/main" id="{6C6DF0EF-7584-B0E6-2513-F9E053387094}"/>
+                  </a:ext>
+                </a:extLst>
+              </p14:cNvPr>
+              <p14:cNvContentPartPr/>
+              <p14:nvPr/>
+            </p14:nvContentPartPr>
+            <p14:xfrm>
+              <a:off x="9750566" y="3905176"/>
+              <a:ext cx="1737000" cy="86760"/>
+            </p14:xfrm>
+          </p:contentPart>
+        </mc:Choice>
+        <mc:Fallback>
+          <p:pic>
+            <p:nvPicPr>
+              <p:cNvPr id="6" name="Рукописный ввод 5">
+                <a:extLst>
+                  <a:ext uri="{FF2B5EF4-FFF2-40B4-BE49-F238E27FC236}">
+                    <a16:creationId xmlns:a16="http://schemas.microsoft.com/office/drawing/2014/main" id="{6C6DF0EF-7584-B0E6-2513-F9E053387094}"/>
+                  </a:ext>
+                </a:extLst>
+              </p:cNvPr>
+              <p:cNvPicPr/>
+              <p:nvPr/>
+            </p:nvPicPr>
+            <p:blipFill>
+              <a:blip r:embed="rId5"/>
+              <a:stretch>
+                <a:fillRect/>
+              </a:stretch>
+            </p:blipFill>
+            <p:spPr>
+              <a:xfrm>
+                <a:off x="9687566" y="3842176"/>
+                <a:ext cx="1862640" cy="212400"/>
+              </a:xfrm>
+              <a:prstGeom prst="rect">
+                <a:avLst/>
+              </a:prstGeom>
+            </p:spPr>
+          </p:pic>
+        </mc:Fallback>
+      </mc:AlternateContent>
+    </p:spTree>
+    <p:extLst>
+      <p:ext uri="{BB962C8B-B14F-4D97-AF65-F5344CB8AC3E}">
+        <p14:creationId xmlns:p14="http://schemas.microsoft.com/office/powerpoint/2010/main" val="991948124"/>
+      </p:ext>
+    </p:extLst>
+  </p:cSld>
+  <p:clrMapOvr>
+    <a:masterClrMapping/>
+  </p:clrMapOvr>
+</p:sld>
+</file>
+
+<file path=ppt/slides/slide23.xml><?xml version="1.0" encoding="utf-8"?>
+<p:sld xmlns:a="http://schemas.openxmlformats.org/drawingml/2006/main" xmlns:r="http://schemas.openxmlformats.org/officeDocument/2006/relationships" xmlns:p="http://schemas.openxmlformats.org/presentationml/2006/main">
+  <p:cSld>
+    <p:spTree>
+      <p:nvGrpSpPr>
+        <p:cNvPr id="1" name="">
+          <a:extLst>
+            <a:ext uri="{FF2B5EF4-FFF2-40B4-BE49-F238E27FC236}">
+              <a16:creationId xmlns:a16="http://schemas.microsoft.com/office/drawing/2014/main" id="{5FE90D09-61C7-BD25-0C35-FD7CBA78954D}"/>
+            </a:ext>
+          </a:extLst>
+        </p:cNvPr>
+        <p:cNvGrpSpPr/>
+        <p:nvPr/>
+      </p:nvGrpSpPr>
+      <p:grpSpPr>
+        <a:xfrm>
+          <a:off x="0" y="0"/>
+          <a:ext cx="0" cy="0"/>
+          <a:chOff x="0" y="0"/>
+          <a:chExt cx="0" cy="0"/>
+        </a:xfrm>
+      </p:grpSpPr>
+      <p:sp>
+        <p:nvSpPr>
+          <p:cNvPr id="2" name="Title 1">
+            <a:extLst>
+              <a:ext uri="{FF2B5EF4-FFF2-40B4-BE49-F238E27FC236}">
+                <a16:creationId xmlns:a16="http://schemas.microsoft.com/office/drawing/2014/main" id="{E0455C38-AB23-6B1E-AE8C-251FB570E256}"/>
+              </a:ext>
+            </a:extLst>
+          </p:cNvPr>
+          <p:cNvSpPr>
+            <a:spLocks noGrp="1"/>
+          </p:cNvSpPr>
+          <p:nvPr>
+            <p:ph type="title"/>
+          </p:nvPr>
+        </p:nvSpPr>
+        <p:spPr/>
+        <p:txBody>
+          <a:bodyPr/>
+          <a:lstStyle/>
+          <a:p>
+            <a:pPr algn="l"/>
+            <a:r>
+              <a:rPr lang="en-US" sz="4000" b="1" dirty="0">
+                <a:solidFill>
+                  <a:srgbClr val="242852"/>
+                </a:solidFill>
+                <a:latin typeface="Calibri Light"/>
+              </a:rPr>
+              <a:t>PR = PULL REQUEST</a:t>
+            </a:r>
+            <a:r>
+              <a:rPr sz="4000" b="1" dirty="0">
+                <a:solidFill>
+                  <a:srgbClr val="242852"/>
+                </a:solidFill>
+                <a:latin typeface="Calibri Light"/>
+              </a:rPr>
+              <a:t>?</a:t>
+            </a:r>
+          </a:p>
+        </p:txBody>
+      </p:sp>
+      <mc:AlternateContent xmlns:mc="http://schemas.openxmlformats.org/markup-compatibility/2006">
+        <mc:Choice xmlns:p14="http://schemas.microsoft.com/office/powerpoint/2010/main" Requires="p14">
+          <p:contentPart p14:bwMode="auto" r:id="rId3">
+            <p14:nvContentPartPr>
+              <p14:cNvPr id="6" name="Рукописный ввод 5">
+                <a:extLst>
+                  <a:ext uri="{FF2B5EF4-FFF2-40B4-BE49-F238E27FC236}">
+                    <a16:creationId xmlns:a16="http://schemas.microsoft.com/office/drawing/2014/main" id="{E82B9F88-2CBE-5CEA-3295-BD97DADEA487}"/>
+                  </a:ext>
+                </a:extLst>
+              </p14:cNvPr>
+              <p14:cNvContentPartPr/>
+              <p14:nvPr/>
+            </p14:nvContentPartPr>
+            <p14:xfrm>
+              <a:off x="9750566" y="3905176"/>
+              <a:ext cx="1737000" cy="86760"/>
+            </p14:xfrm>
+          </p:contentPart>
+        </mc:Choice>
+        <mc:Fallback>
+          <p:pic>
+            <p:nvPicPr>
+              <p:cNvPr id="6" name="Рукописный ввод 5">
+                <a:extLst>
+                  <a:ext uri="{FF2B5EF4-FFF2-40B4-BE49-F238E27FC236}">
+                    <a16:creationId xmlns:a16="http://schemas.microsoft.com/office/drawing/2014/main" id="{E82B9F88-2CBE-5CEA-3295-BD97DADEA487}"/>
+                  </a:ext>
+                </a:extLst>
+              </p:cNvPr>
+              <p:cNvPicPr/>
+              <p:nvPr/>
+            </p:nvPicPr>
+            <p:blipFill>
+              <a:blip r:embed="rId4"/>
+              <a:stretch>
+                <a:fillRect/>
+              </a:stretch>
+            </p:blipFill>
+            <p:spPr>
+              <a:xfrm>
+                <a:off x="9687566" y="3842176"/>
+                <a:ext cx="1862640" cy="212400"/>
+              </a:xfrm>
+              <a:prstGeom prst="rect">
+                <a:avLst/>
+              </a:prstGeom>
+            </p:spPr>
+          </p:pic>
+        </mc:Fallback>
+      </mc:AlternateContent>
+      <p:pic>
+        <p:nvPicPr>
+          <p:cNvPr id="4" name="Рисунок 3">
+            <a:extLst>
+              <a:ext uri="{FF2B5EF4-FFF2-40B4-BE49-F238E27FC236}">
+                <a16:creationId xmlns:a16="http://schemas.microsoft.com/office/drawing/2014/main" id="{5CDDDFE5-337B-EB7D-5962-E736A76DABA0}"/>
+              </a:ext>
+            </a:extLst>
+          </p:cNvPr>
+          <p:cNvPicPr>
+            <a:picLocks noChangeAspect="1"/>
+          </p:cNvPicPr>
+          <p:nvPr/>
+        </p:nvPicPr>
+        <p:blipFill>
+          <a:blip r:embed="rId5"/>
+          <a:stretch>
+            <a:fillRect/>
+          </a:stretch>
+        </p:blipFill>
+        <p:spPr>
+          <a:xfrm>
+            <a:off x="0" y="1690688"/>
+            <a:ext cx="12192000" cy="5662394"/>
+          </a:xfrm>
+          <a:prstGeom prst="rect">
+            <a:avLst/>
+          </a:prstGeom>
+        </p:spPr>
+      </p:pic>
+    </p:spTree>
+    <p:extLst>
+      <p:ext uri="{BB962C8B-B14F-4D97-AF65-F5344CB8AC3E}">
+        <p14:creationId xmlns:p14="http://schemas.microsoft.com/office/powerpoint/2010/main" val="180394587"/>
+      </p:ext>
+    </p:extLst>
+  </p:cSld>
+  <p:clrMapOvr>
+    <a:masterClrMapping/>
+  </p:clrMapOvr>
+</p:sld>
+</file>
+
+<file path=ppt/slides/slide24.xml><?xml version="1.0" encoding="utf-8"?>
+<p:sld xmlns:a="http://schemas.openxmlformats.org/drawingml/2006/main" xmlns:r="http://schemas.openxmlformats.org/officeDocument/2006/relationships" xmlns:p="http://schemas.openxmlformats.org/presentationml/2006/main">
+  <p:cSld>
+    <p:spTree>
+      <p:nvGrpSpPr>
+        <p:cNvPr id="1" name="">
+          <a:extLst>
+            <a:ext uri="{FF2B5EF4-FFF2-40B4-BE49-F238E27FC236}">
+              <a16:creationId xmlns:a16="http://schemas.microsoft.com/office/drawing/2014/main" id="{A6F13642-FB91-2C3D-70FA-BE1A999C2BAE}"/>
+            </a:ext>
+          </a:extLst>
+        </p:cNvPr>
+        <p:cNvGrpSpPr/>
+        <p:nvPr/>
+      </p:nvGrpSpPr>
+      <p:grpSpPr>
+        <a:xfrm>
+          <a:off x="0" y="0"/>
+          <a:ext cx="0" cy="0"/>
+          <a:chOff x="0" y="0"/>
+          <a:chExt cx="0" cy="0"/>
+        </a:xfrm>
+      </p:grpSpPr>
+      <p:sp>
+        <p:nvSpPr>
+          <p:cNvPr id="2" name="Title 1">
+            <a:extLst>
+              <a:ext uri="{FF2B5EF4-FFF2-40B4-BE49-F238E27FC236}">
+                <a16:creationId xmlns:a16="http://schemas.microsoft.com/office/drawing/2014/main" id="{11B24D2E-EE5B-025D-7D6A-D69165696341}"/>
+              </a:ext>
+            </a:extLst>
+          </p:cNvPr>
+          <p:cNvSpPr>
+            <a:spLocks noGrp="1"/>
+          </p:cNvSpPr>
+          <p:nvPr>
+            <p:ph type="title"/>
+          </p:nvPr>
+        </p:nvSpPr>
+        <p:spPr/>
+        <p:txBody>
+          <a:bodyPr/>
+          <a:lstStyle/>
+          <a:p>
+            <a:pPr algn="l"/>
+            <a:r>
+              <a:rPr lang="ru-RU" sz="4000" b="1" dirty="0">
+                <a:solidFill>
+                  <a:srgbClr val="242852"/>
+                </a:solidFill>
+                <a:latin typeface="Calibri Light"/>
+              </a:rPr>
+              <a:t>+ это замечание</a:t>
+            </a:r>
+            <a:r>
+              <a:rPr sz="4000" b="1" dirty="0">
+                <a:solidFill>
+                  <a:srgbClr val="242852"/>
+                </a:solidFill>
+                <a:latin typeface="Calibri Light"/>
+              </a:rPr>
+              <a:t>?</a:t>
+            </a:r>
+          </a:p>
+        </p:txBody>
+      </p:sp>
+      <mc:AlternateContent xmlns:mc="http://schemas.openxmlformats.org/markup-compatibility/2006">
+        <mc:Choice xmlns:p14="http://schemas.microsoft.com/office/powerpoint/2010/main" Requires="p14">
+          <p:contentPart p14:bwMode="auto" r:id="rId3">
+            <p14:nvContentPartPr>
+              <p14:cNvPr id="6" name="Рукописный ввод 5">
+                <a:extLst>
+                  <a:ext uri="{FF2B5EF4-FFF2-40B4-BE49-F238E27FC236}">
+                    <a16:creationId xmlns:a16="http://schemas.microsoft.com/office/drawing/2014/main" id="{E6049277-D58A-7322-1763-8889D048A7FD}"/>
+                  </a:ext>
+                </a:extLst>
+              </p14:cNvPr>
+              <p14:cNvContentPartPr/>
+              <p14:nvPr/>
+            </p14:nvContentPartPr>
+            <p14:xfrm>
+              <a:off x="9750566" y="3905176"/>
+              <a:ext cx="1737000" cy="86760"/>
+            </p14:xfrm>
+          </p:contentPart>
+        </mc:Choice>
+        <mc:Fallback>
+          <p:pic>
+            <p:nvPicPr>
+              <p:cNvPr id="6" name="Рукописный ввод 5">
+                <a:extLst>
+                  <a:ext uri="{FF2B5EF4-FFF2-40B4-BE49-F238E27FC236}">
+                    <a16:creationId xmlns:a16="http://schemas.microsoft.com/office/drawing/2014/main" id="{E6049277-D58A-7322-1763-8889D048A7FD}"/>
+                  </a:ext>
+                </a:extLst>
+              </p:cNvPr>
+              <p:cNvPicPr/>
+              <p:nvPr/>
+            </p:nvPicPr>
+            <p:blipFill>
+              <a:blip r:embed="rId4"/>
+              <a:stretch>
+                <a:fillRect/>
+              </a:stretch>
+            </p:blipFill>
+            <p:spPr>
+              <a:xfrm>
+                <a:off x="9687566" y="3842176"/>
+                <a:ext cx="1862640" cy="212400"/>
+              </a:xfrm>
+              <a:prstGeom prst="rect">
+                <a:avLst/>
+              </a:prstGeom>
+            </p:spPr>
+          </p:pic>
+        </mc:Fallback>
+      </mc:AlternateContent>
+      <p:pic>
+        <p:nvPicPr>
+          <p:cNvPr id="5" name="Рисунок 4">
+            <a:extLst>
+              <a:ext uri="{FF2B5EF4-FFF2-40B4-BE49-F238E27FC236}">
+                <a16:creationId xmlns:a16="http://schemas.microsoft.com/office/drawing/2014/main" id="{1887ABE4-AF2C-3070-EBF2-CF5859265238}"/>
+              </a:ext>
+            </a:extLst>
+          </p:cNvPr>
+          <p:cNvPicPr>
+            <a:picLocks noChangeAspect="1"/>
+          </p:cNvPicPr>
+          <p:nvPr/>
+        </p:nvPicPr>
+        <p:blipFill>
+          <a:blip r:embed="rId5"/>
+          <a:stretch>
+            <a:fillRect/>
+          </a:stretch>
+        </p:blipFill>
+        <p:spPr>
+          <a:xfrm>
+            <a:off x="78547" y="1247470"/>
+            <a:ext cx="11842835" cy="7212790"/>
+          </a:xfrm>
+          <a:prstGeom prst="rect">
+            <a:avLst/>
+          </a:prstGeom>
+        </p:spPr>
+      </p:pic>
+    </p:spTree>
+    <p:extLst>
+      <p:ext uri="{BB962C8B-B14F-4D97-AF65-F5344CB8AC3E}">
+        <p14:creationId xmlns:p14="http://schemas.microsoft.com/office/powerpoint/2010/main" val="1772855993"/>
+      </p:ext>
+    </p:extLst>
+  </p:cSld>
+  <p:clrMapOvr>
+    <a:masterClrMapping/>
+  </p:clrMapOvr>
+</p:sld>
+</file>
+
+<file path=ppt/slides/slide25.xml><?xml version="1.0" encoding="utf-8"?>
+<p:sld xmlns:a="http://schemas.openxmlformats.org/drawingml/2006/main" xmlns:r="http://schemas.openxmlformats.org/officeDocument/2006/relationships" xmlns:p="http://schemas.openxmlformats.org/presentationml/2006/main">
+  <p:cSld>
+    <p:spTree>
+      <p:nvGrpSpPr>
+        <p:cNvPr id="1" name="">
+          <a:extLst>
+            <a:ext uri="{FF2B5EF4-FFF2-40B4-BE49-F238E27FC236}">
+              <a16:creationId xmlns:a16="http://schemas.microsoft.com/office/drawing/2014/main" id="{AF739106-B40F-DA60-AF12-330773E39AFA}"/>
+            </a:ext>
+          </a:extLst>
+        </p:cNvPr>
+        <p:cNvGrpSpPr/>
+        <p:nvPr/>
+      </p:nvGrpSpPr>
+      <p:grpSpPr>
+        <a:xfrm>
+          <a:off x="0" y="0"/>
+          <a:ext cx="0" cy="0"/>
+          <a:chOff x="0" y="0"/>
+          <a:chExt cx="0" cy="0"/>
+        </a:xfrm>
+      </p:grpSpPr>
+      <p:sp>
+        <p:nvSpPr>
+          <p:cNvPr id="2" name="Title 1">
+            <a:extLst>
+              <a:ext uri="{FF2B5EF4-FFF2-40B4-BE49-F238E27FC236}">
+                <a16:creationId xmlns:a16="http://schemas.microsoft.com/office/drawing/2014/main" id="{83056994-7EC5-E9DD-5BD1-4C16D3FF8F92}"/>
+              </a:ext>
+            </a:extLst>
+          </p:cNvPr>
+          <p:cNvSpPr>
+            <a:spLocks noGrp="1"/>
+          </p:cNvSpPr>
+          <p:nvPr>
+            <p:ph type="title"/>
+          </p:nvPr>
+        </p:nvSpPr>
+        <p:spPr/>
+        <p:txBody>
+          <a:bodyPr/>
+          <a:lstStyle/>
+          <a:p>
+            <a:pPr algn="l"/>
+            <a:r>
+              <a:rPr lang="ru-RU" sz="4000" b="1" dirty="0">
+                <a:solidFill>
+                  <a:srgbClr val="242852"/>
+                </a:solidFill>
+                <a:latin typeface="Calibri Light"/>
+              </a:rPr>
+              <a:t>Закрываем </a:t>
+            </a:r>
+            <a:r>
+              <a:rPr lang="ru-RU" sz="4000" b="1" dirty="0" err="1">
+                <a:solidFill>
+                  <a:srgbClr val="242852"/>
+                </a:solidFill>
+                <a:latin typeface="Calibri Light"/>
+              </a:rPr>
+              <a:t>пулл</a:t>
+            </a:r>
+            <a:r>
+              <a:rPr lang="ru-RU" sz="4000" b="1" dirty="0">
+                <a:solidFill>
+                  <a:srgbClr val="242852"/>
+                </a:solidFill>
+                <a:latin typeface="Calibri Light"/>
+              </a:rPr>
+              <a:t> </a:t>
+            </a:r>
+            <a:r>
+              <a:rPr lang="ru-RU" sz="4000" b="1">
+                <a:solidFill>
+                  <a:srgbClr val="242852"/>
+                </a:solidFill>
+                <a:latin typeface="Calibri Light"/>
+              </a:rPr>
+              <a:t>реквест</a:t>
+            </a:r>
+            <a:endParaRPr sz="4000" b="1" dirty="0">
+              <a:solidFill>
+                <a:srgbClr val="242852"/>
+              </a:solidFill>
+              <a:latin typeface="Calibri Light"/>
+            </a:endParaRPr>
+          </a:p>
+        </p:txBody>
+      </p:sp>
+    </p:spTree>
+    <p:extLst>
+      <p:ext uri="{BB962C8B-B14F-4D97-AF65-F5344CB8AC3E}">
+        <p14:creationId xmlns:p14="http://schemas.microsoft.com/office/powerpoint/2010/main" val="2679818755"/>
+      </p:ext>
+    </p:extLst>
+  </p:cSld>
+  <p:clrMapOvr>
+    <a:masterClrMapping/>
+  </p:clrMapOvr>
+</p:sld>
+</file>
+
+<file path=ppt/slides/slide26.xml><?xml version="1.0" encoding="utf-8"?>
+<p:sld xmlns:a="http://schemas.openxmlformats.org/drawingml/2006/main" xmlns:r="http://schemas.openxmlformats.org/officeDocument/2006/relationships" xmlns:p="http://schemas.openxmlformats.org/presentationml/2006/main">
+  <p:cSld>
+    <p:spTree>
+      <p:nvGrpSpPr>
+        <p:cNvPr id="1" name=""/>
+        <p:cNvGrpSpPr/>
+        <p:nvPr/>
+      </p:nvGrpSpPr>
+      <p:grpSpPr>
+        <a:xfrm>
+          <a:off x="0" y="0"/>
+          <a:ext cx="0" cy="0"/>
+          <a:chOff x="0" y="0"/>
+          <a:chExt cx="0" cy="0"/>
+        </a:xfrm>
+      </p:grpSpPr>
+      <p:sp>
+        <p:nvSpPr>
+          <p:cNvPr id="2" name="Title 1"/>
+          <p:cNvSpPr>
+            <a:spLocks noGrp="1"/>
+          </p:cNvSpPr>
+          <p:nvPr>
+            <p:ph type="title"/>
+          </p:nvPr>
+        </p:nvSpPr>
+        <p:spPr/>
+        <p:txBody>
+          <a:bodyPr/>
+          <a:lstStyle/>
+          <a:p>
+            <a:pPr algn="l"/>
+            <a:r>
+              <a:rPr sz="4000" b="1">
+                <a:solidFill>
+                  <a:srgbClr val="242852"/>
+                </a:solidFill>
+                <a:latin typeface="Calibri Light"/>
+              </a:rPr>
+              <a:t>dev → stage → prod</a:t>
+            </a:r>
+          </a:p>
+        </p:txBody>
+      </p:sp>
+      <p:sp>
+        <p:nvSpPr>
+          <p:cNvPr id="3" name="Rounded Rectangle 2"/>
+          <p:cNvSpPr/>
+          <p:nvPr/>
+        </p:nvSpPr>
+        <p:spPr>
+          <a:xfrm>
+            <a:off x="640080" y="1463040"/>
+            <a:ext cx="3383280" cy="1828800"/>
+          </a:xfrm>
+          <a:prstGeom prst="roundRect">
+            <a:avLst/>
+          </a:prstGeom>
+          <a:solidFill>
+            <a:srgbClr val="7F8FA9"/>
+          </a:solidFill>
+          <a:ln>
+            <a:noFill/>
+          </a:ln>
+        </p:spPr>
+        <p:style>
+          <a:lnRef idx="1">
+            <a:schemeClr val="accent1"/>
+          </a:lnRef>
+          <a:fillRef idx="3">
+            <a:schemeClr val="accent1"/>
+          </a:fillRef>
+          <a:effectRef idx="2">
+            <a:schemeClr val="accent1"/>
+          </a:effectRef>
+          <a:fontRef idx="minor">
+            <a:schemeClr val="lt1"/>
+          </a:fontRef>
+        </p:style>
+        <p:txBody>
+          <a:bodyPr wrap="square" rtlCol="0" anchor="ctr"/>
+          <a:lstStyle/>
+          <a:p>
+            <a:pPr algn="ctr"/>
+            <a:r>
+              <a:rPr sz="2200" b="1">
+                <a:solidFill>
+                  <a:srgbClr val="FFFFFF"/>
+                </a:solidFill>
+                <a:latin typeface="Calibri"/>
+              </a:rPr>
+              <a:t>dev</a:t>
+            </a:r>
+          </a:p>
+          <a:p>
+            <a:pPr algn="ctr">
+              <a:spcBef>
+                <a:spcPts val="800"/>
+              </a:spcBef>
+            </a:pPr>
+            <a:r>
+              <a:rPr sz="1400">
+                <a:solidFill>
+                  <a:srgbClr val="FFFFFF"/>
+                </a:solidFill>
+                <a:latin typeface="Calibri"/>
+              </a:rPr>
+              <a:t>ломать можно</a:t>
+            </a:r>
+          </a:p>
+        </p:txBody>
+      </p:sp>
+      <p:sp>
+        <p:nvSpPr>
+          <p:cNvPr id="4" name="Rounded Rectangle 3"/>
+          <p:cNvSpPr/>
+          <p:nvPr/>
+        </p:nvSpPr>
+        <p:spPr>
+          <a:xfrm>
+            <a:off x="4389120" y="1463040"/>
+            <a:ext cx="3383280" cy="1828800"/>
+          </a:xfrm>
+          <a:prstGeom prst="roundRect">
+            <a:avLst/>
+          </a:prstGeom>
+          <a:solidFill>
+            <a:srgbClr val="5AA2AE"/>
+          </a:solidFill>
+          <a:ln>
+            <a:noFill/>
+          </a:ln>
+        </p:spPr>
+        <p:style>
+          <a:lnRef idx="1">
+            <a:schemeClr val="accent1"/>
+          </a:lnRef>
+          <a:fillRef idx="3">
+            <a:schemeClr val="accent1"/>
+          </a:fillRef>
+          <a:effectRef idx="2">
+            <a:schemeClr val="accent1"/>
+          </a:effectRef>
+          <a:fontRef idx="minor">
+            <a:schemeClr val="lt1"/>
+          </a:fontRef>
+        </p:style>
+        <p:txBody>
+          <a:bodyPr wrap="square" rtlCol="0" anchor="ctr"/>
+          <a:lstStyle/>
+          <a:p>
+            <a:pPr algn="ctr"/>
+            <a:r>
+              <a:rPr sz="2200" b="1">
+                <a:solidFill>
+                  <a:srgbClr val="FFFFFF"/>
+                </a:solidFill>
+                <a:latin typeface="Calibri"/>
+              </a:rPr>
+              <a:t>stage</a:t>
+            </a:r>
+          </a:p>
+          <a:p>
+            <a:pPr algn="ctr">
+              <a:spcBef>
+                <a:spcPts val="800"/>
+              </a:spcBef>
+            </a:pPr>
+            <a:r>
+              <a:rPr sz="1400">
+                <a:solidFill>
+                  <a:srgbClr val="FFFFFF"/>
+                </a:solidFill>
+                <a:latin typeface="Calibri"/>
+              </a:rPr>
+              <a:t>как прод, но не прод</a:t>
+            </a:r>
+          </a:p>
+        </p:txBody>
+      </p:sp>
+      <p:sp>
+        <p:nvSpPr>
+          <p:cNvPr id="5" name="Rounded Rectangle 4"/>
+          <p:cNvSpPr/>
+          <p:nvPr/>
+        </p:nvSpPr>
+        <p:spPr>
+          <a:xfrm>
+            <a:off x="8138160" y="1463040"/>
+            <a:ext cx="3383280" cy="1828800"/>
+          </a:xfrm>
+          <a:prstGeom prst="roundRect">
+            <a:avLst/>
+          </a:prstGeom>
+          <a:solidFill>
+            <a:srgbClr val="242852"/>
+          </a:solidFill>
+          <a:ln>
+            <a:noFill/>
+          </a:ln>
+        </p:spPr>
+        <p:style>
+          <a:lnRef idx="1">
+            <a:schemeClr val="accent1"/>
+          </a:lnRef>
+          <a:fillRef idx="3">
+            <a:schemeClr val="accent1"/>
+          </a:fillRef>
+          <a:effectRef idx="2">
+            <a:schemeClr val="accent1"/>
+          </a:effectRef>
+          <a:fontRef idx="minor">
+            <a:schemeClr val="lt1"/>
+          </a:fontRef>
+        </p:style>
+        <p:txBody>
+          <a:bodyPr wrap="square" rtlCol="0" anchor="ctr"/>
+          <a:lstStyle/>
+          <a:p>
+            <a:pPr algn="ctr"/>
+            <a:r>
+              <a:rPr sz="2200" b="1">
+                <a:solidFill>
+                  <a:srgbClr val="FFFFFF"/>
+                </a:solidFill>
+                <a:latin typeface="Calibri"/>
+              </a:rPr>
+              <a:t>prod</a:t>
+            </a:r>
+          </a:p>
+          <a:p>
+            <a:pPr algn="ctr">
+              <a:spcBef>
+                <a:spcPts val="800"/>
+              </a:spcBef>
+            </a:pPr>
+            <a:r>
+              <a:rPr sz="1400">
+                <a:solidFill>
+                  <a:srgbClr val="FFFFFF"/>
+                </a:solidFill>
+                <a:latin typeface="Calibri"/>
+              </a:rPr>
+              <a:t>трогаем осторожно</a:t>
+            </a:r>
+          </a:p>
+        </p:txBody>
+      </p:sp>
+      <p:sp>
+        <p:nvSpPr>
+          <p:cNvPr id="6" name="Rounded Rectangle 5"/>
+          <p:cNvSpPr/>
+          <p:nvPr/>
+        </p:nvSpPr>
+        <p:spPr>
+          <a:xfrm>
+            <a:off x="640080" y="3657600"/>
+            <a:ext cx="10881360" cy="2377440"/>
+          </a:xfrm>
+          <a:prstGeom prst="roundRect">
+            <a:avLst/>
+          </a:prstGeom>
+          <a:solidFill>
+            <a:srgbClr val="E8EDF4"/>
+          </a:solidFill>
+          <a:ln w="25400">
+            <a:solidFill>
+              <a:srgbClr val="7F8FA9"/>
+            </a:solidFill>
+          </a:ln>
+        </p:spPr>
+        <p:style>
+          <a:lnRef idx="1">
+            <a:schemeClr val="accent1"/>
+          </a:lnRef>
+          <a:fillRef idx="3">
+            <a:schemeClr val="accent1"/>
+          </a:fillRef>
+          <a:effectRef idx="2">
+            <a:schemeClr val="accent1"/>
+          </a:effectRef>
+          <a:fontRef idx="minor">
+            <a:schemeClr val="lt1"/>
+          </a:fontRef>
+        </p:style>
+        <p:txBody>
+          <a:bodyPr wrap="square" rtlCol="0" anchor="ctr"/>
+          <a:lstStyle/>
+          <a:p>
+            <a:pPr algn="ctr"/>
+            <a:r>
+              <a:rPr sz="1400">
+                <a:solidFill>
+                  <a:srgbClr val="242852"/>
+                </a:solidFill>
+                <a:latin typeface="Calibri"/>
+              </a:rPr>
+              <a:t>СКРИНШОТ 6  →  pipeline: зелёные галочки dev → stage → prod (Actions / GitLab CI, см. Ш6)</a:t>
+            </a:r>
+          </a:p>
+        </p:txBody>
+      </p:sp>
+    </p:spTree>
+  </p:cSld>
+  <p:clrMapOvr>
+    <a:masterClrMapping/>
+  </p:clrMapOvr>
+</p:sld>
+</file>
+
+<file path=ppt/slides/slide27.xml><?xml version="1.0" encoding="utf-8"?>
+<p:sld xmlns:a="http://schemas.openxmlformats.org/drawingml/2006/main" xmlns:r="http://schemas.openxmlformats.org/officeDocument/2006/relationships" xmlns:p="http://schemas.openxmlformats.org/presentationml/2006/main">
+  <p:cSld>
+    <p:spTree>
+      <p:nvGrpSpPr>
         <p:cNvPr id="1" name=""/>
         <p:cNvGrpSpPr/>
         <p:nvPr/>
@@ -11278,7 +13150,7 @@
 </p:sld>
 </file>
 
-<file path=ppt/slides/slide21.xml><?xml version="1.0" encoding="utf-8"?>
+<file path=ppt/slides/slide28.xml><?xml version="1.0" encoding="utf-8"?>
 <p:sld xmlns:a="http://schemas.openxmlformats.org/drawingml/2006/main" xmlns:r="http://schemas.openxmlformats.org/officeDocument/2006/relationships" xmlns:p="http://schemas.openxmlformats.org/presentationml/2006/main">
   <p:cSld>
     <p:spTree>
@@ -11519,7 +13391,7 @@
 </p:sld>
 </file>
 
-<file path=ppt/slides/slide22.xml><?xml version="1.0" encoding="utf-8"?>
+<file path=ppt/slides/slide29.xml><?xml version="1.0" encoding="utf-8"?>
 <p:sld xmlns:a="http://schemas.openxmlformats.org/drawingml/2006/main" xmlns:r="http://schemas.openxmlformats.org/officeDocument/2006/relationships" xmlns:p="http://schemas.openxmlformats.org/presentationml/2006/main">
   <p:cSld>
     <p:spTree>
@@ -11818,279 +13690,6 @@
                 <a:latin typeface="Calibri"/>
               </a:rPr>
               <a:t>СКРИНШОТ 9  →  маркеры &lt;&lt;&lt;&lt;&lt;&lt;&lt; HEAD … ======= … &gt;&gt;&gt;&gt;&gt;&gt;&gt; + кнопка Resolve (см. Ш9)</a:t>
-            </a:r>
-          </a:p>
-        </p:txBody>
-      </p:sp>
-    </p:spTree>
-  </p:cSld>
-  <p:clrMapOvr>
-    <a:masterClrMapping/>
-  </p:clrMapOvr>
-</p:sld>
-</file>
-
-<file path=ppt/slides/slide23.xml><?xml version="1.0" encoding="utf-8"?>
-<p:sld xmlns:a="http://schemas.openxmlformats.org/drawingml/2006/main" xmlns:r="http://schemas.openxmlformats.org/officeDocument/2006/relationships" xmlns:p="http://schemas.openxmlformats.org/presentationml/2006/main">
-  <p:cSld>
-    <p:spTree>
-      <p:nvGrpSpPr>
-        <p:cNvPr id="1" name=""/>
-        <p:cNvGrpSpPr/>
-        <p:nvPr/>
-      </p:nvGrpSpPr>
-      <p:grpSpPr>
-        <a:xfrm>
-          <a:off x="0" y="0"/>
-          <a:ext cx="0" cy="0"/>
-          <a:chOff x="0" y="0"/>
-          <a:chExt cx="0" cy="0"/>
-        </a:xfrm>
-      </p:grpSpPr>
-      <p:sp>
-        <p:nvSpPr>
-          <p:cNvPr id="2" name="Title 1"/>
-          <p:cNvSpPr>
-            <a:spLocks noGrp="1"/>
-          </p:cNvSpPr>
-          <p:nvPr>
-            <p:ph type="title"/>
-          </p:nvPr>
-        </p:nvSpPr>
-        <p:spPr/>
-        <p:txBody>
-          <a:bodyPr/>
-          <a:lstStyle/>
-          <a:p>
-            <a:pPr algn="l"/>
-            <a:r>
-              <a:rPr sz="4000" b="1">
-                <a:solidFill>
-                  <a:srgbClr val="242852"/>
-                </a:solidFill>
-                <a:latin typeface="Calibri Light"/>
-              </a:rPr>
-              <a:t>5 правил выживания</a:t>
-            </a:r>
-          </a:p>
-        </p:txBody>
-      </p:sp>
-      <p:sp>
-        <p:nvSpPr>
-          <p:cNvPr id="3" name="TextBox 2"/>
-          <p:cNvSpPr txBox="1"/>
-          <p:nvPr/>
-        </p:nvSpPr>
-        <p:spPr>
-          <a:xfrm>
-            <a:off x="640080" y="1371600"/>
-            <a:ext cx="10881360" cy="4572000"/>
-          </a:xfrm>
-          <a:prstGeom prst="rect">
-            <a:avLst/>
-          </a:prstGeom>
-          <a:noFill/>
-        </p:spPr>
-        <p:txBody>
-          <a:bodyPr wrap="square">
-            <a:spAutoFit/>
-          </a:bodyPr>
-          <a:lstStyle/>
-          <a:p>
-            <a:pPr>
-              <a:spcBef>
-                <a:spcPts val="400"/>
-              </a:spcBef>
-              <a:spcAft>
-                <a:spcPts val="1000"/>
-              </a:spcAft>
-            </a:pPr>
-            <a:r>
-              <a:rPr sz="2400">
-                <a:solidFill>
-                  <a:srgbClr val="333333"/>
-                </a:solidFill>
-                <a:latin typeface="Calibri"/>
-              </a:rPr>
-              <a:t>1. main не ломаем — работаем в ветках</a:t>
-            </a:r>
-          </a:p>
-          <a:p>
-            <a:pPr>
-              <a:spcBef>
-                <a:spcPts val="400"/>
-              </a:spcBef>
-              <a:spcAft>
-                <a:spcPts val="1000"/>
-              </a:spcAft>
-            </a:pPr>
-            <a:r>
-              <a:rPr sz="2400">
-                <a:solidFill>
-                  <a:srgbClr val="333333"/>
-                </a:solidFill>
-                <a:latin typeface="Calibri"/>
-              </a:rPr>
-              <a:t>2. Маленький PR &gt; большой подвиг</a:t>
-            </a:r>
-          </a:p>
-          <a:p>
-            <a:pPr>
-              <a:spcBef>
-                <a:spcPts val="400"/>
-              </a:spcBef>
-              <a:spcAft>
-                <a:spcPts val="1000"/>
-              </a:spcAft>
-            </a:pPr>
-            <a:r>
-              <a:rPr sz="2400">
-                <a:solidFill>
-                  <a:srgbClr val="333333"/>
-                </a:solidFill>
-                <a:latin typeface="Calibri"/>
-              </a:rPr>
-              <a:t>3. Зелёный CI + review = merge</a:t>
-            </a:r>
-          </a:p>
-          <a:p>
-            <a:pPr>
-              <a:spcBef>
-                <a:spcPts val="400"/>
-              </a:spcBef>
-              <a:spcAft>
-                <a:spcPts val="1000"/>
-              </a:spcAft>
-            </a:pPr>
-            <a:r>
-              <a:rPr sz="2400">
-                <a:solidFill>
-                  <a:srgbClr val="333333"/>
-                </a:solidFill>
-                <a:latin typeface="Calibri"/>
-              </a:rPr>
-              <a:t>4. Конфликт? Говорим, потом кликаем</a:t>
-            </a:r>
-          </a:p>
-          <a:p>
-            <a:pPr>
-              <a:spcBef>
-                <a:spcPts val="400"/>
-              </a:spcBef>
-              <a:spcAft>
-                <a:spcPts val="1000"/>
-              </a:spcAft>
-            </a:pPr>
-            <a:r>
-              <a:rPr sz="2400">
-                <a:solidFill>
-                  <a:srgbClr val="333333"/>
-                </a:solidFill>
-                <a:latin typeface="Calibri"/>
-              </a:rPr>
-              <a:t>5. Агент готовит — человек отвечает</a:t>
-            </a:r>
-          </a:p>
-        </p:txBody>
-      </p:sp>
-    </p:spTree>
-  </p:cSld>
-  <p:clrMapOvr>
-    <a:masterClrMapping/>
-  </p:clrMapOvr>
-</p:sld>
-</file>
-
-<file path=ppt/slides/slide24.xml><?xml version="1.0" encoding="utf-8"?>
-<p:sld xmlns:a="http://schemas.openxmlformats.org/drawingml/2006/main" xmlns:r="http://schemas.openxmlformats.org/officeDocument/2006/relationships" xmlns:p="http://schemas.openxmlformats.org/presentationml/2006/main">
-  <p:cSld>
-    <p:spTree>
-      <p:nvGrpSpPr>
-        <p:cNvPr id="1" name=""/>
-        <p:cNvGrpSpPr/>
-        <p:nvPr/>
-      </p:nvGrpSpPr>
-      <p:grpSpPr>
-        <a:xfrm>
-          <a:off x="0" y="0"/>
-          <a:ext cx="0" cy="0"/>
-          <a:chOff x="0" y="0"/>
-          <a:chExt cx="0" cy="0"/>
-        </a:xfrm>
-      </p:grpSpPr>
-      <p:sp>
-        <p:nvSpPr>
-          <p:cNvPr id="2" name="Title 1"/>
-          <p:cNvSpPr>
-            <a:spLocks noGrp="1"/>
-          </p:cNvSpPr>
-          <p:nvPr>
-            <p:ph type="ctrTitle"/>
-          </p:nvPr>
-        </p:nvSpPr>
-        <p:spPr/>
-        <p:txBody>
-          <a:bodyPr/>
-          <a:lstStyle/>
-          <a:p>
-            <a:r>
-              <a:t>Спасибо! Вопросы?</a:t>
-            </a:r>
-          </a:p>
-        </p:txBody>
-      </p:sp>
-      <p:sp>
-        <p:nvSpPr>
-          <p:cNvPr id="3" name="Subtitle 2"/>
-          <p:cNvSpPr>
-            <a:spLocks noGrp="1"/>
-          </p:cNvSpPr>
-          <p:nvPr>
-            <p:ph type="subTitle" idx="1"/>
-          </p:nvPr>
-        </p:nvSpPr>
-        <p:spPr/>
-        <p:txBody>
-          <a:bodyPr/>
-          <a:lstStyle/>
-          <a:p>
-            <a:r>
-              <a:t>Демо: ветка → PR → merge за 3 минуты</a:t>
-            </a:r>
-          </a:p>
-        </p:txBody>
-      </p:sp>
-      <p:sp>
-        <p:nvSpPr>
-          <p:cNvPr id="4" name="TextBox 3"/>
-          <p:cNvSpPr txBox="1"/>
-          <p:nvPr/>
-        </p:nvSpPr>
-        <p:spPr>
-          <a:xfrm>
-            <a:off x="640080" y="4937760"/>
-            <a:ext cx="10881360" cy="731520"/>
-          </a:xfrm>
-          <a:prstGeom prst="rect">
-            <a:avLst/>
-          </a:prstGeom>
-          <a:noFill/>
-        </p:spPr>
-        <p:txBody>
-          <a:bodyPr wrap="square">
-            <a:spAutoFit/>
-          </a:bodyPr>
-          <a:lstStyle/>
-          <a:p>
-            <a:pPr algn="ctr"/>
-            <a:r>
-              <a:rPr sz="1600" b="0">
-                <a:solidFill>
-                  <a:srgbClr val="7F8FA9"/>
-                </a:solidFill>
-                <a:latin typeface="Calibri"/>
-              </a:rPr>
-              <a:t>repo: github.com/&lt;твой-ник&gt;/&lt;проект&gt;  •  &lt;имя&gt;  •  2026</a:t>
             </a:r>
           </a:p>
         </p:txBody>
@@ -12382,6 +13981,279 @@
           </a:prstGeom>
         </p:spPr>
       </p:pic>
+    </p:spTree>
+  </p:cSld>
+  <p:clrMapOvr>
+    <a:masterClrMapping/>
+  </p:clrMapOvr>
+</p:sld>
+</file>
+
+<file path=ppt/slides/slide30.xml><?xml version="1.0" encoding="utf-8"?>
+<p:sld xmlns:a="http://schemas.openxmlformats.org/drawingml/2006/main" xmlns:r="http://schemas.openxmlformats.org/officeDocument/2006/relationships" xmlns:p="http://schemas.openxmlformats.org/presentationml/2006/main">
+  <p:cSld>
+    <p:spTree>
+      <p:nvGrpSpPr>
+        <p:cNvPr id="1" name=""/>
+        <p:cNvGrpSpPr/>
+        <p:nvPr/>
+      </p:nvGrpSpPr>
+      <p:grpSpPr>
+        <a:xfrm>
+          <a:off x="0" y="0"/>
+          <a:ext cx="0" cy="0"/>
+          <a:chOff x="0" y="0"/>
+          <a:chExt cx="0" cy="0"/>
+        </a:xfrm>
+      </p:grpSpPr>
+      <p:sp>
+        <p:nvSpPr>
+          <p:cNvPr id="2" name="Title 1"/>
+          <p:cNvSpPr>
+            <a:spLocks noGrp="1"/>
+          </p:cNvSpPr>
+          <p:nvPr>
+            <p:ph type="title"/>
+          </p:nvPr>
+        </p:nvSpPr>
+        <p:spPr/>
+        <p:txBody>
+          <a:bodyPr/>
+          <a:lstStyle/>
+          <a:p>
+            <a:pPr algn="l"/>
+            <a:r>
+              <a:rPr sz="4000" b="1">
+                <a:solidFill>
+                  <a:srgbClr val="242852"/>
+                </a:solidFill>
+                <a:latin typeface="Calibri Light"/>
+              </a:rPr>
+              <a:t>5 правил выживания</a:t>
+            </a:r>
+          </a:p>
+        </p:txBody>
+      </p:sp>
+      <p:sp>
+        <p:nvSpPr>
+          <p:cNvPr id="3" name="TextBox 2"/>
+          <p:cNvSpPr txBox="1"/>
+          <p:nvPr/>
+        </p:nvSpPr>
+        <p:spPr>
+          <a:xfrm>
+            <a:off x="640080" y="1371600"/>
+            <a:ext cx="10881360" cy="4572000"/>
+          </a:xfrm>
+          <a:prstGeom prst="rect">
+            <a:avLst/>
+          </a:prstGeom>
+          <a:noFill/>
+        </p:spPr>
+        <p:txBody>
+          <a:bodyPr wrap="square">
+            <a:spAutoFit/>
+          </a:bodyPr>
+          <a:lstStyle/>
+          <a:p>
+            <a:pPr>
+              <a:spcBef>
+                <a:spcPts val="400"/>
+              </a:spcBef>
+              <a:spcAft>
+                <a:spcPts val="1000"/>
+              </a:spcAft>
+            </a:pPr>
+            <a:r>
+              <a:rPr sz="2400">
+                <a:solidFill>
+                  <a:srgbClr val="333333"/>
+                </a:solidFill>
+                <a:latin typeface="Calibri"/>
+              </a:rPr>
+              <a:t>1. main не ломаем — работаем в ветках</a:t>
+            </a:r>
+          </a:p>
+          <a:p>
+            <a:pPr>
+              <a:spcBef>
+                <a:spcPts val="400"/>
+              </a:spcBef>
+              <a:spcAft>
+                <a:spcPts val="1000"/>
+              </a:spcAft>
+            </a:pPr>
+            <a:r>
+              <a:rPr sz="2400">
+                <a:solidFill>
+                  <a:srgbClr val="333333"/>
+                </a:solidFill>
+                <a:latin typeface="Calibri"/>
+              </a:rPr>
+              <a:t>2. Маленький PR &gt; большой подвиг</a:t>
+            </a:r>
+          </a:p>
+          <a:p>
+            <a:pPr>
+              <a:spcBef>
+                <a:spcPts val="400"/>
+              </a:spcBef>
+              <a:spcAft>
+                <a:spcPts val="1000"/>
+              </a:spcAft>
+            </a:pPr>
+            <a:r>
+              <a:rPr sz="2400">
+                <a:solidFill>
+                  <a:srgbClr val="333333"/>
+                </a:solidFill>
+                <a:latin typeface="Calibri"/>
+              </a:rPr>
+              <a:t>3. Зелёный CI + review = merge</a:t>
+            </a:r>
+          </a:p>
+          <a:p>
+            <a:pPr>
+              <a:spcBef>
+                <a:spcPts val="400"/>
+              </a:spcBef>
+              <a:spcAft>
+                <a:spcPts val="1000"/>
+              </a:spcAft>
+            </a:pPr>
+            <a:r>
+              <a:rPr sz="2400">
+                <a:solidFill>
+                  <a:srgbClr val="333333"/>
+                </a:solidFill>
+                <a:latin typeface="Calibri"/>
+              </a:rPr>
+              <a:t>4. Конфликт? Говорим, потом кликаем</a:t>
+            </a:r>
+          </a:p>
+          <a:p>
+            <a:pPr>
+              <a:spcBef>
+                <a:spcPts val="400"/>
+              </a:spcBef>
+              <a:spcAft>
+                <a:spcPts val="1000"/>
+              </a:spcAft>
+            </a:pPr>
+            <a:r>
+              <a:rPr sz="2400">
+                <a:solidFill>
+                  <a:srgbClr val="333333"/>
+                </a:solidFill>
+                <a:latin typeface="Calibri"/>
+              </a:rPr>
+              <a:t>5. Агент готовит — человек отвечает</a:t>
+            </a:r>
+          </a:p>
+        </p:txBody>
+      </p:sp>
+    </p:spTree>
+  </p:cSld>
+  <p:clrMapOvr>
+    <a:masterClrMapping/>
+  </p:clrMapOvr>
+</p:sld>
+</file>
+
+<file path=ppt/slides/slide31.xml><?xml version="1.0" encoding="utf-8"?>
+<p:sld xmlns:a="http://schemas.openxmlformats.org/drawingml/2006/main" xmlns:r="http://schemas.openxmlformats.org/officeDocument/2006/relationships" xmlns:p="http://schemas.openxmlformats.org/presentationml/2006/main">
+  <p:cSld>
+    <p:spTree>
+      <p:nvGrpSpPr>
+        <p:cNvPr id="1" name=""/>
+        <p:cNvGrpSpPr/>
+        <p:nvPr/>
+      </p:nvGrpSpPr>
+      <p:grpSpPr>
+        <a:xfrm>
+          <a:off x="0" y="0"/>
+          <a:ext cx="0" cy="0"/>
+          <a:chOff x="0" y="0"/>
+          <a:chExt cx="0" cy="0"/>
+        </a:xfrm>
+      </p:grpSpPr>
+      <p:sp>
+        <p:nvSpPr>
+          <p:cNvPr id="2" name="Title 1"/>
+          <p:cNvSpPr>
+            <a:spLocks noGrp="1"/>
+          </p:cNvSpPr>
+          <p:nvPr>
+            <p:ph type="ctrTitle"/>
+          </p:nvPr>
+        </p:nvSpPr>
+        <p:spPr/>
+        <p:txBody>
+          <a:bodyPr/>
+          <a:lstStyle/>
+          <a:p>
+            <a:r>
+              <a:t>Спасибо! Вопросы?</a:t>
+            </a:r>
+          </a:p>
+        </p:txBody>
+      </p:sp>
+      <p:sp>
+        <p:nvSpPr>
+          <p:cNvPr id="3" name="Subtitle 2"/>
+          <p:cNvSpPr>
+            <a:spLocks noGrp="1"/>
+          </p:cNvSpPr>
+          <p:nvPr>
+            <p:ph type="subTitle" idx="1"/>
+          </p:nvPr>
+        </p:nvSpPr>
+        <p:spPr/>
+        <p:txBody>
+          <a:bodyPr/>
+          <a:lstStyle/>
+          <a:p>
+            <a:r>
+              <a:t>Демо: ветка → PR → merge за 3 минуты</a:t>
+            </a:r>
+          </a:p>
+        </p:txBody>
+      </p:sp>
+      <p:sp>
+        <p:nvSpPr>
+          <p:cNvPr id="4" name="TextBox 3"/>
+          <p:cNvSpPr txBox="1"/>
+          <p:nvPr/>
+        </p:nvSpPr>
+        <p:spPr>
+          <a:xfrm>
+            <a:off x="640080" y="4937760"/>
+            <a:ext cx="10881360" cy="731520"/>
+          </a:xfrm>
+          <a:prstGeom prst="rect">
+            <a:avLst/>
+          </a:prstGeom>
+          <a:noFill/>
+        </p:spPr>
+        <p:txBody>
+          <a:bodyPr wrap="square">
+            <a:spAutoFit/>
+          </a:bodyPr>
+          <a:lstStyle/>
+          <a:p>
+            <a:pPr algn="ctr"/>
+            <a:r>
+              <a:rPr sz="1600" b="0">
+                <a:solidFill>
+                  <a:srgbClr val="7F8FA9"/>
+                </a:solidFill>
+                <a:latin typeface="Calibri"/>
+              </a:rPr>
+              <a:t>repo: github.com/&lt;твой-ник&gt;/&lt;проект&gt;  •  &lt;имя&gt;  •  2026</a:t>
+            </a:r>
+          </a:p>
+        </p:txBody>
+      </p:sp>
     </p:spTree>
   </p:cSld>
   <p:clrMapOvr>
